--- a/docs/presentation/ELEC0054 - Presentation template.pptx
+++ b/docs/presentation/ELEC0054 - Presentation template.pptx
@@ -2,41 +2,44 @@
 <file path=ppt/presentation.xml><?xml version="1.0" encoding="utf-8"?>
 <p:presentation xmlns:a="http://schemas.openxmlformats.org/drawingml/2006/main" xmlns:r="http://schemas.openxmlformats.org/officeDocument/2006/relationships" xmlns:p="http://schemas.openxmlformats.org/presentationml/2006/main" embedTrueTypeFonts="1" autoCompressPictures="0">
   <p:sldMasterIdLst>
-    <p:sldMasterId id="2147483735" r:id="rId4"/>
-    <p:sldMasterId id="2147483760" r:id="rId5"/>
+    <p:sldMasterId id="2147483648" r:id="rId1"/>
+    <p:sldMasterId id="2147483666" r:id="rId3"/>
   </p:sldMasterIdLst>
   <p:notesMasterIdLst>
-    <p:notesMasterId r:id="rId15"/>
+    <p:notesMasterId r:id="rId5"/>
   </p:notesMasterIdLst>
   <p:handoutMasterIdLst>
-    <p:handoutMasterId r:id="rId16"/>
+    <p:handoutMasterId r:id="rId14"/>
   </p:handoutMasterIdLst>
   <p:sldIdLst>
-    <p:sldId id="273" r:id="rId6"/>
-    <p:sldId id="266" r:id="rId7"/>
-    <p:sldId id="320" r:id="rId8"/>
-    <p:sldId id="321" r:id="rId9"/>
-    <p:sldId id="323" r:id="rId10"/>
-    <p:sldId id="324" r:id="rId11"/>
-    <p:sldId id="325" r:id="rId12"/>
-    <p:sldId id="322" r:id="rId13"/>
-    <p:sldId id="318" r:id="rId14"/>
+    <p:sldId id="273" r:id="rId4"/>
+    <p:sldId id="266" r:id="rId6"/>
+    <p:sldId id="320" r:id="rId7"/>
+    <p:sldId id="321" r:id="rId8"/>
+    <p:sldId id="323" r:id="rId9"/>
+    <p:sldId id="324" r:id="rId10"/>
+    <p:sldId id="325" r:id="rId11"/>
+    <p:sldId id="322" r:id="rId12"/>
+    <p:sldId id="318" r:id="rId13"/>
   </p:sldIdLst>
   <p:sldSz cx="12192000" cy="6858000"/>
   <p:notesSz cx="6858000" cy="9144000"/>
   <p:embeddedFontLst>
     <p:embeddedFont>
-      <p:font typeface="UCL Sans" pitchFamily="2" charset="0"/>
-      <p:regular r:id="rId17"/>
-      <p:bold r:id="rId18"/>
-      <p:italic r:id="rId19"/>
+      <p:font typeface="UCL Sans SemiBold" pitchFamily="2" charset="77"/>
+      <p:regular r:id="rId18"/>
     </p:embeddedFont>
     <p:embeddedFont>
-      <p:font typeface="UCL Sans SemiBold" pitchFamily="2" charset="0"/>
+      <p:font typeface="UCL Sans" pitchFamily="2" charset="77"/>
+      <p:regular r:id="rId19"/>
+    </p:embeddedFont>
+    <p:embeddedFont>
+      <p:font typeface="UCL Sans"/>
       <p:regular r:id="rId20"/>
-      <p:bold r:id="rId21"/>
-      <p:italic r:id="rId22"/>
-      <p:boldItalic r:id="rId23"/>
+    </p:embeddedFont>
+    <p:embeddedFont>
+      <p:font typeface="UCL Sans SemiBold"/>
+      <p:regular r:id="rId21"/>
     </p:embeddedFont>
   </p:embeddedFontLst>
   <p:defaultTextStyle>
@@ -182,22 +185,8 @@
         </p14:section>
       </p14:sectionLst>
     </p:ext>
-    <p:ext uri="{EFAFB233-063F-42B5-8137-9DF3F51BA10A}">
-      <p15:sldGuideLst xmlns:p15="http://schemas.microsoft.com/office/powerpoint/2012/main"/>
-    </p:ext>
-    <p:ext uri="{2D200454-40CA-4A62-9FC3-DE9A4176ACB9}">
-      <p15:notesGuideLst xmlns:p15="http://schemas.microsoft.com/office/powerpoint/2012/main"/>
-    </p:ext>
   </p:extLst>
 </p:presentation>
-</file>
-
-<file path=ppt/revisionInfo.xml><?xml version="1.0" encoding="utf-8"?>
-<p1510:revInfo xmlns:a="http://schemas.openxmlformats.org/drawingml/2006/main" xmlns:r="http://schemas.openxmlformats.org/officeDocument/2006/relationships" xmlns:p1510="http://schemas.microsoft.com/office/powerpoint/2015/10/main">
-  <p1510:revLst>
-    <p1510:client id="{8C195BFA-847E-D024-D189-2BF75740780F}" v="174" dt="2026-05-19T09:13:23.542"/>
-  </p1510:revLst>
-</p1510:revInfo>
 </file>
 
 <file path=ppt/handoutMasters/handoutMaster1.xml><?xml version="1.0" encoding="utf-8"?>
@@ -224,13 +213,7 @@
       </p:grpSpPr>
       <p:sp>
         <p:nvSpPr>
-          <p:cNvPr id="2" name="Header Placeholder 1">
-            <a:extLst>
-              <a:ext uri="{FF2B5EF4-FFF2-40B4-BE49-F238E27FC236}">
-                <a16:creationId xmlns:a16="http://schemas.microsoft.com/office/drawing/2014/main" id="{EBE67AAA-7040-8B0B-8122-DDA10601D636}"/>
-              </a:ext>
-            </a:extLst>
-          </p:cNvPr>
+          <p:cNvPr id="2" name="Header Placeholder 1"/>
           <p:cNvSpPr>
             <a:spLocks noGrp="1"/>
           </p:cNvSpPr>
@@ -261,13 +244,7 @@
       </p:sp>
       <p:sp>
         <p:nvSpPr>
-          <p:cNvPr id="3" name="Date Placeholder 2">
-            <a:extLst>
-              <a:ext uri="{FF2B5EF4-FFF2-40B4-BE49-F238E27FC236}">
-                <a16:creationId xmlns:a16="http://schemas.microsoft.com/office/drawing/2014/main" id="{24447D23-0C3D-D7C0-6667-B2C6AA1EE4B3}"/>
-              </a:ext>
-            </a:extLst>
-          </p:cNvPr>
+          <p:cNvPr id="3" name="Date Placeholder 2"/>
           <p:cNvSpPr>
             <a:spLocks noGrp="1"/>
           </p:cNvSpPr>
@@ -294,7 +271,6 @@
           <a:p>
             <a:fld id="{A61D93C3-F286-9C4B-98EC-FBB7F0C69BB5}" type="datetimeFigureOut">
               <a:rPr lang="en-US" smtClean="0"/>
-              <a:t>5/23/2026</a:t>
             </a:fld>
             <a:endParaRPr lang="en-US"/>
           </a:p>
@@ -302,13 +278,7 @@
       </p:sp>
       <p:sp>
         <p:nvSpPr>
-          <p:cNvPr id="4" name="Footer Placeholder 3">
-            <a:extLst>
-              <a:ext uri="{FF2B5EF4-FFF2-40B4-BE49-F238E27FC236}">
-                <a16:creationId xmlns:a16="http://schemas.microsoft.com/office/drawing/2014/main" id="{9D20A97E-0F68-A874-C9FD-80673D508B0B}"/>
-              </a:ext>
-            </a:extLst>
-          </p:cNvPr>
+          <p:cNvPr id="4" name="Footer Placeholder 3"/>
           <p:cNvSpPr>
             <a:spLocks noGrp="1"/>
           </p:cNvSpPr>
@@ -339,13 +309,7 @@
       </p:sp>
       <p:sp>
         <p:nvSpPr>
-          <p:cNvPr id="5" name="Slide Number Placeholder 4">
-            <a:extLst>
-              <a:ext uri="{FF2B5EF4-FFF2-40B4-BE49-F238E27FC236}">
-                <a16:creationId xmlns:a16="http://schemas.microsoft.com/office/drawing/2014/main" id="{DFBACC15-A2E2-9CD3-5B2C-9BBABA6B4210}"/>
-              </a:ext>
-            </a:extLst>
-          </p:cNvPr>
+          <p:cNvPr id="5" name="Slide Number Placeholder 4"/>
           <p:cNvSpPr>
             <a:spLocks noGrp="1"/>
           </p:cNvSpPr>
@@ -372,36 +336,14 @@
           <a:p>
             <a:fld id="{C80A0B70-CCF2-4444-BE01-B320D9CE5A46}" type="slidenum">
               <a:rPr lang="en-US" smtClean="0"/>
-              <a:t>‹#›</a:t>
             </a:fld>
             <a:endParaRPr lang="en-US"/>
           </a:p>
         </p:txBody>
       </p:sp>
     </p:spTree>
-    <p:extLst>
-      <p:ext uri="{BB962C8B-B14F-4D97-AF65-F5344CB8AC3E}">
-        <p14:creationId xmlns:p14="http://schemas.microsoft.com/office/powerpoint/2010/main" val="2514167214"/>
-      </p:ext>
-    </p:extLst>
   </p:cSld>
   <p:clrMap bg1="lt1" tx1="dk1" bg2="lt2" tx2="dk2" accent1="accent1" accent2="accent2" accent3="accent3" accent4="accent4" accent5="accent5" accent6="accent6" hlink="hlink" folHlink="folHlink"/>
-  <p:extLst>
-    <p:ext uri="{56416CCD-93CA-4268-BC5B-53C4BB910035}">
-      <p15:sldGuideLst xmlns:p15="http://schemas.microsoft.com/office/powerpoint/2012/main">
-        <p15:guide id="1" orient="horz" pos="2880" userDrawn="1">
-          <p15:clr>
-            <a:srgbClr val="F26B43"/>
-          </p15:clr>
-        </p15:guide>
-        <p15:guide id="2" pos="2160" userDrawn="1">
-          <p15:clr>
-            <a:srgbClr val="F26B43"/>
-          </p15:clr>
-        </p15:guide>
-      </p15:sldGuideLst>
-    </p:ext>
-  </p:extLst>
 </p:handoutMaster>
 </file>
 
@@ -487,7 +429,6 @@
           <a:p>
             <a:fld id="{7D08A70A-88C5-8F48-B495-07492CFAC4E8}" type="datetimeFigureOut">
               <a:rPr lang="en-US" smtClean="0"/>
-              <a:t>5/23/2026</a:t>
             </a:fld>
             <a:endParaRPr lang="en-US"/>
           </a:p>
@@ -554,6 +495,7 @@
               <a:rPr lang="en-GB"/>
               <a:t>Click to edit Master text styles</a:t>
             </a:r>
+            <a:endParaRPr lang="en-GB"/>
           </a:p>
           <a:p>
             <a:pPr lvl="1"/>
@@ -561,6 +503,7 @@
               <a:rPr lang="en-GB"/>
               <a:t>Second level</a:t>
             </a:r>
+            <a:endParaRPr lang="en-GB"/>
           </a:p>
           <a:p>
             <a:pPr lvl="2"/>
@@ -568,6 +511,7 @@
               <a:rPr lang="en-GB"/>
               <a:t>Third level</a:t>
             </a:r>
+            <a:endParaRPr lang="en-GB"/>
           </a:p>
           <a:p>
             <a:pPr lvl="3"/>
@@ -575,6 +519,7 @@
               <a:rPr lang="en-GB"/>
               <a:t>Fourth level</a:t>
             </a:r>
+            <a:endParaRPr lang="en-GB"/>
           </a:p>
           <a:p>
             <a:pPr lvl="4"/>
@@ -646,18 +591,12 @@
           <a:p>
             <a:fld id="{E28BC158-BB56-D04E-8DE4-3CEB786515BF}" type="slidenum">
               <a:rPr lang="en-US" smtClean="0"/>
-              <a:t>‹#›</a:t>
             </a:fld>
             <a:endParaRPr lang="en-US"/>
           </a:p>
         </p:txBody>
       </p:sp>
     </p:spTree>
-    <p:extLst>
-      <p:ext uri="{BB962C8B-B14F-4D97-AF65-F5344CB8AC3E}">
-        <p14:creationId xmlns:p14="http://schemas.microsoft.com/office/powerpoint/2010/main" val="284909796"/>
-      </p:ext>
-    </p:extLst>
   </p:cSld>
   <p:clrMap bg1="lt1" tx1="dk1" bg2="lt2" tx2="dk2" accent1="accent1" accent2="accent2" accent3="accent3" accent4="accent4" accent5="accent5" accent6="accent6" hlink="hlink" folHlink="folHlink"/>
   <p:notesStyle>
@@ -832,18 +771,12 @@
           <a:p>
             <a:fld id="{E28BC158-BB56-D04E-8DE4-3CEB786515BF}" type="slidenum">
               <a:rPr lang="en-US" smtClean="0"/>
-              <a:t>1</a:t>
             </a:fld>
             <a:endParaRPr lang="en-US"/>
           </a:p>
         </p:txBody>
       </p:sp>
     </p:spTree>
-    <p:extLst>
-      <p:ext uri="{BB962C8B-B14F-4D97-AF65-F5344CB8AC3E}">
-        <p14:creationId xmlns:p14="http://schemas.microsoft.com/office/powerpoint/2010/main" val="1512235076"/>
-      </p:ext>
-    </p:extLst>
   </p:cSld>
   <p:clrMapOvr>
     <a:masterClrMapping/>
@@ -928,18 +861,12 @@
           <a:p>
             <a:fld id="{E28BC158-BB56-D04E-8DE4-3CEB786515BF}" type="slidenum">
               <a:rPr lang="en-US" smtClean="0"/>
-              <a:t>2</a:t>
             </a:fld>
             <a:endParaRPr lang="en-US"/>
           </a:p>
         </p:txBody>
       </p:sp>
     </p:spTree>
-    <p:extLst>
-      <p:ext uri="{BB962C8B-B14F-4D97-AF65-F5344CB8AC3E}">
-        <p14:creationId xmlns:p14="http://schemas.microsoft.com/office/powerpoint/2010/main" val="474477146"/>
-      </p:ext>
-    </p:extLst>
   </p:cSld>
   <p:clrMapOvr>
     <a:masterClrMapping/>
@@ -952,13 +879,7 @@
   <p:cSld>
     <p:spTree>
       <p:nvGrpSpPr>
-        <p:cNvPr id="1" name="">
-          <a:extLst>
-            <a:ext uri="{FF2B5EF4-FFF2-40B4-BE49-F238E27FC236}">
-              <a16:creationId xmlns:a16="http://schemas.microsoft.com/office/drawing/2014/main" id="{F994A5B4-C33E-5FA8-A473-3BE1F06410DE}"/>
-            </a:ext>
-          </a:extLst>
-        </p:cNvPr>
+        <p:cNvPr id="1" name=""/>
         <p:cNvGrpSpPr/>
         <p:nvPr/>
       </p:nvGrpSpPr>
@@ -972,13 +893,7 @@
       </p:grpSpPr>
       <p:sp>
         <p:nvSpPr>
-          <p:cNvPr id="2" name="Slide Image Placeholder 1">
-            <a:extLst>
-              <a:ext uri="{FF2B5EF4-FFF2-40B4-BE49-F238E27FC236}">
-                <a16:creationId xmlns:a16="http://schemas.microsoft.com/office/drawing/2014/main" id="{277A9EDF-69B1-AB9B-F1E6-B0DD6B9BD688}"/>
-              </a:ext>
-            </a:extLst>
-          </p:cNvPr>
+          <p:cNvPr id="2" name="Slide Image Placeholder 1"/>
           <p:cNvSpPr>
             <a:spLocks noGrp="1" noRot="1" noChangeAspect="1"/>
           </p:cNvSpPr>
@@ -990,13 +905,7 @@
       </p:sp>
       <p:sp>
         <p:nvSpPr>
-          <p:cNvPr id="3" name="Notes Placeholder 2">
-            <a:extLst>
-              <a:ext uri="{FF2B5EF4-FFF2-40B4-BE49-F238E27FC236}">
-                <a16:creationId xmlns:a16="http://schemas.microsoft.com/office/drawing/2014/main" id="{51796D19-779E-DC64-B7D1-D7CF45DF8C8D}"/>
-              </a:ext>
-            </a:extLst>
-          </p:cNvPr>
+          <p:cNvPr id="3" name="Notes Placeholder 2"/>
           <p:cNvSpPr>
             <a:spLocks noGrp="1"/>
           </p:cNvSpPr>
@@ -1027,13 +936,7 @@
       </p:sp>
       <p:sp>
         <p:nvSpPr>
-          <p:cNvPr id="4" name="Slide Number Placeholder 3">
-            <a:extLst>
-              <a:ext uri="{FF2B5EF4-FFF2-40B4-BE49-F238E27FC236}">
-                <a16:creationId xmlns:a16="http://schemas.microsoft.com/office/drawing/2014/main" id="{D90FD253-729F-A647-F61C-3728337133C4}"/>
-              </a:ext>
-            </a:extLst>
-          </p:cNvPr>
+          <p:cNvPr id="4" name="Slide Number Placeholder 3"/>
           <p:cNvSpPr>
             <a:spLocks noGrp="1"/>
           </p:cNvSpPr>
@@ -1048,18 +951,12 @@
           <a:p>
             <a:fld id="{E28BC158-BB56-D04E-8DE4-3CEB786515BF}" type="slidenum">
               <a:rPr lang="en-US" smtClean="0"/>
-              <a:t>3</a:t>
             </a:fld>
             <a:endParaRPr lang="en-US"/>
           </a:p>
         </p:txBody>
       </p:sp>
     </p:spTree>
-    <p:extLst>
-      <p:ext uri="{BB962C8B-B14F-4D97-AF65-F5344CB8AC3E}">
-        <p14:creationId xmlns:p14="http://schemas.microsoft.com/office/powerpoint/2010/main" val="220976532"/>
-      </p:ext>
-    </p:extLst>
   </p:cSld>
   <p:clrMapOvr>
     <a:masterClrMapping/>
@@ -1072,13 +969,7 @@
   <p:cSld>
     <p:spTree>
       <p:nvGrpSpPr>
-        <p:cNvPr id="1" name="">
-          <a:extLst>
-            <a:ext uri="{FF2B5EF4-FFF2-40B4-BE49-F238E27FC236}">
-              <a16:creationId xmlns:a16="http://schemas.microsoft.com/office/drawing/2014/main" id="{343933C9-C7E6-9D3D-3A96-5B635442EE87}"/>
-            </a:ext>
-          </a:extLst>
-        </p:cNvPr>
+        <p:cNvPr id="1" name=""/>
         <p:cNvGrpSpPr/>
         <p:nvPr/>
       </p:nvGrpSpPr>
@@ -1092,13 +983,7 @@
       </p:grpSpPr>
       <p:sp>
         <p:nvSpPr>
-          <p:cNvPr id="2" name="Slide Image Placeholder 1">
-            <a:extLst>
-              <a:ext uri="{FF2B5EF4-FFF2-40B4-BE49-F238E27FC236}">
-                <a16:creationId xmlns:a16="http://schemas.microsoft.com/office/drawing/2014/main" id="{4CFBB81F-B7E6-0C5F-9A00-F20D518704C0}"/>
-              </a:ext>
-            </a:extLst>
-          </p:cNvPr>
+          <p:cNvPr id="2" name="Slide Image Placeholder 1"/>
           <p:cNvSpPr>
             <a:spLocks noGrp="1" noRot="1" noChangeAspect="1"/>
           </p:cNvSpPr>
@@ -1110,13 +995,7 @@
       </p:sp>
       <p:sp>
         <p:nvSpPr>
-          <p:cNvPr id="3" name="Notes Placeholder 2">
-            <a:extLst>
-              <a:ext uri="{FF2B5EF4-FFF2-40B4-BE49-F238E27FC236}">
-                <a16:creationId xmlns:a16="http://schemas.microsoft.com/office/drawing/2014/main" id="{21211983-3B25-6069-BB6C-2629708809C2}"/>
-              </a:ext>
-            </a:extLst>
-          </p:cNvPr>
+          <p:cNvPr id="3" name="Notes Placeholder 2"/>
           <p:cNvSpPr>
             <a:spLocks noGrp="1"/>
           </p:cNvSpPr>
@@ -1147,13 +1026,7 @@
       </p:sp>
       <p:sp>
         <p:nvSpPr>
-          <p:cNvPr id="4" name="Slide Number Placeholder 3">
-            <a:extLst>
-              <a:ext uri="{FF2B5EF4-FFF2-40B4-BE49-F238E27FC236}">
-                <a16:creationId xmlns:a16="http://schemas.microsoft.com/office/drawing/2014/main" id="{639B3B9A-6E2B-1AEA-976E-B78A167EC3A6}"/>
-              </a:ext>
-            </a:extLst>
-          </p:cNvPr>
+          <p:cNvPr id="4" name="Slide Number Placeholder 3"/>
           <p:cNvSpPr>
             <a:spLocks noGrp="1"/>
           </p:cNvSpPr>
@@ -1168,18 +1041,12 @@
           <a:p>
             <a:fld id="{E28BC158-BB56-D04E-8DE4-3CEB786515BF}" type="slidenum">
               <a:rPr lang="en-US" smtClean="0"/>
-              <a:t>4</a:t>
             </a:fld>
             <a:endParaRPr lang="en-US"/>
           </a:p>
         </p:txBody>
       </p:sp>
     </p:spTree>
-    <p:extLst>
-      <p:ext uri="{BB962C8B-B14F-4D97-AF65-F5344CB8AC3E}">
-        <p14:creationId xmlns:p14="http://schemas.microsoft.com/office/powerpoint/2010/main" val="2359876061"/>
-      </p:ext>
-    </p:extLst>
   </p:cSld>
   <p:clrMapOvr>
     <a:masterClrMapping/>
@@ -1192,13 +1059,7 @@
   <p:cSld>
     <p:spTree>
       <p:nvGrpSpPr>
-        <p:cNvPr id="1" name="">
-          <a:extLst>
-            <a:ext uri="{FF2B5EF4-FFF2-40B4-BE49-F238E27FC236}">
-              <a16:creationId xmlns:a16="http://schemas.microsoft.com/office/drawing/2014/main" id="{EE59EED2-47D8-40D8-39C0-0FAAE21BF8D2}"/>
-            </a:ext>
-          </a:extLst>
-        </p:cNvPr>
+        <p:cNvPr id="1" name=""/>
         <p:cNvGrpSpPr/>
         <p:nvPr/>
       </p:nvGrpSpPr>
@@ -1212,13 +1073,7 @@
       </p:grpSpPr>
       <p:sp>
         <p:nvSpPr>
-          <p:cNvPr id="2" name="Slide Image Placeholder 1">
-            <a:extLst>
-              <a:ext uri="{FF2B5EF4-FFF2-40B4-BE49-F238E27FC236}">
-                <a16:creationId xmlns:a16="http://schemas.microsoft.com/office/drawing/2014/main" id="{728E0C02-0207-FA04-4E09-5481F329D599}"/>
-              </a:ext>
-            </a:extLst>
-          </p:cNvPr>
+          <p:cNvPr id="2" name="Slide Image Placeholder 1"/>
           <p:cNvSpPr>
             <a:spLocks noGrp="1" noRot="1" noChangeAspect="1"/>
           </p:cNvSpPr>
@@ -1230,13 +1085,7 @@
       </p:sp>
       <p:sp>
         <p:nvSpPr>
-          <p:cNvPr id="3" name="Notes Placeholder 2">
-            <a:extLst>
-              <a:ext uri="{FF2B5EF4-FFF2-40B4-BE49-F238E27FC236}">
-                <a16:creationId xmlns:a16="http://schemas.microsoft.com/office/drawing/2014/main" id="{74D8F10E-9251-2619-B3D4-8FAD988E591D}"/>
-              </a:ext>
-            </a:extLst>
-          </p:cNvPr>
+          <p:cNvPr id="3" name="Notes Placeholder 2"/>
           <p:cNvSpPr>
             <a:spLocks noGrp="1"/>
           </p:cNvSpPr>
@@ -1267,13 +1116,7 @@
       </p:sp>
       <p:sp>
         <p:nvSpPr>
-          <p:cNvPr id="4" name="Slide Number Placeholder 3">
-            <a:extLst>
-              <a:ext uri="{FF2B5EF4-FFF2-40B4-BE49-F238E27FC236}">
-                <a16:creationId xmlns:a16="http://schemas.microsoft.com/office/drawing/2014/main" id="{5FD22A50-0262-A07C-63B0-DB11F6802E49}"/>
-              </a:ext>
-            </a:extLst>
-          </p:cNvPr>
+          <p:cNvPr id="4" name="Slide Number Placeholder 3"/>
           <p:cNvSpPr>
             <a:spLocks noGrp="1"/>
           </p:cNvSpPr>
@@ -1288,18 +1131,12 @@
           <a:p>
             <a:fld id="{E28BC158-BB56-D04E-8DE4-3CEB786515BF}" type="slidenum">
               <a:rPr lang="en-US" smtClean="0"/>
-              <a:t>5</a:t>
             </a:fld>
             <a:endParaRPr lang="en-US"/>
           </a:p>
         </p:txBody>
       </p:sp>
     </p:spTree>
-    <p:extLst>
-      <p:ext uri="{BB962C8B-B14F-4D97-AF65-F5344CB8AC3E}">
-        <p14:creationId xmlns:p14="http://schemas.microsoft.com/office/powerpoint/2010/main" val="1033974137"/>
-      </p:ext>
-    </p:extLst>
   </p:cSld>
   <p:clrMapOvr>
     <a:masterClrMapping/>
@@ -1312,13 +1149,7 @@
   <p:cSld>
     <p:spTree>
       <p:nvGrpSpPr>
-        <p:cNvPr id="1" name="">
-          <a:extLst>
-            <a:ext uri="{FF2B5EF4-FFF2-40B4-BE49-F238E27FC236}">
-              <a16:creationId xmlns:a16="http://schemas.microsoft.com/office/drawing/2014/main" id="{3DB8F2E5-E51B-32FA-1F4D-639B4738D991}"/>
-            </a:ext>
-          </a:extLst>
-        </p:cNvPr>
+        <p:cNvPr id="1" name=""/>
         <p:cNvGrpSpPr/>
         <p:nvPr/>
       </p:nvGrpSpPr>
@@ -1332,13 +1163,7 @@
       </p:grpSpPr>
       <p:sp>
         <p:nvSpPr>
-          <p:cNvPr id="2" name="Slide Image Placeholder 1">
-            <a:extLst>
-              <a:ext uri="{FF2B5EF4-FFF2-40B4-BE49-F238E27FC236}">
-                <a16:creationId xmlns:a16="http://schemas.microsoft.com/office/drawing/2014/main" id="{CFDFDC7C-BC78-863B-F574-C1FA7D0BFA60}"/>
-              </a:ext>
-            </a:extLst>
-          </p:cNvPr>
+          <p:cNvPr id="2" name="Slide Image Placeholder 1"/>
           <p:cNvSpPr>
             <a:spLocks noGrp="1" noRot="1" noChangeAspect="1"/>
           </p:cNvSpPr>
@@ -1350,13 +1175,7 @@
       </p:sp>
       <p:sp>
         <p:nvSpPr>
-          <p:cNvPr id="3" name="Notes Placeholder 2">
-            <a:extLst>
-              <a:ext uri="{FF2B5EF4-FFF2-40B4-BE49-F238E27FC236}">
-                <a16:creationId xmlns:a16="http://schemas.microsoft.com/office/drawing/2014/main" id="{753E3486-B690-847F-51E0-1DEBF9301535}"/>
-              </a:ext>
-            </a:extLst>
-          </p:cNvPr>
+          <p:cNvPr id="3" name="Notes Placeholder 2"/>
           <p:cNvSpPr>
             <a:spLocks noGrp="1"/>
           </p:cNvSpPr>
@@ -1387,13 +1206,7 @@
       </p:sp>
       <p:sp>
         <p:nvSpPr>
-          <p:cNvPr id="4" name="Slide Number Placeholder 3">
-            <a:extLst>
-              <a:ext uri="{FF2B5EF4-FFF2-40B4-BE49-F238E27FC236}">
-                <a16:creationId xmlns:a16="http://schemas.microsoft.com/office/drawing/2014/main" id="{523B623C-4B2E-7520-C2C7-49023504EB38}"/>
-              </a:ext>
-            </a:extLst>
-          </p:cNvPr>
+          <p:cNvPr id="4" name="Slide Number Placeholder 3"/>
           <p:cNvSpPr>
             <a:spLocks noGrp="1"/>
           </p:cNvSpPr>
@@ -1408,18 +1221,12 @@
           <a:p>
             <a:fld id="{E28BC158-BB56-D04E-8DE4-3CEB786515BF}" type="slidenum">
               <a:rPr lang="en-US" smtClean="0"/>
-              <a:t>6</a:t>
             </a:fld>
             <a:endParaRPr lang="en-US"/>
           </a:p>
         </p:txBody>
       </p:sp>
     </p:spTree>
-    <p:extLst>
-      <p:ext uri="{BB962C8B-B14F-4D97-AF65-F5344CB8AC3E}">
-        <p14:creationId xmlns:p14="http://schemas.microsoft.com/office/powerpoint/2010/main" val="3822685782"/>
-      </p:ext>
-    </p:extLst>
   </p:cSld>
   <p:clrMapOvr>
     <a:masterClrMapping/>
@@ -1432,13 +1239,7 @@
   <p:cSld>
     <p:spTree>
       <p:nvGrpSpPr>
-        <p:cNvPr id="1" name="">
-          <a:extLst>
-            <a:ext uri="{FF2B5EF4-FFF2-40B4-BE49-F238E27FC236}">
-              <a16:creationId xmlns:a16="http://schemas.microsoft.com/office/drawing/2014/main" id="{37E14752-8FCE-DB00-4717-1021204DF5C2}"/>
-            </a:ext>
-          </a:extLst>
-        </p:cNvPr>
+        <p:cNvPr id="1" name=""/>
         <p:cNvGrpSpPr/>
         <p:nvPr/>
       </p:nvGrpSpPr>
@@ -1452,13 +1253,7 @@
       </p:grpSpPr>
       <p:sp>
         <p:nvSpPr>
-          <p:cNvPr id="2" name="Slide Image Placeholder 1">
-            <a:extLst>
-              <a:ext uri="{FF2B5EF4-FFF2-40B4-BE49-F238E27FC236}">
-                <a16:creationId xmlns:a16="http://schemas.microsoft.com/office/drawing/2014/main" id="{BA6A70B5-EE47-6AF8-A232-789D11A6738C}"/>
-              </a:ext>
-            </a:extLst>
-          </p:cNvPr>
+          <p:cNvPr id="2" name="Slide Image Placeholder 1"/>
           <p:cNvSpPr>
             <a:spLocks noGrp="1" noRot="1" noChangeAspect="1"/>
           </p:cNvSpPr>
@@ -1470,13 +1265,7 @@
       </p:sp>
       <p:sp>
         <p:nvSpPr>
-          <p:cNvPr id="3" name="Notes Placeholder 2">
-            <a:extLst>
-              <a:ext uri="{FF2B5EF4-FFF2-40B4-BE49-F238E27FC236}">
-                <a16:creationId xmlns:a16="http://schemas.microsoft.com/office/drawing/2014/main" id="{CA3A3DA0-3D6F-7BCC-A743-05C30637DE66}"/>
-              </a:ext>
-            </a:extLst>
-          </p:cNvPr>
+          <p:cNvPr id="3" name="Notes Placeholder 2"/>
           <p:cNvSpPr>
             <a:spLocks noGrp="1"/>
           </p:cNvSpPr>
@@ -1507,13 +1296,7 @@
       </p:sp>
       <p:sp>
         <p:nvSpPr>
-          <p:cNvPr id="4" name="Slide Number Placeholder 3">
-            <a:extLst>
-              <a:ext uri="{FF2B5EF4-FFF2-40B4-BE49-F238E27FC236}">
-                <a16:creationId xmlns:a16="http://schemas.microsoft.com/office/drawing/2014/main" id="{00794A68-BD0C-8D8C-9DD4-D26805D84C02}"/>
-              </a:ext>
-            </a:extLst>
-          </p:cNvPr>
+          <p:cNvPr id="4" name="Slide Number Placeholder 3"/>
           <p:cNvSpPr>
             <a:spLocks noGrp="1"/>
           </p:cNvSpPr>
@@ -1528,18 +1311,12 @@
           <a:p>
             <a:fld id="{E28BC158-BB56-D04E-8DE4-3CEB786515BF}" type="slidenum">
               <a:rPr lang="en-US" smtClean="0"/>
-              <a:t>7</a:t>
             </a:fld>
             <a:endParaRPr lang="en-US"/>
           </a:p>
         </p:txBody>
       </p:sp>
     </p:spTree>
-    <p:extLst>
-      <p:ext uri="{BB962C8B-B14F-4D97-AF65-F5344CB8AC3E}">
-        <p14:creationId xmlns:p14="http://schemas.microsoft.com/office/powerpoint/2010/main" val="1232609692"/>
-      </p:ext>
-    </p:extLst>
   </p:cSld>
   <p:clrMapOvr>
     <a:masterClrMapping/>
@@ -1552,13 +1329,7 @@
   <p:cSld>
     <p:spTree>
       <p:nvGrpSpPr>
-        <p:cNvPr id="1" name="">
-          <a:extLst>
-            <a:ext uri="{FF2B5EF4-FFF2-40B4-BE49-F238E27FC236}">
-              <a16:creationId xmlns:a16="http://schemas.microsoft.com/office/drawing/2014/main" id="{B33B0EAA-D84C-618B-8E57-32EBEB6CA4BE}"/>
-            </a:ext>
-          </a:extLst>
-        </p:cNvPr>
+        <p:cNvPr id="1" name=""/>
         <p:cNvGrpSpPr/>
         <p:nvPr/>
       </p:nvGrpSpPr>
@@ -1572,13 +1343,7 @@
       </p:grpSpPr>
       <p:sp>
         <p:nvSpPr>
-          <p:cNvPr id="2" name="Slide Image Placeholder 1">
-            <a:extLst>
-              <a:ext uri="{FF2B5EF4-FFF2-40B4-BE49-F238E27FC236}">
-                <a16:creationId xmlns:a16="http://schemas.microsoft.com/office/drawing/2014/main" id="{AB9597F8-5587-195A-5B86-E562E2C14022}"/>
-              </a:ext>
-            </a:extLst>
-          </p:cNvPr>
+          <p:cNvPr id="2" name="Slide Image Placeholder 1"/>
           <p:cNvSpPr>
             <a:spLocks noGrp="1" noRot="1" noChangeAspect="1"/>
           </p:cNvSpPr>
@@ -1590,13 +1355,7 @@
       </p:sp>
       <p:sp>
         <p:nvSpPr>
-          <p:cNvPr id="3" name="Notes Placeholder 2">
-            <a:extLst>
-              <a:ext uri="{FF2B5EF4-FFF2-40B4-BE49-F238E27FC236}">
-                <a16:creationId xmlns:a16="http://schemas.microsoft.com/office/drawing/2014/main" id="{547B8CCA-B1CE-E8F5-F47A-1DC2BD5A1F4F}"/>
-              </a:ext>
-            </a:extLst>
-          </p:cNvPr>
+          <p:cNvPr id="3" name="Notes Placeholder 2"/>
           <p:cNvSpPr>
             <a:spLocks noGrp="1"/>
           </p:cNvSpPr>
@@ -1627,13 +1386,7 @@
       </p:sp>
       <p:sp>
         <p:nvSpPr>
-          <p:cNvPr id="4" name="Slide Number Placeholder 3">
-            <a:extLst>
-              <a:ext uri="{FF2B5EF4-FFF2-40B4-BE49-F238E27FC236}">
-                <a16:creationId xmlns:a16="http://schemas.microsoft.com/office/drawing/2014/main" id="{BDD0AB92-55C1-4FDD-06CB-9CD82336654C}"/>
-              </a:ext>
-            </a:extLst>
-          </p:cNvPr>
+          <p:cNvPr id="4" name="Slide Number Placeholder 3"/>
           <p:cNvSpPr>
             <a:spLocks noGrp="1"/>
           </p:cNvSpPr>
@@ -1648,18 +1401,12 @@
           <a:p>
             <a:fld id="{E28BC158-BB56-D04E-8DE4-3CEB786515BF}" type="slidenum">
               <a:rPr lang="en-US" smtClean="0"/>
-              <a:t>8</a:t>
             </a:fld>
             <a:endParaRPr lang="en-US"/>
           </a:p>
         </p:txBody>
       </p:sp>
     </p:spTree>
-    <p:extLst>
-      <p:ext uri="{BB962C8B-B14F-4D97-AF65-F5344CB8AC3E}">
-        <p14:creationId xmlns:p14="http://schemas.microsoft.com/office/powerpoint/2010/main" val="2233877661"/>
-      </p:ext>
-    </p:extLst>
   </p:cSld>
   <p:clrMapOvr>
     <a:masterClrMapping/>
@@ -1725,7 +1472,6 @@
               <a:buSzTx/>
               <a:buFontTx/>
               <a:buNone/>
-              <a:tabLst/>
               <a:defRPr/>
             </a:pPr>
             <a:r>
@@ -1764,18 +1510,12 @@
           <a:p>
             <a:fld id="{E28BC158-BB56-D04E-8DE4-3CEB786515BF}" type="slidenum">
               <a:rPr lang="en-US" smtClean="0"/>
-              <a:t>9</a:t>
             </a:fld>
             <a:endParaRPr lang="en-US"/>
           </a:p>
         </p:txBody>
       </p:sp>
     </p:spTree>
-    <p:extLst>
-      <p:ext uri="{BB962C8B-B14F-4D97-AF65-F5344CB8AC3E}">
-        <p14:creationId xmlns:p14="http://schemas.microsoft.com/office/powerpoint/2010/main" val="1008832853"/>
-      </p:ext>
-    </p:extLst>
   </p:cSld>
   <p:clrMapOvr>
     <a:masterClrMapping/>
@@ -1810,13 +1550,7 @@
       </p:grpSpPr>
       <p:sp>
         <p:nvSpPr>
-          <p:cNvPr id="2" name="Title 1">
-            <a:extLst>
-              <a:ext uri="{FF2B5EF4-FFF2-40B4-BE49-F238E27FC236}">
-                <a16:creationId xmlns:a16="http://schemas.microsoft.com/office/drawing/2014/main" id="{8EEA5F1D-3A29-463C-D7AF-7132F92B56CD}"/>
-              </a:ext>
-            </a:extLst>
-          </p:cNvPr>
+          <p:cNvPr id="2" name="Title 1"/>
           <p:cNvSpPr>
             <a:spLocks noGrp="1"/>
           </p:cNvSpPr>
@@ -1873,13 +1607,7 @@
       </p:sp>
       <p:sp>
         <p:nvSpPr>
-          <p:cNvPr id="7" name="Text Placeholder 2">
-            <a:extLst>
-              <a:ext uri="{FF2B5EF4-FFF2-40B4-BE49-F238E27FC236}">
-                <a16:creationId xmlns:a16="http://schemas.microsoft.com/office/drawing/2014/main" id="{75E8DED6-3359-C8D7-EDF1-14AE135495B0}"/>
-              </a:ext>
-            </a:extLst>
-          </p:cNvPr>
+          <p:cNvPr id="7" name="Text Placeholder 2"/>
           <p:cNvSpPr>
             <a:spLocks noGrp="1"/>
           </p:cNvSpPr>
@@ -2001,21 +1729,13 @@
               <a:rPr lang="en-GB" dirty="0"/>
               <a:t>Names of Presenters, UCL Sans Regular 24pt</a:t>
             </a:r>
-          </a:p>
-        </p:txBody>
-      </p:sp>
-      <p:sp>
-        <p:nvSpPr>
-          <p:cNvPr id="4" name="Rectangle 3">
-            <a:extLst>
-              <a:ext uri="{FF2B5EF4-FFF2-40B4-BE49-F238E27FC236}">
-                <a16:creationId xmlns:a16="http://schemas.microsoft.com/office/drawing/2014/main" id="{7903D562-9BC1-5B2A-B39F-74DAD6DF10C0}"/>
-              </a:ext>
-              <a:ext uri="{C183D7F6-B498-43B3-948B-1728B52AA6E4}">
-                <adec:decorative xmlns:adec="http://schemas.microsoft.com/office/drawing/2017/decorative" val="1"/>
-              </a:ext>
-            </a:extLst>
-          </p:cNvPr>
+            <a:endParaRPr lang="en-GB" dirty="0"/>
+          </a:p>
+        </p:txBody>
+      </p:sp>
+      <p:sp>
+        <p:nvSpPr>
+          <p:cNvPr id="4" name="Rectangle 3"/>
           <p:cNvSpPr>
             <a:spLocks noGrp="1" noRot="1" noMove="1" noResize="1" noEditPoints="1" noAdjustHandles="1" noChangeArrowheads="1" noChangeShapeType="1"/>
           </p:cNvSpPr>
@@ -2063,13 +1783,7 @@
       </p:sp>
       <p:sp>
         <p:nvSpPr>
-          <p:cNvPr id="5" name="Text Placeholder 2">
-            <a:extLst>
-              <a:ext uri="{FF2B5EF4-FFF2-40B4-BE49-F238E27FC236}">
-                <a16:creationId xmlns:a16="http://schemas.microsoft.com/office/drawing/2014/main" id="{91B036D7-E2F6-A505-BD78-D58A7EE2AF66}"/>
-              </a:ext>
-            </a:extLst>
-          </p:cNvPr>
+          <p:cNvPr id="5" name="Text Placeholder 2"/>
           <p:cNvSpPr>
             <a:spLocks noGrp="1"/>
           </p:cNvSpPr>
@@ -2191,21 +1905,13 @@
               <a:rPr lang="en-GB" dirty="0"/>
               <a:t>Date, UCL Sans Regular 18pt </a:t>
             </a:r>
+            <a:endParaRPr lang="en-GB" dirty="0"/>
           </a:p>
         </p:txBody>
       </p:sp>
       <p:pic>
         <p:nvPicPr>
-          <p:cNvPr id="9" name="Picture 8" descr="UCL logo, University College London">
-            <a:extLst>
-              <a:ext uri="{FF2B5EF4-FFF2-40B4-BE49-F238E27FC236}">
-                <a16:creationId xmlns:a16="http://schemas.microsoft.com/office/drawing/2014/main" id="{D13C0C81-E6EF-C626-E359-2DC4637817EE}"/>
-              </a:ext>
-              <a:ext uri="{C183D7F6-B498-43B3-948B-1728B52AA6E4}">
-                <adec:decorative xmlns:adec="http://schemas.microsoft.com/office/drawing/2017/decorative" val="0"/>
-              </a:ext>
-            </a:extLst>
-          </p:cNvPr>
+          <p:cNvPr id="9" name="Picture 8" descr="UCL logo, University College London"/>
           <p:cNvPicPr>
             <a:picLocks noGrp="1" noRot="1" noMove="1" noResize="1" noEditPoints="1" noAdjustHandles="1" noChangeArrowheads="1" noChangeShapeType="1" noCrop="1"/>
           </p:cNvPicPr>
@@ -2228,11 +1934,6 @@
         </p:spPr>
       </p:pic>
     </p:spTree>
-    <p:extLst>
-      <p:ext uri="{BB962C8B-B14F-4D97-AF65-F5344CB8AC3E}">
-        <p14:creationId xmlns:p14="http://schemas.microsoft.com/office/powerpoint/2010/main" val="3370091355"/>
-      </p:ext>
-    </p:extLst>
   </p:cSld>
   <p:clrMapOvr>
     <a:masterClrMapping/>
@@ -2267,13 +1968,7 @@
       </p:grpSpPr>
       <p:sp>
         <p:nvSpPr>
-          <p:cNvPr id="2" name="Title 1">
-            <a:extLst>
-              <a:ext uri="{FF2B5EF4-FFF2-40B4-BE49-F238E27FC236}">
-                <a16:creationId xmlns:a16="http://schemas.microsoft.com/office/drawing/2014/main" id="{8EEA5F1D-3A29-463C-D7AF-7132F92B56CD}"/>
-              </a:ext>
-            </a:extLst>
-          </p:cNvPr>
+          <p:cNvPr id="2" name="Title 1"/>
           <p:cNvSpPr>
             <a:spLocks noGrp="1"/>
           </p:cNvSpPr>
@@ -2318,18 +2013,13 @@
               <a:rPr lang="en-GB" dirty="0"/>
               <a:t> 36pt</a:t>
             </a:r>
-          </a:p>
-        </p:txBody>
-      </p:sp>
-      <p:sp>
-        <p:nvSpPr>
-          <p:cNvPr id="4" name="Text Placeholder 7">
-            <a:extLst>
-              <a:ext uri="{FF2B5EF4-FFF2-40B4-BE49-F238E27FC236}">
-                <a16:creationId xmlns:a16="http://schemas.microsoft.com/office/drawing/2014/main" id="{C5D11EE6-C4E2-EE93-39A9-79D248FDD196}"/>
-              </a:ext>
-            </a:extLst>
-          </p:cNvPr>
+            <a:endParaRPr lang="en-GB" dirty="0"/>
+          </a:p>
+        </p:txBody>
+      </p:sp>
+      <p:sp>
+        <p:nvSpPr>
+          <p:cNvPr id="4" name="Text Placeholder 7"/>
           <p:cNvSpPr>
             <a:spLocks noGrp="1"/>
           </p:cNvSpPr>
@@ -2356,7 +2046,7 @@
               <a:spcBef>
                 <a:spcPts val="0"/>
               </a:spcBef>
-              <a:buFont typeface="Wingdings" pitchFamily="2" charset="2"/>
+              <a:buFont typeface="Wingdings" panose="05000000000000000000" pitchFamily="2" charset="2"/>
               <a:buNone/>
               <a:defRPr sz="2400">
                 <a:solidFill>
@@ -2365,22 +2055,22 @@
               </a:defRPr>
             </a:lvl1pPr>
             <a:lvl2pPr>
-              <a:buFont typeface="Wingdings" pitchFamily="2" charset="2"/>
+              <a:buFont typeface="Wingdings" panose="05000000000000000000" pitchFamily="2" charset="2"/>
               <a:buChar char="§"/>
               <a:defRPr sz="1800"/>
             </a:lvl2pPr>
             <a:lvl3pPr>
-              <a:buFont typeface="Wingdings" pitchFamily="2" charset="2"/>
+              <a:buFont typeface="Wingdings" panose="05000000000000000000" pitchFamily="2" charset="2"/>
               <a:buChar char="§"/>
               <a:defRPr sz="1800"/>
             </a:lvl3pPr>
             <a:lvl4pPr>
-              <a:buFont typeface="Wingdings" pitchFamily="2" charset="2"/>
+              <a:buFont typeface="Wingdings" panose="05000000000000000000" pitchFamily="2" charset="2"/>
               <a:buChar char="§"/>
               <a:defRPr sz="1800"/>
             </a:lvl4pPr>
             <a:lvl5pPr>
-              <a:buFont typeface="Wingdings" pitchFamily="2" charset="2"/>
+              <a:buFont typeface="Wingdings" panose="05000000000000000000" pitchFamily="2" charset="2"/>
               <a:buChar char="§"/>
               <a:defRPr sz="1800"/>
             </a:lvl5pPr>
@@ -2391,18 +2081,13 @@
               <a:rPr lang="en-GB" dirty="0"/>
               <a:t>Subheading text style, UCL Sans regular 24pt</a:t>
             </a:r>
-          </a:p>
-        </p:txBody>
-      </p:sp>
-      <p:sp>
-        <p:nvSpPr>
-          <p:cNvPr id="7" name="Text Placeholder 7">
-            <a:extLst>
-              <a:ext uri="{FF2B5EF4-FFF2-40B4-BE49-F238E27FC236}">
-                <a16:creationId xmlns:a16="http://schemas.microsoft.com/office/drawing/2014/main" id="{55335586-933A-6F8D-CF5B-B9D033AD83A3}"/>
-              </a:ext>
-            </a:extLst>
-          </p:cNvPr>
+            <a:endParaRPr lang="en-GB" dirty="0"/>
+          </a:p>
+        </p:txBody>
+      </p:sp>
+      <p:sp>
+        <p:nvSpPr>
+          <p:cNvPr id="7" name="Text Placeholder 7"/>
           <p:cNvSpPr>
             <a:spLocks noGrp="1"/>
           </p:cNvSpPr>
@@ -2429,7 +2114,7 @@
               <a:spcBef>
                 <a:spcPts val="0"/>
               </a:spcBef>
-              <a:buFont typeface="Wingdings" pitchFamily="2" charset="2"/>
+              <a:buFont typeface="Wingdings" panose="05000000000000000000" pitchFamily="2" charset="2"/>
               <a:buNone/>
               <a:defRPr sz="1800">
                 <a:solidFill>
@@ -2438,22 +2123,22 @@
               </a:defRPr>
             </a:lvl1pPr>
             <a:lvl2pPr>
-              <a:buFont typeface="Wingdings" pitchFamily="2" charset="2"/>
+              <a:buFont typeface="Wingdings" panose="05000000000000000000" pitchFamily="2" charset="2"/>
               <a:buChar char="§"/>
               <a:defRPr sz="1800"/>
             </a:lvl2pPr>
             <a:lvl3pPr>
-              <a:buFont typeface="Wingdings" pitchFamily="2" charset="2"/>
+              <a:buFont typeface="Wingdings" panose="05000000000000000000" pitchFamily="2" charset="2"/>
               <a:buChar char="§"/>
               <a:defRPr sz="1800"/>
             </a:lvl3pPr>
             <a:lvl4pPr>
-              <a:buFont typeface="Wingdings" pitchFamily="2" charset="2"/>
+              <a:buFont typeface="Wingdings" panose="05000000000000000000" pitchFamily="2" charset="2"/>
               <a:buChar char="§"/>
               <a:defRPr sz="1800"/>
             </a:lvl4pPr>
             <a:lvl5pPr>
-              <a:buFont typeface="Wingdings" pitchFamily="2" charset="2"/>
+              <a:buFont typeface="Wingdings" panose="05000000000000000000" pitchFamily="2" charset="2"/>
               <a:buChar char="§"/>
               <a:defRPr sz="1800"/>
             </a:lvl5pPr>
@@ -2464,6 +2149,7 @@
               <a:rPr lang="en-GB" dirty="0"/>
               <a:t>Body text, </a:t>
             </a:r>
+            <a:endParaRPr lang="en-GB" dirty="0"/>
           </a:p>
           <a:p>
             <a:pPr lvl="0"/>
@@ -2477,16 +2163,7 @@
       </p:sp>
       <p:pic>
         <p:nvPicPr>
-          <p:cNvPr id="8" name="Picture 7">
-            <a:extLst>
-              <a:ext uri="{FF2B5EF4-FFF2-40B4-BE49-F238E27FC236}">
-                <a16:creationId xmlns:a16="http://schemas.microsoft.com/office/drawing/2014/main" id="{8E0A8775-7F4C-B3DF-556A-43E4628D9E6B}"/>
-              </a:ext>
-              <a:ext uri="{C183D7F6-B498-43B3-948B-1728B52AA6E4}">
-                <adec:decorative xmlns:adec="http://schemas.microsoft.com/office/drawing/2017/decorative" val="1"/>
-              </a:ext>
-            </a:extLst>
-          </p:cNvPr>
+          <p:cNvPr id="8" name="Picture 7"/>
           <p:cNvPicPr>
             <a:picLocks noGrp="1" noRot="1" noChangeAspect="1" noMove="1" noResize="1" noEditPoints="1" noAdjustHandles="1" noChangeArrowheads="1" noChangeShapeType="1" noCrop="1"/>
           </p:cNvPicPr>
@@ -2509,11 +2186,6 @@
         </p:spPr>
       </p:pic>
     </p:spTree>
-    <p:extLst>
-      <p:ext uri="{BB962C8B-B14F-4D97-AF65-F5344CB8AC3E}">
-        <p14:creationId xmlns:p14="http://schemas.microsoft.com/office/powerpoint/2010/main" val="1777399123"/>
-      </p:ext>
-    </p:extLst>
   </p:cSld>
   <p:clrMapOvr>
     <a:masterClrMapping/>
@@ -2548,13 +2220,7 @@
       </p:grpSpPr>
       <p:sp>
         <p:nvSpPr>
-          <p:cNvPr id="2" name="Title 1">
-            <a:extLst>
-              <a:ext uri="{FF2B5EF4-FFF2-40B4-BE49-F238E27FC236}">
-                <a16:creationId xmlns:a16="http://schemas.microsoft.com/office/drawing/2014/main" id="{8EEA5F1D-3A29-463C-D7AF-7132F92B56CD}"/>
-              </a:ext>
-            </a:extLst>
-          </p:cNvPr>
+          <p:cNvPr id="2" name="Title 1"/>
           <p:cNvSpPr>
             <a:spLocks noGrp="1"/>
           </p:cNvSpPr>
@@ -2609,18 +2275,13 @@
               <a:rPr lang="en-GB" dirty="0"/>
               <a:t> 36pt</a:t>
             </a:r>
-          </a:p>
-        </p:txBody>
-      </p:sp>
-      <p:sp>
-        <p:nvSpPr>
-          <p:cNvPr id="4" name="Text Placeholder 7">
-            <a:extLst>
-              <a:ext uri="{FF2B5EF4-FFF2-40B4-BE49-F238E27FC236}">
-                <a16:creationId xmlns:a16="http://schemas.microsoft.com/office/drawing/2014/main" id="{C5D11EE6-C4E2-EE93-39A9-79D248FDD196}"/>
-              </a:ext>
-            </a:extLst>
-          </p:cNvPr>
+            <a:endParaRPr lang="en-GB" dirty="0"/>
+          </a:p>
+        </p:txBody>
+      </p:sp>
+      <p:sp>
+        <p:nvSpPr>
+          <p:cNvPr id="4" name="Text Placeholder 7"/>
           <p:cNvSpPr>
             <a:spLocks noGrp="1"/>
           </p:cNvSpPr>
@@ -2641,27 +2302,27 @@
           <a:bodyPr/>
           <a:lstStyle>
             <a:lvl1pPr>
-              <a:buFont typeface="Wingdings" pitchFamily="2" charset="2"/>
+              <a:buFont typeface="Wingdings" panose="05000000000000000000" pitchFamily="2" charset="2"/>
               <a:buChar char="§"/>
               <a:defRPr sz="1800"/>
             </a:lvl1pPr>
             <a:lvl2pPr>
-              <a:buFont typeface="Wingdings" pitchFamily="2" charset="2"/>
+              <a:buFont typeface="Wingdings" panose="05000000000000000000" pitchFamily="2" charset="2"/>
               <a:buChar char="§"/>
               <a:defRPr sz="1800"/>
             </a:lvl2pPr>
             <a:lvl3pPr>
-              <a:buFont typeface="Wingdings" pitchFamily="2" charset="2"/>
+              <a:buFont typeface="Wingdings" panose="05000000000000000000" pitchFamily="2" charset="2"/>
               <a:buChar char="§"/>
               <a:defRPr sz="1800"/>
             </a:lvl3pPr>
             <a:lvl4pPr>
-              <a:buFont typeface="Wingdings" pitchFamily="2" charset="2"/>
+              <a:buFont typeface="Wingdings" panose="05000000000000000000" pitchFamily="2" charset="2"/>
               <a:buChar char="§"/>
               <a:defRPr sz="1800"/>
             </a:lvl4pPr>
             <a:lvl5pPr>
-              <a:buFont typeface="Wingdings" pitchFamily="2" charset="2"/>
+              <a:buFont typeface="Wingdings" panose="05000000000000000000" pitchFamily="2" charset="2"/>
               <a:buChar char="§"/>
               <a:defRPr sz="1800"/>
             </a:lvl5pPr>
@@ -2678,16 +2339,7 @@
       </p:sp>
       <p:pic>
         <p:nvPicPr>
-          <p:cNvPr id="7" name="Picture 6">
-            <a:extLst>
-              <a:ext uri="{FF2B5EF4-FFF2-40B4-BE49-F238E27FC236}">
-                <a16:creationId xmlns:a16="http://schemas.microsoft.com/office/drawing/2014/main" id="{0C7F7948-C0B4-4DA0-F295-8EA3ED1E9A0A}"/>
-              </a:ext>
-              <a:ext uri="{C183D7F6-B498-43B3-948B-1728B52AA6E4}">
-                <adec:decorative xmlns:adec="http://schemas.microsoft.com/office/drawing/2017/decorative" val="1"/>
-              </a:ext>
-            </a:extLst>
-          </p:cNvPr>
+          <p:cNvPr id="7" name="Picture 6"/>
           <p:cNvPicPr>
             <a:picLocks noGrp="1" noRot="1" noChangeAspect="1" noMove="1" noResize="1" noEditPoints="1" noAdjustHandles="1" noChangeArrowheads="1" noChangeShapeType="1" noCrop="1"/>
           </p:cNvPicPr>
@@ -2710,11 +2362,6 @@
         </p:spPr>
       </p:pic>
     </p:spTree>
-    <p:extLst>
-      <p:ext uri="{BB962C8B-B14F-4D97-AF65-F5344CB8AC3E}">
-        <p14:creationId xmlns:p14="http://schemas.microsoft.com/office/powerpoint/2010/main" val="1485046621"/>
-      </p:ext>
-    </p:extLst>
   </p:cSld>
   <p:clrMapOvr>
     <a:masterClrMapping/>
@@ -2749,13 +2396,7 @@
       </p:grpSpPr>
       <p:sp>
         <p:nvSpPr>
-          <p:cNvPr id="2" name="Title 1">
-            <a:extLst>
-              <a:ext uri="{FF2B5EF4-FFF2-40B4-BE49-F238E27FC236}">
-                <a16:creationId xmlns:a16="http://schemas.microsoft.com/office/drawing/2014/main" id="{8EEA5F1D-3A29-463C-D7AF-7132F92B56CD}"/>
-              </a:ext>
-            </a:extLst>
-          </p:cNvPr>
+          <p:cNvPr id="2" name="Title 1"/>
           <p:cNvSpPr>
             <a:spLocks noGrp="1"/>
           </p:cNvSpPr>
@@ -2807,18 +2448,13 @@
               <a:rPr lang="en-GB" dirty="0"/>
               <a:t> 36pt</a:t>
             </a:r>
-          </a:p>
-        </p:txBody>
-      </p:sp>
-      <p:sp>
-        <p:nvSpPr>
-          <p:cNvPr id="8" name="Text Placeholder 7">
-            <a:extLst>
-              <a:ext uri="{FF2B5EF4-FFF2-40B4-BE49-F238E27FC236}">
-                <a16:creationId xmlns:a16="http://schemas.microsoft.com/office/drawing/2014/main" id="{CDC1F16C-DBBC-93A6-C7EF-DE12462C35FD}"/>
-              </a:ext>
-            </a:extLst>
-          </p:cNvPr>
+            <a:endParaRPr lang="en-GB" dirty="0"/>
+          </a:p>
+        </p:txBody>
+      </p:sp>
+      <p:sp>
+        <p:nvSpPr>
+          <p:cNvPr id="8" name="Text Placeholder 7"/>
           <p:cNvSpPr>
             <a:spLocks noGrp="1"/>
           </p:cNvSpPr>
@@ -2839,27 +2475,27 @@
           <a:bodyPr/>
           <a:lstStyle>
             <a:lvl1pPr>
-              <a:buFont typeface="Wingdings" pitchFamily="2" charset="2"/>
+              <a:buFont typeface="Wingdings" panose="05000000000000000000" pitchFamily="2" charset="2"/>
               <a:buChar char="§"/>
               <a:defRPr sz="1800"/>
             </a:lvl1pPr>
             <a:lvl2pPr>
-              <a:buFont typeface="Wingdings" pitchFamily="2" charset="2"/>
+              <a:buFont typeface="Wingdings" panose="05000000000000000000" pitchFamily="2" charset="2"/>
               <a:buChar char="§"/>
               <a:defRPr sz="1800"/>
             </a:lvl2pPr>
             <a:lvl3pPr>
-              <a:buFont typeface="Wingdings" pitchFamily="2" charset="2"/>
+              <a:buFont typeface="Wingdings" panose="05000000000000000000" pitchFamily="2" charset="2"/>
               <a:buChar char="§"/>
               <a:defRPr sz="1800"/>
             </a:lvl3pPr>
             <a:lvl4pPr>
-              <a:buFont typeface="Wingdings" pitchFamily="2" charset="2"/>
+              <a:buFont typeface="Wingdings" panose="05000000000000000000" pitchFamily="2" charset="2"/>
               <a:buChar char="§"/>
               <a:defRPr sz="1800"/>
             </a:lvl4pPr>
             <a:lvl5pPr>
-              <a:buFont typeface="Wingdings" pitchFamily="2" charset="2"/>
+              <a:buFont typeface="Wingdings" panose="05000000000000000000" pitchFamily="2" charset="2"/>
               <a:buChar char="§"/>
               <a:defRPr sz="1800"/>
             </a:lvl5pPr>
@@ -2870,6 +2506,7 @@
               <a:rPr lang="en-GB" dirty="0"/>
               <a:t>Bullet text, </a:t>
             </a:r>
+            <a:endParaRPr lang="en-GB" dirty="0"/>
           </a:p>
           <a:p>
             <a:pPr lvl="0"/>
@@ -2883,13 +2520,7 @@
       </p:sp>
       <p:sp>
         <p:nvSpPr>
-          <p:cNvPr id="9" name="Text Placeholder 7">
-            <a:extLst>
-              <a:ext uri="{FF2B5EF4-FFF2-40B4-BE49-F238E27FC236}">
-                <a16:creationId xmlns:a16="http://schemas.microsoft.com/office/drawing/2014/main" id="{9A92D522-EA5D-B98E-DDA4-80FEB73128FF}"/>
-              </a:ext>
-            </a:extLst>
-          </p:cNvPr>
+          <p:cNvPr id="9" name="Text Placeholder 7"/>
           <p:cNvSpPr>
             <a:spLocks noGrp="1"/>
           </p:cNvSpPr>
@@ -2910,27 +2541,27 @@
           <a:bodyPr/>
           <a:lstStyle>
             <a:lvl1pPr>
-              <a:buFont typeface="Wingdings" pitchFamily="2" charset="2"/>
+              <a:buFont typeface="Wingdings" panose="05000000000000000000" pitchFamily="2" charset="2"/>
               <a:buChar char="§"/>
               <a:defRPr sz="1800"/>
             </a:lvl1pPr>
             <a:lvl2pPr>
-              <a:buFont typeface="Wingdings" pitchFamily="2" charset="2"/>
+              <a:buFont typeface="Wingdings" panose="05000000000000000000" pitchFamily="2" charset="2"/>
               <a:buChar char="§"/>
               <a:defRPr sz="1800"/>
             </a:lvl2pPr>
             <a:lvl3pPr>
-              <a:buFont typeface="Wingdings" pitchFamily="2" charset="2"/>
+              <a:buFont typeface="Wingdings" panose="05000000000000000000" pitchFamily="2" charset="2"/>
               <a:buChar char="§"/>
               <a:defRPr sz="1800"/>
             </a:lvl3pPr>
             <a:lvl4pPr>
-              <a:buFont typeface="Wingdings" pitchFamily="2" charset="2"/>
+              <a:buFont typeface="Wingdings" panose="05000000000000000000" pitchFamily="2" charset="2"/>
               <a:buChar char="§"/>
               <a:defRPr sz="1800"/>
             </a:lvl4pPr>
             <a:lvl5pPr>
-              <a:buFont typeface="Wingdings" pitchFamily="2" charset="2"/>
+              <a:buFont typeface="Wingdings" panose="05000000000000000000" pitchFamily="2" charset="2"/>
               <a:buChar char="§"/>
               <a:defRPr sz="1800"/>
             </a:lvl5pPr>
@@ -2941,6 +2572,7 @@
               <a:rPr lang="en-GB" dirty="0"/>
               <a:t>Bullet text, </a:t>
             </a:r>
+            <a:endParaRPr lang="en-GB" dirty="0"/>
           </a:p>
           <a:p>
             <a:pPr lvl="0"/>
@@ -2954,16 +2586,7 @@
       </p:sp>
       <p:pic>
         <p:nvPicPr>
-          <p:cNvPr id="6" name="Picture 5">
-            <a:extLst>
-              <a:ext uri="{FF2B5EF4-FFF2-40B4-BE49-F238E27FC236}">
-                <a16:creationId xmlns:a16="http://schemas.microsoft.com/office/drawing/2014/main" id="{ECBB61E5-C9D8-A05D-C8A2-706AEF9A96CE}"/>
-              </a:ext>
-              <a:ext uri="{C183D7F6-B498-43B3-948B-1728B52AA6E4}">
-                <adec:decorative xmlns:adec="http://schemas.microsoft.com/office/drawing/2017/decorative" val="1"/>
-              </a:ext>
-            </a:extLst>
-          </p:cNvPr>
+          <p:cNvPr id="6" name="Picture 5"/>
           <p:cNvPicPr>
             <a:picLocks noGrp="1" noRot="1" noChangeAspect="1" noMove="1" noResize="1" noEditPoints="1" noAdjustHandles="1" noChangeArrowheads="1" noChangeShapeType="1" noCrop="1"/>
           </p:cNvPicPr>
@@ -2986,11 +2609,6 @@
         </p:spPr>
       </p:pic>
     </p:spTree>
-    <p:extLst>
-      <p:ext uri="{BB962C8B-B14F-4D97-AF65-F5344CB8AC3E}">
-        <p14:creationId xmlns:p14="http://schemas.microsoft.com/office/powerpoint/2010/main" val="2216617966"/>
-      </p:ext>
-    </p:extLst>
   </p:cSld>
   <p:clrMapOvr>
     <a:masterClrMapping/>
@@ -3025,13 +2643,7 @@
       </p:grpSpPr>
       <p:sp>
         <p:nvSpPr>
-          <p:cNvPr id="2" name="Title 1">
-            <a:extLst>
-              <a:ext uri="{FF2B5EF4-FFF2-40B4-BE49-F238E27FC236}">
-                <a16:creationId xmlns:a16="http://schemas.microsoft.com/office/drawing/2014/main" id="{8EEA5F1D-3A29-463C-D7AF-7132F92B56CD}"/>
-              </a:ext>
-            </a:extLst>
-          </p:cNvPr>
+          <p:cNvPr id="2" name="Title 1"/>
           <p:cNvSpPr>
             <a:spLocks noGrp="1"/>
           </p:cNvSpPr>
@@ -3081,13 +2693,7 @@
       </p:sp>
       <p:sp>
         <p:nvSpPr>
-          <p:cNvPr id="7" name="Text Placeholder 2">
-            <a:extLst>
-              <a:ext uri="{FF2B5EF4-FFF2-40B4-BE49-F238E27FC236}">
-                <a16:creationId xmlns:a16="http://schemas.microsoft.com/office/drawing/2014/main" id="{75E8DED6-3359-C8D7-EDF1-14AE135495B0}"/>
-              </a:ext>
-            </a:extLst>
-          </p:cNvPr>
+          <p:cNvPr id="7" name="Text Placeholder 2"/>
           <p:cNvSpPr>
             <a:spLocks noGrp="1"/>
           </p:cNvSpPr>
@@ -3209,23 +2815,18 @@
               <a:rPr lang="en-GB" dirty="0"/>
               <a:t>Subtitle, UCL Sans Regular 24pt</a:t>
             </a:r>
-          </a:p>
-        </p:txBody>
-      </p:sp>
-      <p:sp>
-        <p:nvSpPr>
-          <p:cNvPr id="4" name="Table Placeholder 3" descr="Add a clear, concise statement describing the figures presented in the table">
-            <a:extLst>
-              <a:ext uri="{FF2B5EF4-FFF2-40B4-BE49-F238E27FC236}">
-                <a16:creationId xmlns:a16="http://schemas.microsoft.com/office/drawing/2014/main" id="{A4C55113-F63B-C02B-63A2-F9C817D9BF39}"/>
-              </a:ext>
-            </a:extLst>
-          </p:cNvPr>
+            <a:endParaRPr lang="en-GB" dirty="0"/>
+          </a:p>
+        </p:txBody>
+      </p:sp>
+      <p:sp>
+        <p:nvSpPr>
+          <p:cNvPr id="4" name="Table Placeholder 3" descr="Add a clear, concise statement describing the figures presented in the table"/>
           <p:cNvSpPr>
             <a:spLocks noGrp="1" noRot="1" noMove="1" noResize="1" noEditPoints="1" noAdjustHandles="1" noChangeArrowheads="1" noChangeShapeType="1"/>
           </p:cNvSpPr>
           <p:nvPr>
-            <p:ph type="tbl" sz="quarter" idx="12"/>
+            <p:ph type="tbl" sz="quarter" idx="12" hasCustomPrompt="1"/>
           </p:nvPr>
         </p:nvSpPr>
         <p:spPr>
@@ -3259,13 +2860,7 @@
       </p:sp>
       <p:sp>
         <p:nvSpPr>
-          <p:cNvPr id="11" name="Text Placeholder 2">
-            <a:extLst>
-              <a:ext uri="{FF2B5EF4-FFF2-40B4-BE49-F238E27FC236}">
-                <a16:creationId xmlns:a16="http://schemas.microsoft.com/office/drawing/2014/main" id="{F75F6D65-6CB4-1A07-17CB-355AFECF9D4B}"/>
-              </a:ext>
-            </a:extLst>
-          </p:cNvPr>
+          <p:cNvPr id="11" name="Text Placeholder 2"/>
           <p:cNvSpPr>
             <a:spLocks noGrp="1"/>
           </p:cNvSpPr>
@@ -3387,21 +2982,13 @@
               <a:rPr lang="en-GB" dirty="0"/>
               <a:t>Body text, UCL Sans Regular 18pt</a:t>
             </a:r>
-          </a:p>
-        </p:txBody>
-      </p:sp>
-      <p:sp>
-        <p:nvSpPr>
-          <p:cNvPr id="6" name="Picture Placeholder 2" descr="Add a clear, concise statement describing the main purpose of the image">
-            <a:extLst>
-              <a:ext uri="{FF2B5EF4-FFF2-40B4-BE49-F238E27FC236}">
-                <a16:creationId xmlns:a16="http://schemas.microsoft.com/office/drawing/2014/main" id="{82876633-1ADE-997E-991B-B6FA6635A20E}"/>
-              </a:ext>
-              <a:ext uri="{C183D7F6-B498-43B3-948B-1728B52AA6E4}">
-                <adec:decorative xmlns:adec="http://schemas.microsoft.com/office/drawing/2017/decorative" val="0"/>
-              </a:ext>
-            </a:extLst>
-          </p:cNvPr>
+            <a:endParaRPr lang="en-GB" dirty="0"/>
+          </a:p>
+        </p:txBody>
+      </p:sp>
+      <p:sp>
+        <p:nvSpPr>
+          <p:cNvPr id="6" name="Picture Placeholder 2" descr="Add a clear, concise statement describing the main purpose of the image"/>
           <p:cNvSpPr>
             <a:spLocks noGrp="1"/>
           </p:cNvSpPr>
@@ -3473,16 +3060,7 @@
       </p:sp>
       <p:pic>
         <p:nvPicPr>
-          <p:cNvPr id="3" name="Picture 2">
-            <a:extLst>
-              <a:ext uri="{FF2B5EF4-FFF2-40B4-BE49-F238E27FC236}">
-                <a16:creationId xmlns:a16="http://schemas.microsoft.com/office/drawing/2014/main" id="{EAAC2962-03E0-EA22-DBC0-9E4736A7D3C7}"/>
-              </a:ext>
-              <a:ext uri="{C183D7F6-B498-43B3-948B-1728B52AA6E4}">
-                <adec:decorative xmlns:adec="http://schemas.microsoft.com/office/drawing/2017/decorative" val="1"/>
-              </a:ext>
-            </a:extLst>
-          </p:cNvPr>
+          <p:cNvPr id="3" name="Picture 2"/>
           <p:cNvPicPr>
             <a:picLocks noGrp="1" noRot="1" noMove="1" noResize="1" noEditPoints="1" noAdjustHandles="1" noChangeArrowheads="1" noChangeShapeType="1" noCrop="1"/>
           </p:cNvPicPr>
@@ -3505,11 +3083,6 @@
         </p:spPr>
       </p:pic>
     </p:spTree>
-    <p:extLst>
-      <p:ext uri="{BB962C8B-B14F-4D97-AF65-F5344CB8AC3E}">
-        <p14:creationId xmlns:p14="http://schemas.microsoft.com/office/powerpoint/2010/main" val="2340933957"/>
-      </p:ext>
-    </p:extLst>
   </p:cSld>
   <p:clrMapOvr>
     <a:masterClrMapping/>
@@ -3544,13 +3117,7 @@
       </p:grpSpPr>
       <p:sp>
         <p:nvSpPr>
-          <p:cNvPr id="2" name="Title 1">
-            <a:extLst>
-              <a:ext uri="{FF2B5EF4-FFF2-40B4-BE49-F238E27FC236}">
-                <a16:creationId xmlns:a16="http://schemas.microsoft.com/office/drawing/2014/main" id="{8EEA5F1D-3A29-463C-D7AF-7132F92B56CD}"/>
-              </a:ext>
-            </a:extLst>
-          </p:cNvPr>
+          <p:cNvPr id="2" name="Title 1"/>
           <p:cNvSpPr>
             <a:spLocks noGrp="1"/>
           </p:cNvSpPr>
@@ -3602,18 +3169,13 @@
               <a:rPr lang="en-GB" dirty="0"/>
               <a:t> 36pt</a:t>
             </a:r>
-          </a:p>
-        </p:txBody>
-      </p:sp>
-      <p:sp>
-        <p:nvSpPr>
-          <p:cNvPr id="7" name="Picture Placeholder 6" descr="Add a clear, concise statement describing the main purpose of the image">
-            <a:extLst>
-              <a:ext uri="{FF2B5EF4-FFF2-40B4-BE49-F238E27FC236}">
-                <a16:creationId xmlns:a16="http://schemas.microsoft.com/office/drawing/2014/main" id="{0799EAC2-36C5-0886-6CEB-AA012D2BF087}"/>
-              </a:ext>
-            </a:extLst>
-          </p:cNvPr>
+            <a:endParaRPr lang="en-GB" dirty="0"/>
+          </a:p>
+        </p:txBody>
+      </p:sp>
+      <p:sp>
+        <p:nvSpPr>
+          <p:cNvPr id="7" name="Picture Placeholder 6" descr="Add a clear, concise statement describing the main purpose of the image"/>
           <p:cNvSpPr>
             <a:spLocks noGrp="1"/>
           </p:cNvSpPr>
@@ -3640,13 +3202,7 @@
       </p:sp>
       <p:sp>
         <p:nvSpPr>
-          <p:cNvPr id="4" name="Text Placeholder 7">
-            <a:extLst>
-              <a:ext uri="{FF2B5EF4-FFF2-40B4-BE49-F238E27FC236}">
-                <a16:creationId xmlns:a16="http://schemas.microsoft.com/office/drawing/2014/main" id="{C5D11EE6-C4E2-EE93-39A9-79D248FDD196}"/>
-              </a:ext>
-            </a:extLst>
-          </p:cNvPr>
+          <p:cNvPr id="4" name="Text Placeholder 7"/>
           <p:cNvSpPr>
             <a:spLocks noGrp="1"/>
           </p:cNvSpPr>
@@ -3673,27 +3229,27 @@
               <a:spcBef>
                 <a:spcPts val="0"/>
               </a:spcBef>
-              <a:buFont typeface="Wingdings" pitchFamily="2" charset="2"/>
+              <a:buFont typeface="Wingdings" panose="05000000000000000000" pitchFamily="2" charset="2"/>
               <a:buNone/>
               <a:defRPr sz="1800"/>
             </a:lvl1pPr>
             <a:lvl2pPr>
-              <a:buFont typeface="Wingdings" pitchFamily="2" charset="2"/>
+              <a:buFont typeface="Wingdings" panose="05000000000000000000" pitchFamily="2" charset="2"/>
               <a:buChar char="§"/>
               <a:defRPr sz="1800"/>
             </a:lvl2pPr>
             <a:lvl3pPr>
-              <a:buFont typeface="Wingdings" pitchFamily="2" charset="2"/>
+              <a:buFont typeface="Wingdings" panose="05000000000000000000" pitchFamily="2" charset="2"/>
               <a:buChar char="§"/>
               <a:defRPr sz="1800"/>
             </a:lvl3pPr>
             <a:lvl4pPr>
-              <a:buFont typeface="Wingdings" pitchFamily="2" charset="2"/>
+              <a:buFont typeface="Wingdings" panose="05000000000000000000" pitchFamily="2" charset="2"/>
               <a:buChar char="§"/>
               <a:defRPr sz="1800"/>
             </a:lvl4pPr>
             <a:lvl5pPr>
-              <a:buFont typeface="Wingdings" pitchFamily="2" charset="2"/>
+              <a:buFont typeface="Wingdings" panose="05000000000000000000" pitchFamily="2" charset="2"/>
               <a:buChar char="§"/>
               <a:defRPr sz="1800"/>
             </a:lvl5pPr>
@@ -3704,6 +3260,7 @@
               <a:rPr lang="en-GB" dirty="0"/>
               <a:t>Body text, </a:t>
             </a:r>
+            <a:endParaRPr lang="en-GB" dirty="0"/>
           </a:p>
           <a:p>
             <a:pPr lvl="0"/>
@@ -3717,13 +3274,7 @@
       </p:sp>
       <p:sp>
         <p:nvSpPr>
-          <p:cNvPr id="8" name="Picture Placeholder 6" descr="Add a clear, concise statement describing the main purpose of the image">
-            <a:extLst>
-              <a:ext uri="{FF2B5EF4-FFF2-40B4-BE49-F238E27FC236}">
-                <a16:creationId xmlns:a16="http://schemas.microsoft.com/office/drawing/2014/main" id="{AC751661-2014-7CB4-B61A-24EB30E04B80}"/>
-              </a:ext>
-            </a:extLst>
-          </p:cNvPr>
+          <p:cNvPr id="8" name="Picture Placeholder 6" descr="Add a clear, concise statement describing the main purpose of the image"/>
           <p:cNvSpPr>
             <a:spLocks noGrp="1"/>
           </p:cNvSpPr>
@@ -3750,13 +3301,7 @@
       </p:sp>
       <p:sp>
         <p:nvSpPr>
-          <p:cNvPr id="5" name="Text Placeholder 7">
-            <a:extLst>
-              <a:ext uri="{FF2B5EF4-FFF2-40B4-BE49-F238E27FC236}">
-                <a16:creationId xmlns:a16="http://schemas.microsoft.com/office/drawing/2014/main" id="{5584243F-83D4-EC28-5C47-CF5ACA19B5DC}"/>
-              </a:ext>
-            </a:extLst>
-          </p:cNvPr>
+          <p:cNvPr id="5" name="Text Placeholder 7"/>
           <p:cNvSpPr>
             <a:spLocks noGrp="1"/>
           </p:cNvSpPr>
@@ -3783,27 +3328,27 @@
               <a:spcBef>
                 <a:spcPts val="0"/>
               </a:spcBef>
-              <a:buFont typeface="Wingdings" pitchFamily="2" charset="2"/>
+              <a:buFont typeface="Wingdings" panose="05000000000000000000" pitchFamily="2" charset="2"/>
               <a:buNone/>
               <a:defRPr sz="1800"/>
             </a:lvl1pPr>
             <a:lvl2pPr>
-              <a:buFont typeface="Wingdings" pitchFamily="2" charset="2"/>
+              <a:buFont typeface="Wingdings" panose="05000000000000000000" pitchFamily="2" charset="2"/>
               <a:buChar char="§"/>
               <a:defRPr sz="1800"/>
             </a:lvl2pPr>
             <a:lvl3pPr>
-              <a:buFont typeface="Wingdings" pitchFamily="2" charset="2"/>
+              <a:buFont typeface="Wingdings" panose="05000000000000000000" pitchFamily="2" charset="2"/>
               <a:buChar char="§"/>
               <a:defRPr sz="1800"/>
             </a:lvl3pPr>
             <a:lvl4pPr>
-              <a:buFont typeface="Wingdings" pitchFamily="2" charset="2"/>
+              <a:buFont typeface="Wingdings" panose="05000000000000000000" pitchFamily="2" charset="2"/>
               <a:buChar char="§"/>
               <a:defRPr sz="1800"/>
             </a:lvl4pPr>
             <a:lvl5pPr>
-              <a:buFont typeface="Wingdings" pitchFamily="2" charset="2"/>
+              <a:buFont typeface="Wingdings" panose="05000000000000000000" pitchFamily="2" charset="2"/>
               <a:buChar char="§"/>
               <a:defRPr sz="1800"/>
             </a:lvl5pPr>
@@ -3814,6 +3359,7 @@
               <a:rPr lang="en-GB" dirty="0"/>
               <a:t>Body text, </a:t>
             </a:r>
+            <a:endParaRPr lang="en-GB" dirty="0"/>
           </a:p>
           <a:p>
             <a:pPr lvl="0"/>
@@ -3827,16 +3373,7 @@
       </p:sp>
       <p:pic>
         <p:nvPicPr>
-          <p:cNvPr id="6" name="Picture 5">
-            <a:extLst>
-              <a:ext uri="{FF2B5EF4-FFF2-40B4-BE49-F238E27FC236}">
-                <a16:creationId xmlns:a16="http://schemas.microsoft.com/office/drawing/2014/main" id="{87E78866-9053-C0FF-479E-006604389F74}"/>
-              </a:ext>
-              <a:ext uri="{C183D7F6-B498-43B3-948B-1728B52AA6E4}">
-                <adec:decorative xmlns:adec="http://schemas.microsoft.com/office/drawing/2017/decorative" val="1"/>
-              </a:ext>
-            </a:extLst>
-          </p:cNvPr>
+          <p:cNvPr id="6" name="Picture 5"/>
           <p:cNvPicPr>
             <a:picLocks noGrp="1" noRot="1" noChangeAspect="1" noMove="1" noResize="1" noEditPoints="1" noAdjustHandles="1" noChangeArrowheads="1" noChangeShapeType="1" noCrop="1"/>
           </p:cNvPicPr>
@@ -3859,11 +3396,6 @@
         </p:spPr>
       </p:pic>
     </p:spTree>
-    <p:extLst>
-      <p:ext uri="{BB962C8B-B14F-4D97-AF65-F5344CB8AC3E}">
-        <p14:creationId xmlns:p14="http://schemas.microsoft.com/office/powerpoint/2010/main" val="2908856241"/>
-      </p:ext>
-    </p:extLst>
   </p:cSld>
   <p:clrMapOvr>
     <a:masterClrMapping/>
@@ -3898,13 +3430,7 @@
       </p:grpSpPr>
       <p:sp>
         <p:nvSpPr>
-          <p:cNvPr id="2" name="Title 1">
-            <a:extLst>
-              <a:ext uri="{FF2B5EF4-FFF2-40B4-BE49-F238E27FC236}">
-                <a16:creationId xmlns:a16="http://schemas.microsoft.com/office/drawing/2014/main" id="{8EEA5F1D-3A29-463C-D7AF-7132F92B56CD}"/>
-              </a:ext>
-            </a:extLst>
-          </p:cNvPr>
+          <p:cNvPr id="2" name="Title 1"/>
           <p:cNvSpPr>
             <a:spLocks noGrp="1"/>
           </p:cNvSpPr>
@@ -3956,18 +3482,13 @@
               <a:rPr lang="en-GB" dirty="0"/>
               <a:t> 36pt</a:t>
             </a:r>
-          </a:p>
-        </p:txBody>
-      </p:sp>
-      <p:sp>
-        <p:nvSpPr>
-          <p:cNvPr id="7" name="Picture Placeholder 6" descr="Add a clear, concise statement describing the main purpose of the image">
-            <a:extLst>
-              <a:ext uri="{FF2B5EF4-FFF2-40B4-BE49-F238E27FC236}">
-                <a16:creationId xmlns:a16="http://schemas.microsoft.com/office/drawing/2014/main" id="{0799EAC2-36C5-0886-6CEB-AA012D2BF087}"/>
-              </a:ext>
-            </a:extLst>
-          </p:cNvPr>
+            <a:endParaRPr lang="en-GB" dirty="0"/>
+          </a:p>
+        </p:txBody>
+      </p:sp>
+      <p:sp>
+        <p:nvSpPr>
+          <p:cNvPr id="7" name="Picture Placeholder 6" descr="Add a clear, concise statement describing the main purpose of the image"/>
           <p:cNvSpPr>
             <a:spLocks noGrp="1"/>
           </p:cNvSpPr>
@@ -3998,13 +3519,7 @@
       </p:sp>
       <p:sp>
         <p:nvSpPr>
-          <p:cNvPr id="4" name="Text Placeholder 7">
-            <a:extLst>
-              <a:ext uri="{FF2B5EF4-FFF2-40B4-BE49-F238E27FC236}">
-                <a16:creationId xmlns:a16="http://schemas.microsoft.com/office/drawing/2014/main" id="{C5D11EE6-C4E2-EE93-39A9-79D248FDD196}"/>
-              </a:ext>
-            </a:extLst>
-          </p:cNvPr>
+          <p:cNvPr id="4" name="Text Placeholder 7"/>
           <p:cNvSpPr>
             <a:spLocks noGrp="1"/>
           </p:cNvSpPr>
@@ -4031,27 +3546,27 @@
               <a:spcBef>
                 <a:spcPts val="0"/>
               </a:spcBef>
-              <a:buFont typeface="Wingdings" pitchFamily="2" charset="2"/>
+              <a:buFont typeface="Wingdings" panose="05000000000000000000" pitchFamily="2" charset="2"/>
               <a:buNone/>
               <a:defRPr sz="1800"/>
             </a:lvl1pPr>
             <a:lvl2pPr>
-              <a:buFont typeface="Wingdings" pitchFamily="2" charset="2"/>
+              <a:buFont typeface="Wingdings" panose="05000000000000000000" pitchFamily="2" charset="2"/>
               <a:buChar char="§"/>
               <a:defRPr sz="1800"/>
             </a:lvl2pPr>
             <a:lvl3pPr>
-              <a:buFont typeface="Wingdings" pitchFamily="2" charset="2"/>
+              <a:buFont typeface="Wingdings" panose="05000000000000000000" pitchFamily="2" charset="2"/>
               <a:buChar char="§"/>
               <a:defRPr sz="1800"/>
             </a:lvl3pPr>
             <a:lvl4pPr>
-              <a:buFont typeface="Wingdings" pitchFamily="2" charset="2"/>
+              <a:buFont typeface="Wingdings" panose="05000000000000000000" pitchFamily="2" charset="2"/>
               <a:buChar char="§"/>
               <a:defRPr sz="1800"/>
             </a:lvl4pPr>
             <a:lvl5pPr>
-              <a:buFont typeface="Wingdings" pitchFamily="2" charset="2"/>
+              <a:buFont typeface="Wingdings" panose="05000000000000000000" pitchFamily="2" charset="2"/>
               <a:buChar char="§"/>
               <a:defRPr sz="1800"/>
             </a:lvl5pPr>
@@ -4062,6 +3577,7 @@
               <a:rPr lang="en-GB" dirty="0"/>
               <a:t>Body text, </a:t>
             </a:r>
+            <a:endParaRPr lang="en-GB" dirty="0"/>
           </a:p>
           <a:p>
             <a:pPr lvl="0"/>
@@ -4075,16 +3591,7 @@
       </p:sp>
       <p:pic>
         <p:nvPicPr>
-          <p:cNvPr id="5" name="Picture 4">
-            <a:extLst>
-              <a:ext uri="{FF2B5EF4-FFF2-40B4-BE49-F238E27FC236}">
-                <a16:creationId xmlns:a16="http://schemas.microsoft.com/office/drawing/2014/main" id="{0683C0A7-72DE-AAF6-9C2F-83EEF344D925}"/>
-              </a:ext>
-              <a:ext uri="{C183D7F6-B498-43B3-948B-1728B52AA6E4}">
-                <adec:decorative xmlns:adec="http://schemas.microsoft.com/office/drawing/2017/decorative" val="1"/>
-              </a:ext>
-            </a:extLst>
-          </p:cNvPr>
+          <p:cNvPr id="5" name="Picture 4"/>
           <p:cNvPicPr>
             <a:picLocks noGrp="1" noRot="1" noChangeAspect="1" noMove="1" noResize="1" noEditPoints="1" noAdjustHandles="1" noChangeArrowheads="1" noChangeShapeType="1" noCrop="1"/>
           </p:cNvPicPr>
@@ -4107,11 +3614,6 @@
         </p:spPr>
       </p:pic>
     </p:spTree>
-    <p:extLst>
-      <p:ext uri="{BB962C8B-B14F-4D97-AF65-F5344CB8AC3E}">
-        <p14:creationId xmlns:p14="http://schemas.microsoft.com/office/powerpoint/2010/main" val="1735878255"/>
-      </p:ext>
-    </p:extLst>
   </p:cSld>
   <p:clrMapOvr>
     <a:masterClrMapping/>
@@ -4138,13 +3640,7 @@
       </p:grpSpPr>
       <p:sp>
         <p:nvSpPr>
-          <p:cNvPr id="2" name="Picture Placeholder 6" descr="Add a clear, concise statement describing the main purpose of the image">
-            <a:extLst>
-              <a:ext uri="{FF2B5EF4-FFF2-40B4-BE49-F238E27FC236}">
-                <a16:creationId xmlns:a16="http://schemas.microsoft.com/office/drawing/2014/main" id="{ECFBA17C-2B5D-255B-BB8F-D30D74D054C3}"/>
-              </a:ext>
-            </a:extLst>
-          </p:cNvPr>
+          <p:cNvPr id="2" name="Picture Placeholder 6" descr="Add a clear, concise statement describing the main purpose of the image"/>
           <p:cNvSpPr>
             <a:spLocks noGrp="1" noRot="1" noMove="1" noResize="1" noEditPoints="1" noAdjustHandles="1" noChangeArrowheads="1" noChangeShapeType="1"/>
           </p:cNvSpPr>
@@ -4171,16 +3667,7 @@
       </p:sp>
       <p:pic>
         <p:nvPicPr>
-          <p:cNvPr id="5" name="Picture 4">
-            <a:extLst>
-              <a:ext uri="{FF2B5EF4-FFF2-40B4-BE49-F238E27FC236}">
-                <a16:creationId xmlns:a16="http://schemas.microsoft.com/office/drawing/2014/main" id="{644561CB-C28E-2B9A-0BF9-49CA398334E3}"/>
-              </a:ext>
-              <a:ext uri="{C183D7F6-B498-43B3-948B-1728B52AA6E4}">
-                <adec:decorative xmlns:adec="http://schemas.microsoft.com/office/drawing/2017/decorative" val="1"/>
-              </a:ext>
-            </a:extLst>
-          </p:cNvPr>
+          <p:cNvPr id="5" name="Picture 4"/>
           <p:cNvPicPr>
             <a:picLocks noGrp="1" noRot="1" noChangeAspect="1" noMove="1" noResize="1" noEditPoints="1" noAdjustHandles="1" noChangeArrowheads="1" noChangeShapeType="1" noCrop="1"/>
           </p:cNvPicPr>
@@ -4203,11 +3690,6 @@
         </p:spPr>
       </p:pic>
     </p:spTree>
-    <p:extLst>
-      <p:ext uri="{BB962C8B-B14F-4D97-AF65-F5344CB8AC3E}">
-        <p14:creationId xmlns:p14="http://schemas.microsoft.com/office/powerpoint/2010/main" val="3621249288"/>
-      </p:ext>
-    </p:extLst>
   </p:cSld>
   <p:clrMapOvr>
     <a:masterClrMapping/>
@@ -4242,13 +3724,7 @@
       </p:grpSpPr>
       <p:sp>
         <p:nvSpPr>
-          <p:cNvPr id="26" name="Text Placeholder 25">
-            <a:extLst>
-              <a:ext uri="{FF2B5EF4-FFF2-40B4-BE49-F238E27FC236}">
-                <a16:creationId xmlns:a16="http://schemas.microsoft.com/office/drawing/2014/main" id="{C745EF00-09E6-10CA-B1BF-5A7B7EC8063C}"/>
-              </a:ext>
-            </a:extLst>
-          </p:cNvPr>
+          <p:cNvPr id="26" name="Text Placeholder 25"/>
           <p:cNvSpPr>
             <a:spLocks noGrp="1" noRot="1" noMove="1" noResize="1" noEditPoints="1" noAdjustHandles="1" noChangeArrowheads="1" noChangeShapeType="1"/>
           </p:cNvSpPr>
@@ -4306,6 +3782,7 @@
               <a:rPr lang="en-GB" dirty="0"/>
               <a:t>Headline </a:t>
             </a:r>
+            <a:endParaRPr lang="en-GB" dirty="0"/>
           </a:p>
           <a:p>
             <a:pPr lvl="0"/>
@@ -4321,18 +3798,13 @@
               <a:rPr lang="en-GB" dirty="0"/>
               <a:t> 36pt</a:t>
             </a:r>
-          </a:p>
-        </p:txBody>
-      </p:sp>
-      <p:sp>
-        <p:nvSpPr>
-          <p:cNvPr id="7" name="Picture Placeholder 6" descr="Add a clear, concise statement describing the main purpose of the image">
-            <a:extLst>
-              <a:ext uri="{FF2B5EF4-FFF2-40B4-BE49-F238E27FC236}">
-                <a16:creationId xmlns:a16="http://schemas.microsoft.com/office/drawing/2014/main" id="{0799EAC2-36C5-0886-6CEB-AA012D2BF087}"/>
-              </a:ext>
-            </a:extLst>
-          </p:cNvPr>
+            <a:endParaRPr lang="en-GB" dirty="0"/>
+          </a:p>
+        </p:txBody>
+      </p:sp>
+      <p:sp>
+        <p:nvSpPr>
+          <p:cNvPr id="7" name="Picture Placeholder 6" descr="Add a clear, concise statement describing the main purpose of the image"/>
           <p:cNvSpPr>
             <a:spLocks noGrp="1"/>
           </p:cNvSpPr>
@@ -4363,13 +3835,7 @@
       </p:sp>
       <p:sp>
         <p:nvSpPr>
-          <p:cNvPr id="2" name="Text Placeholder 3">
-            <a:extLst>
-              <a:ext uri="{FF2B5EF4-FFF2-40B4-BE49-F238E27FC236}">
-                <a16:creationId xmlns:a16="http://schemas.microsoft.com/office/drawing/2014/main" id="{D8E98CA0-EAB4-835F-548A-B6C634C3B1F4}"/>
-              </a:ext>
-            </a:extLst>
-          </p:cNvPr>
+          <p:cNvPr id="2" name="Text Placeholder 3"/>
           <p:cNvSpPr>
             <a:spLocks noGrp="1"/>
           </p:cNvSpPr>
@@ -4438,6 +3904,7 @@
               <a:rPr lang="en-GB" dirty="0"/>
               <a:t>Body text, </a:t>
             </a:r>
+            <a:endParaRPr lang="en-GB" dirty="0"/>
           </a:p>
           <a:p>
             <a:pPr lvl="0"/>
@@ -4445,18 +3912,13 @@
               <a:rPr lang="en-GB" dirty="0"/>
               <a:t>UCL Sans 18pt</a:t>
             </a:r>
-          </a:p>
-        </p:txBody>
-      </p:sp>
-      <p:sp>
-        <p:nvSpPr>
-          <p:cNvPr id="28" name="Picture Placeholder 6" descr="Add a clear, concise statement describing the main purpose of the image">
-            <a:extLst>
-              <a:ext uri="{FF2B5EF4-FFF2-40B4-BE49-F238E27FC236}">
-                <a16:creationId xmlns:a16="http://schemas.microsoft.com/office/drawing/2014/main" id="{7A9B95BC-4D66-3908-97EF-FB4460F52B22}"/>
-              </a:ext>
-            </a:extLst>
-          </p:cNvPr>
+            <a:endParaRPr lang="en-GB" dirty="0"/>
+          </a:p>
+        </p:txBody>
+      </p:sp>
+      <p:sp>
+        <p:nvSpPr>
+          <p:cNvPr id="28" name="Picture Placeholder 6" descr="Add a clear, concise statement describing the main purpose of the image"/>
           <p:cNvSpPr>
             <a:spLocks noGrp="1"/>
           </p:cNvSpPr>
@@ -4487,13 +3949,7 @@
       </p:sp>
       <p:sp>
         <p:nvSpPr>
-          <p:cNvPr id="4" name="Text Placeholder 3">
-            <a:extLst>
-              <a:ext uri="{FF2B5EF4-FFF2-40B4-BE49-F238E27FC236}">
-                <a16:creationId xmlns:a16="http://schemas.microsoft.com/office/drawing/2014/main" id="{991755B3-2EC0-736A-45CE-D2F11359FCF2}"/>
-              </a:ext>
-            </a:extLst>
-          </p:cNvPr>
+          <p:cNvPr id="4" name="Text Placeholder 3"/>
           <p:cNvSpPr>
             <a:spLocks noGrp="1"/>
           </p:cNvSpPr>
@@ -4562,6 +4018,7 @@
               <a:rPr lang="en-GB" dirty="0"/>
               <a:t>Body text, </a:t>
             </a:r>
+            <a:endParaRPr lang="en-GB" dirty="0"/>
           </a:p>
           <a:p>
             <a:pPr lvl="0"/>
@@ -4569,18 +4026,13 @@
               <a:rPr lang="en-GB" dirty="0"/>
               <a:t>UCL Sans 18pt</a:t>
             </a:r>
-          </a:p>
-        </p:txBody>
-      </p:sp>
-      <p:sp>
-        <p:nvSpPr>
-          <p:cNvPr id="35" name="Picture Placeholder 6" descr="Add a clear, concise statement describing the main purpose of the image">
-            <a:extLst>
-              <a:ext uri="{FF2B5EF4-FFF2-40B4-BE49-F238E27FC236}">
-                <a16:creationId xmlns:a16="http://schemas.microsoft.com/office/drawing/2014/main" id="{C85375D3-F603-A1F9-0769-6A655B6E6692}"/>
-              </a:ext>
-            </a:extLst>
-          </p:cNvPr>
+            <a:endParaRPr lang="en-GB" dirty="0"/>
+          </a:p>
+        </p:txBody>
+      </p:sp>
+      <p:sp>
+        <p:nvSpPr>
+          <p:cNvPr id="35" name="Picture Placeholder 6" descr="Add a clear, concise statement describing the main purpose of the image"/>
           <p:cNvSpPr>
             <a:spLocks noGrp="1"/>
           </p:cNvSpPr>
@@ -4611,13 +4063,7 @@
       </p:sp>
       <p:sp>
         <p:nvSpPr>
-          <p:cNvPr id="5" name="Text Placeholder 3">
-            <a:extLst>
-              <a:ext uri="{FF2B5EF4-FFF2-40B4-BE49-F238E27FC236}">
-                <a16:creationId xmlns:a16="http://schemas.microsoft.com/office/drawing/2014/main" id="{193885E6-59BA-3D4B-A49F-F83F0A580D69}"/>
-              </a:ext>
-            </a:extLst>
-          </p:cNvPr>
+          <p:cNvPr id="5" name="Text Placeholder 3"/>
           <p:cNvSpPr>
             <a:spLocks noGrp="1"/>
           </p:cNvSpPr>
@@ -4686,6 +4132,7 @@
               <a:rPr lang="en-GB" dirty="0"/>
               <a:t>Body text, </a:t>
             </a:r>
+            <a:endParaRPr lang="en-GB" dirty="0"/>
           </a:p>
           <a:p>
             <a:pPr lvl="0"/>
@@ -4693,18 +4140,13 @@
               <a:rPr lang="en-GB" dirty="0"/>
               <a:t>UCL Sans 18pt</a:t>
             </a:r>
-          </a:p>
-        </p:txBody>
-      </p:sp>
-      <p:sp>
-        <p:nvSpPr>
-          <p:cNvPr id="36" name="Picture Placeholder 6" descr="Add a clear, concise statement describing the main purpose of the image">
-            <a:extLst>
-              <a:ext uri="{FF2B5EF4-FFF2-40B4-BE49-F238E27FC236}">
-                <a16:creationId xmlns:a16="http://schemas.microsoft.com/office/drawing/2014/main" id="{5B98E73B-EC26-695B-64A0-FE5244D0C7D7}"/>
-              </a:ext>
-            </a:extLst>
-          </p:cNvPr>
+            <a:endParaRPr lang="en-GB" dirty="0"/>
+          </a:p>
+        </p:txBody>
+      </p:sp>
+      <p:sp>
+        <p:nvSpPr>
+          <p:cNvPr id="36" name="Picture Placeholder 6" descr="Add a clear, concise statement describing the main purpose of the image"/>
           <p:cNvSpPr>
             <a:spLocks noGrp="1"/>
           </p:cNvSpPr>
@@ -4735,13 +4177,7 @@
       </p:sp>
       <p:sp>
         <p:nvSpPr>
-          <p:cNvPr id="6" name="Text Placeholder 3">
-            <a:extLst>
-              <a:ext uri="{FF2B5EF4-FFF2-40B4-BE49-F238E27FC236}">
-                <a16:creationId xmlns:a16="http://schemas.microsoft.com/office/drawing/2014/main" id="{308DBC67-B009-AACF-4F14-CEE565C4E072}"/>
-              </a:ext>
-            </a:extLst>
-          </p:cNvPr>
+          <p:cNvPr id="6" name="Text Placeholder 3"/>
           <p:cNvSpPr>
             <a:spLocks noGrp="1"/>
           </p:cNvSpPr>
@@ -4810,6 +4246,7 @@
               <a:rPr lang="en-GB" dirty="0"/>
               <a:t>Body text, </a:t>
             </a:r>
+            <a:endParaRPr lang="en-GB" dirty="0"/>
           </a:p>
           <a:p>
             <a:pPr lvl="0"/>
@@ -4817,21 +4254,13 @@
               <a:rPr lang="en-GB" dirty="0"/>
               <a:t>UCL Sans 18pt</a:t>
             </a:r>
+            <a:endParaRPr lang="en-GB" dirty="0"/>
           </a:p>
         </p:txBody>
       </p:sp>
       <p:pic>
         <p:nvPicPr>
-          <p:cNvPr id="3" name="Picture 2">
-            <a:extLst>
-              <a:ext uri="{FF2B5EF4-FFF2-40B4-BE49-F238E27FC236}">
-                <a16:creationId xmlns:a16="http://schemas.microsoft.com/office/drawing/2014/main" id="{D5C298C2-508C-1619-2F51-CD8DCF5CE8D0}"/>
-              </a:ext>
-              <a:ext uri="{C183D7F6-B498-43B3-948B-1728B52AA6E4}">
-                <adec:decorative xmlns:adec="http://schemas.microsoft.com/office/drawing/2017/decorative" val="1"/>
-              </a:ext>
-            </a:extLst>
-          </p:cNvPr>
+          <p:cNvPr id="3" name="Picture 2"/>
           <p:cNvPicPr>
             <a:picLocks noGrp="1" noRot="1" noChangeAspect="1" noMove="1" noResize="1" noEditPoints="1" noAdjustHandles="1" noChangeArrowheads="1" noChangeShapeType="1" noCrop="1"/>
           </p:cNvPicPr>
@@ -4854,11 +4283,6 @@
         </p:spPr>
       </p:pic>
     </p:spTree>
-    <p:extLst>
-      <p:ext uri="{BB962C8B-B14F-4D97-AF65-F5344CB8AC3E}">
-        <p14:creationId xmlns:p14="http://schemas.microsoft.com/office/powerpoint/2010/main" val="3567379473"/>
-      </p:ext>
-    </p:extLst>
   </p:cSld>
   <p:clrMapOvr>
     <a:masterClrMapping/>
@@ -4885,16 +4309,7 @@
       </p:grpSpPr>
       <p:sp>
         <p:nvSpPr>
-          <p:cNvPr id="11" name="Picture Placeholder 2">
-            <a:extLst>
-              <a:ext uri="{FF2B5EF4-FFF2-40B4-BE49-F238E27FC236}">
-                <a16:creationId xmlns:a16="http://schemas.microsoft.com/office/drawing/2014/main" id="{FF246E73-D036-D034-B53B-3390FBBB5D02}"/>
-              </a:ext>
-              <a:ext uri="{C183D7F6-B498-43B3-948B-1728B52AA6E4}">
-                <adec:decorative xmlns:adec="http://schemas.microsoft.com/office/drawing/2017/decorative" val="1"/>
-              </a:ext>
-            </a:extLst>
-          </p:cNvPr>
+          <p:cNvPr id="11" name="Picture Placeholder 2"/>
           <p:cNvSpPr>
             <a:spLocks noGrp="1" noRot="1" noMove="1" noResize="1" noEditPoints="1" noAdjustHandles="1" noChangeArrowheads="1" noChangeShapeType="1"/>
           </p:cNvSpPr>
@@ -4957,18 +4372,13 @@
               <a:rPr lang="en-US" dirty="0"/>
               <a:t>Insert and image</a:t>
             </a:r>
+            <a:endParaRPr lang="en-US" dirty="0"/>
           </a:p>
         </p:txBody>
       </p:sp>
       <p:pic>
         <p:nvPicPr>
-          <p:cNvPr id="2" name="Picture 1" descr="UCL logo, University College London">
-            <a:extLst>
-              <a:ext uri="{FF2B5EF4-FFF2-40B4-BE49-F238E27FC236}">
-                <a16:creationId xmlns:a16="http://schemas.microsoft.com/office/drawing/2014/main" id="{3EE928D3-B605-30AB-BA7D-FB2B1FC48EF2}"/>
-              </a:ext>
-            </a:extLst>
-          </p:cNvPr>
+          <p:cNvPr id="2" name="Picture 1" descr="UCL logo, University College London"/>
           <p:cNvPicPr>
             <a:picLocks noChangeAspect="1"/>
           </p:cNvPicPr>
@@ -4992,13 +4402,7 @@
       </p:pic>
       <p:sp>
         <p:nvSpPr>
-          <p:cNvPr id="3" name="Text Placeholder 2">
-            <a:extLst>
-              <a:ext uri="{FF2B5EF4-FFF2-40B4-BE49-F238E27FC236}">
-                <a16:creationId xmlns:a16="http://schemas.microsoft.com/office/drawing/2014/main" id="{78B86FC5-1258-6FBF-23A7-19183EBBA39E}"/>
-              </a:ext>
-            </a:extLst>
-          </p:cNvPr>
+          <p:cNvPr id="3" name="Text Placeholder 2"/>
           <p:cNvSpPr>
             <a:spLocks noGrp="1" noRot="1" noMove="1" noResize="1" noEditPoints="1" noAdjustHandles="1" noChangeArrowheads="1" noChangeShapeType="1"/>
           </p:cNvSpPr>
@@ -5077,13 +4481,7 @@
       </p:sp>
       <p:sp>
         <p:nvSpPr>
-          <p:cNvPr id="7" name="Text Placeholder 2">
-            <a:extLst>
-              <a:ext uri="{FF2B5EF4-FFF2-40B4-BE49-F238E27FC236}">
-                <a16:creationId xmlns:a16="http://schemas.microsoft.com/office/drawing/2014/main" id="{75E8DED6-3359-C8D7-EDF1-14AE135495B0}"/>
-              </a:ext>
-            </a:extLst>
-          </p:cNvPr>
+          <p:cNvPr id="7" name="Text Placeholder 2"/>
           <p:cNvSpPr>
             <a:spLocks noGrp="1"/>
           </p:cNvSpPr>
@@ -5205,6 +4603,7 @@
               <a:rPr lang="en-GB" dirty="0"/>
               <a:t>Names of Presenters, </a:t>
             </a:r>
+            <a:endParaRPr lang="en-GB" dirty="0"/>
           </a:p>
           <a:p>
             <a:pPr lvl="0"/>
@@ -5212,18 +4611,13 @@
               <a:rPr lang="en-GB" dirty="0"/>
               <a:t>UCL Sans regular 24pt</a:t>
             </a:r>
-          </a:p>
-        </p:txBody>
-      </p:sp>
-      <p:sp>
-        <p:nvSpPr>
-          <p:cNvPr id="5" name="Text Placeholder 2">
-            <a:extLst>
-              <a:ext uri="{FF2B5EF4-FFF2-40B4-BE49-F238E27FC236}">
-                <a16:creationId xmlns:a16="http://schemas.microsoft.com/office/drawing/2014/main" id="{31780D4D-96BC-3F19-6FFC-D0D6B82AF61A}"/>
-              </a:ext>
-            </a:extLst>
-          </p:cNvPr>
+            <a:endParaRPr lang="en-GB" dirty="0"/>
+          </a:p>
+        </p:txBody>
+      </p:sp>
+      <p:sp>
+        <p:nvSpPr>
+          <p:cNvPr id="5" name="Text Placeholder 2"/>
           <p:cNvSpPr>
             <a:spLocks noGrp="1"/>
           </p:cNvSpPr>
@@ -5345,21 +4739,13 @@
               <a:rPr lang="en-GB" dirty="0"/>
               <a:t>Date, UCL Sans regular 18px</a:t>
             </a:r>
-          </a:p>
-        </p:txBody>
-      </p:sp>
-      <p:sp>
-        <p:nvSpPr>
-          <p:cNvPr id="4" name="Rectangle 3">
-            <a:extLst>
-              <a:ext uri="{FF2B5EF4-FFF2-40B4-BE49-F238E27FC236}">
-                <a16:creationId xmlns:a16="http://schemas.microsoft.com/office/drawing/2014/main" id="{7903D562-9BC1-5B2A-B39F-74DAD6DF10C0}"/>
-              </a:ext>
-              <a:ext uri="{C183D7F6-B498-43B3-948B-1728B52AA6E4}">
-                <adec:decorative xmlns:adec="http://schemas.microsoft.com/office/drawing/2017/decorative" val="1"/>
-              </a:ext>
-            </a:extLst>
-          </p:cNvPr>
+            <a:endParaRPr lang="en-GB" dirty="0"/>
+          </a:p>
+        </p:txBody>
+      </p:sp>
+      <p:sp>
+        <p:nvSpPr>
+          <p:cNvPr id="4" name="Rectangle 3"/>
           <p:cNvSpPr>
             <a:spLocks noGrp="1" noRot="1" noMove="1" noResize="1" noEditPoints="1" noAdjustHandles="1" noChangeArrowheads="1" noChangeShapeType="1"/>
           </p:cNvSpPr>
@@ -5407,16 +4793,7 @@
       </p:sp>
       <p:sp>
         <p:nvSpPr>
-          <p:cNvPr id="14" name="Rectangle 13">
-            <a:extLst>
-              <a:ext uri="{FF2B5EF4-FFF2-40B4-BE49-F238E27FC236}">
-                <a16:creationId xmlns:a16="http://schemas.microsoft.com/office/drawing/2014/main" id="{83D0518E-CF11-EBA3-9663-A8A79A187D45}"/>
-              </a:ext>
-              <a:ext uri="{C183D7F6-B498-43B3-948B-1728B52AA6E4}">
-                <adec:decorative xmlns:adec="http://schemas.microsoft.com/office/drawing/2017/decorative" val="1"/>
-              </a:ext>
-            </a:extLst>
-          </p:cNvPr>
+          <p:cNvPr id="14" name="Rectangle 13"/>
           <p:cNvSpPr>
             <a:spLocks noGrp="1" noRot="1" noMove="1" noResize="1" noEditPoints="1" noAdjustHandles="1" noChangeArrowheads="1" noChangeShapeType="1"/>
           </p:cNvSpPr>
@@ -5463,11 +4840,6 @@
         </p:txBody>
       </p:sp>
     </p:spTree>
-    <p:extLst>
-      <p:ext uri="{BB962C8B-B14F-4D97-AF65-F5344CB8AC3E}">
-        <p14:creationId xmlns:p14="http://schemas.microsoft.com/office/powerpoint/2010/main" val="812307782"/>
-      </p:ext>
-    </p:extLst>
   </p:cSld>
   <p:clrMapOvr>
     <a:masterClrMapping/>
@@ -5502,13 +4874,7 @@
       </p:grpSpPr>
       <p:sp>
         <p:nvSpPr>
-          <p:cNvPr id="2" name="Title 1">
-            <a:extLst>
-              <a:ext uri="{FF2B5EF4-FFF2-40B4-BE49-F238E27FC236}">
-                <a16:creationId xmlns:a16="http://schemas.microsoft.com/office/drawing/2014/main" id="{8EEA5F1D-3A29-463C-D7AF-7132F92B56CD}"/>
-              </a:ext>
-            </a:extLst>
-          </p:cNvPr>
+          <p:cNvPr id="2" name="Title 1"/>
           <p:cNvSpPr>
             <a:spLocks noGrp="1"/>
           </p:cNvSpPr>
@@ -5560,18 +4926,13 @@
               <a:rPr lang="en-GB" dirty="0"/>
               <a:t> 36pt</a:t>
             </a:r>
-          </a:p>
-        </p:txBody>
-      </p:sp>
-      <p:sp>
-        <p:nvSpPr>
-          <p:cNvPr id="4" name="Text Placeholder 7">
-            <a:extLst>
-              <a:ext uri="{FF2B5EF4-FFF2-40B4-BE49-F238E27FC236}">
-                <a16:creationId xmlns:a16="http://schemas.microsoft.com/office/drawing/2014/main" id="{C5D11EE6-C4E2-EE93-39A9-79D248FDD196}"/>
-              </a:ext>
-            </a:extLst>
-          </p:cNvPr>
+            <a:endParaRPr lang="en-GB" dirty="0"/>
+          </a:p>
+        </p:txBody>
+      </p:sp>
+      <p:sp>
+        <p:nvSpPr>
+          <p:cNvPr id="4" name="Text Placeholder 7"/>
           <p:cNvSpPr>
             <a:spLocks noGrp="1"/>
           </p:cNvSpPr>
@@ -5598,7 +4959,7 @@
               <a:spcBef>
                 <a:spcPts val="0"/>
               </a:spcBef>
-              <a:buFont typeface="Wingdings" pitchFamily="2" charset="2"/>
+              <a:buFont typeface="Wingdings" panose="05000000000000000000" pitchFamily="2" charset="2"/>
               <a:buNone/>
               <a:defRPr sz="1800">
                 <a:solidFill>
@@ -5607,22 +4968,22 @@
               </a:defRPr>
             </a:lvl1pPr>
             <a:lvl2pPr>
-              <a:buFont typeface="Wingdings" pitchFamily="2" charset="2"/>
+              <a:buFont typeface="Wingdings" panose="05000000000000000000" pitchFamily="2" charset="2"/>
               <a:buChar char="§"/>
               <a:defRPr sz="1800"/>
             </a:lvl2pPr>
             <a:lvl3pPr>
-              <a:buFont typeface="Wingdings" pitchFamily="2" charset="2"/>
+              <a:buFont typeface="Wingdings" panose="05000000000000000000" pitchFamily="2" charset="2"/>
               <a:buChar char="§"/>
               <a:defRPr sz="1800"/>
             </a:lvl3pPr>
             <a:lvl4pPr>
-              <a:buFont typeface="Wingdings" pitchFamily="2" charset="2"/>
+              <a:buFont typeface="Wingdings" panose="05000000000000000000" pitchFamily="2" charset="2"/>
               <a:buChar char="§"/>
               <a:defRPr sz="1800"/>
             </a:lvl4pPr>
             <a:lvl5pPr>
-              <a:buFont typeface="Wingdings" pitchFamily="2" charset="2"/>
+              <a:buFont typeface="Wingdings" panose="05000000000000000000" pitchFamily="2" charset="2"/>
               <a:buChar char="§"/>
               <a:defRPr sz="1800"/>
             </a:lvl5pPr>
@@ -5633,6 +4994,7 @@
               <a:rPr lang="en-GB" dirty="0"/>
               <a:t>Body text, </a:t>
             </a:r>
+            <a:endParaRPr lang="en-GB" dirty="0"/>
           </a:p>
           <a:p>
             <a:pPr lvl="0"/>
@@ -5646,16 +5008,7 @@
       </p:sp>
       <p:sp>
         <p:nvSpPr>
-          <p:cNvPr id="5" name="Rectangle 4">
-            <a:extLst>
-              <a:ext uri="{FF2B5EF4-FFF2-40B4-BE49-F238E27FC236}">
-                <a16:creationId xmlns:a16="http://schemas.microsoft.com/office/drawing/2014/main" id="{7DFDE716-F6EE-9CD2-4183-C3966BF52E8F}"/>
-              </a:ext>
-              <a:ext uri="{C183D7F6-B498-43B3-948B-1728B52AA6E4}">
-                <adec:decorative xmlns:adec="http://schemas.microsoft.com/office/drawing/2017/decorative" val="1"/>
-              </a:ext>
-            </a:extLst>
-          </p:cNvPr>
+          <p:cNvPr id="5" name="Rectangle 4"/>
           <p:cNvSpPr>
             <a:spLocks noGrp="1" noRot="1" noMove="1" noResize="1" noEditPoints="1" noAdjustHandles="1" noChangeArrowheads="1" noChangeShapeType="1"/>
           </p:cNvSpPr>
@@ -5703,16 +5056,7 @@
       </p:sp>
       <p:sp>
         <p:nvSpPr>
-          <p:cNvPr id="6" name="Rectangle 5">
-            <a:extLst>
-              <a:ext uri="{FF2B5EF4-FFF2-40B4-BE49-F238E27FC236}">
-                <a16:creationId xmlns:a16="http://schemas.microsoft.com/office/drawing/2014/main" id="{1C99A0D4-0838-5973-6802-0E9A93433AF4}"/>
-              </a:ext>
-              <a:ext uri="{C183D7F6-B498-43B3-948B-1728B52AA6E4}">
-                <adec:decorative xmlns:adec="http://schemas.microsoft.com/office/drawing/2017/decorative" val="1"/>
-              </a:ext>
-            </a:extLst>
-          </p:cNvPr>
+          <p:cNvPr id="6" name="Rectangle 5"/>
           <p:cNvSpPr>
             <a:spLocks noGrp="1" noRot="1" noMove="1" noResize="1" noEditPoints="1" noAdjustHandles="1" noChangeArrowheads="1" noChangeShapeType="1"/>
           </p:cNvSpPr>
@@ -5760,16 +5104,7 @@
       </p:sp>
       <p:pic>
         <p:nvPicPr>
-          <p:cNvPr id="11" name="Picture 10">
-            <a:extLst>
-              <a:ext uri="{FF2B5EF4-FFF2-40B4-BE49-F238E27FC236}">
-                <a16:creationId xmlns:a16="http://schemas.microsoft.com/office/drawing/2014/main" id="{D64D565B-2E0B-B3BA-562F-3D6EFC90B27B}"/>
-              </a:ext>
-              <a:ext uri="{C183D7F6-B498-43B3-948B-1728B52AA6E4}">
-                <adec:decorative xmlns:adec="http://schemas.microsoft.com/office/drawing/2017/decorative" val="1"/>
-              </a:ext>
-            </a:extLst>
-          </p:cNvPr>
+          <p:cNvPr id="11" name="Picture 10"/>
           <p:cNvPicPr>
             <a:picLocks noGrp="1" noRot="1" noMove="1" noResize="1" noEditPoints="1" noAdjustHandles="1" noChangeArrowheads="1" noChangeShapeType="1" noCrop="1"/>
           </p:cNvPicPr>
@@ -5792,11 +5127,6 @@
         </p:spPr>
       </p:pic>
     </p:spTree>
-    <p:extLst>
-      <p:ext uri="{BB962C8B-B14F-4D97-AF65-F5344CB8AC3E}">
-        <p14:creationId xmlns:p14="http://schemas.microsoft.com/office/powerpoint/2010/main" val="4171055652"/>
-      </p:ext>
-    </p:extLst>
   </p:cSld>
   <p:clrMapOvr>
     <a:masterClrMapping/>
@@ -5831,13 +5161,7 @@
       </p:grpSpPr>
       <p:sp>
         <p:nvSpPr>
-          <p:cNvPr id="2" name="Title 1">
-            <a:extLst>
-              <a:ext uri="{FF2B5EF4-FFF2-40B4-BE49-F238E27FC236}">
-                <a16:creationId xmlns:a16="http://schemas.microsoft.com/office/drawing/2014/main" id="{8EEA5F1D-3A29-463C-D7AF-7132F92B56CD}"/>
-              </a:ext>
-            </a:extLst>
-          </p:cNvPr>
+          <p:cNvPr id="2" name="Title 1"/>
           <p:cNvSpPr>
             <a:spLocks noGrp="1"/>
           </p:cNvSpPr>
@@ -5894,13 +5218,7 @@
       </p:sp>
       <p:sp>
         <p:nvSpPr>
-          <p:cNvPr id="5" name="Text Placeholder 2">
-            <a:extLst>
-              <a:ext uri="{FF2B5EF4-FFF2-40B4-BE49-F238E27FC236}">
-                <a16:creationId xmlns:a16="http://schemas.microsoft.com/office/drawing/2014/main" id="{964ED5BF-C3CF-4D38-BE90-EA0A915CFA6D}"/>
-              </a:ext>
-            </a:extLst>
-          </p:cNvPr>
+          <p:cNvPr id="5" name="Text Placeholder 2"/>
           <p:cNvSpPr>
             <a:spLocks noGrp="1"/>
           </p:cNvSpPr>
@@ -6022,21 +5340,13 @@
               <a:rPr lang="en-GB" dirty="0"/>
               <a:t>Names of Presenters, UCL Sans Regular 24pt</a:t>
             </a:r>
-          </a:p>
-        </p:txBody>
-      </p:sp>
-      <p:sp>
-        <p:nvSpPr>
-          <p:cNvPr id="4" name="Rectangle 3">
-            <a:extLst>
-              <a:ext uri="{FF2B5EF4-FFF2-40B4-BE49-F238E27FC236}">
-                <a16:creationId xmlns:a16="http://schemas.microsoft.com/office/drawing/2014/main" id="{7903D562-9BC1-5B2A-B39F-74DAD6DF10C0}"/>
-              </a:ext>
-              <a:ext uri="{C183D7F6-B498-43B3-948B-1728B52AA6E4}">
-                <adec:decorative xmlns:adec="http://schemas.microsoft.com/office/drawing/2017/decorative" val="1"/>
-              </a:ext>
-            </a:extLst>
-          </p:cNvPr>
+            <a:endParaRPr lang="en-GB" dirty="0"/>
+          </a:p>
+        </p:txBody>
+      </p:sp>
+      <p:sp>
+        <p:nvSpPr>
+          <p:cNvPr id="4" name="Rectangle 3"/>
           <p:cNvSpPr>
             <a:spLocks noGrp="1" noRot="1" noMove="1" noResize="1" noEditPoints="1" noAdjustHandles="1" noChangeArrowheads="1" noChangeShapeType="1"/>
           </p:cNvSpPr>
@@ -6084,13 +5394,7 @@
       </p:sp>
       <p:sp>
         <p:nvSpPr>
-          <p:cNvPr id="6" name="Text Placeholder 2">
-            <a:extLst>
-              <a:ext uri="{FF2B5EF4-FFF2-40B4-BE49-F238E27FC236}">
-                <a16:creationId xmlns:a16="http://schemas.microsoft.com/office/drawing/2014/main" id="{136BEE82-A57F-C035-F03D-A9DCB796DC7D}"/>
-              </a:ext>
-            </a:extLst>
-          </p:cNvPr>
+          <p:cNvPr id="6" name="Text Placeholder 2"/>
           <p:cNvSpPr>
             <a:spLocks noGrp="1"/>
           </p:cNvSpPr>
@@ -6212,21 +5516,13 @@
               <a:rPr lang="en-GB" dirty="0"/>
               <a:t>Date, UCL Sans Regular 18pt</a:t>
             </a:r>
+            <a:endParaRPr lang="en-GB" dirty="0"/>
           </a:p>
         </p:txBody>
       </p:sp>
       <p:pic>
         <p:nvPicPr>
-          <p:cNvPr id="9" name="Picture 8" descr="UCL logo, University College London">
-            <a:extLst>
-              <a:ext uri="{FF2B5EF4-FFF2-40B4-BE49-F238E27FC236}">
-                <a16:creationId xmlns:a16="http://schemas.microsoft.com/office/drawing/2014/main" id="{806284FE-9AAB-111F-B7E9-0694AF943D76}"/>
-              </a:ext>
-              <a:ext uri="{C183D7F6-B498-43B3-948B-1728B52AA6E4}">
-                <adec:decorative xmlns:adec="http://schemas.microsoft.com/office/drawing/2017/decorative" val="0"/>
-              </a:ext>
-            </a:extLst>
-          </p:cNvPr>
+          <p:cNvPr id="9" name="Picture 8" descr="UCL logo, University College London"/>
           <p:cNvPicPr>
             <a:picLocks noGrp="1" noRot="1" noMove="1" noResize="1" noEditPoints="1" noAdjustHandles="1" noChangeArrowheads="1" noChangeShapeType="1" noCrop="1"/>
           </p:cNvPicPr>
@@ -6249,11 +5545,6 @@
         </p:spPr>
       </p:pic>
     </p:spTree>
-    <p:extLst>
-      <p:ext uri="{BB962C8B-B14F-4D97-AF65-F5344CB8AC3E}">
-        <p14:creationId xmlns:p14="http://schemas.microsoft.com/office/powerpoint/2010/main" val="974178337"/>
-      </p:ext>
-    </p:extLst>
   </p:cSld>
   <p:clrMapOvr>
     <a:masterClrMapping/>
@@ -6288,13 +5579,7 @@
       </p:grpSpPr>
       <p:sp>
         <p:nvSpPr>
-          <p:cNvPr id="2" name="Title 1">
-            <a:extLst>
-              <a:ext uri="{FF2B5EF4-FFF2-40B4-BE49-F238E27FC236}">
-                <a16:creationId xmlns:a16="http://schemas.microsoft.com/office/drawing/2014/main" id="{8EEA5F1D-3A29-463C-D7AF-7132F92B56CD}"/>
-              </a:ext>
-            </a:extLst>
-          </p:cNvPr>
+          <p:cNvPr id="2" name="Title 1"/>
           <p:cNvSpPr>
             <a:spLocks noGrp="1"/>
           </p:cNvSpPr>
@@ -6351,13 +5636,7 @@
       </p:sp>
       <p:sp>
         <p:nvSpPr>
-          <p:cNvPr id="7" name="Text Placeholder 2">
-            <a:extLst>
-              <a:ext uri="{FF2B5EF4-FFF2-40B4-BE49-F238E27FC236}">
-                <a16:creationId xmlns:a16="http://schemas.microsoft.com/office/drawing/2014/main" id="{75E8DED6-3359-C8D7-EDF1-14AE135495B0}"/>
-              </a:ext>
-            </a:extLst>
-          </p:cNvPr>
+          <p:cNvPr id="7" name="Text Placeholder 2"/>
           <p:cNvSpPr>
             <a:spLocks noGrp="1"/>
           </p:cNvSpPr>
@@ -6479,18 +5758,13 @@
               <a:rPr lang="en-GB" dirty="0"/>
               <a:t>Subtitle, UCL Sans Regular 24pt</a:t>
             </a:r>
-          </a:p>
-        </p:txBody>
-      </p:sp>
-      <p:sp>
-        <p:nvSpPr>
-          <p:cNvPr id="4" name="Table Placeholder 3">
-            <a:extLst>
-              <a:ext uri="{FF2B5EF4-FFF2-40B4-BE49-F238E27FC236}">
-                <a16:creationId xmlns:a16="http://schemas.microsoft.com/office/drawing/2014/main" id="{A4C55113-F63B-C02B-63A2-F9C817D9BF39}"/>
-              </a:ext>
-            </a:extLst>
-          </p:cNvPr>
+            <a:endParaRPr lang="en-GB" dirty="0"/>
+          </a:p>
+        </p:txBody>
+      </p:sp>
+      <p:sp>
+        <p:nvSpPr>
+          <p:cNvPr id="4" name="Table Placeholder 3"/>
           <p:cNvSpPr>
             <a:spLocks noGrp="1"/>
           </p:cNvSpPr>
@@ -6517,13 +5791,7 @@
       </p:sp>
       <p:sp>
         <p:nvSpPr>
-          <p:cNvPr id="11" name="Text Placeholder 2">
-            <a:extLst>
-              <a:ext uri="{FF2B5EF4-FFF2-40B4-BE49-F238E27FC236}">
-                <a16:creationId xmlns:a16="http://schemas.microsoft.com/office/drawing/2014/main" id="{F75F6D65-6CB4-1A07-17CB-355AFECF9D4B}"/>
-              </a:ext>
-            </a:extLst>
-          </p:cNvPr>
+          <p:cNvPr id="11" name="Text Placeholder 2"/>
           <p:cNvSpPr>
             <a:spLocks noGrp="1"/>
           </p:cNvSpPr>
@@ -6645,21 +5913,13 @@
               <a:rPr lang="en-GB" dirty="0"/>
               <a:t>Text, UCL Sans Regular 18pt</a:t>
             </a:r>
-          </a:p>
-        </p:txBody>
-      </p:sp>
-      <p:sp>
-        <p:nvSpPr>
-          <p:cNvPr id="6" name="Picture Placeholder 2" descr="Add a clear, concise statement describing the main purpose of the image">
-            <a:extLst>
-              <a:ext uri="{FF2B5EF4-FFF2-40B4-BE49-F238E27FC236}">
-                <a16:creationId xmlns:a16="http://schemas.microsoft.com/office/drawing/2014/main" id="{82876633-1ADE-997E-991B-B6FA6635A20E}"/>
-              </a:ext>
-              <a:ext uri="{C183D7F6-B498-43B3-948B-1728B52AA6E4}">
-                <adec:decorative xmlns:adec="http://schemas.microsoft.com/office/drawing/2017/decorative" val="0"/>
-              </a:ext>
-            </a:extLst>
-          </p:cNvPr>
+            <a:endParaRPr lang="en-GB" dirty="0"/>
+          </a:p>
+        </p:txBody>
+      </p:sp>
+      <p:sp>
+        <p:nvSpPr>
+          <p:cNvPr id="6" name="Picture Placeholder 2" descr="Add a clear, concise statement describing the main purpose of the image"/>
           <p:cNvSpPr>
             <a:spLocks noGrp="1"/>
           </p:cNvSpPr>
@@ -6723,16 +5983,7 @@
       </p:sp>
       <p:sp>
         <p:nvSpPr>
-          <p:cNvPr id="3" name="Rectangle 2">
-            <a:extLst>
-              <a:ext uri="{FF2B5EF4-FFF2-40B4-BE49-F238E27FC236}">
-                <a16:creationId xmlns:a16="http://schemas.microsoft.com/office/drawing/2014/main" id="{EC235949-2C3C-533B-6BE3-4C117E17EEF4}"/>
-              </a:ext>
-              <a:ext uri="{C183D7F6-B498-43B3-948B-1728B52AA6E4}">
-                <adec:decorative xmlns:adec="http://schemas.microsoft.com/office/drawing/2017/decorative" val="1"/>
-              </a:ext>
-            </a:extLst>
-          </p:cNvPr>
+          <p:cNvPr id="3" name="Rectangle 2"/>
           <p:cNvSpPr>
             <a:spLocks noGrp="1" noRot="1" noMove="1" noResize="1" noEditPoints="1" noAdjustHandles="1" noChangeArrowheads="1" noChangeShapeType="1"/>
           </p:cNvSpPr>
@@ -6780,16 +6031,7 @@
       </p:sp>
       <p:pic>
         <p:nvPicPr>
-          <p:cNvPr id="8" name="Picture 7">
-            <a:extLst>
-              <a:ext uri="{FF2B5EF4-FFF2-40B4-BE49-F238E27FC236}">
-                <a16:creationId xmlns:a16="http://schemas.microsoft.com/office/drawing/2014/main" id="{1255F678-9F19-2B31-68D4-F374061E815D}"/>
-              </a:ext>
-              <a:ext uri="{C183D7F6-B498-43B3-948B-1728B52AA6E4}">
-                <adec:decorative xmlns:adec="http://schemas.microsoft.com/office/drawing/2017/decorative" val="1"/>
-              </a:ext>
-            </a:extLst>
-          </p:cNvPr>
+          <p:cNvPr id="8" name="Picture 7"/>
           <p:cNvPicPr>
             <a:picLocks noGrp="1" noRot="1" noMove="1" noResize="1" noEditPoints="1" noAdjustHandles="1" noChangeArrowheads="1" noChangeShapeType="1" noCrop="1"/>
           </p:cNvPicPr>
@@ -6812,11 +6054,6 @@
         </p:spPr>
       </p:pic>
     </p:spTree>
-    <p:extLst>
-      <p:ext uri="{BB962C8B-B14F-4D97-AF65-F5344CB8AC3E}">
-        <p14:creationId xmlns:p14="http://schemas.microsoft.com/office/powerpoint/2010/main" val="195872338"/>
-      </p:ext>
-    </p:extLst>
   </p:cSld>
   <p:clrMapOvr>
     <a:masterClrMapping/>
@@ -6851,13 +6088,7 @@
       </p:grpSpPr>
       <p:sp>
         <p:nvSpPr>
-          <p:cNvPr id="2" name="Title 1">
-            <a:extLst>
-              <a:ext uri="{FF2B5EF4-FFF2-40B4-BE49-F238E27FC236}">
-                <a16:creationId xmlns:a16="http://schemas.microsoft.com/office/drawing/2014/main" id="{8EEA5F1D-3A29-463C-D7AF-7132F92B56CD}"/>
-              </a:ext>
-            </a:extLst>
-          </p:cNvPr>
+          <p:cNvPr id="2" name="Title 1"/>
           <p:cNvSpPr>
             <a:spLocks noGrp="1"/>
           </p:cNvSpPr>
@@ -6909,18 +6140,13 @@
               <a:rPr lang="en-GB" dirty="0"/>
               <a:t> 36pt</a:t>
             </a:r>
-          </a:p>
-        </p:txBody>
-      </p:sp>
-      <p:sp>
-        <p:nvSpPr>
-          <p:cNvPr id="7" name="Picture Placeholder 6" descr="Add a clear, concise statement describing the main purpose of the image">
-            <a:extLst>
-              <a:ext uri="{FF2B5EF4-FFF2-40B4-BE49-F238E27FC236}">
-                <a16:creationId xmlns:a16="http://schemas.microsoft.com/office/drawing/2014/main" id="{0799EAC2-36C5-0886-6CEB-AA012D2BF087}"/>
-              </a:ext>
-            </a:extLst>
-          </p:cNvPr>
+            <a:endParaRPr lang="en-GB" dirty="0"/>
+          </a:p>
+        </p:txBody>
+      </p:sp>
+      <p:sp>
+        <p:nvSpPr>
+          <p:cNvPr id="7" name="Picture Placeholder 6" descr="Add a clear, concise statement describing the main purpose of the image"/>
           <p:cNvSpPr>
             <a:spLocks noGrp="1"/>
           </p:cNvSpPr>
@@ -6947,13 +6173,7 @@
       </p:sp>
       <p:sp>
         <p:nvSpPr>
-          <p:cNvPr id="4" name="Text Placeholder 7">
-            <a:extLst>
-              <a:ext uri="{FF2B5EF4-FFF2-40B4-BE49-F238E27FC236}">
-                <a16:creationId xmlns:a16="http://schemas.microsoft.com/office/drawing/2014/main" id="{C5D11EE6-C4E2-EE93-39A9-79D248FDD196}"/>
-              </a:ext>
-            </a:extLst>
-          </p:cNvPr>
+          <p:cNvPr id="4" name="Text Placeholder 7"/>
           <p:cNvSpPr>
             <a:spLocks noGrp="1"/>
           </p:cNvSpPr>
@@ -6980,27 +6200,27 @@
               <a:spcBef>
                 <a:spcPts val="0"/>
               </a:spcBef>
-              <a:buFont typeface="Wingdings" pitchFamily="2" charset="2"/>
+              <a:buFont typeface="Wingdings" panose="05000000000000000000" pitchFamily="2" charset="2"/>
               <a:buNone/>
               <a:defRPr sz="1800"/>
             </a:lvl1pPr>
             <a:lvl2pPr>
-              <a:buFont typeface="Wingdings" pitchFamily="2" charset="2"/>
+              <a:buFont typeface="Wingdings" panose="05000000000000000000" pitchFamily="2" charset="2"/>
               <a:buChar char="§"/>
               <a:defRPr sz="1800"/>
             </a:lvl2pPr>
             <a:lvl3pPr>
-              <a:buFont typeface="Wingdings" pitchFamily="2" charset="2"/>
+              <a:buFont typeface="Wingdings" panose="05000000000000000000" pitchFamily="2" charset="2"/>
               <a:buChar char="§"/>
               <a:defRPr sz="1800"/>
             </a:lvl3pPr>
             <a:lvl4pPr>
-              <a:buFont typeface="Wingdings" pitchFamily="2" charset="2"/>
+              <a:buFont typeface="Wingdings" panose="05000000000000000000" pitchFamily="2" charset="2"/>
               <a:buChar char="§"/>
               <a:defRPr sz="1800"/>
             </a:lvl4pPr>
             <a:lvl5pPr>
-              <a:buFont typeface="Wingdings" pitchFamily="2" charset="2"/>
+              <a:buFont typeface="Wingdings" panose="05000000000000000000" pitchFamily="2" charset="2"/>
               <a:buChar char="§"/>
               <a:defRPr sz="1800"/>
             </a:lvl5pPr>
@@ -7017,13 +6237,7 @@
       </p:sp>
       <p:sp>
         <p:nvSpPr>
-          <p:cNvPr id="8" name="Picture Placeholder 6" descr="Add a clear, concise statement describing the main purpose of the image">
-            <a:extLst>
-              <a:ext uri="{FF2B5EF4-FFF2-40B4-BE49-F238E27FC236}">
-                <a16:creationId xmlns:a16="http://schemas.microsoft.com/office/drawing/2014/main" id="{AC751661-2014-7CB4-B61A-24EB30E04B80}"/>
-              </a:ext>
-            </a:extLst>
-          </p:cNvPr>
+          <p:cNvPr id="8" name="Picture Placeholder 6" descr="Add a clear, concise statement describing the main purpose of the image"/>
           <p:cNvSpPr>
             <a:spLocks noGrp="1"/>
           </p:cNvSpPr>
@@ -7050,13 +6264,7 @@
       </p:sp>
       <p:sp>
         <p:nvSpPr>
-          <p:cNvPr id="5" name="Text Placeholder 7">
-            <a:extLst>
-              <a:ext uri="{FF2B5EF4-FFF2-40B4-BE49-F238E27FC236}">
-                <a16:creationId xmlns:a16="http://schemas.microsoft.com/office/drawing/2014/main" id="{5584243F-83D4-EC28-5C47-CF5ACA19B5DC}"/>
-              </a:ext>
-            </a:extLst>
-          </p:cNvPr>
+          <p:cNvPr id="5" name="Text Placeholder 7"/>
           <p:cNvSpPr>
             <a:spLocks noGrp="1"/>
           </p:cNvSpPr>
@@ -7083,27 +6291,27 @@
               <a:spcBef>
                 <a:spcPts val="0"/>
               </a:spcBef>
-              <a:buFont typeface="Wingdings" pitchFamily="2" charset="2"/>
+              <a:buFont typeface="Wingdings" panose="05000000000000000000" pitchFamily="2" charset="2"/>
               <a:buNone/>
               <a:defRPr sz="1800"/>
             </a:lvl1pPr>
             <a:lvl2pPr>
-              <a:buFont typeface="Wingdings" pitchFamily="2" charset="2"/>
+              <a:buFont typeface="Wingdings" panose="05000000000000000000" pitchFamily="2" charset="2"/>
               <a:buChar char="§"/>
               <a:defRPr sz="1800"/>
             </a:lvl2pPr>
             <a:lvl3pPr>
-              <a:buFont typeface="Wingdings" pitchFamily="2" charset="2"/>
+              <a:buFont typeface="Wingdings" panose="05000000000000000000" pitchFamily="2" charset="2"/>
               <a:buChar char="§"/>
               <a:defRPr sz="1800"/>
             </a:lvl3pPr>
             <a:lvl4pPr>
-              <a:buFont typeface="Wingdings" pitchFamily="2" charset="2"/>
+              <a:buFont typeface="Wingdings" panose="05000000000000000000" pitchFamily="2" charset="2"/>
               <a:buChar char="§"/>
               <a:defRPr sz="1800"/>
             </a:lvl4pPr>
             <a:lvl5pPr>
-              <a:buFont typeface="Wingdings" pitchFamily="2" charset="2"/>
+              <a:buFont typeface="Wingdings" panose="05000000000000000000" pitchFamily="2" charset="2"/>
               <a:buChar char="§"/>
               <a:defRPr sz="1800"/>
             </a:lvl5pPr>
@@ -7120,16 +6328,7 @@
       </p:sp>
       <p:sp>
         <p:nvSpPr>
-          <p:cNvPr id="6" name="Rectangle 5">
-            <a:extLst>
-              <a:ext uri="{FF2B5EF4-FFF2-40B4-BE49-F238E27FC236}">
-                <a16:creationId xmlns:a16="http://schemas.microsoft.com/office/drawing/2014/main" id="{2D31EA68-8F97-2C93-1DF1-0C50A907ABE6}"/>
-              </a:ext>
-              <a:ext uri="{C183D7F6-B498-43B3-948B-1728B52AA6E4}">
-                <adec:decorative xmlns:adec="http://schemas.microsoft.com/office/drawing/2017/decorative" val="1"/>
-              </a:ext>
-            </a:extLst>
-          </p:cNvPr>
+          <p:cNvPr id="6" name="Rectangle 5"/>
           <p:cNvSpPr>
             <a:spLocks noGrp="1" noRot="1" noMove="1" noResize="1" noEditPoints="1" noAdjustHandles="1" noChangeArrowheads="1" noChangeShapeType="1"/>
           </p:cNvSpPr>
@@ -7177,16 +6376,7 @@
       </p:sp>
       <p:pic>
         <p:nvPicPr>
-          <p:cNvPr id="9" name="Picture 8">
-            <a:extLst>
-              <a:ext uri="{FF2B5EF4-FFF2-40B4-BE49-F238E27FC236}">
-                <a16:creationId xmlns:a16="http://schemas.microsoft.com/office/drawing/2014/main" id="{4A935693-F1F7-EFB7-3F70-BBCEEF923D97}"/>
-              </a:ext>
-              <a:ext uri="{C183D7F6-B498-43B3-948B-1728B52AA6E4}">
-                <adec:decorative xmlns:adec="http://schemas.microsoft.com/office/drawing/2017/decorative" val="1"/>
-              </a:ext>
-            </a:extLst>
-          </p:cNvPr>
+          <p:cNvPr id="9" name="Picture 8"/>
           <p:cNvPicPr>
             <a:picLocks noGrp="1" noRot="1" noChangeAspect="1" noMove="1" noResize="1" noEditPoints="1" noAdjustHandles="1" noChangeArrowheads="1" noChangeShapeType="1" noCrop="1"/>
           </p:cNvPicPr>
@@ -7209,11 +6399,6 @@
         </p:spPr>
       </p:pic>
     </p:spTree>
-    <p:extLst>
-      <p:ext uri="{BB962C8B-B14F-4D97-AF65-F5344CB8AC3E}">
-        <p14:creationId xmlns:p14="http://schemas.microsoft.com/office/powerpoint/2010/main" val="3053882416"/>
-      </p:ext>
-    </p:extLst>
   </p:cSld>
   <p:clrMapOvr>
     <a:masterClrMapping/>
@@ -7248,13 +6433,7 @@
       </p:grpSpPr>
       <p:sp>
         <p:nvSpPr>
-          <p:cNvPr id="9" name="Title 1">
-            <a:extLst>
-              <a:ext uri="{FF2B5EF4-FFF2-40B4-BE49-F238E27FC236}">
-                <a16:creationId xmlns:a16="http://schemas.microsoft.com/office/drawing/2014/main" id="{F8CF606E-A120-FD80-1208-6800F7AB3C83}"/>
-              </a:ext>
-            </a:extLst>
-          </p:cNvPr>
+          <p:cNvPr id="9" name="Title 1"/>
           <p:cNvSpPr>
             <a:spLocks noGrp="1"/>
           </p:cNvSpPr>
@@ -7306,18 +6485,13 @@
               <a:rPr lang="en-GB" dirty="0"/>
               <a:t> 36pt</a:t>
             </a:r>
-          </a:p>
-        </p:txBody>
-      </p:sp>
-      <p:sp>
-        <p:nvSpPr>
-          <p:cNvPr id="10" name="Picture Placeholder 6" descr="Add a clear, concise statement describing the main purpose of the image">
-            <a:extLst>
-              <a:ext uri="{FF2B5EF4-FFF2-40B4-BE49-F238E27FC236}">
-                <a16:creationId xmlns:a16="http://schemas.microsoft.com/office/drawing/2014/main" id="{2F201AA6-C7B0-FA4A-12EF-F05A6A27B847}"/>
-              </a:ext>
-            </a:extLst>
-          </p:cNvPr>
+            <a:endParaRPr lang="en-GB" dirty="0"/>
+          </a:p>
+        </p:txBody>
+      </p:sp>
+      <p:sp>
+        <p:nvSpPr>
+          <p:cNvPr id="10" name="Picture Placeholder 6" descr="Add a clear, concise statement describing the main purpose of the image"/>
           <p:cNvSpPr>
             <a:spLocks noGrp="1"/>
           </p:cNvSpPr>
@@ -7344,13 +6518,7 @@
       </p:sp>
       <p:sp>
         <p:nvSpPr>
-          <p:cNvPr id="11" name="Text Placeholder 7">
-            <a:extLst>
-              <a:ext uri="{FF2B5EF4-FFF2-40B4-BE49-F238E27FC236}">
-                <a16:creationId xmlns:a16="http://schemas.microsoft.com/office/drawing/2014/main" id="{3DB5FBAF-BF92-0B32-16AD-1D4746507FE2}"/>
-              </a:ext>
-            </a:extLst>
-          </p:cNvPr>
+          <p:cNvPr id="11" name="Text Placeholder 7"/>
           <p:cNvSpPr>
             <a:spLocks noGrp="1"/>
           </p:cNvSpPr>
@@ -7377,27 +6545,27 @@
               <a:spcBef>
                 <a:spcPts val="0"/>
               </a:spcBef>
-              <a:buFont typeface="Wingdings" pitchFamily="2" charset="2"/>
+              <a:buFont typeface="Wingdings" panose="05000000000000000000" pitchFamily="2" charset="2"/>
               <a:buNone/>
               <a:defRPr sz="1800"/>
             </a:lvl1pPr>
             <a:lvl2pPr>
-              <a:buFont typeface="Wingdings" pitchFamily="2" charset="2"/>
+              <a:buFont typeface="Wingdings" panose="05000000000000000000" pitchFamily="2" charset="2"/>
               <a:buChar char="§"/>
               <a:defRPr sz="1800"/>
             </a:lvl2pPr>
             <a:lvl3pPr>
-              <a:buFont typeface="Wingdings" pitchFamily="2" charset="2"/>
+              <a:buFont typeface="Wingdings" panose="05000000000000000000" pitchFamily="2" charset="2"/>
               <a:buChar char="§"/>
               <a:defRPr sz="1800"/>
             </a:lvl3pPr>
             <a:lvl4pPr>
-              <a:buFont typeface="Wingdings" pitchFamily="2" charset="2"/>
+              <a:buFont typeface="Wingdings" panose="05000000000000000000" pitchFamily="2" charset="2"/>
               <a:buChar char="§"/>
               <a:defRPr sz="1800"/>
             </a:lvl4pPr>
             <a:lvl5pPr>
-              <a:buFont typeface="Wingdings" pitchFamily="2" charset="2"/>
+              <a:buFont typeface="Wingdings" panose="05000000000000000000" pitchFamily="2" charset="2"/>
               <a:buChar char="§"/>
               <a:defRPr sz="1800"/>
             </a:lvl5pPr>
@@ -7408,6 +6576,7 @@
               <a:rPr lang="en-GB" dirty="0"/>
               <a:t>Body text, </a:t>
             </a:r>
+            <a:endParaRPr lang="en-GB" dirty="0"/>
           </a:p>
           <a:p>
             <a:pPr lvl="0"/>
@@ -7421,16 +6590,7 @@
       </p:sp>
       <p:sp>
         <p:nvSpPr>
-          <p:cNvPr id="6" name="Rectangle 5">
-            <a:extLst>
-              <a:ext uri="{FF2B5EF4-FFF2-40B4-BE49-F238E27FC236}">
-                <a16:creationId xmlns:a16="http://schemas.microsoft.com/office/drawing/2014/main" id="{2D31EA68-8F97-2C93-1DF1-0C50A907ABE6}"/>
-              </a:ext>
-              <a:ext uri="{C183D7F6-B498-43B3-948B-1728B52AA6E4}">
-                <adec:decorative xmlns:adec="http://schemas.microsoft.com/office/drawing/2017/decorative" val="1"/>
-              </a:ext>
-            </a:extLst>
-          </p:cNvPr>
+          <p:cNvPr id="6" name="Rectangle 5"/>
           <p:cNvSpPr>
             <a:spLocks noGrp="1" noRot="1" noMove="1" noResize="1" noEditPoints="1" noAdjustHandles="1" noChangeArrowheads="1" noChangeShapeType="1"/>
           </p:cNvSpPr>
@@ -7478,16 +6638,7 @@
       </p:sp>
       <p:pic>
         <p:nvPicPr>
-          <p:cNvPr id="2" name="Picture 1">
-            <a:extLst>
-              <a:ext uri="{FF2B5EF4-FFF2-40B4-BE49-F238E27FC236}">
-                <a16:creationId xmlns:a16="http://schemas.microsoft.com/office/drawing/2014/main" id="{D8E64966-6EA4-2AE9-2F73-A1E95B461EBC}"/>
-              </a:ext>
-              <a:ext uri="{C183D7F6-B498-43B3-948B-1728B52AA6E4}">
-                <adec:decorative xmlns:adec="http://schemas.microsoft.com/office/drawing/2017/decorative" val="1"/>
-              </a:ext>
-            </a:extLst>
-          </p:cNvPr>
+          <p:cNvPr id="2" name="Picture 1"/>
           <p:cNvPicPr>
             <a:picLocks noGrp="1" noRot="1" noMove="1" noResize="1" noEditPoints="1" noAdjustHandles="1" noChangeArrowheads="1" noChangeShapeType="1" noCrop="1"/>
           </p:cNvPicPr>
@@ -7510,11 +6661,6 @@
         </p:spPr>
       </p:pic>
     </p:spTree>
-    <p:extLst>
-      <p:ext uri="{BB962C8B-B14F-4D97-AF65-F5344CB8AC3E}">
-        <p14:creationId xmlns:p14="http://schemas.microsoft.com/office/powerpoint/2010/main" val="1938927398"/>
-      </p:ext>
-    </p:extLst>
   </p:cSld>
   <p:clrMapOvr>
     <a:masterClrMapping/>
@@ -7549,13 +6695,7 @@
       </p:grpSpPr>
       <p:sp>
         <p:nvSpPr>
-          <p:cNvPr id="26" name="Text Placeholder 25">
-            <a:extLst>
-              <a:ext uri="{FF2B5EF4-FFF2-40B4-BE49-F238E27FC236}">
-                <a16:creationId xmlns:a16="http://schemas.microsoft.com/office/drawing/2014/main" id="{C745EF00-09E6-10CA-B1BF-5A7B7EC8063C}"/>
-              </a:ext>
-            </a:extLst>
-          </p:cNvPr>
+          <p:cNvPr id="26" name="Text Placeholder 25"/>
           <p:cNvSpPr>
             <a:spLocks noGrp="1"/>
           </p:cNvSpPr>
@@ -7613,6 +6753,7 @@
               <a:rPr lang="en-GB" dirty="0"/>
               <a:t>Headline </a:t>
             </a:r>
+            <a:endParaRPr lang="en-GB" dirty="0"/>
           </a:p>
           <a:p>
             <a:pPr lvl="0"/>
@@ -7628,18 +6769,13 @@
               <a:rPr lang="en-GB" dirty="0"/>
               <a:t> 36pt</a:t>
             </a:r>
-          </a:p>
-        </p:txBody>
-      </p:sp>
-      <p:sp>
-        <p:nvSpPr>
-          <p:cNvPr id="7" name="Picture Placeholder 6" descr="Add a clear, concise statement describing the main purpose of the image">
-            <a:extLst>
-              <a:ext uri="{FF2B5EF4-FFF2-40B4-BE49-F238E27FC236}">
-                <a16:creationId xmlns:a16="http://schemas.microsoft.com/office/drawing/2014/main" id="{0799EAC2-36C5-0886-6CEB-AA012D2BF087}"/>
-              </a:ext>
-            </a:extLst>
-          </p:cNvPr>
+            <a:endParaRPr lang="en-GB" dirty="0"/>
+          </a:p>
+        </p:txBody>
+      </p:sp>
+      <p:sp>
+        <p:nvSpPr>
+          <p:cNvPr id="7" name="Picture Placeholder 6" descr="Add a clear, concise statement describing the main purpose of the image"/>
           <p:cNvSpPr>
             <a:spLocks noGrp="1"/>
           </p:cNvSpPr>
@@ -7666,13 +6802,7 @@
       </p:sp>
       <p:sp>
         <p:nvSpPr>
-          <p:cNvPr id="2" name="Title 1">
-            <a:extLst>
-              <a:ext uri="{FF2B5EF4-FFF2-40B4-BE49-F238E27FC236}">
-                <a16:creationId xmlns:a16="http://schemas.microsoft.com/office/drawing/2014/main" id="{8EEA5F1D-3A29-463C-D7AF-7132F92B56CD}"/>
-              </a:ext>
-            </a:extLst>
-          </p:cNvPr>
+          <p:cNvPr id="2" name="Title 1"/>
           <p:cNvSpPr>
             <a:spLocks noGrp="1"/>
           </p:cNvSpPr>
@@ -7706,7 +6836,6 @@
               <a:buSzTx/>
               <a:buFontTx/>
               <a:buNone/>
-              <a:tabLst/>
               <a:defRPr sz="1800" b="0" i="0">
                 <a:solidFill>
                   <a:schemeClr val="tx2"/>
@@ -7730,7 +6859,6 @@
               <a:buSzTx/>
               <a:buFontTx/>
               <a:buNone/>
-              <a:tabLst/>
               <a:defRPr/>
             </a:pPr>
             <a:r>
@@ -7744,18 +6872,13 @@
               <a:rPr lang="en-GB" dirty="0"/>
               <a:t>UCL Sans Regular 18pt</a:t>
             </a:r>
-          </a:p>
-        </p:txBody>
-      </p:sp>
-      <p:sp>
-        <p:nvSpPr>
-          <p:cNvPr id="28" name="Picture Placeholder 6" descr="Add a clear, concise statement describing the main purpose of the image">
-            <a:extLst>
-              <a:ext uri="{FF2B5EF4-FFF2-40B4-BE49-F238E27FC236}">
-                <a16:creationId xmlns:a16="http://schemas.microsoft.com/office/drawing/2014/main" id="{7A9B95BC-4D66-3908-97EF-FB4460F52B22}"/>
-              </a:ext>
-            </a:extLst>
-          </p:cNvPr>
+            <a:endParaRPr lang="en-GB" dirty="0"/>
+          </a:p>
+        </p:txBody>
+      </p:sp>
+      <p:sp>
+        <p:nvSpPr>
+          <p:cNvPr id="28" name="Picture Placeholder 6" descr="Add a clear, concise statement describing the main purpose of the image"/>
           <p:cNvSpPr>
             <a:spLocks noGrp="1"/>
           </p:cNvSpPr>
@@ -7782,13 +6905,7 @@
       </p:sp>
       <p:sp>
         <p:nvSpPr>
-          <p:cNvPr id="30" name="Text Placeholder 29">
-            <a:extLst>
-              <a:ext uri="{FF2B5EF4-FFF2-40B4-BE49-F238E27FC236}">
-                <a16:creationId xmlns:a16="http://schemas.microsoft.com/office/drawing/2014/main" id="{FBDDB7BF-E334-9161-E3A7-3D392EA86CA2}"/>
-              </a:ext>
-            </a:extLst>
-          </p:cNvPr>
+          <p:cNvPr id="30" name="Text Placeholder 29"/>
           <p:cNvSpPr>
             <a:spLocks noGrp="1"/>
           </p:cNvSpPr>
@@ -7864,13 +6981,7 @@
       </p:sp>
       <p:sp>
         <p:nvSpPr>
-          <p:cNvPr id="35" name="Picture Placeholder 6" descr="Add a clear, concise statement describing the main purpose of the image">
-            <a:extLst>
-              <a:ext uri="{FF2B5EF4-FFF2-40B4-BE49-F238E27FC236}">
-                <a16:creationId xmlns:a16="http://schemas.microsoft.com/office/drawing/2014/main" id="{C85375D3-F603-A1F9-0769-6A655B6E6692}"/>
-              </a:ext>
-            </a:extLst>
-          </p:cNvPr>
+          <p:cNvPr id="35" name="Picture Placeholder 6" descr="Add a clear, concise statement describing the main purpose of the image"/>
           <p:cNvSpPr>
             <a:spLocks noGrp="1"/>
           </p:cNvSpPr>
@@ -7897,13 +7008,7 @@
       </p:sp>
       <p:sp>
         <p:nvSpPr>
-          <p:cNvPr id="32" name="Text Placeholder 31">
-            <a:extLst>
-              <a:ext uri="{FF2B5EF4-FFF2-40B4-BE49-F238E27FC236}">
-                <a16:creationId xmlns:a16="http://schemas.microsoft.com/office/drawing/2014/main" id="{C1102347-D73B-9C6D-7E2C-F4283EC520FF}"/>
-              </a:ext>
-            </a:extLst>
-          </p:cNvPr>
+          <p:cNvPr id="32" name="Text Placeholder 31"/>
           <p:cNvSpPr>
             <a:spLocks noGrp="1"/>
           </p:cNvSpPr>
@@ -7979,13 +7084,7 @@
       </p:sp>
       <p:sp>
         <p:nvSpPr>
-          <p:cNvPr id="36" name="Picture Placeholder 6" descr="Add a clear, concise statement describing the main purpose of the image">
-            <a:extLst>
-              <a:ext uri="{FF2B5EF4-FFF2-40B4-BE49-F238E27FC236}">
-                <a16:creationId xmlns:a16="http://schemas.microsoft.com/office/drawing/2014/main" id="{5B98E73B-EC26-695B-64A0-FE5244D0C7D7}"/>
-              </a:ext>
-            </a:extLst>
-          </p:cNvPr>
+          <p:cNvPr id="36" name="Picture Placeholder 6" descr="Add a clear, concise statement describing the main purpose of the image"/>
           <p:cNvSpPr>
             <a:spLocks noGrp="1"/>
           </p:cNvSpPr>
@@ -8012,13 +7111,7 @@
       </p:sp>
       <p:sp>
         <p:nvSpPr>
-          <p:cNvPr id="34" name="Text Placeholder 33">
-            <a:extLst>
-              <a:ext uri="{FF2B5EF4-FFF2-40B4-BE49-F238E27FC236}">
-                <a16:creationId xmlns:a16="http://schemas.microsoft.com/office/drawing/2014/main" id="{B62033B8-9ECF-6181-24C6-8380692FF4A0}"/>
-              </a:ext>
-            </a:extLst>
-          </p:cNvPr>
+          <p:cNvPr id="34" name="Text Placeholder 33"/>
           <p:cNvSpPr>
             <a:spLocks noGrp="1"/>
           </p:cNvSpPr>
@@ -8094,16 +7187,7 @@
       </p:sp>
       <p:sp>
         <p:nvSpPr>
-          <p:cNvPr id="4" name="Rectangle 3">
-            <a:extLst>
-              <a:ext uri="{FF2B5EF4-FFF2-40B4-BE49-F238E27FC236}">
-                <a16:creationId xmlns:a16="http://schemas.microsoft.com/office/drawing/2014/main" id="{ABD764E0-C2A5-851D-9E15-7970376FAD1B}"/>
-              </a:ext>
-              <a:ext uri="{C183D7F6-B498-43B3-948B-1728B52AA6E4}">
-                <adec:decorative xmlns:adec="http://schemas.microsoft.com/office/drawing/2017/decorative" val="1"/>
-              </a:ext>
-            </a:extLst>
-          </p:cNvPr>
+          <p:cNvPr id="4" name="Rectangle 3"/>
           <p:cNvSpPr>
             <a:spLocks noGrp="1" noRot="1" noMove="1" noResize="1" noEditPoints="1" noAdjustHandles="1" noChangeArrowheads="1" noChangeShapeType="1"/>
           </p:cNvSpPr>
@@ -8151,16 +7235,7 @@
       </p:sp>
       <p:pic>
         <p:nvPicPr>
-          <p:cNvPr id="8" name="Picture 7">
-            <a:extLst>
-              <a:ext uri="{FF2B5EF4-FFF2-40B4-BE49-F238E27FC236}">
-                <a16:creationId xmlns:a16="http://schemas.microsoft.com/office/drawing/2014/main" id="{9EE115A2-315F-2C75-AD3F-871CC5AAC4DF}"/>
-              </a:ext>
-              <a:ext uri="{C183D7F6-B498-43B3-948B-1728B52AA6E4}">
-                <adec:decorative xmlns:adec="http://schemas.microsoft.com/office/drawing/2017/decorative" val="1"/>
-              </a:ext>
-            </a:extLst>
-          </p:cNvPr>
+          <p:cNvPr id="8" name="Picture 7"/>
           <p:cNvPicPr>
             <a:picLocks noGrp="1" noRot="1" noMove="1" noResize="1" noEditPoints="1" noAdjustHandles="1" noChangeArrowheads="1" noChangeShapeType="1" noCrop="1"/>
           </p:cNvPicPr>
@@ -8183,11 +7258,6 @@
         </p:spPr>
       </p:pic>
     </p:spTree>
-    <p:extLst>
-      <p:ext uri="{BB962C8B-B14F-4D97-AF65-F5344CB8AC3E}">
-        <p14:creationId xmlns:p14="http://schemas.microsoft.com/office/powerpoint/2010/main" val="3036791910"/>
-      </p:ext>
-    </p:extLst>
   </p:cSld>
   <p:clrMapOvr>
     <a:masterClrMapping/>
@@ -8214,13 +7284,7 @@
       </p:grpSpPr>
       <p:sp>
         <p:nvSpPr>
-          <p:cNvPr id="8" name="Text Placeholder 3">
-            <a:extLst>
-              <a:ext uri="{FF2B5EF4-FFF2-40B4-BE49-F238E27FC236}">
-                <a16:creationId xmlns:a16="http://schemas.microsoft.com/office/drawing/2014/main" id="{E879B5DC-7300-88F8-C308-CBC1B2803C67}"/>
-              </a:ext>
-            </a:extLst>
-          </p:cNvPr>
+          <p:cNvPr id="8" name="Text Placeholder 3"/>
           <p:cNvSpPr>
             <a:spLocks noGrp="1"/>
           </p:cNvSpPr>
@@ -8294,6 +7358,7 @@
               <a:rPr lang="en-GB" dirty="0"/>
               <a:t>Headline </a:t>
             </a:r>
+            <a:endParaRPr lang="en-GB" dirty="0"/>
           </a:p>
           <a:p>
             <a:pPr lvl="0"/>
@@ -8301,6 +7366,7 @@
               <a:rPr lang="en-GB" dirty="0"/>
               <a:t>UCL Sans </a:t>
             </a:r>
+            <a:endParaRPr lang="en-GB" dirty="0"/>
           </a:p>
           <a:p>
             <a:pPr lvl="0"/>
@@ -8312,18 +7378,13 @@
               <a:rPr lang="en-GB" dirty="0"/>
               <a:t> 36pt</a:t>
             </a:r>
-          </a:p>
-        </p:txBody>
-      </p:sp>
-      <p:sp>
-        <p:nvSpPr>
-          <p:cNvPr id="9" name="Text Placeholder 3">
-            <a:extLst>
-              <a:ext uri="{FF2B5EF4-FFF2-40B4-BE49-F238E27FC236}">
-                <a16:creationId xmlns:a16="http://schemas.microsoft.com/office/drawing/2014/main" id="{BD51B5E5-6C5C-CBFB-B0B8-D64DB5640EBC}"/>
-              </a:ext>
-            </a:extLst>
-          </p:cNvPr>
+            <a:endParaRPr lang="en-GB" dirty="0"/>
+          </a:p>
+        </p:txBody>
+      </p:sp>
+      <p:sp>
+        <p:nvSpPr>
+          <p:cNvPr id="9" name="Text Placeholder 3"/>
           <p:cNvSpPr>
             <a:spLocks noGrp="1"/>
           </p:cNvSpPr>
@@ -8397,6 +7458,7 @@
               <a:rPr lang="en-GB" dirty="0"/>
               <a:t>Subheading text style, </a:t>
             </a:r>
+            <a:endParaRPr lang="en-GB" dirty="0"/>
           </a:p>
           <a:p>
             <a:pPr lvl="0"/>
@@ -8404,18 +7466,13 @@
               <a:rPr lang="en-GB" dirty="0"/>
               <a:t>UCL Sans regular 24pt</a:t>
             </a:r>
-          </a:p>
-        </p:txBody>
-      </p:sp>
-      <p:sp>
-        <p:nvSpPr>
-          <p:cNvPr id="6" name="Content Placeholder 3">
-            <a:extLst>
-              <a:ext uri="{FF2B5EF4-FFF2-40B4-BE49-F238E27FC236}">
-                <a16:creationId xmlns:a16="http://schemas.microsoft.com/office/drawing/2014/main" id="{129D6C95-4A5B-9C67-29AF-2DE954D6E43F}"/>
-              </a:ext>
-            </a:extLst>
-          </p:cNvPr>
+            <a:endParaRPr lang="en-GB" dirty="0"/>
+          </a:p>
+        </p:txBody>
+      </p:sp>
+      <p:sp>
+        <p:nvSpPr>
+          <p:cNvPr id="6" name="Content Placeholder 3"/>
           <p:cNvSpPr>
             <a:spLocks noGrp="1"/>
           </p:cNvSpPr>
@@ -8447,9 +7504,8 @@
               </a:spcAft>
               <a:buClrTx/>
               <a:buSzTx/>
-              <a:buFont typeface="Arial" panose="020B0604020202020204" pitchFamily="34" charset="0"/>
-              <a:buNone/>
-              <a:tabLst/>
+              <a:buFont typeface="Arial" panose="020B0604020202090204" pitchFamily="34" charset="0"/>
+              <a:buNone/>
               <a:defRPr sz="1800"/>
             </a:lvl1pPr>
           </a:lstStyle>
@@ -8466,9 +7522,8 @@
               </a:spcAft>
               <a:buClrTx/>
               <a:buSzTx/>
-              <a:buFont typeface="Arial" panose="020B0604020202020204" pitchFamily="34" charset="0"/>
-              <a:buNone/>
-              <a:tabLst/>
+              <a:buFont typeface="Arial" panose="020B0604020202090204" pitchFamily="34" charset="0"/>
+              <a:buNone/>
               <a:defRPr/>
             </a:pPr>
             <a:r>
@@ -8481,13 +7536,7 @@
       </p:sp>
       <p:sp>
         <p:nvSpPr>
-          <p:cNvPr id="7" name="Content Placeholder 5">
-            <a:extLst>
-              <a:ext uri="{FF2B5EF4-FFF2-40B4-BE49-F238E27FC236}">
-                <a16:creationId xmlns:a16="http://schemas.microsoft.com/office/drawing/2014/main" id="{80A7D660-C734-F70C-8436-BC3EFE9A5B2D}"/>
-              </a:ext>
-            </a:extLst>
-          </p:cNvPr>
+          <p:cNvPr id="7" name="Content Placeholder 5"/>
           <p:cNvSpPr>
             <a:spLocks noGrp="1"/>
           </p:cNvSpPr>
@@ -8519,9 +7568,8 @@
               </a:spcAft>
               <a:buClrTx/>
               <a:buSzTx/>
-              <a:buFont typeface="Arial" panose="020B0604020202020204" pitchFamily="34" charset="0"/>
-              <a:buNone/>
-              <a:tabLst/>
+              <a:buFont typeface="Arial" panose="020B0604020202090204" pitchFamily="34" charset="0"/>
+              <a:buNone/>
               <a:defRPr sz="1800"/>
             </a:lvl1pPr>
           </a:lstStyle>
@@ -8538,9 +7586,8 @@
               </a:spcAft>
               <a:buClrTx/>
               <a:buSzTx/>
-              <a:buFont typeface="Arial" panose="020B0604020202020204" pitchFamily="34" charset="0"/>
-              <a:buNone/>
-              <a:tabLst/>
+              <a:buFont typeface="Arial" panose="020B0604020202090204" pitchFamily="34" charset="0"/>
+              <a:buNone/>
               <a:defRPr/>
             </a:pPr>
             <a:r>
@@ -8556,16 +7603,7 @@
       </p:sp>
       <p:sp>
         <p:nvSpPr>
-          <p:cNvPr id="11" name="Rectangle 10">
-            <a:extLst>
-              <a:ext uri="{FF2B5EF4-FFF2-40B4-BE49-F238E27FC236}">
-                <a16:creationId xmlns:a16="http://schemas.microsoft.com/office/drawing/2014/main" id="{82194073-EA37-1F6C-8979-A5566C6B6515}"/>
-              </a:ext>
-              <a:ext uri="{C183D7F6-B498-43B3-948B-1728B52AA6E4}">
-                <adec:decorative xmlns:adec="http://schemas.microsoft.com/office/drawing/2017/decorative" val="1"/>
-              </a:ext>
-            </a:extLst>
-          </p:cNvPr>
+          <p:cNvPr id="11" name="Rectangle 10"/>
           <p:cNvSpPr>
             <a:spLocks noGrp="1" noRot="1" noMove="1" noResize="1" noEditPoints="1" noAdjustHandles="1" noChangeArrowheads="1" noChangeShapeType="1"/>
           </p:cNvSpPr>
@@ -8613,16 +7651,7 @@
       </p:sp>
       <p:pic>
         <p:nvPicPr>
-          <p:cNvPr id="2" name="Picture 1">
-            <a:extLst>
-              <a:ext uri="{FF2B5EF4-FFF2-40B4-BE49-F238E27FC236}">
-                <a16:creationId xmlns:a16="http://schemas.microsoft.com/office/drawing/2014/main" id="{DEC4CDE7-BB95-C8A0-730E-D626B97500E6}"/>
-              </a:ext>
-              <a:ext uri="{C183D7F6-B498-43B3-948B-1728B52AA6E4}">
-                <adec:decorative xmlns:adec="http://schemas.microsoft.com/office/drawing/2017/decorative" val="1"/>
-              </a:ext>
-            </a:extLst>
-          </p:cNvPr>
+          <p:cNvPr id="2" name="Picture 1"/>
           <p:cNvPicPr>
             <a:picLocks noGrp="1" noRot="1" noMove="1" noResize="1" noEditPoints="1" noAdjustHandles="1" noChangeArrowheads="1" noChangeShapeType="1" noCrop="1"/>
           </p:cNvPicPr>
@@ -8645,11 +7674,6 @@
         </p:spPr>
       </p:pic>
     </p:spTree>
-    <p:extLst>
-      <p:ext uri="{BB962C8B-B14F-4D97-AF65-F5344CB8AC3E}">
-        <p14:creationId xmlns:p14="http://schemas.microsoft.com/office/powerpoint/2010/main" val="1827294869"/>
-      </p:ext>
-    </p:extLst>
   </p:cSld>
   <p:clrMapOvr>
     <a:masterClrMapping/>
@@ -8676,13 +7700,7 @@
       </p:grpSpPr>
       <p:sp>
         <p:nvSpPr>
-          <p:cNvPr id="2" name="Picture Placeholder 6" descr="Add a clear, concise statement describing the main purpose of the image">
-            <a:extLst>
-              <a:ext uri="{FF2B5EF4-FFF2-40B4-BE49-F238E27FC236}">
-                <a16:creationId xmlns:a16="http://schemas.microsoft.com/office/drawing/2014/main" id="{ECFBA17C-2B5D-255B-BB8F-D30D74D054C3}"/>
-              </a:ext>
-            </a:extLst>
-          </p:cNvPr>
+          <p:cNvPr id="2" name="Picture Placeholder 6" descr="Add a clear, concise statement describing the main purpose of the image"/>
           <p:cNvSpPr>
             <a:spLocks noGrp="1" noRot="1" noMove="1" noResize="1" noEditPoints="1" noAdjustHandles="1" noChangeArrowheads="1" noChangeShapeType="1"/>
           </p:cNvSpPr>
@@ -8709,16 +7727,7 @@
       </p:sp>
       <p:sp>
         <p:nvSpPr>
-          <p:cNvPr id="11" name="Rectangle 10">
-            <a:extLst>
-              <a:ext uri="{FF2B5EF4-FFF2-40B4-BE49-F238E27FC236}">
-                <a16:creationId xmlns:a16="http://schemas.microsoft.com/office/drawing/2014/main" id="{82194073-EA37-1F6C-8979-A5566C6B6515}"/>
-              </a:ext>
-              <a:ext uri="{C183D7F6-B498-43B3-948B-1728B52AA6E4}">
-                <adec:decorative xmlns:adec="http://schemas.microsoft.com/office/drawing/2017/decorative" val="1"/>
-              </a:ext>
-            </a:extLst>
-          </p:cNvPr>
+          <p:cNvPr id="11" name="Rectangle 10"/>
           <p:cNvSpPr>
             <a:spLocks noGrp="1" noRot="1" noMove="1" noResize="1" noEditPoints="1" noAdjustHandles="1" noChangeArrowheads="1" noChangeShapeType="1"/>
           </p:cNvSpPr>
@@ -8766,16 +7775,7 @@
       </p:sp>
       <p:pic>
         <p:nvPicPr>
-          <p:cNvPr id="6" name="Picture 5">
-            <a:extLst>
-              <a:ext uri="{FF2B5EF4-FFF2-40B4-BE49-F238E27FC236}">
-                <a16:creationId xmlns:a16="http://schemas.microsoft.com/office/drawing/2014/main" id="{2392A8DC-7EF8-37EE-2959-687D81C066F9}"/>
-              </a:ext>
-              <a:ext uri="{C183D7F6-B498-43B3-948B-1728B52AA6E4}">
-                <adec:decorative xmlns:adec="http://schemas.microsoft.com/office/drawing/2017/decorative" val="1"/>
-              </a:ext>
-            </a:extLst>
-          </p:cNvPr>
+          <p:cNvPr id="6" name="Picture 5"/>
           <p:cNvPicPr>
             <a:picLocks noGrp="1" noRot="1" noMove="1" noResize="1" noEditPoints="1" noAdjustHandles="1" noChangeArrowheads="1" noChangeShapeType="1" noCrop="1"/>
           </p:cNvPicPr>
@@ -8798,11 +7798,6 @@
         </p:spPr>
       </p:pic>
     </p:spTree>
-    <p:extLst>
-      <p:ext uri="{BB962C8B-B14F-4D97-AF65-F5344CB8AC3E}">
-        <p14:creationId xmlns:p14="http://schemas.microsoft.com/office/powerpoint/2010/main" val="773437893"/>
-      </p:ext>
-    </p:extLst>
   </p:cSld>
   <p:clrMapOvr>
     <a:masterClrMapping/>
@@ -8837,13 +7832,7 @@
       </p:grpSpPr>
       <p:sp>
         <p:nvSpPr>
-          <p:cNvPr id="2" name="Title 1">
-            <a:extLst>
-              <a:ext uri="{FF2B5EF4-FFF2-40B4-BE49-F238E27FC236}">
-                <a16:creationId xmlns:a16="http://schemas.microsoft.com/office/drawing/2014/main" id="{8EEA5F1D-3A29-463C-D7AF-7132F92B56CD}"/>
-              </a:ext>
-            </a:extLst>
-          </p:cNvPr>
+          <p:cNvPr id="2" name="Title 1"/>
           <p:cNvSpPr>
             <a:spLocks noGrp="1"/>
           </p:cNvSpPr>
@@ -8900,13 +7889,7 @@
       </p:sp>
       <p:sp>
         <p:nvSpPr>
-          <p:cNvPr id="7" name="Text Placeholder 2">
-            <a:extLst>
-              <a:ext uri="{FF2B5EF4-FFF2-40B4-BE49-F238E27FC236}">
-                <a16:creationId xmlns:a16="http://schemas.microsoft.com/office/drawing/2014/main" id="{75E8DED6-3359-C8D7-EDF1-14AE135495B0}"/>
-              </a:ext>
-            </a:extLst>
-          </p:cNvPr>
+          <p:cNvPr id="7" name="Text Placeholder 2"/>
           <p:cNvSpPr>
             <a:spLocks noGrp="1"/>
           </p:cNvSpPr>
@@ -9028,18 +8011,13 @@
               <a:rPr lang="en-GB" dirty="0"/>
               <a:t>Names of Presenters, UCL Sans Regular 24pt</a:t>
             </a:r>
-          </a:p>
-        </p:txBody>
-      </p:sp>
-      <p:sp>
-        <p:nvSpPr>
-          <p:cNvPr id="5" name="Text Placeholder 2">
-            <a:extLst>
-              <a:ext uri="{FF2B5EF4-FFF2-40B4-BE49-F238E27FC236}">
-                <a16:creationId xmlns:a16="http://schemas.microsoft.com/office/drawing/2014/main" id="{91B036D7-E2F6-A505-BD78-D58A7EE2AF66}"/>
-              </a:ext>
-            </a:extLst>
-          </p:cNvPr>
+            <a:endParaRPr lang="en-GB" dirty="0"/>
+          </a:p>
+        </p:txBody>
+      </p:sp>
+      <p:sp>
+        <p:nvSpPr>
+          <p:cNvPr id="5" name="Text Placeholder 2"/>
           <p:cNvSpPr>
             <a:spLocks noGrp="1"/>
           </p:cNvSpPr>
@@ -9161,18 +8139,13 @@
               <a:rPr lang="en-GB" dirty="0"/>
               <a:t>Date, UCL Sans Regular 18pt</a:t>
             </a:r>
-          </a:p>
-        </p:txBody>
-      </p:sp>
-      <p:sp>
-        <p:nvSpPr>
-          <p:cNvPr id="6" name="Text Placeholder 2">
-            <a:extLst>
-              <a:ext uri="{FF2B5EF4-FFF2-40B4-BE49-F238E27FC236}">
-                <a16:creationId xmlns:a16="http://schemas.microsoft.com/office/drawing/2014/main" id="{9B210098-618B-3211-A070-0B31B3AB0AFB}"/>
-              </a:ext>
-            </a:extLst>
-          </p:cNvPr>
+            <a:endParaRPr lang="en-GB" dirty="0"/>
+          </a:p>
+        </p:txBody>
+      </p:sp>
+      <p:sp>
+        <p:nvSpPr>
+          <p:cNvPr id="6" name="Text Placeholder 2"/>
           <p:cNvSpPr>
             <a:spLocks noGrp="1"/>
           </p:cNvSpPr>
@@ -9294,6 +8267,7 @@
               <a:rPr lang="en-GB" dirty="0"/>
               <a:t>Type in your faculty/department/unit name here </a:t>
             </a:r>
+            <a:endParaRPr lang="en-GB" dirty="0"/>
           </a:p>
           <a:p>
             <a:pPr lvl="0"/>
@@ -9301,21 +8275,13 @@
               <a:rPr lang="en-GB" dirty="0"/>
               <a:t>UCL Sans Regular 18pt</a:t>
             </a:r>
-          </a:p>
-        </p:txBody>
-      </p:sp>
-      <p:sp>
-        <p:nvSpPr>
-          <p:cNvPr id="4" name="Rectangle 3">
-            <a:extLst>
-              <a:ext uri="{FF2B5EF4-FFF2-40B4-BE49-F238E27FC236}">
-                <a16:creationId xmlns:a16="http://schemas.microsoft.com/office/drawing/2014/main" id="{7903D562-9BC1-5B2A-B39F-74DAD6DF10C0}"/>
-              </a:ext>
-              <a:ext uri="{C183D7F6-B498-43B3-948B-1728B52AA6E4}">
-                <adec:decorative xmlns:adec="http://schemas.microsoft.com/office/drawing/2017/decorative" val="1"/>
-              </a:ext>
-            </a:extLst>
-          </p:cNvPr>
+            <a:endParaRPr lang="en-GB" dirty="0"/>
+          </a:p>
+        </p:txBody>
+      </p:sp>
+      <p:sp>
+        <p:nvSpPr>
+          <p:cNvPr id="4" name="Rectangle 3"/>
           <p:cNvSpPr>
             <a:spLocks noGrp="1" noRot="1" noMove="1" noResize="1" noEditPoints="1" noAdjustHandles="1" noChangeArrowheads="1" noChangeShapeType="1"/>
           </p:cNvSpPr>
@@ -9363,16 +8329,7 @@
       </p:sp>
       <p:pic>
         <p:nvPicPr>
-          <p:cNvPr id="8" name="Picture 7" descr="UCL logo, University College London">
-            <a:extLst>
-              <a:ext uri="{FF2B5EF4-FFF2-40B4-BE49-F238E27FC236}">
-                <a16:creationId xmlns:a16="http://schemas.microsoft.com/office/drawing/2014/main" id="{015A3936-D42C-5AA9-C95F-13B329034A6F}"/>
-              </a:ext>
-              <a:ext uri="{C183D7F6-B498-43B3-948B-1728B52AA6E4}">
-                <adec:decorative xmlns:adec="http://schemas.microsoft.com/office/drawing/2017/decorative" val="0"/>
-              </a:ext>
-            </a:extLst>
-          </p:cNvPr>
+          <p:cNvPr id="8" name="Picture 7" descr="UCL logo, University College London"/>
           <p:cNvPicPr>
             <a:picLocks noGrp="1" noRot="1" noMove="1" noResize="1" noEditPoints="1" noAdjustHandles="1" noChangeArrowheads="1" noChangeShapeType="1" noCrop="1"/>
           </p:cNvPicPr>
@@ -9395,11 +8352,6 @@
         </p:spPr>
       </p:pic>
     </p:spTree>
-    <p:extLst>
-      <p:ext uri="{BB962C8B-B14F-4D97-AF65-F5344CB8AC3E}">
-        <p14:creationId xmlns:p14="http://schemas.microsoft.com/office/powerpoint/2010/main" val="4107889911"/>
-      </p:ext>
-    </p:extLst>
   </p:cSld>
   <p:clrMapOvr>
     <a:masterClrMapping/>
@@ -9434,13 +8386,7 @@
       </p:grpSpPr>
       <p:sp>
         <p:nvSpPr>
-          <p:cNvPr id="8" name="Picture Placeholder">
-            <a:extLst>
-              <a:ext uri="{FF2B5EF4-FFF2-40B4-BE49-F238E27FC236}">
-                <a16:creationId xmlns:a16="http://schemas.microsoft.com/office/drawing/2014/main" id="{28531EDC-6E9D-171F-68E1-2D8DBFCDB40E}"/>
-              </a:ext>
-            </a:extLst>
-          </p:cNvPr>
+          <p:cNvPr id="8" name="Picture Placeholder"/>
           <p:cNvSpPr>
             <a:spLocks noGrp="1"/>
           </p:cNvSpPr>
@@ -9509,13 +8455,7 @@
       </p:sp>
       <p:sp>
         <p:nvSpPr>
-          <p:cNvPr id="2" name="Title 1">
-            <a:extLst>
-              <a:ext uri="{FF2B5EF4-FFF2-40B4-BE49-F238E27FC236}">
-                <a16:creationId xmlns:a16="http://schemas.microsoft.com/office/drawing/2014/main" id="{8EEA5F1D-3A29-463C-D7AF-7132F92B56CD}"/>
-              </a:ext>
-            </a:extLst>
-          </p:cNvPr>
+          <p:cNvPr id="2" name="Title 1"/>
           <p:cNvSpPr>
             <a:spLocks noGrp="1"/>
           </p:cNvSpPr>
@@ -9572,16 +8512,7 @@
       </p:sp>
       <p:sp>
         <p:nvSpPr>
-          <p:cNvPr id="4" name="Rectangle 3">
-            <a:extLst>
-              <a:ext uri="{FF2B5EF4-FFF2-40B4-BE49-F238E27FC236}">
-                <a16:creationId xmlns:a16="http://schemas.microsoft.com/office/drawing/2014/main" id="{7903D562-9BC1-5B2A-B39F-74DAD6DF10C0}"/>
-              </a:ext>
-              <a:ext uri="{C183D7F6-B498-43B3-948B-1728B52AA6E4}">
-                <adec:decorative xmlns:adec="http://schemas.microsoft.com/office/drawing/2017/decorative" val="1"/>
-              </a:ext>
-            </a:extLst>
-          </p:cNvPr>
+          <p:cNvPr id="4" name="Rectangle 3"/>
           <p:cNvSpPr>
             <a:spLocks noGrp="1" noRot="1" noMove="1" noResize="1" noEditPoints="1" noAdjustHandles="1" noChangeArrowheads="1" noChangeShapeType="1"/>
           </p:cNvSpPr>
@@ -9629,13 +8560,7 @@
       </p:sp>
       <p:pic>
         <p:nvPicPr>
-          <p:cNvPr id="7" name="Picture 6" descr="UCL logo, University College London">
-            <a:extLst>
-              <a:ext uri="{FF2B5EF4-FFF2-40B4-BE49-F238E27FC236}">
-                <a16:creationId xmlns:a16="http://schemas.microsoft.com/office/drawing/2014/main" id="{D18708AF-A3A2-2F68-E544-B6827803E2D8}"/>
-              </a:ext>
-            </a:extLst>
-          </p:cNvPr>
+          <p:cNvPr id="7" name="Picture 6" descr="UCL logo, University College London"/>
           <p:cNvPicPr>
             <a:picLocks noGrp="1" noRot="1" noMove="1" noResize="1" noEditPoints="1" noAdjustHandles="1" noChangeArrowheads="1" noChangeShapeType="1" noCrop="1"/>
           </p:cNvPicPr>
@@ -9658,11 +8583,6 @@
         </p:spPr>
       </p:pic>
     </p:spTree>
-    <p:extLst>
-      <p:ext uri="{BB962C8B-B14F-4D97-AF65-F5344CB8AC3E}">
-        <p14:creationId xmlns:p14="http://schemas.microsoft.com/office/powerpoint/2010/main" val="2556291075"/>
-      </p:ext>
-    </p:extLst>
   </p:cSld>
   <p:clrMapOvr>
     <a:masterClrMapping/>
@@ -9697,16 +8617,7 @@
       </p:grpSpPr>
       <p:sp>
         <p:nvSpPr>
-          <p:cNvPr id="2" name="Title 1">
-            <a:extLst>
-              <a:ext uri="{FF2B5EF4-FFF2-40B4-BE49-F238E27FC236}">
-                <a16:creationId xmlns:a16="http://schemas.microsoft.com/office/drawing/2014/main" id="{8EEA5F1D-3A29-463C-D7AF-7132F92B56CD}"/>
-              </a:ext>
-              <a:ext uri="{C183D7F6-B498-43B3-948B-1728B52AA6E4}">
-                <adec:decorative xmlns:adec="http://schemas.microsoft.com/office/drawing/2017/decorative" val="0"/>
-              </a:ext>
-            </a:extLst>
-          </p:cNvPr>
+          <p:cNvPr id="2" name="Title 1"/>
           <p:cNvSpPr>
             <a:spLocks noGrp="1"/>
           </p:cNvSpPr>
@@ -9756,13 +8667,7 @@
       </p:sp>
       <p:sp>
         <p:nvSpPr>
-          <p:cNvPr id="7" name="Text Placeholder 2">
-            <a:extLst>
-              <a:ext uri="{FF2B5EF4-FFF2-40B4-BE49-F238E27FC236}">
-                <a16:creationId xmlns:a16="http://schemas.microsoft.com/office/drawing/2014/main" id="{75E8DED6-3359-C8D7-EDF1-14AE135495B0}"/>
-              </a:ext>
-            </a:extLst>
-          </p:cNvPr>
+          <p:cNvPr id="7" name="Text Placeholder 2"/>
           <p:cNvSpPr>
             <a:spLocks noGrp="1"/>
           </p:cNvSpPr>
@@ -9884,18 +8789,13 @@
               <a:rPr lang="en-GB" dirty="0"/>
               <a:t>Subheading, UCL Sans Regular 24pt</a:t>
             </a:r>
-          </a:p>
-        </p:txBody>
-      </p:sp>
-      <p:sp>
-        <p:nvSpPr>
-          <p:cNvPr id="8" name="Text Placeholder 2">
-            <a:extLst>
-              <a:ext uri="{FF2B5EF4-FFF2-40B4-BE49-F238E27FC236}">
-                <a16:creationId xmlns:a16="http://schemas.microsoft.com/office/drawing/2014/main" id="{E595666D-8684-C6D9-B7E0-40470F82CBD5}"/>
-              </a:ext>
-            </a:extLst>
-          </p:cNvPr>
+            <a:endParaRPr lang="en-GB" dirty="0"/>
+          </a:p>
+        </p:txBody>
+      </p:sp>
+      <p:sp>
+        <p:nvSpPr>
+          <p:cNvPr id="8" name="Text Placeholder 2"/>
           <p:cNvSpPr>
             <a:spLocks noGrp="1"/>
           </p:cNvSpPr>
@@ -10017,21 +8917,13 @@
               <a:rPr lang="en-GB" dirty="0"/>
               <a:t>Body text, UCL Sans Regular 18pt</a:t>
             </a:r>
-          </a:p>
-        </p:txBody>
-      </p:sp>
-      <p:sp>
-        <p:nvSpPr>
-          <p:cNvPr id="6" name="Picture Placeholder 2" descr="Add a clear, concise statement describing the main purpose of the image">
-            <a:extLst>
-              <a:ext uri="{FF2B5EF4-FFF2-40B4-BE49-F238E27FC236}">
-                <a16:creationId xmlns:a16="http://schemas.microsoft.com/office/drawing/2014/main" id="{82876633-1ADE-997E-991B-B6FA6635A20E}"/>
-              </a:ext>
-              <a:ext uri="{C183D7F6-B498-43B3-948B-1728B52AA6E4}">
-                <adec:decorative xmlns:adec="http://schemas.microsoft.com/office/drawing/2017/decorative" val="0"/>
-              </a:ext>
-            </a:extLst>
-          </p:cNvPr>
+            <a:endParaRPr lang="en-GB" dirty="0"/>
+          </a:p>
+        </p:txBody>
+      </p:sp>
+      <p:sp>
+        <p:nvSpPr>
+          <p:cNvPr id="6" name="Picture Placeholder 2" descr="Add a clear, concise statement describing the main purpose of the image"/>
           <p:cNvSpPr>
             <a:spLocks noGrp="1" noRot="1" noMove="1" noResize="1" noEditPoints="1" noAdjustHandles="1" noChangeArrowheads="1" noChangeShapeType="1"/>
           </p:cNvSpPr>
@@ -10103,16 +8995,7 @@
       </p:sp>
       <p:pic>
         <p:nvPicPr>
-          <p:cNvPr id="3" name="Picture 2">
-            <a:extLst>
-              <a:ext uri="{FF2B5EF4-FFF2-40B4-BE49-F238E27FC236}">
-                <a16:creationId xmlns:a16="http://schemas.microsoft.com/office/drawing/2014/main" id="{C3458C44-E5EC-6C0F-07EE-14F8EFD85190}"/>
-              </a:ext>
-              <a:ext uri="{C183D7F6-B498-43B3-948B-1728B52AA6E4}">
-                <adec:decorative xmlns:adec="http://schemas.microsoft.com/office/drawing/2017/decorative" val="1"/>
-              </a:ext>
-            </a:extLst>
-          </p:cNvPr>
+          <p:cNvPr id="3" name="Picture 2"/>
           <p:cNvPicPr>
             <a:picLocks noGrp="1" noRot="1" noMove="1" noResize="1" noEditPoints="1" noAdjustHandles="1" noChangeArrowheads="1" noChangeShapeType="1" noCrop="1"/>
           </p:cNvPicPr>
@@ -10135,11 +9018,6 @@
         </p:spPr>
       </p:pic>
     </p:spTree>
-    <p:extLst>
-      <p:ext uri="{BB962C8B-B14F-4D97-AF65-F5344CB8AC3E}">
-        <p14:creationId xmlns:p14="http://schemas.microsoft.com/office/powerpoint/2010/main" val="3823335058"/>
-      </p:ext>
-    </p:extLst>
   </p:cSld>
   <p:clrMapOvr>
     <a:masterClrMapping/>
@@ -10174,16 +9052,7 @@
       </p:grpSpPr>
       <p:sp>
         <p:nvSpPr>
-          <p:cNvPr id="2" name="Title 1">
-            <a:extLst>
-              <a:ext uri="{FF2B5EF4-FFF2-40B4-BE49-F238E27FC236}">
-                <a16:creationId xmlns:a16="http://schemas.microsoft.com/office/drawing/2014/main" id="{8EEA5F1D-3A29-463C-D7AF-7132F92B56CD}"/>
-              </a:ext>
-              <a:ext uri="{C183D7F6-B498-43B3-948B-1728B52AA6E4}">
-                <adec:decorative xmlns:adec="http://schemas.microsoft.com/office/drawing/2017/decorative" val="0"/>
-              </a:ext>
-            </a:extLst>
-          </p:cNvPr>
+          <p:cNvPr id="2" name="Title 1"/>
           <p:cNvSpPr>
             <a:spLocks noGrp="1"/>
           </p:cNvSpPr>
@@ -10233,13 +9102,7 @@
       </p:sp>
       <p:sp>
         <p:nvSpPr>
-          <p:cNvPr id="7" name="Text Placeholder 2">
-            <a:extLst>
-              <a:ext uri="{FF2B5EF4-FFF2-40B4-BE49-F238E27FC236}">
-                <a16:creationId xmlns:a16="http://schemas.microsoft.com/office/drawing/2014/main" id="{75E8DED6-3359-C8D7-EDF1-14AE135495B0}"/>
-              </a:ext>
-            </a:extLst>
-          </p:cNvPr>
+          <p:cNvPr id="7" name="Text Placeholder 2"/>
           <p:cNvSpPr>
             <a:spLocks noGrp="1"/>
           </p:cNvSpPr>
@@ -10361,18 +9224,13 @@
               <a:rPr lang="en-GB" dirty="0"/>
               <a:t>Subheading, UCL Sans Regular 24pt</a:t>
             </a:r>
-          </a:p>
-        </p:txBody>
-      </p:sp>
-      <p:sp>
-        <p:nvSpPr>
-          <p:cNvPr id="8" name="Text Placeholder 2">
-            <a:extLst>
-              <a:ext uri="{FF2B5EF4-FFF2-40B4-BE49-F238E27FC236}">
-                <a16:creationId xmlns:a16="http://schemas.microsoft.com/office/drawing/2014/main" id="{E595666D-8684-C6D9-B7E0-40470F82CBD5}"/>
-              </a:ext>
-            </a:extLst>
-          </p:cNvPr>
+            <a:endParaRPr lang="en-GB" dirty="0"/>
+          </a:p>
+        </p:txBody>
+      </p:sp>
+      <p:sp>
+        <p:nvSpPr>
+          <p:cNvPr id="8" name="Text Placeholder 2"/>
           <p:cNvSpPr>
             <a:spLocks noGrp="1"/>
           </p:cNvSpPr>
@@ -10494,21 +9352,13 @@
               <a:rPr lang="en-GB" dirty="0"/>
               <a:t>Body text, UCL Sans Regular 18pt</a:t>
             </a:r>
-          </a:p>
-        </p:txBody>
-      </p:sp>
-      <p:sp>
-        <p:nvSpPr>
-          <p:cNvPr id="6" name="Picture Placeholder 2" descr="Add a clear, concise statement describing the main purpose of the image">
-            <a:extLst>
-              <a:ext uri="{FF2B5EF4-FFF2-40B4-BE49-F238E27FC236}">
-                <a16:creationId xmlns:a16="http://schemas.microsoft.com/office/drawing/2014/main" id="{82876633-1ADE-997E-991B-B6FA6635A20E}"/>
-              </a:ext>
-              <a:ext uri="{C183D7F6-B498-43B3-948B-1728B52AA6E4}">
-                <adec:decorative xmlns:adec="http://schemas.microsoft.com/office/drawing/2017/decorative" val="0"/>
-              </a:ext>
-            </a:extLst>
-          </p:cNvPr>
+            <a:endParaRPr lang="en-GB" dirty="0"/>
+          </a:p>
+        </p:txBody>
+      </p:sp>
+      <p:sp>
+        <p:nvSpPr>
+          <p:cNvPr id="6" name="Picture Placeholder 2" descr="Add a clear, concise statement describing the main purpose of the image"/>
           <p:cNvSpPr>
             <a:spLocks noGrp="1" noRot="1" noMove="1" noResize="1" noEditPoints="1" noAdjustHandles="1" noChangeArrowheads="1" noChangeShapeType="1"/>
           </p:cNvSpPr>
@@ -10580,16 +9430,7 @@
       </p:sp>
       <p:pic>
         <p:nvPicPr>
-          <p:cNvPr id="3" name="Picture 2">
-            <a:extLst>
-              <a:ext uri="{FF2B5EF4-FFF2-40B4-BE49-F238E27FC236}">
-                <a16:creationId xmlns:a16="http://schemas.microsoft.com/office/drawing/2014/main" id="{1E18122F-70D4-67D5-8E4D-F01945D7B59B}"/>
-              </a:ext>
-              <a:ext uri="{C183D7F6-B498-43B3-948B-1728B52AA6E4}">
-                <adec:decorative xmlns:adec="http://schemas.microsoft.com/office/drawing/2017/decorative" val="1"/>
-              </a:ext>
-            </a:extLst>
-          </p:cNvPr>
+          <p:cNvPr id="3" name="Picture 2"/>
           <p:cNvPicPr>
             <a:picLocks noGrp="1" noRot="1" noMove="1" noResize="1" noEditPoints="1" noAdjustHandles="1" noChangeArrowheads="1" noChangeShapeType="1" noCrop="1"/>
           </p:cNvPicPr>
@@ -10612,11 +9453,6 @@
         </p:spPr>
       </p:pic>
     </p:spTree>
-    <p:extLst>
-      <p:ext uri="{BB962C8B-B14F-4D97-AF65-F5344CB8AC3E}">
-        <p14:creationId xmlns:p14="http://schemas.microsoft.com/office/powerpoint/2010/main" val="2911210734"/>
-      </p:ext>
-    </p:extLst>
   </p:cSld>
   <p:clrMapOvr>
     <a:masterClrMapping/>
@@ -10651,13 +9487,7 @@
       </p:grpSpPr>
       <p:sp>
         <p:nvSpPr>
-          <p:cNvPr id="2" name="Title 1">
-            <a:extLst>
-              <a:ext uri="{FF2B5EF4-FFF2-40B4-BE49-F238E27FC236}">
-                <a16:creationId xmlns:a16="http://schemas.microsoft.com/office/drawing/2014/main" id="{8EEA5F1D-3A29-463C-D7AF-7132F92B56CD}"/>
-              </a:ext>
-            </a:extLst>
-          </p:cNvPr>
+          <p:cNvPr id="2" name="Title 1"/>
           <p:cNvSpPr>
             <a:spLocks noGrp="1"/>
           </p:cNvSpPr>
@@ -10709,18 +9539,13 @@
               <a:rPr lang="en-GB" dirty="0"/>
               <a:t> 36pt</a:t>
             </a:r>
-          </a:p>
-        </p:txBody>
-      </p:sp>
-      <p:sp>
-        <p:nvSpPr>
-          <p:cNvPr id="9" name="Content Placeholder">
-            <a:extLst>
-              <a:ext uri="{FF2B5EF4-FFF2-40B4-BE49-F238E27FC236}">
-                <a16:creationId xmlns:a16="http://schemas.microsoft.com/office/drawing/2014/main" id="{56CD648F-431D-5F73-408C-9A9A725008CE}"/>
-              </a:ext>
-            </a:extLst>
-          </p:cNvPr>
+            <a:endParaRPr lang="en-GB" dirty="0"/>
+          </a:p>
+        </p:txBody>
+      </p:sp>
+      <p:sp>
+        <p:nvSpPr>
+          <p:cNvPr id="9" name="Content Placeholder"/>
           <p:cNvSpPr>
             <a:spLocks noGrp="1"/>
           </p:cNvSpPr>
@@ -10751,21 +9576,13 @@
               <a:rPr lang="en-GB" dirty="0"/>
               <a:t>Space for graphs, images, charts, videos</a:t>
             </a:r>
+            <a:endParaRPr lang="en-GB" dirty="0"/>
           </a:p>
         </p:txBody>
       </p:sp>
       <p:pic>
         <p:nvPicPr>
-          <p:cNvPr id="7" name="Picture 6">
-            <a:extLst>
-              <a:ext uri="{FF2B5EF4-FFF2-40B4-BE49-F238E27FC236}">
-                <a16:creationId xmlns:a16="http://schemas.microsoft.com/office/drawing/2014/main" id="{86D0927E-B17D-5AAB-7B62-A7F6E96D7448}"/>
-              </a:ext>
-              <a:ext uri="{C183D7F6-B498-43B3-948B-1728B52AA6E4}">
-                <adec:decorative xmlns:adec="http://schemas.microsoft.com/office/drawing/2017/decorative" val="1"/>
-              </a:ext>
-            </a:extLst>
-          </p:cNvPr>
+          <p:cNvPr id="7" name="Picture 6"/>
           <p:cNvPicPr>
             <a:picLocks noGrp="1" noRot="1" noChangeAspect="1" noMove="1" noResize="1" noEditPoints="1" noAdjustHandles="1" noChangeArrowheads="1" noChangeShapeType="1" noCrop="1"/>
           </p:cNvPicPr>
@@ -10788,11 +9605,6 @@
         </p:spPr>
       </p:pic>
     </p:spTree>
-    <p:extLst>
-      <p:ext uri="{BB962C8B-B14F-4D97-AF65-F5344CB8AC3E}">
-        <p14:creationId xmlns:p14="http://schemas.microsoft.com/office/powerpoint/2010/main" val="114353661"/>
-      </p:ext>
-    </p:extLst>
   </p:cSld>
   <p:clrMapOvr>
     <a:masterClrMapping/>
@@ -10827,13 +9639,7 @@
       </p:grpSpPr>
       <p:sp>
         <p:nvSpPr>
-          <p:cNvPr id="15" name="Text Placeholder 3">
-            <a:extLst>
-              <a:ext uri="{FF2B5EF4-FFF2-40B4-BE49-F238E27FC236}">
-                <a16:creationId xmlns:a16="http://schemas.microsoft.com/office/drawing/2014/main" id="{D734C2A9-9A5D-B1B8-4932-DFDAC1AE7955}"/>
-              </a:ext>
-            </a:extLst>
-          </p:cNvPr>
+          <p:cNvPr id="15" name="Text Placeholder 3"/>
           <p:cNvSpPr>
             <a:spLocks noGrp="1"/>
           </p:cNvSpPr>
@@ -10907,6 +9713,7 @@
               <a:rPr lang="en-GB" dirty="0"/>
               <a:t>Headline </a:t>
             </a:r>
+            <a:endParaRPr lang="en-GB" dirty="0"/>
           </a:p>
           <a:p>
             <a:pPr lvl="0"/>
@@ -10914,6 +9721,7 @@
               <a:rPr lang="en-GB" dirty="0"/>
               <a:t>UCL Sans </a:t>
             </a:r>
+            <a:endParaRPr lang="en-GB" dirty="0"/>
           </a:p>
           <a:p>
             <a:pPr lvl="0"/>
@@ -10925,18 +9733,13 @@
               <a:rPr lang="en-GB" dirty="0"/>
               <a:t> 36pt</a:t>
             </a:r>
-          </a:p>
-        </p:txBody>
-      </p:sp>
-      <p:sp>
-        <p:nvSpPr>
-          <p:cNvPr id="16" name="Text Placeholder 3">
-            <a:extLst>
-              <a:ext uri="{FF2B5EF4-FFF2-40B4-BE49-F238E27FC236}">
-                <a16:creationId xmlns:a16="http://schemas.microsoft.com/office/drawing/2014/main" id="{779E96EC-744C-3144-B51D-E5100BEE942C}"/>
-              </a:ext>
-            </a:extLst>
-          </p:cNvPr>
+            <a:endParaRPr lang="en-GB" dirty="0"/>
+          </a:p>
+        </p:txBody>
+      </p:sp>
+      <p:sp>
+        <p:nvSpPr>
+          <p:cNvPr id="16" name="Text Placeholder 3"/>
           <p:cNvSpPr>
             <a:spLocks noGrp="1"/>
           </p:cNvSpPr>
@@ -11010,6 +9813,7 @@
               <a:rPr lang="en-GB" dirty="0"/>
               <a:t>Subheading text style, </a:t>
             </a:r>
+            <a:endParaRPr lang="en-GB" dirty="0"/>
           </a:p>
           <a:p>
             <a:pPr lvl="0"/>
@@ -11017,21 +9821,13 @@
               <a:rPr lang="en-GB" dirty="0"/>
               <a:t>UCL Sans regular 24pt</a:t>
             </a:r>
-          </a:p>
-        </p:txBody>
-      </p:sp>
-      <p:sp>
-        <p:nvSpPr>
-          <p:cNvPr id="12" name="Content Placeholder 3">
-            <a:extLst>
-              <a:ext uri="{FF2B5EF4-FFF2-40B4-BE49-F238E27FC236}">
-                <a16:creationId xmlns:a16="http://schemas.microsoft.com/office/drawing/2014/main" id="{A0CEB380-FACF-CB25-2505-20906C2E85C2}"/>
-              </a:ext>
-              <a:ext uri="{C183D7F6-B498-43B3-948B-1728B52AA6E4}">
-                <adec:decorative xmlns:adec="http://schemas.microsoft.com/office/drawing/2017/decorative" val="0"/>
-              </a:ext>
-            </a:extLst>
-          </p:cNvPr>
+            <a:endParaRPr lang="en-GB" dirty="0"/>
+          </a:p>
+        </p:txBody>
+      </p:sp>
+      <p:sp>
+        <p:nvSpPr>
+          <p:cNvPr id="12" name="Content Placeholder 3"/>
           <p:cNvSpPr>
             <a:spLocks noGrp="1"/>
           </p:cNvSpPr>
@@ -11063,9 +9859,8 @@
               </a:spcAft>
               <a:buClrTx/>
               <a:buSzTx/>
-              <a:buFont typeface="Arial" panose="020B0604020202020204" pitchFamily="34" charset="0"/>
-              <a:buNone/>
-              <a:tabLst/>
+              <a:buFont typeface="Arial" panose="020B0604020202090204" pitchFamily="34" charset="0"/>
+              <a:buNone/>
               <a:defRPr sz="1800"/>
             </a:lvl1pPr>
           </a:lstStyle>
@@ -11082,9 +9877,8 @@
               </a:spcAft>
               <a:buClrTx/>
               <a:buSzTx/>
-              <a:buFont typeface="Arial" panose="020B0604020202020204" pitchFamily="34" charset="0"/>
-              <a:buNone/>
-              <a:tabLst/>
+              <a:buFont typeface="Arial" panose="020B0604020202090204" pitchFamily="34" charset="0"/>
+              <a:buNone/>
               <a:defRPr/>
             </a:pPr>
             <a:r>
@@ -11097,13 +9891,7 @@
       </p:sp>
       <p:sp>
         <p:nvSpPr>
-          <p:cNvPr id="13" name="Content Placeholder 5">
-            <a:extLst>
-              <a:ext uri="{FF2B5EF4-FFF2-40B4-BE49-F238E27FC236}">
-                <a16:creationId xmlns:a16="http://schemas.microsoft.com/office/drawing/2014/main" id="{EFB165C1-BA6C-CC63-70EA-E4881C9B3782}"/>
-              </a:ext>
-            </a:extLst>
-          </p:cNvPr>
+          <p:cNvPr id="13" name="Content Placeholder 5"/>
           <p:cNvSpPr>
             <a:spLocks noGrp="1"/>
           </p:cNvSpPr>
@@ -11135,9 +9923,8 @@
               </a:spcAft>
               <a:buClrTx/>
               <a:buSzTx/>
-              <a:buFont typeface="Arial" panose="020B0604020202020204" pitchFamily="34" charset="0"/>
-              <a:buNone/>
-              <a:tabLst/>
+              <a:buFont typeface="Arial" panose="020B0604020202090204" pitchFamily="34" charset="0"/>
+              <a:buNone/>
               <a:defRPr sz="1800"/>
             </a:lvl1pPr>
           </a:lstStyle>
@@ -11154,9 +9941,8 @@
               </a:spcAft>
               <a:buClrTx/>
               <a:buSzTx/>
-              <a:buFont typeface="Arial" panose="020B0604020202020204" pitchFamily="34" charset="0"/>
-              <a:buNone/>
-              <a:tabLst/>
+              <a:buFont typeface="Arial" panose="020B0604020202090204" pitchFamily="34" charset="0"/>
+              <a:buNone/>
               <a:defRPr/>
             </a:pPr>
             <a:r>
@@ -11172,16 +9958,7 @@
       </p:sp>
       <p:pic>
         <p:nvPicPr>
-          <p:cNvPr id="4" name="Picture 3">
-            <a:extLst>
-              <a:ext uri="{FF2B5EF4-FFF2-40B4-BE49-F238E27FC236}">
-                <a16:creationId xmlns:a16="http://schemas.microsoft.com/office/drawing/2014/main" id="{ECA53278-43EB-727A-BB6A-515939010519}"/>
-              </a:ext>
-              <a:ext uri="{C183D7F6-B498-43B3-948B-1728B52AA6E4}">
-                <adec:decorative xmlns:adec="http://schemas.microsoft.com/office/drawing/2017/decorative" val="1"/>
-              </a:ext>
-            </a:extLst>
-          </p:cNvPr>
+          <p:cNvPr id="4" name="Picture 3"/>
           <p:cNvPicPr>
             <a:picLocks noGrp="1" noRot="1" noChangeAspect="1" noMove="1" noResize="1" noEditPoints="1" noAdjustHandles="1" noChangeArrowheads="1" noChangeShapeType="1" noCrop="1"/>
           </p:cNvPicPr>
@@ -11204,11 +9981,6 @@
         </p:spPr>
       </p:pic>
     </p:spTree>
-    <p:extLst>
-      <p:ext uri="{BB962C8B-B14F-4D97-AF65-F5344CB8AC3E}">
-        <p14:creationId xmlns:p14="http://schemas.microsoft.com/office/powerpoint/2010/main" val="526822512"/>
-      </p:ext>
-    </p:extLst>
   </p:cSld>
   <p:clrMapOvr>
     <a:masterClrMapping/>
@@ -11243,13 +10015,7 @@
       </p:grpSpPr>
       <p:sp>
         <p:nvSpPr>
-          <p:cNvPr id="2" name="Title 1">
-            <a:extLst>
-              <a:ext uri="{FF2B5EF4-FFF2-40B4-BE49-F238E27FC236}">
-                <a16:creationId xmlns:a16="http://schemas.microsoft.com/office/drawing/2014/main" id="{8EEA5F1D-3A29-463C-D7AF-7132F92B56CD}"/>
-              </a:ext>
-            </a:extLst>
-          </p:cNvPr>
+          <p:cNvPr id="2" name="Title 1"/>
           <p:cNvSpPr>
             <a:spLocks noGrp="1"/>
           </p:cNvSpPr>
@@ -11301,18 +10067,13 @@
               <a:rPr lang="en-GB" dirty="0"/>
               <a:t> 36pt</a:t>
             </a:r>
-          </a:p>
-        </p:txBody>
-      </p:sp>
-      <p:sp>
-        <p:nvSpPr>
-          <p:cNvPr id="4" name="Text Placeholder 7">
-            <a:extLst>
-              <a:ext uri="{FF2B5EF4-FFF2-40B4-BE49-F238E27FC236}">
-                <a16:creationId xmlns:a16="http://schemas.microsoft.com/office/drawing/2014/main" id="{C5D11EE6-C4E2-EE93-39A9-79D248FDD196}"/>
-              </a:ext>
-            </a:extLst>
-          </p:cNvPr>
+            <a:endParaRPr lang="en-GB" dirty="0"/>
+          </a:p>
+        </p:txBody>
+      </p:sp>
+      <p:sp>
+        <p:nvSpPr>
+          <p:cNvPr id="4" name="Text Placeholder 7"/>
           <p:cNvSpPr>
             <a:spLocks noGrp="1"/>
           </p:cNvSpPr>
@@ -11336,27 +10097,27 @@
               <a:lnSpc>
                 <a:spcPct val="100000"/>
               </a:lnSpc>
-              <a:buFont typeface="Wingdings" pitchFamily="2" charset="2"/>
+              <a:buFont typeface="Wingdings" panose="05000000000000000000" pitchFamily="2" charset="2"/>
               <a:buNone/>
               <a:defRPr sz="1800"/>
             </a:lvl1pPr>
             <a:lvl2pPr>
-              <a:buFont typeface="Wingdings" pitchFamily="2" charset="2"/>
+              <a:buFont typeface="Wingdings" panose="05000000000000000000" pitchFamily="2" charset="2"/>
               <a:buChar char="§"/>
               <a:defRPr sz="1800"/>
             </a:lvl2pPr>
             <a:lvl3pPr>
-              <a:buFont typeface="Wingdings" pitchFamily="2" charset="2"/>
+              <a:buFont typeface="Wingdings" panose="05000000000000000000" pitchFamily="2" charset="2"/>
               <a:buChar char="§"/>
               <a:defRPr sz="1800"/>
             </a:lvl3pPr>
             <a:lvl4pPr>
-              <a:buFont typeface="Wingdings" pitchFamily="2" charset="2"/>
+              <a:buFont typeface="Wingdings" panose="05000000000000000000" pitchFamily="2" charset="2"/>
               <a:buChar char="§"/>
               <a:defRPr sz="1800"/>
             </a:lvl4pPr>
             <a:lvl5pPr>
-              <a:buFont typeface="Wingdings" pitchFamily="2" charset="2"/>
+              <a:buFont typeface="Wingdings" panose="05000000000000000000" pitchFamily="2" charset="2"/>
               <a:buChar char="§"/>
               <a:defRPr sz="1800"/>
             </a:lvl5pPr>
@@ -11373,16 +10134,7 @@
       </p:sp>
       <p:pic>
         <p:nvPicPr>
-          <p:cNvPr id="7" name="Picture 6">
-            <a:extLst>
-              <a:ext uri="{FF2B5EF4-FFF2-40B4-BE49-F238E27FC236}">
-                <a16:creationId xmlns:a16="http://schemas.microsoft.com/office/drawing/2014/main" id="{0D96BD17-ACBE-B136-C0C2-347FD6061AFF}"/>
-              </a:ext>
-              <a:ext uri="{C183D7F6-B498-43B3-948B-1728B52AA6E4}">
-                <adec:decorative xmlns:adec="http://schemas.microsoft.com/office/drawing/2017/decorative" val="1"/>
-              </a:ext>
-            </a:extLst>
-          </p:cNvPr>
+          <p:cNvPr id="7" name="Picture 6"/>
           <p:cNvPicPr>
             <a:picLocks noGrp="1" noRot="1" noChangeAspect="1" noMove="1" noResize="1" noEditPoints="1" noAdjustHandles="1" noChangeArrowheads="1" noChangeShapeType="1" noCrop="1"/>
           </p:cNvPicPr>
@@ -11405,11 +10157,6 @@
         </p:spPr>
       </p:pic>
     </p:spTree>
-    <p:extLst>
-      <p:ext uri="{BB962C8B-B14F-4D97-AF65-F5344CB8AC3E}">
-        <p14:creationId xmlns:p14="http://schemas.microsoft.com/office/powerpoint/2010/main" val="3917175777"/>
-      </p:ext>
-    </p:extLst>
   </p:cSld>
   <p:clrMapOvr>
     <a:masterClrMapping/>
@@ -11441,13 +10188,7 @@
       </p:grpSpPr>
       <p:sp>
         <p:nvSpPr>
-          <p:cNvPr id="2" name="Title Placeholder 1">
-            <a:extLst>
-              <a:ext uri="{FF2B5EF4-FFF2-40B4-BE49-F238E27FC236}">
-                <a16:creationId xmlns:a16="http://schemas.microsoft.com/office/drawing/2014/main" id="{F5BDE158-E1C9-B1AC-ECDC-73BA00A9F65D}"/>
-              </a:ext>
-            </a:extLst>
-          </p:cNvPr>
+          <p:cNvPr id="2" name="Title Placeholder 1"/>
           <p:cNvSpPr>
             <a:spLocks noGrp="1" noChangeArrowheads="1"/>
           </p:cNvSpPr>
@@ -11488,11 +10229,7 @@
           </a:extLst>
         </p:spPr>
         <p:txBody>
-          <a:bodyPr vert="horz" wrap="square" lIns="91440" tIns="45720" rIns="91440" bIns="45720" numCol="1" anchor="ctr" anchorCtr="0" compatLnSpc="1">
-            <a:prstTxWarp prst="textNoShape">
-              <a:avLst/>
-            </a:prstTxWarp>
-          </a:bodyPr>
+          <a:bodyPr vert="horz" wrap="square" lIns="91440" tIns="45720" rIns="91440" bIns="45720" numCol="1" anchor="ctr" anchorCtr="0" compatLnSpc="1"/>
           <a:lstStyle/>
           <a:p>
             <a:pPr lvl="0"/>
@@ -11506,13 +10243,7 @@
       </p:sp>
       <p:sp>
         <p:nvSpPr>
-          <p:cNvPr id="3" name="Text Placeholder 2">
-            <a:extLst>
-              <a:ext uri="{FF2B5EF4-FFF2-40B4-BE49-F238E27FC236}">
-                <a16:creationId xmlns:a16="http://schemas.microsoft.com/office/drawing/2014/main" id="{BD52742C-E3D3-975E-E4B8-7BDB2954BB99}"/>
-              </a:ext>
-            </a:extLst>
-          </p:cNvPr>
+          <p:cNvPr id="3" name="Text Placeholder 2"/>
           <p:cNvSpPr>
             <a:spLocks noGrp="1" noChangeArrowheads="1"/>
           </p:cNvSpPr>
@@ -11553,11 +10284,7 @@
           </a:extLst>
         </p:spPr>
         <p:txBody>
-          <a:bodyPr vert="horz" wrap="square" lIns="91440" tIns="45720" rIns="91440" bIns="45720" numCol="1" anchor="t" anchorCtr="0" compatLnSpc="1">
-            <a:prstTxWarp prst="textNoShape">
-              <a:avLst/>
-            </a:prstTxWarp>
-          </a:bodyPr>
+          <a:bodyPr vert="horz" wrap="square" lIns="91440" tIns="45720" rIns="91440" bIns="45720" numCol="1" anchor="t" anchorCtr="0" compatLnSpc="1"/>
           <a:lstStyle/>
           <a:p>
             <a:pPr lvl="0"/>
@@ -11565,6 +10292,7 @@
               <a:rPr lang="en-GB" altLang="en-US"/>
               <a:t>Click to edit Master text styles</a:t>
             </a:r>
+            <a:endParaRPr lang="en-GB" altLang="en-US"/>
           </a:p>
           <a:p>
             <a:pPr lvl="1"/>
@@ -11572,6 +10300,7 @@
               <a:rPr lang="en-GB" altLang="en-US"/>
               <a:t>Second level</a:t>
             </a:r>
+            <a:endParaRPr lang="en-GB" altLang="en-US"/>
           </a:p>
           <a:p>
             <a:pPr lvl="2"/>
@@ -11579,6 +10308,7 @@
               <a:rPr lang="en-GB" altLang="en-US"/>
               <a:t>Third level</a:t>
             </a:r>
+            <a:endParaRPr lang="en-GB" altLang="en-US"/>
           </a:p>
           <a:p>
             <a:pPr lvl="3"/>
@@ -11586,6 +10316,7 @@
               <a:rPr lang="en-GB" altLang="en-US"/>
               <a:t>Fourth level</a:t>
             </a:r>
+            <a:endParaRPr lang="en-GB" altLang="en-US"/>
           </a:p>
           <a:p>
             <a:pPr lvl="4"/>
@@ -11598,31 +10329,26 @@
         </p:txBody>
       </p:sp>
     </p:spTree>
-    <p:extLst>
-      <p:ext uri="{BB962C8B-B14F-4D97-AF65-F5344CB8AC3E}">
-        <p14:creationId xmlns:p14="http://schemas.microsoft.com/office/powerpoint/2010/main" val="3129269336"/>
-      </p:ext>
-    </p:extLst>
   </p:cSld>
   <p:clrMap bg1="lt1" tx1="dk1" bg2="lt2" tx2="dk2" accent1="accent1" accent2="accent2" accent3="accent3" accent4="accent4" accent5="accent5" accent6="accent6" hlink="hlink" folHlink="folHlink"/>
   <p:sldLayoutIdLst>
-    <p:sldLayoutId id="2147483718" r:id="rId1"/>
-    <p:sldLayoutId id="2147483794" r:id="rId2"/>
-    <p:sldLayoutId id="2147483799" r:id="rId3"/>
-    <p:sldLayoutId id="2147483804" r:id="rId4"/>
-    <p:sldLayoutId id="2147483723" r:id="rId5"/>
-    <p:sldLayoutId id="2147483805" r:id="rId6"/>
-    <p:sldLayoutId id="2147483734" r:id="rId7"/>
-    <p:sldLayoutId id="2147483720" r:id="rId8"/>
-    <p:sldLayoutId id="2147483725" r:id="rId9"/>
-    <p:sldLayoutId id="2147483759" r:id="rId10"/>
-    <p:sldLayoutId id="2147483733" r:id="rId11"/>
-    <p:sldLayoutId id="2147483726" r:id="rId12"/>
-    <p:sldLayoutId id="2147483729" r:id="rId13"/>
-    <p:sldLayoutId id="2147483727" r:id="rId14"/>
-    <p:sldLayoutId id="2147483802" r:id="rId15"/>
-    <p:sldLayoutId id="2147483806" r:id="rId16"/>
-    <p:sldLayoutId id="2147483728" r:id="rId17"/>
+    <p:sldLayoutId id="2147483649" r:id="rId1"/>
+    <p:sldLayoutId id="2147483650" r:id="rId2"/>
+    <p:sldLayoutId id="2147483651" r:id="rId3"/>
+    <p:sldLayoutId id="2147483652" r:id="rId4"/>
+    <p:sldLayoutId id="2147483653" r:id="rId5"/>
+    <p:sldLayoutId id="2147483654" r:id="rId6"/>
+    <p:sldLayoutId id="2147483655" r:id="rId7"/>
+    <p:sldLayoutId id="2147483656" r:id="rId8"/>
+    <p:sldLayoutId id="2147483657" r:id="rId9"/>
+    <p:sldLayoutId id="2147483658" r:id="rId10"/>
+    <p:sldLayoutId id="2147483659" r:id="rId11"/>
+    <p:sldLayoutId id="2147483660" r:id="rId12"/>
+    <p:sldLayoutId id="2147483661" r:id="rId13"/>
+    <p:sldLayoutId id="2147483662" r:id="rId14"/>
+    <p:sldLayoutId id="2147483663" r:id="rId15"/>
+    <p:sldLayoutId id="2147483664" r:id="rId16"/>
+    <p:sldLayoutId id="2147483665" r:id="rId17"/>
   </p:sldLayoutIdLst>
   <p:txStyles>
     <p:titleStyle>
@@ -11652,7 +10378,7 @@
         <a:spcBef>
           <a:spcPts val="1000"/>
         </a:spcBef>
-        <a:buFont typeface="Wingdings" pitchFamily="2" charset="2"/>
+        <a:buFont typeface="Wingdings" panose="05000000000000000000" pitchFamily="2" charset="2"/>
         <a:buChar char="§"/>
         <a:defRPr sz="2800" kern="1200">
           <a:solidFill>
@@ -11670,7 +10396,7 @@
         <a:spcBef>
           <a:spcPts val="500"/>
         </a:spcBef>
-        <a:buFont typeface="Wingdings" pitchFamily="2" charset="2"/>
+        <a:buFont typeface="Wingdings" panose="05000000000000000000" pitchFamily="2" charset="2"/>
         <a:buChar char="§"/>
         <a:defRPr sz="2400" kern="1200">
           <a:solidFill>
@@ -11688,7 +10414,7 @@
         <a:spcBef>
           <a:spcPts val="500"/>
         </a:spcBef>
-        <a:buFont typeface="Wingdings" pitchFamily="2" charset="2"/>
+        <a:buFont typeface="Wingdings" panose="05000000000000000000" pitchFamily="2" charset="2"/>
         <a:buChar char="§"/>
         <a:defRPr sz="2000" kern="1200">
           <a:solidFill>
@@ -11706,7 +10432,7 @@
         <a:spcBef>
           <a:spcPts val="500"/>
         </a:spcBef>
-        <a:buFont typeface="Wingdings" pitchFamily="2" charset="2"/>
+        <a:buFont typeface="Wingdings" panose="05000000000000000000" pitchFamily="2" charset="2"/>
         <a:buChar char="§"/>
         <a:defRPr sz="1800" kern="1200">
           <a:solidFill>
@@ -11724,7 +10450,7 @@
         <a:spcBef>
           <a:spcPts val="500"/>
         </a:spcBef>
-        <a:buFont typeface="Wingdings" pitchFamily="2" charset="2"/>
+        <a:buFont typeface="Wingdings" panose="05000000000000000000" pitchFamily="2" charset="2"/>
         <a:buChar char="§"/>
         <a:defRPr sz="1800" kern="1200">
           <a:solidFill>
@@ -11742,7 +10468,7 @@
         <a:spcBef>
           <a:spcPts val="500"/>
         </a:spcBef>
-        <a:buFont typeface="Arial" panose="020B0604020202020204" pitchFamily="34" charset="0"/>
+        <a:buFont typeface="Arial" panose="020B0604020202090204" pitchFamily="34" charset="0"/>
         <a:buChar char="•"/>
         <a:defRPr sz="1800" kern="1200">
           <a:solidFill>
@@ -11760,7 +10486,7 @@
         <a:spcBef>
           <a:spcPts val="500"/>
         </a:spcBef>
-        <a:buFont typeface="Arial" panose="020B0604020202020204" pitchFamily="34" charset="0"/>
+        <a:buFont typeface="Arial" panose="020B0604020202090204" pitchFamily="34" charset="0"/>
         <a:buChar char="•"/>
         <a:defRPr sz="1800" kern="1200">
           <a:solidFill>
@@ -11778,7 +10504,7 @@
         <a:spcBef>
           <a:spcPts val="500"/>
         </a:spcBef>
-        <a:buFont typeface="Arial" panose="020B0604020202020204" pitchFamily="34" charset="0"/>
+        <a:buFont typeface="Arial" panose="020B0604020202090204" pitchFamily="34" charset="0"/>
         <a:buChar char="•"/>
         <a:defRPr sz="1800" kern="1200">
           <a:solidFill>
@@ -11796,7 +10522,7 @@
         <a:spcBef>
           <a:spcPts val="500"/>
         </a:spcBef>
-        <a:buFont typeface="Arial" panose="020B0604020202020204" pitchFamily="34" charset="0"/>
+        <a:buFont typeface="Arial" panose="020B0604020202090204" pitchFamily="34" charset="0"/>
         <a:buChar char="•"/>
         <a:defRPr sz="1800" kern="1200">
           <a:solidFill>
@@ -11904,112 +10630,6 @@
       </a:lvl9pPr>
     </p:otherStyle>
   </p:txStyles>
-  <p:extLst>
-    <p:ext uri="{27BBF7A9-308A-43DC-89C8-2F10F3537804}">
-      <p15:sldGuideLst xmlns:p15="http://schemas.microsoft.com/office/powerpoint/2012/main">
-        <p15:guide id="1" orient="horz" pos="258" userDrawn="1">
-          <p15:clr>
-            <a:srgbClr val="F26B43"/>
-          </p15:clr>
-        </p15:guide>
-        <p15:guide id="2" pos="258" userDrawn="1">
-          <p15:clr>
-            <a:srgbClr val="F26B43"/>
-          </p15:clr>
-        </p15:guide>
-        <p15:guide id="3" orient="horz" pos="4064" userDrawn="1">
-          <p15:clr>
-            <a:srgbClr val="F26B43"/>
-          </p15:clr>
-        </p15:guide>
-        <p15:guide id="4" pos="853" userDrawn="1">
-          <p15:clr>
-            <a:srgbClr val="F26B43"/>
-          </p15:clr>
-        </p15:guide>
-        <p15:guide id="5" pos="1451" userDrawn="1">
-          <p15:clr>
-            <a:srgbClr val="F26B43"/>
-          </p15:clr>
-        </p15:guide>
-        <p15:guide id="6" pos="2048" userDrawn="1">
-          <p15:clr>
-            <a:srgbClr val="F26B43"/>
-          </p15:clr>
-        </p15:guide>
-        <p15:guide id="7" pos="2643" userDrawn="1">
-          <p15:clr>
-            <a:srgbClr val="F26B43"/>
-          </p15:clr>
-        </p15:guide>
-        <p15:guide id="8" pos="3840" userDrawn="1">
-          <p15:clr>
-            <a:srgbClr val="F26B43"/>
-          </p15:clr>
-        </p15:guide>
-        <p15:guide id="9" pos="3241" userDrawn="1">
-          <p15:clr>
-            <a:srgbClr val="F26B43"/>
-          </p15:clr>
-        </p15:guide>
-        <p15:guide id="10" pos="4436" userDrawn="1">
-          <p15:clr>
-            <a:srgbClr val="F26B43"/>
-          </p15:clr>
-        </p15:guide>
-        <p15:guide id="11" pos="5034" userDrawn="1">
-          <p15:clr>
-            <a:srgbClr val="F26B43"/>
-          </p15:clr>
-        </p15:guide>
-        <p15:guide id="12" pos="5630" userDrawn="1">
-          <p15:clr>
-            <a:srgbClr val="F26B43"/>
-          </p15:clr>
-        </p15:guide>
-        <p15:guide id="13" pos="6226" userDrawn="1">
-          <p15:clr>
-            <a:srgbClr val="F26B43"/>
-          </p15:clr>
-        </p15:guide>
-        <p15:guide id="14" pos="6824" userDrawn="1">
-          <p15:clr>
-            <a:srgbClr val="F26B43"/>
-          </p15:clr>
-        </p15:guide>
-        <p15:guide id="15" pos="7421" userDrawn="1">
-          <p15:clr>
-            <a:srgbClr val="F26B43"/>
-          </p15:clr>
-        </p15:guide>
-        <p15:guide id="16" orient="horz" pos="3430" userDrawn="1">
-          <p15:clr>
-            <a:srgbClr val="F26B43"/>
-          </p15:clr>
-        </p15:guide>
-        <p15:guide id="17" orient="horz" pos="2796" userDrawn="1">
-          <p15:clr>
-            <a:srgbClr val="F26B43"/>
-          </p15:clr>
-        </p15:guide>
-        <p15:guide id="18" orient="horz" pos="894" userDrawn="1">
-          <p15:clr>
-            <a:srgbClr val="F26B43"/>
-          </p15:clr>
-        </p15:guide>
-        <p15:guide id="19" orient="horz" pos="1526" userDrawn="1">
-          <p15:clr>
-            <a:srgbClr val="F26B43"/>
-          </p15:clr>
-        </p15:guide>
-        <p15:guide id="20" orient="horz" pos="2160" userDrawn="1">
-          <p15:clr>
-            <a:srgbClr val="F26B43"/>
-          </p15:clr>
-        </p15:guide>
-      </p15:sldGuideLst>
-    </p:ext>
-  </p:extLst>
 </p:sldMaster>
 </file>
 
@@ -12037,13 +10657,7 @@
       </p:grpSpPr>
       <p:sp>
         <p:nvSpPr>
-          <p:cNvPr id="2" name="Title Placeholder 1">
-            <a:extLst>
-              <a:ext uri="{FF2B5EF4-FFF2-40B4-BE49-F238E27FC236}">
-                <a16:creationId xmlns:a16="http://schemas.microsoft.com/office/drawing/2014/main" id="{F34B97B0-6D67-3762-FAC1-F9C15B608960}"/>
-              </a:ext>
-            </a:extLst>
-          </p:cNvPr>
+          <p:cNvPr id="2" name="Title Placeholder 1"/>
           <p:cNvSpPr>
             <a:spLocks noGrp="1" noChangeArrowheads="1"/>
           </p:cNvSpPr>
@@ -12084,11 +10698,7 @@
           </a:extLst>
         </p:spPr>
         <p:txBody>
-          <a:bodyPr vert="horz" wrap="square" lIns="91440" tIns="45720" rIns="91440" bIns="45720" numCol="1" anchor="ctr" anchorCtr="0" compatLnSpc="1">
-            <a:prstTxWarp prst="textNoShape">
-              <a:avLst/>
-            </a:prstTxWarp>
-          </a:bodyPr>
+          <a:bodyPr vert="horz" wrap="square" lIns="91440" tIns="45720" rIns="91440" bIns="45720" numCol="1" anchor="ctr" anchorCtr="0" compatLnSpc="1"/>
           <a:lstStyle/>
           <a:p>
             <a:pPr lvl="0"/>
@@ -12102,13 +10712,7 @@
       </p:sp>
       <p:sp>
         <p:nvSpPr>
-          <p:cNvPr id="3" name="Text Placeholder 2">
-            <a:extLst>
-              <a:ext uri="{FF2B5EF4-FFF2-40B4-BE49-F238E27FC236}">
-                <a16:creationId xmlns:a16="http://schemas.microsoft.com/office/drawing/2014/main" id="{5E18E98D-5DC5-F844-0B8F-29580141F4D9}"/>
-              </a:ext>
-            </a:extLst>
-          </p:cNvPr>
+          <p:cNvPr id="3" name="Text Placeholder 2"/>
           <p:cNvSpPr>
             <a:spLocks noGrp="1" noChangeArrowheads="1"/>
           </p:cNvSpPr>
@@ -12149,11 +10753,7 @@
           </a:extLst>
         </p:spPr>
         <p:txBody>
-          <a:bodyPr vert="horz" wrap="square" lIns="91440" tIns="45720" rIns="91440" bIns="45720" numCol="1" anchor="t" anchorCtr="0" compatLnSpc="1">
-            <a:prstTxWarp prst="textNoShape">
-              <a:avLst/>
-            </a:prstTxWarp>
-          </a:bodyPr>
+          <a:bodyPr vert="horz" wrap="square" lIns="91440" tIns="45720" rIns="91440" bIns="45720" numCol="1" anchor="t" anchorCtr="0" compatLnSpc="1"/>
           <a:lstStyle/>
           <a:p>
             <a:pPr lvl="0"/>
@@ -12161,6 +10761,7 @@
               <a:rPr lang="en-GB" altLang="en-US" dirty="0"/>
               <a:t>Click to edit Master text styles</a:t>
             </a:r>
+            <a:endParaRPr lang="en-GB" altLang="en-US" dirty="0"/>
           </a:p>
           <a:p>
             <a:pPr lvl="1"/>
@@ -12168,6 +10769,7 @@
               <a:rPr lang="en-GB" altLang="en-US" dirty="0"/>
               <a:t>Second level</a:t>
             </a:r>
+            <a:endParaRPr lang="en-GB" altLang="en-US" dirty="0"/>
           </a:p>
           <a:p>
             <a:pPr lvl="2"/>
@@ -12175,6 +10777,7 @@
               <a:rPr lang="en-GB" altLang="en-US" dirty="0"/>
               <a:t>Third level</a:t>
             </a:r>
+            <a:endParaRPr lang="en-GB" altLang="en-US" dirty="0"/>
           </a:p>
           <a:p>
             <a:pPr lvl="3"/>
@@ -12182,6 +10785,7 @@
               <a:rPr lang="en-GB" altLang="en-US" dirty="0"/>
               <a:t>Fourth level</a:t>
             </a:r>
+            <a:endParaRPr lang="en-GB" altLang="en-US" dirty="0"/>
           </a:p>
           <a:p>
             <a:pPr lvl="4"/>
@@ -12194,22 +10798,17 @@
         </p:txBody>
       </p:sp>
     </p:spTree>
-    <p:extLst>
-      <p:ext uri="{BB962C8B-B14F-4D97-AF65-F5344CB8AC3E}">
-        <p14:creationId xmlns:p14="http://schemas.microsoft.com/office/powerpoint/2010/main" val="434988953"/>
-      </p:ext>
-    </p:extLst>
   </p:cSld>
   <p:clrMap bg1="lt1" tx1="dk1" bg2="lt2" tx2="dk2" accent1="accent1" accent2="accent2" accent3="accent3" accent4="accent4" accent5="accent5" accent6="accent6" hlink="hlink" folHlink="folHlink"/>
   <p:sldLayoutIdLst>
-    <p:sldLayoutId id="2147483761" r:id="rId1"/>
-    <p:sldLayoutId id="2147483763" r:id="rId2"/>
-    <p:sldLayoutId id="2147483767" r:id="rId3"/>
-    <p:sldLayoutId id="2147483769" r:id="rId4"/>
-    <p:sldLayoutId id="2147483803" r:id="rId5"/>
-    <p:sldLayoutId id="2147483770" r:id="rId6"/>
-    <p:sldLayoutId id="2147483771" r:id="rId7"/>
-    <p:sldLayoutId id="2147483807" r:id="rId8"/>
+    <p:sldLayoutId id="2147483667" r:id="rId1"/>
+    <p:sldLayoutId id="2147483668" r:id="rId2"/>
+    <p:sldLayoutId id="2147483669" r:id="rId3"/>
+    <p:sldLayoutId id="2147483670" r:id="rId4"/>
+    <p:sldLayoutId id="2147483671" r:id="rId5"/>
+    <p:sldLayoutId id="2147483672" r:id="rId6"/>
+    <p:sldLayoutId id="2147483673" r:id="rId7"/>
+    <p:sldLayoutId id="2147483674" r:id="rId8"/>
   </p:sldLayoutIdLst>
   <p:txStyles>
     <p:titleStyle>
@@ -12239,7 +10838,7 @@
         <a:spcBef>
           <a:spcPts val="1000"/>
         </a:spcBef>
-        <a:buFont typeface="Wingdings" pitchFamily="2" charset="2"/>
+        <a:buFont typeface="Wingdings" panose="05000000000000000000" pitchFamily="2" charset="2"/>
         <a:buChar char="§"/>
         <a:defRPr sz="2800" kern="1200">
           <a:solidFill>
@@ -12257,7 +10856,7 @@
         <a:spcBef>
           <a:spcPts val="500"/>
         </a:spcBef>
-        <a:buFont typeface="Wingdings" pitchFamily="2" charset="2"/>
+        <a:buFont typeface="Wingdings" panose="05000000000000000000" pitchFamily="2" charset="2"/>
         <a:buChar char="§"/>
         <a:defRPr sz="2400" kern="1200">
           <a:solidFill>
@@ -12275,7 +10874,7 @@
         <a:spcBef>
           <a:spcPts val="500"/>
         </a:spcBef>
-        <a:buFont typeface="Wingdings" pitchFamily="2" charset="2"/>
+        <a:buFont typeface="Wingdings" panose="05000000000000000000" pitchFamily="2" charset="2"/>
         <a:buChar char="§"/>
         <a:defRPr sz="2000" kern="1200">
           <a:solidFill>
@@ -12293,7 +10892,7 @@
         <a:spcBef>
           <a:spcPts val="500"/>
         </a:spcBef>
-        <a:buFont typeface="Wingdings" pitchFamily="2" charset="2"/>
+        <a:buFont typeface="Wingdings" panose="05000000000000000000" pitchFamily="2" charset="2"/>
         <a:buChar char="§"/>
         <a:defRPr sz="1800" kern="1200">
           <a:solidFill>
@@ -12311,7 +10910,7 @@
         <a:spcBef>
           <a:spcPts val="500"/>
         </a:spcBef>
-        <a:buFont typeface="Wingdings" pitchFamily="2" charset="2"/>
+        <a:buFont typeface="Wingdings" panose="05000000000000000000" pitchFamily="2" charset="2"/>
         <a:buChar char="§"/>
         <a:defRPr sz="1800" kern="1200">
           <a:solidFill>
@@ -12329,7 +10928,7 @@
         <a:spcBef>
           <a:spcPts val="500"/>
         </a:spcBef>
-        <a:buFont typeface="Arial" panose="020B0604020202020204" pitchFamily="34" charset="0"/>
+        <a:buFont typeface="Arial" panose="020B0604020202090204" pitchFamily="34" charset="0"/>
         <a:buChar char="•"/>
         <a:defRPr sz="1800" kern="1200">
           <a:solidFill>
@@ -12347,7 +10946,7 @@
         <a:spcBef>
           <a:spcPts val="500"/>
         </a:spcBef>
-        <a:buFont typeface="Arial" panose="020B0604020202020204" pitchFamily="34" charset="0"/>
+        <a:buFont typeface="Arial" panose="020B0604020202090204" pitchFamily="34" charset="0"/>
         <a:buChar char="•"/>
         <a:defRPr sz="1800" kern="1200">
           <a:solidFill>
@@ -12365,7 +10964,7 @@
         <a:spcBef>
           <a:spcPts val="500"/>
         </a:spcBef>
-        <a:buFont typeface="Arial" panose="020B0604020202020204" pitchFamily="34" charset="0"/>
+        <a:buFont typeface="Arial" panose="020B0604020202090204" pitchFamily="34" charset="0"/>
         <a:buChar char="•"/>
         <a:defRPr sz="1800" kern="1200">
           <a:solidFill>
@@ -12383,7 +10982,7 @@
         <a:spcBef>
           <a:spcPts val="500"/>
         </a:spcBef>
-        <a:buFont typeface="Arial" panose="020B0604020202020204" pitchFamily="34" charset="0"/>
+        <a:buFont typeface="Arial" panose="020B0604020202090204" pitchFamily="34" charset="0"/>
         <a:buChar char="•"/>
         <a:defRPr sz="1800" kern="1200">
           <a:solidFill>
@@ -12491,112 +11090,6 @@
       </a:lvl9pPr>
     </p:otherStyle>
   </p:txStyles>
-  <p:extLst>
-    <p:ext uri="{27BBF7A9-308A-43DC-89C8-2F10F3537804}">
-      <p15:sldGuideLst xmlns:p15="http://schemas.microsoft.com/office/powerpoint/2012/main">
-        <p15:guide id="1" orient="horz" pos="258" userDrawn="1">
-          <p15:clr>
-            <a:srgbClr val="F26B43"/>
-          </p15:clr>
-        </p15:guide>
-        <p15:guide id="2" pos="258" userDrawn="1">
-          <p15:clr>
-            <a:srgbClr val="F26B43"/>
-          </p15:clr>
-        </p15:guide>
-        <p15:guide id="3" orient="horz" pos="4064" userDrawn="1">
-          <p15:clr>
-            <a:srgbClr val="F26B43"/>
-          </p15:clr>
-        </p15:guide>
-        <p15:guide id="4" pos="853" userDrawn="1">
-          <p15:clr>
-            <a:srgbClr val="F26B43"/>
-          </p15:clr>
-        </p15:guide>
-        <p15:guide id="5" pos="1451" userDrawn="1">
-          <p15:clr>
-            <a:srgbClr val="F26B43"/>
-          </p15:clr>
-        </p15:guide>
-        <p15:guide id="6" pos="2048" userDrawn="1">
-          <p15:clr>
-            <a:srgbClr val="F26B43"/>
-          </p15:clr>
-        </p15:guide>
-        <p15:guide id="7" pos="2643" userDrawn="1">
-          <p15:clr>
-            <a:srgbClr val="F26B43"/>
-          </p15:clr>
-        </p15:guide>
-        <p15:guide id="8" pos="3840" userDrawn="1">
-          <p15:clr>
-            <a:srgbClr val="F26B43"/>
-          </p15:clr>
-        </p15:guide>
-        <p15:guide id="9" pos="3241" userDrawn="1">
-          <p15:clr>
-            <a:srgbClr val="F26B43"/>
-          </p15:clr>
-        </p15:guide>
-        <p15:guide id="10" pos="4436" userDrawn="1">
-          <p15:clr>
-            <a:srgbClr val="F26B43"/>
-          </p15:clr>
-        </p15:guide>
-        <p15:guide id="11" pos="5034" userDrawn="1">
-          <p15:clr>
-            <a:srgbClr val="F26B43"/>
-          </p15:clr>
-        </p15:guide>
-        <p15:guide id="12" pos="5630" userDrawn="1">
-          <p15:clr>
-            <a:srgbClr val="F26B43"/>
-          </p15:clr>
-        </p15:guide>
-        <p15:guide id="13" pos="6226" userDrawn="1">
-          <p15:clr>
-            <a:srgbClr val="F26B43"/>
-          </p15:clr>
-        </p15:guide>
-        <p15:guide id="14" pos="6824" userDrawn="1">
-          <p15:clr>
-            <a:srgbClr val="F26B43"/>
-          </p15:clr>
-        </p15:guide>
-        <p15:guide id="15" pos="7421" userDrawn="1">
-          <p15:clr>
-            <a:srgbClr val="F26B43"/>
-          </p15:clr>
-        </p15:guide>
-        <p15:guide id="16" orient="horz" pos="3430" userDrawn="1">
-          <p15:clr>
-            <a:srgbClr val="F26B43"/>
-          </p15:clr>
-        </p15:guide>
-        <p15:guide id="17" orient="horz" pos="2796" userDrawn="1">
-          <p15:clr>
-            <a:srgbClr val="F26B43"/>
-          </p15:clr>
-        </p15:guide>
-        <p15:guide id="18" orient="horz" pos="894" userDrawn="1">
-          <p15:clr>
-            <a:srgbClr val="F26B43"/>
-          </p15:clr>
-        </p15:guide>
-        <p15:guide id="19" orient="horz" pos="1526" userDrawn="1">
-          <p15:clr>
-            <a:srgbClr val="F26B43"/>
-          </p15:clr>
-        </p15:guide>
-        <p15:guide id="20" orient="horz" pos="2160" userDrawn="1">
-          <p15:clr>
-            <a:srgbClr val="F26B43"/>
-          </p15:clr>
-        </p15:guide>
-      </p15:sldGuideLst>
-    </p:ext>
-  </p:extLst>
 </p:sldMaster>
 </file>
 
@@ -12619,13 +11112,7 @@
       </p:grpSpPr>
       <p:pic>
         <p:nvPicPr>
-          <p:cNvPr id="17" name="Picture Placeholder 16" descr="A couple of women standing on a balcony&#10;&#10;AI-generated content may be incorrect.">
-            <a:extLst>
-              <a:ext uri="{FF2B5EF4-FFF2-40B4-BE49-F238E27FC236}">
-                <a16:creationId xmlns:a16="http://schemas.microsoft.com/office/drawing/2014/main" id="{0A90CA10-9DE7-0491-090F-697AACAB2AAB}"/>
-              </a:ext>
-            </a:extLst>
-          </p:cNvPr>
+          <p:cNvPr id="17" name="Picture Placeholder 16" descr="A couple of women standing on a balcony&#10;&#10;AI-generated content may be incorrect."/>
           <p:cNvPicPr>
             <a:picLocks noGrp="1" noChangeAspect="1"/>
           </p:cNvPicPr>
@@ -12634,7 +11121,7 @@
           </p:nvPr>
         </p:nvPicPr>
         <p:blipFill>
-          <a:blip r:embed="rId3"/>
+          <a:blip r:embed="rId1"/>
           <a:srcRect t="7813" b="7813"/>
           <a:stretch>
             <a:fillRect/>
@@ -12649,13 +11136,7 @@
       </p:pic>
       <p:sp>
         <p:nvSpPr>
-          <p:cNvPr id="2" name="Text Placeholder 1">
-            <a:extLst>
-              <a:ext uri="{FF2B5EF4-FFF2-40B4-BE49-F238E27FC236}">
-                <a16:creationId xmlns:a16="http://schemas.microsoft.com/office/drawing/2014/main" id="{5C7C7C80-F696-54B1-112A-211BB4345912}"/>
-              </a:ext>
-            </a:extLst>
-          </p:cNvPr>
+          <p:cNvPr id="2" name="Text Placeholder 1"/>
           <p:cNvSpPr>
             <a:spLocks noGrp="1"/>
           </p:cNvSpPr>
@@ -12669,27 +11150,30 @@
           <a:lstStyle/>
           <a:p>
             <a:r>
-              <a:rPr lang="en-GB">
-                <a:latin typeface="UCL Sans SemiBold"/>
-              </a:rPr>
-              <a:t>Title</a:t>
-            </a:r>
-            <a:endParaRPr lang="en-US"/>
-          </a:p>
-        </p:txBody>
-      </p:sp>
-      <p:sp>
-        <p:nvSpPr>
-          <p:cNvPr id="9" name="Rectangle 8">
-            <a:extLst>
-              <a:ext uri="{FF2B5EF4-FFF2-40B4-BE49-F238E27FC236}">
-                <a16:creationId xmlns:a16="http://schemas.microsoft.com/office/drawing/2014/main" id="{CF925875-E786-ECD9-222A-1CD7BF9CBA61}"/>
-              </a:ext>
-              <a:ext uri="{C183D7F6-B498-43B3-948B-1728B52AA6E4}">
-                <adec:decorative xmlns:adec="http://schemas.microsoft.com/office/drawing/2017/decorative" val="1"/>
-              </a:ext>
-            </a:extLst>
-          </p:cNvPr>
+              <a:rPr lang="en-US" altLang="en-US"/>
+              <a:t>Teaching a Self-</a:t>
+            </a:r>
+            <a:endParaRPr lang="en-US" altLang="en-US"/>
+          </a:p>
+          <a:p>
+            <a:r>
+              <a:rPr lang="en-US" altLang="en-US"/>
+              <a:t>Driving Car to</a:t>
+            </a:r>
+            <a:endParaRPr lang="en-US" altLang="en-US"/>
+          </a:p>
+          <a:p>
+            <a:r>
+              <a:rPr lang="en-US" altLang="en-US"/>
+              <a:t>Cross Safely​</a:t>
+            </a:r>
+            <a:endParaRPr lang="en-US" altLang="en-US"/>
+          </a:p>
+        </p:txBody>
+      </p:sp>
+      <p:sp>
+        <p:nvSpPr>
+          <p:cNvPr id="9" name="Rectangle 8"/>
           <p:cNvSpPr>
             <a:spLocks noGrp="1" noRot="1" noMove="1" noResize="1" noEditPoints="1" noAdjustHandles="1" noChangeArrowheads="1" noChangeShapeType="1"/>
           </p:cNvSpPr>
@@ -12737,13 +11221,7 @@
       </p:sp>
       <p:sp>
         <p:nvSpPr>
-          <p:cNvPr id="3" name="Text Placeholder 2">
-            <a:extLst>
-              <a:ext uri="{FF2B5EF4-FFF2-40B4-BE49-F238E27FC236}">
-                <a16:creationId xmlns:a16="http://schemas.microsoft.com/office/drawing/2014/main" id="{1FC30198-0A2B-B64B-808C-86C51E56DB58}"/>
-              </a:ext>
-            </a:extLst>
-          </p:cNvPr>
+          <p:cNvPr id="3" name="Text Placeholder 2"/>
           <p:cNvSpPr>
             <a:spLocks noGrp="1"/>
           </p:cNvSpPr>
@@ -12757,24 +11235,20 @@
           <a:lstStyle/>
           <a:p>
             <a:r>
-              <a:rPr lang="en-GB">
+              <a:rPr lang="en-US" altLang="en-GB">
                 <a:latin typeface="UCL Sans"/>
               </a:rPr>
-              <a:t>Full name</a:t>
-            </a:r>
-            <a:endParaRPr lang="en-US"/>
-          </a:p>
-        </p:txBody>
-      </p:sp>
-      <p:sp>
-        <p:nvSpPr>
-          <p:cNvPr id="6" name="Text Placeholder 5">
-            <a:extLst>
-              <a:ext uri="{FF2B5EF4-FFF2-40B4-BE49-F238E27FC236}">
-                <a16:creationId xmlns:a16="http://schemas.microsoft.com/office/drawing/2014/main" id="{C62915C7-E4C8-08AA-1334-CA5998A021CD}"/>
-              </a:ext>
-            </a:extLst>
-          </p:cNvPr>
+              <a:t>Jiaqi Xie</a:t>
+            </a:r>
+            <a:endParaRPr lang="en-US" altLang="en-GB">
+              <a:latin typeface="UCL Sans"/>
+            </a:endParaRPr>
+          </a:p>
+        </p:txBody>
+      </p:sp>
+      <p:sp>
+        <p:nvSpPr>
+          <p:cNvPr id="6" name="Text Placeholder 5"/>
           <p:cNvSpPr>
             <a:spLocks noGrp="1"/>
           </p:cNvSpPr>
@@ -12788,31 +11262,27 @@
           <a:lstStyle/>
           <a:p>
             <a:r>
-              <a:rPr lang="en-GB">
+              <a:rPr lang="en-US" altLang="en-GB">
                 <a:latin typeface="UCL Sans"/>
               </a:rPr>
-              <a:t>Student number</a:t>
-            </a:r>
-            <a:endParaRPr lang="en-US"/>
+              <a:t>25027138</a:t>
+            </a:r>
+            <a:endParaRPr lang="en-US" altLang="en-GB">
+              <a:latin typeface="UCL Sans"/>
+            </a:endParaRPr>
           </a:p>
         </p:txBody>
       </p:sp>
       <p:pic>
         <p:nvPicPr>
-          <p:cNvPr id="4" name="Picture 3" descr="UCL logo, University College London">
-            <a:extLst>
-              <a:ext uri="{FF2B5EF4-FFF2-40B4-BE49-F238E27FC236}">
-                <a16:creationId xmlns:a16="http://schemas.microsoft.com/office/drawing/2014/main" id="{93120B80-4D83-9DFF-4E74-79FA54E6B56D}"/>
-              </a:ext>
-            </a:extLst>
-          </p:cNvPr>
+          <p:cNvPr id="4" name="Picture 3" descr="UCL logo, University College London"/>
           <p:cNvPicPr>
             <a:picLocks noChangeAspect="1"/>
           </p:cNvPicPr>
           <p:nvPr/>
         </p:nvPicPr>
         <p:blipFill>
-          <a:blip r:embed="rId4"/>
+          <a:blip r:embed="rId2"/>
           <a:stretch>
             <a:fillRect/>
           </a:stretch>
@@ -12829,16 +11299,7 @@
       </p:pic>
       <p:sp>
         <p:nvSpPr>
-          <p:cNvPr id="8" name="Rectangle 7">
-            <a:extLst>
-              <a:ext uri="{FF2B5EF4-FFF2-40B4-BE49-F238E27FC236}">
-                <a16:creationId xmlns:a16="http://schemas.microsoft.com/office/drawing/2014/main" id="{E508F10F-1CE3-23FD-1272-B7388A3BF36D}"/>
-              </a:ext>
-              <a:ext uri="{C183D7F6-B498-43B3-948B-1728B52AA6E4}">
-                <adec:decorative xmlns:adec="http://schemas.microsoft.com/office/drawing/2017/decorative" val="1"/>
-              </a:ext>
-            </a:extLst>
-          </p:cNvPr>
+          <p:cNvPr id="8" name="Rectangle 7"/>
           <p:cNvSpPr>
             <a:spLocks noGrp="1" noRot="1" noMove="1" noResize="1" noEditPoints="1" noAdjustHandles="1" noChangeArrowheads="1" noChangeShapeType="1"/>
           </p:cNvSpPr>
@@ -12885,11 +11346,6 @@
         </p:txBody>
       </p:sp>
     </p:spTree>
-    <p:extLst>
-      <p:ext uri="{BB962C8B-B14F-4D97-AF65-F5344CB8AC3E}">
-        <p14:creationId xmlns:p14="http://schemas.microsoft.com/office/powerpoint/2010/main" val="1874449910"/>
-      </p:ext>
-    </p:extLst>
   </p:cSld>
   <p:clrMapOvr>
     <a:masterClrMapping/>
@@ -12916,13 +11372,7 @@
       </p:grpSpPr>
       <p:sp>
         <p:nvSpPr>
-          <p:cNvPr id="2" name="Title 1">
-            <a:extLst>
-              <a:ext uri="{FF2B5EF4-FFF2-40B4-BE49-F238E27FC236}">
-                <a16:creationId xmlns:a16="http://schemas.microsoft.com/office/drawing/2014/main" id="{E4176485-5686-97EB-92B0-85140BAD7DEA}"/>
-              </a:ext>
-            </a:extLst>
-          </p:cNvPr>
+          <p:cNvPr id="2" name="Title 1"/>
           <p:cNvSpPr>
             <a:spLocks noGrp="1"/>
           </p:cNvSpPr>
@@ -12947,13 +11397,7 @@
       </p:sp>
       <p:sp>
         <p:nvSpPr>
-          <p:cNvPr id="5" name="Text Placeholder 4">
-            <a:extLst>
-              <a:ext uri="{FF2B5EF4-FFF2-40B4-BE49-F238E27FC236}">
-                <a16:creationId xmlns:a16="http://schemas.microsoft.com/office/drawing/2014/main" id="{FB7BA857-D47D-DE0E-2631-54516261F7C4}"/>
-              </a:ext>
-            </a:extLst>
-          </p:cNvPr>
+          <p:cNvPr id="5" name="Text Placeholder 4"/>
           <p:cNvSpPr>
             <a:spLocks noGrp="1"/>
           </p:cNvSpPr>
@@ -12961,21 +11405,716 @@
             <p:ph type="body" sz="quarter" idx="11"/>
           </p:nvPr>
         </p:nvSpPr>
-        <p:spPr/>
+        <p:spPr>
+          <a:xfrm>
+            <a:off x="440690" y="1127760"/>
+            <a:ext cx="5827395" cy="3528060"/>
+          </a:xfrm>
+        </p:spPr>
         <p:txBody>
           <a:bodyPr/>
           <a:lstStyle/>
           <a:p>
+            <a:pPr>
+              <a:defRPr sz="1500">
+                <a:solidFill>
+                  <a:srgbClr val="4B5563"/>
+                </a:solidFill>
+              </a:defRPr>
+            </a:pPr>
+            <a:r>
+              <a:rPr sz="1800">
+                <a:sym typeface="+mn-ea"/>
+              </a:rPr>
+              <a:t>Safe decision-making for self-driving cars at intersections</a:t>
+            </a:r>
+            <a:endParaRPr sz="1800">
+              <a:sym typeface="+mn-ea"/>
+            </a:endParaRPr>
+          </a:p>
+          <a:p>
+            <a:pPr>
+              <a:defRPr sz="1500">
+                <a:solidFill>
+                  <a:srgbClr val="4B5563"/>
+                </a:solidFill>
+              </a:defRPr>
+            </a:pPr>
             <a:endParaRPr lang="en-GB"/>
           </a:p>
+          <a:p>
+            <a:pPr marL="0">
+              <a:spcAft>
+                <a:spcPts val="900"/>
+              </a:spcAft>
+              <a:defRPr sz="2200">
+                <a:solidFill>
+                  <a:srgbClr val="111827"/>
+                </a:solidFill>
+              </a:defRPr>
+            </a:pPr>
+            <a:r>
+              <a:rPr sz="1800">
+                <a:sym typeface="+mn-ea"/>
+              </a:rPr>
+              <a:t>A self-driving car must decide what to do next.</a:t>
+            </a:r>
+            <a:r>
+              <a:rPr lang="en-US" sz="1800">
+                <a:sym typeface="+mn-ea"/>
+              </a:rPr>
+              <a:t> </a:t>
+            </a:r>
+            <a:r>
+              <a:rPr sz="1800">
+                <a:sym typeface="+mn-ea"/>
+              </a:rPr>
+              <a:t>Other cars may move in more than one possible way.</a:t>
+            </a:r>
+            <a:endParaRPr sz="1800">
+              <a:sym typeface="+mn-ea"/>
+            </a:endParaRPr>
+          </a:p>
+          <a:p>
+            <a:pPr>
+              <a:defRPr sz="1500">
+                <a:solidFill>
+                  <a:srgbClr val="4B5563"/>
+                </a:solidFill>
+              </a:defRPr>
+            </a:pPr>
+            <a:r>
+              <a:rPr sz="1800">
+                <a:solidFill>
+                  <a:srgbClr val="111827"/>
+                </a:solidFill>
+                <a:sym typeface="+mn-ea"/>
+              </a:rPr>
+              <a:t>In simple words, I am studying how a car can cross a busy junction without being too brave or too scared. The car should move forward, but only when the possible futures of nearby cars look safe enough.</a:t>
+            </a:r>
+            <a:endParaRPr sz="1800">
+              <a:solidFill>
+                <a:srgbClr val="111827"/>
+              </a:solidFill>
+              <a:sym typeface="+mn-ea"/>
+            </a:endParaRPr>
+          </a:p>
+          <a:p>
+            <a:pPr>
+              <a:defRPr sz="1500">
+                <a:solidFill>
+                  <a:srgbClr val="4B5563"/>
+                </a:solidFill>
+              </a:defRPr>
+            </a:pPr>
+            <a:endParaRPr>
+              <a:solidFill>
+                <a:srgbClr val="111827"/>
+              </a:solidFill>
+            </a:endParaRPr>
+          </a:p>
+          <a:p>
+            <a:pPr>
+              <a:defRPr sz="1500">
+                <a:solidFill>
+                  <a:srgbClr val="4B5563"/>
+                </a:solidFill>
+              </a:defRPr>
+            </a:pPr>
+            <a:endParaRPr lang="en-GB"/>
+          </a:p>
+        </p:txBody>
+      </p:sp>
+      <p:sp>
+        <p:nvSpPr>
+          <p:cNvPr id="17" name="Rounded Rectangle 16"/>
+          <p:cNvSpPr/>
+          <p:nvPr/>
+        </p:nvSpPr>
+        <p:spPr>
+          <a:xfrm>
+            <a:off x="868680" y="5289550"/>
+            <a:ext cx="4754880" cy="658368"/>
+          </a:xfrm>
+          <a:prstGeom prst="roundRect">
+            <a:avLst/>
+          </a:prstGeom>
+          <a:solidFill>
+            <a:srgbClr val="DBEAFE"/>
+          </a:solidFill>
+          <a:ln>
+            <a:solidFill>
+              <a:srgbClr val="2563EB"/>
+            </a:solidFill>
+          </a:ln>
+        </p:spPr>
+        <p:style>
+          <a:lnRef idx="1">
+            <a:schemeClr val="accent1"/>
+          </a:lnRef>
+          <a:fillRef idx="3">
+            <a:schemeClr val="accent1"/>
+          </a:fillRef>
+          <a:effectRef idx="2">
+            <a:schemeClr val="accent1"/>
+          </a:effectRef>
+          <a:fontRef idx="minor">
+            <a:schemeClr val="lt1"/>
+          </a:fontRef>
+        </p:style>
+        <p:txBody>
+          <a:bodyPr lIns="109728" rIns="109728" rtlCol="0" anchor="ctr"/>
+          <a:lstStyle/>
+          <a:p>
+            <a:pPr algn="ctr">
+              <a:defRPr sz="1800" b="1">
+                <a:solidFill>
+                  <a:srgbClr val="172554"/>
+                </a:solidFill>
+              </a:defRPr>
+            </a:pPr>
+            <a:r>
+              <a:t>Like crossing a road: look, think, then move.</a:t>
+            </a:r>
+          </a:p>
+        </p:txBody>
+      </p:sp>
+      <p:sp>
+        <p:nvSpPr>
+          <p:cNvPr id="6" name="Rectangle 5"/>
+          <p:cNvSpPr/>
+          <p:nvPr/>
+        </p:nvSpPr>
+        <p:spPr>
+          <a:xfrm>
+            <a:off x="8273491" y="1417320"/>
+            <a:ext cx="1126540" cy="4403750"/>
+          </a:xfrm>
+          <a:prstGeom prst="rect">
+            <a:avLst/>
+          </a:prstGeom>
+          <a:solidFill>
+            <a:srgbClr val="374151"/>
+          </a:solidFill>
+          <a:ln>
+            <a:solidFill>
+              <a:srgbClr val="374151"/>
+            </a:solidFill>
+          </a:ln>
+        </p:spPr>
+        <p:style>
+          <a:lnRef idx="1">
+            <a:schemeClr val="accent1"/>
+          </a:lnRef>
+          <a:fillRef idx="3">
+            <a:schemeClr val="accent1"/>
+          </a:fillRef>
+          <a:effectRef idx="2">
+            <a:schemeClr val="accent1"/>
+          </a:effectRef>
+          <a:fontRef idx="minor">
+            <a:schemeClr val="lt1"/>
+          </a:fontRef>
+        </p:style>
+        <p:txBody>
+          <a:bodyPr rtlCol="0" anchor="ctr"/>
+          <a:lstStyle/>
+          <a:p>
+            <a:pPr algn="ctr"/>
+          </a:p>
+        </p:txBody>
+      </p:sp>
+      <p:sp>
+        <p:nvSpPr>
+          <p:cNvPr id="7" name="Rectangle 6"/>
+          <p:cNvSpPr/>
+          <p:nvPr/>
+        </p:nvSpPr>
+        <p:spPr>
+          <a:xfrm>
+            <a:off x="6583680" y="3055924"/>
+            <a:ext cx="4403750" cy="1126540"/>
+          </a:xfrm>
+          <a:prstGeom prst="rect">
+            <a:avLst/>
+          </a:prstGeom>
+          <a:solidFill>
+            <a:srgbClr val="374151"/>
+          </a:solidFill>
+          <a:ln>
+            <a:solidFill>
+              <a:srgbClr val="374151"/>
+            </a:solidFill>
+          </a:ln>
+        </p:spPr>
+        <p:style>
+          <a:lnRef idx="1">
+            <a:schemeClr val="accent1"/>
+          </a:lnRef>
+          <a:fillRef idx="3">
+            <a:schemeClr val="accent1"/>
+          </a:fillRef>
+          <a:effectRef idx="2">
+            <a:schemeClr val="accent1"/>
+          </a:effectRef>
+          <a:fontRef idx="minor">
+            <a:schemeClr val="lt1"/>
+          </a:fontRef>
+        </p:style>
+        <p:txBody>
+          <a:bodyPr rtlCol="0" anchor="ctr"/>
+          <a:lstStyle/>
+          <a:p>
+            <a:pPr algn="ctr"/>
+          </a:p>
+        </p:txBody>
+      </p:sp>
+      <p:sp>
+        <p:nvSpPr>
+          <p:cNvPr id="8" name="Rectangle 7"/>
+          <p:cNvSpPr/>
+          <p:nvPr/>
+        </p:nvSpPr>
+        <p:spPr>
+          <a:xfrm>
+            <a:off x="6788505" y="3588471"/>
+            <a:ext cx="460857" cy="51206"/>
+          </a:xfrm>
+          <a:prstGeom prst="rect">
+            <a:avLst/>
+          </a:prstGeom>
+          <a:solidFill>
+            <a:srgbClr val="FBBF24"/>
+          </a:solidFill>
+          <a:ln>
+            <a:solidFill>
+              <a:srgbClr val="FBBF24"/>
+            </a:solidFill>
+          </a:ln>
+        </p:spPr>
+        <p:style>
+          <a:lnRef idx="1">
+            <a:schemeClr val="accent1"/>
+          </a:lnRef>
+          <a:fillRef idx="3">
+            <a:schemeClr val="accent1"/>
+          </a:fillRef>
+          <a:effectRef idx="2">
+            <a:schemeClr val="accent1"/>
+          </a:effectRef>
+          <a:fontRef idx="minor">
+            <a:schemeClr val="lt1"/>
+          </a:fontRef>
+        </p:style>
+        <p:txBody>
+          <a:bodyPr rtlCol="0" anchor="ctr"/>
+          <a:lstStyle/>
+          <a:p>
+            <a:pPr algn="ctr"/>
+          </a:p>
+        </p:txBody>
+      </p:sp>
+      <p:sp>
+        <p:nvSpPr>
+          <p:cNvPr id="9" name="Rectangle 8"/>
+          <p:cNvSpPr/>
+          <p:nvPr/>
+        </p:nvSpPr>
+        <p:spPr>
+          <a:xfrm>
+            <a:off x="7710220" y="3588471"/>
+            <a:ext cx="460857" cy="51206"/>
+          </a:xfrm>
+          <a:prstGeom prst="rect">
+            <a:avLst/>
+          </a:prstGeom>
+          <a:solidFill>
+            <a:srgbClr val="FBBF24"/>
+          </a:solidFill>
+          <a:ln>
+            <a:solidFill>
+              <a:srgbClr val="FBBF24"/>
+            </a:solidFill>
+          </a:ln>
+        </p:spPr>
+        <p:style>
+          <a:lnRef idx="1">
+            <a:schemeClr val="accent1"/>
+          </a:lnRef>
+          <a:fillRef idx="3">
+            <a:schemeClr val="accent1"/>
+          </a:fillRef>
+          <a:effectRef idx="2">
+            <a:schemeClr val="accent1"/>
+          </a:effectRef>
+          <a:fontRef idx="minor">
+            <a:schemeClr val="lt1"/>
+          </a:fontRef>
+        </p:style>
+        <p:txBody>
+          <a:bodyPr rtlCol="0" anchor="ctr"/>
+          <a:lstStyle/>
+          <a:p>
+            <a:pPr algn="ctr"/>
+          </a:p>
+        </p:txBody>
+      </p:sp>
+      <p:sp>
+        <p:nvSpPr>
+          <p:cNvPr id="10" name="Rectangle 9"/>
+          <p:cNvSpPr/>
+          <p:nvPr/>
+        </p:nvSpPr>
+        <p:spPr>
+          <a:xfrm>
+            <a:off x="8631936" y="3588471"/>
+            <a:ext cx="460857" cy="51206"/>
+          </a:xfrm>
+          <a:prstGeom prst="rect">
+            <a:avLst/>
+          </a:prstGeom>
+          <a:solidFill>
+            <a:srgbClr val="FBBF24"/>
+          </a:solidFill>
+          <a:ln>
+            <a:solidFill>
+              <a:srgbClr val="FBBF24"/>
+            </a:solidFill>
+          </a:ln>
+        </p:spPr>
+        <p:style>
+          <a:lnRef idx="1">
+            <a:schemeClr val="accent1"/>
+          </a:lnRef>
+          <a:fillRef idx="3">
+            <a:schemeClr val="accent1"/>
+          </a:fillRef>
+          <a:effectRef idx="2">
+            <a:schemeClr val="accent1"/>
+          </a:effectRef>
+          <a:fontRef idx="minor">
+            <a:schemeClr val="lt1"/>
+          </a:fontRef>
+        </p:style>
+        <p:txBody>
+          <a:bodyPr rtlCol="0" anchor="ctr"/>
+          <a:lstStyle/>
+          <a:p>
+            <a:pPr algn="ctr"/>
+          </a:p>
+        </p:txBody>
+      </p:sp>
+      <p:sp>
+        <p:nvSpPr>
+          <p:cNvPr id="11" name="Rectangle 10"/>
+          <p:cNvSpPr/>
+          <p:nvPr/>
+        </p:nvSpPr>
+        <p:spPr>
+          <a:xfrm>
+            <a:off x="9553651" y="3588471"/>
+            <a:ext cx="460857" cy="51206"/>
+          </a:xfrm>
+          <a:prstGeom prst="rect">
+            <a:avLst/>
+          </a:prstGeom>
+          <a:solidFill>
+            <a:srgbClr val="FBBF24"/>
+          </a:solidFill>
+          <a:ln>
+            <a:solidFill>
+              <a:srgbClr val="FBBF24"/>
+            </a:solidFill>
+          </a:ln>
+        </p:spPr>
+        <p:style>
+          <a:lnRef idx="1">
+            <a:schemeClr val="accent1"/>
+          </a:lnRef>
+          <a:fillRef idx="3">
+            <a:schemeClr val="accent1"/>
+          </a:fillRef>
+          <a:effectRef idx="2">
+            <a:schemeClr val="accent1"/>
+          </a:effectRef>
+          <a:fontRef idx="minor">
+            <a:schemeClr val="lt1"/>
+          </a:fontRef>
+        </p:style>
+        <p:txBody>
+          <a:bodyPr rtlCol="0" anchor="ctr"/>
+          <a:lstStyle/>
+          <a:p>
+            <a:pPr algn="ctr"/>
+          </a:p>
+        </p:txBody>
+      </p:sp>
+      <p:sp>
+        <p:nvSpPr>
+          <p:cNvPr id="12" name="Rounded Rectangle 11"/>
+          <p:cNvSpPr/>
+          <p:nvPr/>
+        </p:nvSpPr>
+        <p:spPr>
+          <a:xfrm>
+            <a:off x="7044537" y="3363163"/>
+            <a:ext cx="798819" cy="409651"/>
+          </a:xfrm>
+          <a:prstGeom prst="roundRect">
+            <a:avLst/>
+          </a:prstGeom>
+          <a:solidFill>
+            <a:srgbClr val="2563EB"/>
+          </a:solidFill>
+          <a:ln>
+            <a:solidFill>
+              <a:srgbClr val="2563EB"/>
+            </a:solidFill>
+          </a:ln>
+        </p:spPr>
+        <p:style>
+          <a:lnRef idx="1">
+            <a:schemeClr val="accent1"/>
+          </a:lnRef>
+          <a:fillRef idx="3">
+            <a:schemeClr val="accent1"/>
+          </a:fillRef>
+          <a:effectRef idx="2">
+            <a:schemeClr val="accent1"/>
+          </a:effectRef>
+          <a:fontRef idx="minor">
+            <a:schemeClr val="lt1"/>
+          </a:fontRef>
+        </p:style>
+        <p:txBody>
+          <a:bodyPr rtlCol="0" anchor="ctr"/>
+          <a:lstStyle/>
+          <a:p>
+            <a:pPr algn="ctr">
+              <a:defRPr sz="1100" b="1">
+                <a:solidFill>
+                  <a:srgbClr val="FFFFFF"/>
+                </a:solidFill>
+              </a:defRPr>
+            </a:pPr>
+            <a:r>
+              <a:t>EGO</a:t>
+            </a:r>
+          </a:p>
+        </p:txBody>
+      </p:sp>
+      <p:sp>
+        <p:nvSpPr>
+          <p:cNvPr id="13" name="Rounded Rectangle 12"/>
+          <p:cNvSpPr/>
+          <p:nvPr/>
+        </p:nvSpPr>
+        <p:spPr>
+          <a:xfrm>
+            <a:off x="8631936" y="1929384"/>
+            <a:ext cx="563270" cy="563270"/>
+          </a:xfrm>
+          <a:prstGeom prst="roundRect">
+            <a:avLst/>
+          </a:prstGeom>
+          <a:solidFill>
+            <a:srgbClr val="F97316"/>
+          </a:solidFill>
+          <a:ln>
+            <a:solidFill>
+              <a:srgbClr val="F97316"/>
+            </a:solidFill>
+          </a:ln>
+        </p:spPr>
+        <p:style>
+          <a:lnRef idx="1">
+            <a:schemeClr val="accent1"/>
+          </a:lnRef>
+          <a:fillRef idx="3">
+            <a:schemeClr val="accent1"/>
+          </a:fillRef>
+          <a:effectRef idx="2">
+            <a:schemeClr val="accent1"/>
+          </a:effectRef>
+          <a:fontRef idx="minor">
+            <a:schemeClr val="lt1"/>
+          </a:fontRef>
+        </p:style>
+        <p:txBody>
+          <a:bodyPr rtlCol="0" anchor="ctr"/>
+          <a:lstStyle/>
+          <a:p>
+            <a:pPr algn="ctr">
+              <a:defRPr sz="1100" b="1">
+                <a:solidFill>
+                  <a:srgbClr val="FFFFFF"/>
+                </a:solidFill>
+              </a:defRPr>
+            </a:pPr>
+            <a:r>
+              <a:t>TV</a:t>
+            </a:r>
+          </a:p>
+        </p:txBody>
+      </p:sp>
+      <p:cxnSp>
+        <p:nvCxnSpPr>
+          <p:cNvPr id="14" name="Connector 13"/>
+          <p:cNvCxnSpPr/>
+          <p:nvPr/>
+        </p:nvCxnSpPr>
+        <p:spPr>
+          <a:xfrm>
+            <a:off x="8887968" y="2492654"/>
+            <a:ext cx="0" cy="972922"/>
+          </a:xfrm>
+          <a:prstGeom prst="line">
+            <a:avLst/>
+          </a:prstGeom>
+          <a:ln w="25400">
+            <a:solidFill>
+              <a:srgbClr val="16A34A"/>
+            </a:solidFill>
+          </a:ln>
+        </p:spPr>
+        <p:style>
+          <a:lnRef idx="2">
+            <a:schemeClr val="accent1"/>
+          </a:lnRef>
+          <a:fillRef idx="0">
+            <a:schemeClr val="accent1"/>
+          </a:fillRef>
+          <a:effectRef idx="1">
+            <a:schemeClr val="accent1"/>
+          </a:effectRef>
+          <a:fontRef idx="minor">
+            <a:schemeClr val="tx1"/>
+          </a:fontRef>
+        </p:style>
+      </p:cxnSp>
+      <p:cxnSp>
+        <p:nvCxnSpPr>
+          <p:cNvPr id="15" name="Connector 14"/>
+          <p:cNvCxnSpPr/>
+          <p:nvPr/>
+        </p:nvCxnSpPr>
+        <p:spPr>
+          <a:xfrm>
+            <a:off x="8887968" y="2492654"/>
+            <a:ext cx="0" cy="1433779"/>
+          </a:xfrm>
+          <a:prstGeom prst="line">
+            <a:avLst/>
+          </a:prstGeom>
+          <a:ln w="25400">
+            <a:solidFill>
+              <a:srgbClr val="F97316"/>
+            </a:solidFill>
+          </a:ln>
+        </p:spPr>
+        <p:style>
+          <a:lnRef idx="2">
+            <a:schemeClr val="accent1"/>
+          </a:lnRef>
+          <a:fillRef idx="0">
+            <a:schemeClr val="accent1"/>
+          </a:fillRef>
+          <a:effectRef idx="1">
+            <a:schemeClr val="accent1"/>
+          </a:effectRef>
+          <a:fontRef idx="minor">
+            <a:schemeClr val="tx1"/>
+          </a:fontRef>
+        </p:style>
+      </p:cxnSp>
+      <p:cxnSp>
+        <p:nvCxnSpPr>
+          <p:cNvPr id="16" name="Connector 15"/>
+          <p:cNvCxnSpPr/>
+          <p:nvPr/>
+        </p:nvCxnSpPr>
+        <p:spPr>
+          <a:xfrm>
+            <a:off x="8887968" y="2492654"/>
+            <a:ext cx="0" cy="1894637"/>
+          </a:xfrm>
+          <a:prstGeom prst="line">
+            <a:avLst/>
+          </a:prstGeom>
+          <a:ln w="25400">
+            <a:solidFill>
+              <a:srgbClr val="DC2626"/>
+            </a:solidFill>
+          </a:ln>
+        </p:spPr>
+        <p:style>
+          <a:lnRef idx="2">
+            <a:schemeClr val="accent1"/>
+          </a:lnRef>
+          <a:fillRef idx="0">
+            <a:schemeClr val="accent1"/>
+          </a:fillRef>
+          <a:effectRef idx="1">
+            <a:schemeClr val="accent1"/>
+          </a:effectRef>
+          <a:fontRef idx="minor">
+            <a:schemeClr val="tx1"/>
+          </a:fontRef>
+        </p:style>
+      </p:cxnSp>
+      <p:sp>
+        <p:nvSpPr>
+          <p:cNvPr id="4" name="Arc 3"/>
+          <p:cNvSpPr/>
+          <p:nvPr/>
+        </p:nvSpPr>
+        <p:spPr>
+          <a:xfrm>
+            <a:off x="7083425" y="3543300"/>
+            <a:ext cx="1652270" cy="1998345"/>
+          </a:xfrm>
+          <a:prstGeom prst="arc">
+            <a:avLst/>
+          </a:prstGeom>
+          <a:noFill/>
+          <a:ln>
+            <a:solidFill>
+              <a:srgbClr val="C00000"/>
+            </a:solidFill>
+          </a:ln>
+          <a:effectLst/>
+          <a:extLst>
+            <a:ext uri="{909E8E84-426E-40DD-AFC4-6F175D3DCCD1}">
+              <a14:hiddenFill xmlns:a14="http://schemas.microsoft.com/office/drawing/2010/main">
+                <a:solidFill>
+                  <a:srgbClr val="C00000"/>
+                </a:solidFill>
+              </a14:hiddenFill>
+            </a:ext>
+          </a:extLst>
+        </p:spPr>
+        <p:style>
+          <a:lnRef idx="2">
+            <a:schemeClr val="accent1"/>
+          </a:lnRef>
+          <a:fillRef idx="0">
+            <a:srgbClr val="FFFFFF"/>
+          </a:fillRef>
+          <a:effectRef idx="0">
+            <a:srgbClr val="FFFFFF"/>
+          </a:effectRef>
+          <a:fontRef idx="minor">
+            <a:schemeClr val="tx1"/>
+          </a:fontRef>
+        </p:style>
+        <p:txBody>
+          <a:bodyPr/>
+          <a:p>
+            <a:endParaRPr lang="en-US"/>
+          </a:p>
         </p:txBody>
       </p:sp>
     </p:spTree>
-    <p:extLst>
-      <p:ext uri="{BB962C8B-B14F-4D97-AF65-F5344CB8AC3E}">
-        <p14:creationId xmlns:p14="http://schemas.microsoft.com/office/powerpoint/2010/main" val="172256862"/>
-      </p:ext>
-    </p:extLst>
   </p:cSld>
   <p:clrMapOvr>
     <a:masterClrMapping/>
@@ -12988,13 +12127,7 @@
   <p:cSld>
     <p:spTree>
       <p:nvGrpSpPr>
-        <p:cNvPr id="1" name="">
-          <a:extLst>
-            <a:ext uri="{FF2B5EF4-FFF2-40B4-BE49-F238E27FC236}">
-              <a16:creationId xmlns:a16="http://schemas.microsoft.com/office/drawing/2014/main" id="{3B88FEFA-5F4A-EC0B-F9EA-99946DF2AB9C}"/>
-            </a:ext>
-          </a:extLst>
-        </p:cNvPr>
+        <p:cNvPr id="1" name=""/>
         <p:cNvGrpSpPr/>
         <p:nvPr/>
       </p:nvGrpSpPr>
@@ -13008,13 +12141,7 @@
       </p:grpSpPr>
       <p:sp>
         <p:nvSpPr>
-          <p:cNvPr id="2" name="Title 1">
-            <a:extLst>
-              <a:ext uri="{FF2B5EF4-FFF2-40B4-BE49-F238E27FC236}">
-                <a16:creationId xmlns:a16="http://schemas.microsoft.com/office/drawing/2014/main" id="{CD2710AD-B1FD-B8F3-2D2E-0AFF7969A172}"/>
-              </a:ext>
-            </a:extLst>
-          </p:cNvPr>
+          <p:cNvPr id="2" name="Title 1"/>
           <p:cNvSpPr>
             <a:spLocks noGrp="1"/>
           </p:cNvSpPr>
@@ -13039,13 +12166,7 @@
       </p:sp>
       <p:sp>
         <p:nvSpPr>
-          <p:cNvPr id="3" name="Text Placeholder 2">
-            <a:extLst>
-              <a:ext uri="{FF2B5EF4-FFF2-40B4-BE49-F238E27FC236}">
-                <a16:creationId xmlns:a16="http://schemas.microsoft.com/office/drawing/2014/main" id="{15FADA96-F4F3-8478-BEAD-8C11CDCFFA0A}"/>
-              </a:ext>
-            </a:extLst>
-          </p:cNvPr>
+          <p:cNvPr id="3" name="Text Placeholder 2"/>
           <p:cNvSpPr>
             <a:spLocks noGrp="1"/>
           </p:cNvSpPr>
@@ -13055,7 +12176,7 @@
         </p:nvSpPr>
         <p:spPr>
           <a:xfrm>
-            <a:off x="440783" y="1916825"/>
+            <a:off x="440783" y="1196100"/>
             <a:ext cx="7239393" cy="3528300"/>
           </a:xfrm>
         </p:spPr>
@@ -13063,16 +12184,778 @@
           <a:bodyPr/>
           <a:lstStyle/>
           <a:p>
+            <a:r>
+              <a:rPr>
+                <a:solidFill>
+                  <a:srgbClr val="111827"/>
+                </a:solidFill>
+                <a:sym typeface="+mn-ea"/>
+              </a:rPr>
+              <a:t>One guess is not enough</a:t>
+            </a:r>
+            <a:endParaRPr>
+              <a:solidFill>
+                <a:srgbClr val="111827"/>
+              </a:solidFill>
+              <a:sym typeface="+mn-ea"/>
+            </a:endParaRPr>
+          </a:p>
+          <a:p>
             <a:endParaRPr lang="en-GB" dirty="0"/>
           </a:p>
         </p:txBody>
       </p:sp>
+      <p:sp>
+        <p:nvSpPr>
+          <p:cNvPr id="5" name="Rounded Rectangle 4"/>
+          <p:cNvSpPr/>
+          <p:nvPr/>
+        </p:nvSpPr>
+        <p:spPr>
+          <a:xfrm>
+            <a:off x="1076960" y="2052320"/>
+            <a:ext cx="4297680" cy="502920"/>
+          </a:xfrm>
+          <a:prstGeom prst="roundRect">
+            <a:avLst/>
+          </a:prstGeom>
+          <a:solidFill>
+            <a:srgbClr val="FEE2E2"/>
+          </a:solidFill>
+          <a:ln>
+            <a:solidFill>
+              <a:srgbClr val="DC2626"/>
+            </a:solidFill>
+          </a:ln>
+        </p:spPr>
+        <p:style>
+          <a:lnRef idx="1">
+            <a:schemeClr val="accent1"/>
+          </a:lnRef>
+          <a:fillRef idx="3">
+            <a:schemeClr val="accent1"/>
+          </a:fillRef>
+          <a:effectRef idx="2">
+            <a:schemeClr val="accent1"/>
+          </a:effectRef>
+          <a:fontRef idx="minor">
+            <a:schemeClr val="lt1"/>
+          </a:fontRef>
+        </p:style>
+        <p:txBody>
+          <a:bodyPr lIns="109728" rIns="109728" rtlCol="0" anchor="ctr"/>
+          <a:lstStyle/>
+          <a:p>
+            <a:pPr algn="ctr">
+              <a:defRPr sz="1700" b="1">
+                <a:solidFill>
+                  <a:srgbClr val="DC2626"/>
+                </a:solidFill>
+              </a:defRPr>
+            </a:pPr>
+            <a:r>
+              <a:t>One guessed future</a:t>
+            </a:r>
+          </a:p>
+        </p:txBody>
+      </p:sp>
+      <p:sp>
+        <p:nvSpPr>
+          <p:cNvPr id="6" name="Rectangle 5"/>
+          <p:cNvSpPr/>
+          <p:nvPr/>
+        </p:nvSpPr>
+        <p:spPr>
+          <a:xfrm>
+            <a:off x="1762760" y="2875280"/>
+            <a:ext cx="2834640" cy="658368"/>
+          </a:xfrm>
+          <a:prstGeom prst="rect">
+            <a:avLst/>
+          </a:prstGeom>
+          <a:solidFill>
+            <a:srgbClr val="374151"/>
+          </a:solidFill>
+          <a:ln>
+            <a:solidFill>
+              <a:srgbClr val="374151"/>
+            </a:solidFill>
+          </a:ln>
+        </p:spPr>
+        <p:style>
+          <a:lnRef idx="1">
+            <a:schemeClr val="accent1"/>
+          </a:lnRef>
+          <a:fillRef idx="3">
+            <a:schemeClr val="accent1"/>
+          </a:fillRef>
+          <a:effectRef idx="2">
+            <a:schemeClr val="accent1"/>
+          </a:effectRef>
+          <a:fontRef idx="minor">
+            <a:schemeClr val="lt1"/>
+          </a:fontRef>
+        </p:style>
+        <p:txBody>
+          <a:bodyPr rtlCol="0" anchor="ctr"/>
+          <a:lstStyle/>
+          <a:p>
+            <a:pPr algn="ctr"/>
+          </a:p>
+        </p:txBody>
+      </p:sp>
+      <p:sp>
+        <p:nvSpPr>
+          <p:cNvPr id="7" name="Rounded Rectangle 6"/>
+          <p:cNvSpPr/>
+          <p:nvPr/>
+        </p:nvSpPr>
+        <p:spPr>
+          <a:xfrm>
+            <a:off x="2037080" y="2994152"/>
+            <a:ext cx="822960" cy="411480"/>
+          </a:xfrm>
+          <a:prstGeom prst="roundRect">
+            <a:avLst/>
+          </a:prstGeom>
+          <a:solidFill>
+            <a:srgbClr val="2563EB"/>
+          </a:solidFill>
+          <a:ln>
+            <a:solidFill>
+              <a:srgbClr val="2563EB"/>
+            </a:solidFill>
+          </a:ln>
+        </p:spPr>
+        <p:style>
+          <a:lnRef idx="1">
+            <a:schemeClr val="accent1"/>
+          </a:lnRef>
+          <a:fillRef idx="3">
+            <a:schemeClr val="accent1"/>
+          </a:fillRef>
+          <a:effectRef idx="2">
+            <a:schemeClr val="accent1"/>
+          </a:effectRef>
+          <a:fontRef idx="minor">
+            <a:schemeClr val="lt1"/>
+          </a:fontRef>
+        </p:style>
+        <p:txBody>
+          <a:bodyPr rtlCol="0" anchor="ctr"/>
+          <a:lstStyle/>
+          <a:p>
+            <a:pPr algn="ctr">
+              <a:defRPr sz="1100" b="1">
+                <a:solidFill>
+                  <a:srgbClr val="FFFFFF"/>
+                </a:solidFill>
+              </a:defRPr>
+            </a:pPr>
+            <a:r>
+              <a:t>EGO</a:t>
+            </a:r>
+          </a:p>
+        </p:txBody>
+      </p:sp>
+      <p:sp>
+        <p:nvSpPr>
+          <p:cNvPr id="8" name="Rounded Rectangle 7"/>
+          <p:cNvSpPr/>
+          <p:nvPr/>
+        </p:nvSpPr>
+        <p:spPr>
+          <a:xfrm>
+            <a:off x="3545840" y="2994152"/>
+            <a:ext cx="594360" cy="384048"/>
+          </a:xfrm>
+          <a:prstGeom prst="roundRect">
+            <a:avLst/>
+          </a:prstGeom>
+          <a:solidFill>
+            <a:srgbClr val="F97316"/>
+          </a:solidFill>
+          <a:ln>
+            <a:solidFill>
+              <a:srgbClr val="F97316"/>
+            </a:solidFill>
+          </a:ln>
+        </p:spPr>
+        <p:style>
+          <a:lnRef idx="1">
+            <a:schemeClr val="accent1"/>
+          </a:lnRef>
+          <a:fillRef idx="3">
+            <a:schemeClr val="accent1"/>
+          </a:fillRef>
+          <a:effectRef idx="2">
+            <a:schemeClr val="accent1"/>
+          </a:effectRef>
+          <a:fontRef idx="minor">
+            <a:schemeClr val="lt1"/>
+          </a:fontRef>
+        </p:style>
+        <p:txBody>
+          <a:bodyPr rtlCol="0" anchor="ctr"/>
+          <a:lstStyle/>
+          <a:p>
+            <a:pPr algn="ctr">
+              <a:defRPr sz="1100" b="1">
+                <a:solidFill>
+                  <a:srgbClr val="FFFFFF"/>
+                </a:solidFill>
+              </a:defRPr>
+            </a:pPr>
+            <a:r>
+              <a:t>TV</a:t>
+            </a:r>
+          </a:p>
+        </p:txBody>
+      </p:sp>
+      <p:cxnSp>
+        <p:nvCxnSpPr>
+          <p:cNvPr id="9" name="Connector 8"/>
+          <p:cNvCxnSpPr/>
+          <p:nvPr/>
+        </p:nvCxnSpPr>
+        <p:spPr>
+          <a:xfrm>
+            <a:off x="4140200" y="3177032"/>
+            <a:ext cx="731520" cy="0"/>
+          </a:xfrm>
+          <a:prstGeom prst="line">
+            <a:avLst/>
+          </a:prstGeom>
+          <a:ln w="38100">
+            <a:solidFill>
+              <a:srgbClr val="DC2626"/>
+            </a:solidFill>
+          </a:ln>
+        </p:spPr>
+        <p:style>
+          <a:lnRef idx="2">
+            <a:schemeClr val="accent1"/>
+          </a:lnRef>
+          <a:fillRef idx="0">
+            <a:schemeClr val="accent1"/>
+          </a:fillRef>
+          <a:effectRef idx="1">
+            <a:schemeClr val="accent1"/>
+          </a:effectRef>
+          <a:fontRef idx="minor">
+            <a:schemeClr val="tx1"/>
+          </a:fontRef>
+        </p:style>
+      </p:cxnSp>
+      <p:sp>
+        <p:nvSpPr>
+          <p:cNvPr id="10" name="TextBox 9"/>
+          <p:cNvSpPr txBox="1"/>
+          <p:nvPr/>
+        </p:nvSpPr>
+        <p:spPr>
+          <a:xfrm>
+            <a:off x="1625600" y="3881120"/>
+            <a:ext cx="3108960" cy="274320"/>
+          </a:xfrm>
+          <a:prstGeom prst="rect">
+            <a:avLst/>
+          </a:prstGeom>
+          <a:noFill/>
+        </p:spPr>
+        <p:txBody>
+          <a:bodyPr wrap="none" anchor="ctr">
+            <a:spAutoFit/>
+          </a:bodyPr>
+          <a:lstStyle/>
+          <a:p>
+            <a:pPr algn="ctr">
+              <a:defRPr sz="1800" b="1">
+                <a:solidFill>
+                  <a:srgbClr val="DC2626"/>
+                </a:solidFill>
+              </a:defRPr>
+            </a:pPr>
+            <a:r>
+              <a:t>Too confident</a:t>
+            </a:r>
+          </a:p>
+        </p:txBody>
+      </p:sp>
+      <p:sp>
+        <p:nvSpPr>
+          <p:cNvPr id="11" name="Rounded Rectangle 10"/>
+          <p:cNvSpPr/>
+          <p:nvPr/>
+        </p:nvSpPr>
+        <p:spPr>
+          <a:xfrm>
+            <a:off x="6654800" y="2052320"/>
+            <a:ext cx="4297680" cy="502920"/>
+          </a:xfrm>
+          <a:prstGeom prst="roundRect">
+            <a:avLst/>
+          </a:prstGeom>
+          <a:solidFill>
+            <a:srgbClr val="DCFCE7"/>
+          </a:solidFill>
+          <a:ln>
+            <a:solidFill>
+              <a:srgbClr val="16A34A"/>
+            </a:solidFill>
+          </a:ln>
+        </p:spPr>
+        <p:style>
+          <a:lnRef idx="1">
+            <a:schemeClr val="accent1"/>
+          </a:lnRef>
+          <a:fillRef idx="3">
+            <a:schemeClr val="accent1"/>
+          </a:fillRef>
+          <a:effectRef idx="2">
+            <a:schemeClr val="accent1"/>
+          </a:effectRef>
+          <a:fontRef idx="minor">
+            <a:schemeClr val="lt1"/>
+          </a:fontRef>
+        </p:style>
+        <p:txBody>
+          <a:bodyPr lIns="109728" rIns="109728" rtlCol="0" anchor="ctr"/>
+          <a:lstStyle/>
+          <a:p>
+            <a:pPr algn="ctr">
+              <a:defRPr sz="1700" b="1">
+                <a:solidFill>
+                  <a:srgbClr val="172554"/>
+                </a:solidFill>
+              </a:defRPr>
+            </a:pPr>
+            <a:r>
+              <a:t>Several possible futures</a:t>
+            </a:r>
+          </a:p>
+        </p:txBody>
+      </p:sp>
+      <p:sp>
+        <p:nvSpPr>
+          <p:cNvPr id="12" name="Rectangle 11"/>
+          <p:cNvSpPr/>
+          <p:nvPr/>
+        </p:nvSpPr>
+        <p:spPr>
+          <a:xfrm>
+            <a:off x="7340600" y="2875280"/>
+            <a:ext cx="2834640" cy="658368"/>
+          </a:xfrm>
+          <a:prstGeom prst="rect">
+            <a:avLst/>
+          </a:prstGeom>
+          <a:solidFill>
+            <a:srgbClr val="374151"/>
+          </a:solidFill>
+          <a:ln>
+            <a:solidFill>
+              <a:srgbClr val="374151"/>
+            </a:solidFill>
+          </a:ln>
+        </p:spPr>
+        <p:style>
+          <a:lnRef idx="1">
+            <a:schemeClr val="accent1"/>
+          </a:lnRef>
+          <a:fillRef idx="3">
+            <a:schemeClr val="accent1"/>
+          </a:fillRef>
+          <a:effectRef idx="2">
+            <a:schemeClr val="accent1"/>
+          </a:effectRef>
+          <a:fontRef idx="minor">
+            <a:schemeClr val="lt1"/>
+          </a:fontRef>
+        </p:style>
+        <p:txBody>
+          <a:bodyPr rtlCol="0" anchor="ctr"/>
+          <a:lstStyle/>
+          <a:p>
+            <a:pPr algn="ctr"/>
+          </a:p>
+        </p:txBody>
+      </p:sp>
+      <p:sp>
+        <p:nvSpPr>
+          <p:cNvPr id="13" name="Rounded Rectangle 12"/>
+          <p:cNvSpPr/>
+          <p:nvPr/>
+        </p:nvSpPr>
+        <p:spPr>
+          <a:xfrm>
+            <a:off x="7614920" y="2994152"/>
+            <a:ext cx="822960" cy="411480"/>
+          </a:xfrm>
+          <a:prstGeom prst="roundRect">
+            <a:avLst/>
+          </a:prstGeom>
+          <a:solidFill>
+            <a:srgbClr val="2563EB"/>
+          </a:solidFill>
+          <a:ln>
+            <a:solidFill>
+              <a:srgbClr val="2563EB"/>
+            </a:solidFill>
+          </a:ln>
+        </p:spPr>
+        <p:style>
+          <a:lnRef idx="1">
+            <a:schemeClr val="accent1"/>
+          </a:lnRef>
+          <a:fillRef idx="3">
+            <a:schemeClr val="accent1"/>
+          </a:fillRef>
+          <a:effectRef idx="2">
+            <a:schemeClr val="accent1"/>
+          </a:effectRef>
+          <a:fontRef idx="minor">
+            <a:schemeClr val="lt1"/>
+          </a:fontRef>
+        </p:style>
+        <p:txBody>
+          <a:bodyPr rtlCol="0" anchor="ctr"/>
+          <a:lstStyle/>
+          <a:p>
+            <a:pPr algn="ctr">
+              <a:defRPr sz="1100" b="1">
+                <a:solidFill>
+                  <a:srgbClr val="FFFFFF"/>
+                </a:solidFill>
+              </a:defRPr>
+            </a:pPr>
+            <a:r>
+              <a:t>EGO</a:t>
+            </a:r>
+          </a:p>
+        </p:txBody>
+      </p:sp>
+      <p:sp>
+        <p:nvSpPr>
+          <p:cNvPr id="14" name="Rounded Rectangle 13"/>
+          <p:cNvSpPr/>
+          <p:nvPr/>
+        </p:nvSpPr>
+        <p:spPr>
+          <a:xfrm>
+            <a:off x="9123680" y="2994152"/>
+            <a:ext cx="594360" cy="384048"/>
+          </a:xfrm>
+          <a:prstGeom prst="roundRect">
+            <a:avLst/>
+          </a:prstGeom>
+          <a:solidFill>
+            <a:srgbClr val="F97316"/>
+          </a:solidFill>
+          <a:ln>
+            <a:solidFill>
+              <a:srgbClr val="F97316"/>
+            </a:solidFill>
+          </a:ln>
+        </p:spPr>
+        <p:style>
+          <a:lnRef idx="1">
+            <a:schemeClr val="accent1"/>
+          </a:lnRef>
+          <a:fillRef idx="3">
+            <a:schemeClr val="accent1"/>
+          </a:fillRef>
+          <a:effectRef idx="2">
+            <a:schemeClr val="accent1"/>
+          </a:effectRef>
+          <a:fontRef idx="minor">
+            <a:schemeClr val="lt1"/>
+          </a:fontRef>
+        </p:style>
+        <p:txBody>
+          <a:bodyPr rtlCol="0" anchor="ctr"/>
+          <a:lstStyle/>
+          <a:p>
+            <a:pPr algn="ctr">
+              <a:defRPr sz="1100" b="1">
+                <a:solidFill>
+                  <a:srgbClr val="FFFFFF"/>
+                </a:solidFill>
+              </a:defRPr>
+            </a:pPr>
+            <a:r>
+              <a:t>TV</a:t>
+            </a:r>
+          </a:p>
+        </p:txBody>
+      </p:sp>
+      <p:cxnSp>
+        <p:nvCxnSpPr>
+          <p:cNvPr id="15" name="Connector 14"/>
+          <p:cNvCxnSpPr/>
+          <p:nvPr/>
+        </p:nvCxnSpPr>
+        <p:spPr>
+          <a:xfrm flipV="1">
+            <a:off x="9718040" y="2646680"/>
+            <a:ext cx="685800" cy="530352"/>
+          </a:xfrm>
+          <a:prstGeom prst="line">
+            <a:avLst/>
+          </a:prstGeom>
+          <a:ln w="38100">
+            <a:solidFill>
+              <a:srgbClr val="16A34A"/>
+            </a:solidFill>
+          </a:ln>
+        </p:spPr>
+        <p:style>
+          <a:lnRef idx="2">
+            <a:schemeClr val="accent1"/>
+          </a:lnRef>
+          <a:fillRef idx="0">
+            <a:schemeClr val="accent1"/>
+          </a:fillRef>
+          <a:effectRef idx="1">
+            <a:schemeClr val="accent1"/>
+          </a:effectRef>
+          <a:fontRef idx="minor">
+            <a:schemeClr val="tx1"/>
+          </a:fontRef>
+        </p:style>
+      </p:cxnSp>
+      <p:cxnSp>
+        <p:nvCxnSpPr>
+          <p:cNvPr id="16" name="Connector 15"/>
+          <p:cNvCxnSpPr/>
+          <p:nvPr/>
+        </p:nvCxnSpPr>
+        <p:spPr>
+          <a:xfrm>
+            <a:off x="9718040" y="3177032"/>
+            <a:ext cx="777240" cy="0"/>
+          </a:xfrm>
+          <a:prstGeom prst="line">
+            <a:avLst/>
+          </a:prstGeom>
+          <a:ln w="38100">
+            <a:solidFill>
+              <a:srgbClr val="F97316"/>
+            </a:solidFill>
+          </a:ln>
+        </p:spPr>
+        <p:style>
+          <a:lnRef idx="2">
+            <a:schemeClr val="accent1"/>
+          </a:lnRef>
+          <a:fillRef idx="0">
+            <a:schemeClr val="accent1"/>
+          </a:fillRef>
+          <a:effectRef idx="1">
+            <a:schemeClr val="accent1"/>
+          </a:effectRef>
+          <a:fontRef idx="minor">
+            <a:schemeClr val="tx1"/>
+          </a:fontRef>
+        </p:style>
+      </p:cxnSp>
+      <p:cxnSp>
+        <p:nvCxnSpPr>
+          <p:cNvPr id="17" name="Connector 16"/>
+          <p:cNvCxnSpPr/>
+          <p:nvPr/>
+        </p:nvCxnSpPr>
+        <p:spPr>
+          <a:xfrm>
+            <a:off x="9718040" y="3177032"/>
+            <a:ext cx="685800" cy="521208"/>
+          </a:xfrm>
+          <a:prstGeom prst="line">
+            <a:avLst/>
+          </a:prstGeom>
+          <a:ln w="38100">
+            <a:solidFill>
+              <a:srgbClr val="DC2626"/>
+            </a:solidFill>
+          </a:ln>
+        </p:spPr>
+        <p:style>
+          <a:lnRef idx="2">
+            <a:schemeClr val="accent1"/>
+          </a:lnRef>
+          <a:fillRef idx="0">
+            <a:schemeClr val="accent1"/>
+          </a:fillRef>
+          <a:effectRef idx="1">
+            <a:schemeClr val="accent1"/>
+          </a:effectRef>
+          <a:fontRef idx="minor">
+            <a:schemeClr val="tx1"/>
+          </a:fontRef>
+        </p:style>
+      </p:cxnSp>
+      <p:sp>
+        <p:nvSpPr>
+          <p:cNvPr id="18" name="TextBox 17"/>
+          <p:cNvSpPr txBox="1"/>
+          <p:nvPr/>
+        </p:nvSpPr>
+        <p:spPr>
+          <a:xfrm>
+            <a:off x="7477760" y="3881120"/>
+            <a:ext cx="3108960" cy="274320"/>
+          </a:xfrm>
+          <a:prstGeom prst="rect">
+            <a:avLst/>
+          </a:prstGeom>
+          <a:noFill/>
+        </p:spPr>
+        <p:txBody>
+          <a:bodyPr wrap="none" anchor="ctr">
+            <a:spAutoFit/>
+          </a:bodyPr>
+          <a:lstStyle/>
+          <a:p>
+            <a:pPr algn="ctr">
+              <a:defRPr sz="1800" b="1">
+                <a:solidFill>
+                  <a:srgbClr val="16A34A"/>
+                </a:solidFill>
+              </a:defRPr>
+            </a:pPr>
+            <a:r>
+              <a:t>More careful</a:t>
+            </a:r>
+          </a:p>
+        </p:txBody>
+      </p:sp>
+      <p:sp>
+        <p:nvSpPr>
+          <p:cNvPr id="19" name="Rounded Rectangle 18"/>
+          <p:cNvSpPr/>
+          <p:nvPr/>
+        </p:nvSpPr>
+        <p:spPr>
+          <a:xfrm>
+            <a:off x="1828800" y="5491480"/>
+            <a:ext cx="8595360" cy="685800"/>
+          </a:xfrm>
+          <a:prstGeom prst="roundRect">
+            <a:avLst/>
+          </a:prstGeom>
+          <a:solidFill>
+            <a:srgbClr val="DBEAFE"/>
+          </a:solidFill>
+          <a:ln>
+            <a:solidFill>
+              <a:srgbClr val="2563EB"/>
+            </a:solidFill>
+          </a:ln>
+        </p:spPr>
+        <p:style>
+          <a:lnRef idx="1">
+            <a:schemeClr val="accent1"/>
+          </a:lnRef>
+          <a:fillRef idx="3">
+            <a:schemeClr val="accent1"/>
+          </a:fillRef>
+          <a:effectRef idx="2">
+            <a:schemeClr val="accent1"/>
+          </a:effectRef>
+          <a:fontRef idx="minor">
+            <a:schemeClr val="lt1"/>
+          </a:fontRef>
+        </p:style>
+        <p:txBody>
+          <a:bodyPr lIns="109728" rIns="109728" rtlCol="0" anchor="ctr"/>
+          <a:lstStyle/>
+          <a:p>
+            <a:pPr algn="ctr">
+              <a:defRPr sz="1800" b="1">
+                <a:solidFill>
+                  <a:srgbClr val="172554"/>
+                </a:solidFill>
+              </a:defRPr>
+            </a:pPr>
+            <a:r>
+              <a:rPr b="0">
+                <a:solidFill>
+                  <a:srgbClr val="111827"/>
+                </a:solidFill>
+                <a:latin typeface="UCL Sans" pitchFamily="2" charset="77"/>
+              </a:rPr>
+              <a:t>The challenge: choose a move that is safe for many possible futures.</a:t>
+            </a:r>
+            <a:endParaRPr b="0">
+              <a:solidFill>
+                <a:srgbClr val="111827"/>
+              </a:solidFill>
+              <a:latin typeface="UCL Sans" pitchFamily="2" charset="77"/>
+            </a:endParaRPr>
+          </a:p>
+        </p:txBody>
+      </p:sp>
+      <p:sp>
+        <p:nvSpPr>
+          <p:cNvPr id="20" name="Rounded Rectangle 19"/>
+          <p:cNvSpPr/>
+          <p:nvPr/>
+        </p:nvSpPr>
+        <p:spPr>
+          <a:xfrm>
+            <a:off x="914400" y="4384040"/>
+            <a:ext cx="10241280" cy="868680"/>
+          </a:xfrm>
+          <a:prstGeom prst="roundRect">
+            <a:avLst/>
+          </a:prstGeom>
+          <a:solidFill>
+            <a:srgbClr val="F3F4F6"/>
+          </a:solidFill>
+          <a:ln>
+            <a:solidFill>
+              <a:srgbClr val="D1D5DB"/>
+            </a:solidFill>
+          </a:ln>
+        </p:spPr>
+        <p:style>
+          <a:lnRef idx="1">
+            <a:schemeClr val="accent1"/>
+          </a:lnRef>
+          <a:fillRef idx="3">
+            <a:schemeClr val="accent1"/>
+          </a:fillRef>
+          <a:effectRef idx="2">
+            <a:schemeClr val="accent1"/>
+          </a:effectRef>
+          <a:fontRef idx="minor">
+            <a:schemeClr val="lt1"/>
+          </a:fontRef>
+        </p:style>
+        <p:txBody>
+          <a:bodyPr wrap="square" lIns="164592" tIns="91440" rIns="164592" bIns="73152" rtlCol="0" anchor="ctr"/>
+          <a:lstStyle/>
+          <a:p>
+            <a:pPr algn="l">
+              <a:defRPr sz="1500">
+                <a:solidFill>
+                  <a:srgbClr val="111827"/>
+                </a:solidFill>
+              </a:defRPr>
+            </a:pPr>
+            <a:r>
+              <a:rPr sz="1800">
+                <a:latin typeface="UCL Sans" pitchFamily="2" charset="77"/>
+              </a:rPr>
+              <a:t>The problem is uncertainty. If the self-driving car only trusts one guessed path, it may make a risky decision. A safer car should think about several possible futures, just like a person checks both directions before crossing a road.</a:t>
+            </a:r>
+            <a:endParaRPr sz="1800">
+              <a:latin typeface="UCL Sans" pitchFamily="2" charset="77"/>
+            </a:endParaRPr>
+          </a:p>
+        </p:txBody>
+      </p:sp>
     </p:spTree>
-    <p:extLst>
-      <p:ext uri="{BB962C8B-B14F-4D97-AF65-F5344CB8AC3E}">
-        <p14:creationId xmlns:p14="http://schemas.microsoft.com/office/powerpoint/2010/main" val="3616484203"/>
-      </p:ext>
-    </p:extLst>
   </p:cSld>
   <p:clrMapOvr>
     <a:masterClrMapping/>
@@ -13085,13 +12968,7 @@
   <p:cSld>
     <p:spTree>
       <p:nvGrpSpPr>
-        <p:cNvPr id="1" name="">
-          <a:extLst>
-            <a:ext uri="{FF2B5EF4-FFF2-40B4-BE49-F238E27FC236}">
-              <a16:creationId xmlns:a16="http://schemas.microsoft.com/office/drawing/2014/main" id="{40BF945C-B680-79AA-2159-B65C77B9EB5E}"/>
-            </a:ext>
-          </a:extLst>
-        </p:cNvPr>
+        <p:cNvPr id="1" name=""/>
         <p:cNvGrpSpPr/>
         <p:nvPr/>
       </p:nvGrpSpPr>
@@ -13105,13 +12982,7 @@
       </p:grpSpPr>
       <p:sp>
         <p:nvSpPr>
-          <p:cNvPr id="2" name="Title 1">
-            <a:extLst>
-              <a:ext uri="{FF2B5EF4-FFF2-40B4-BE49-F238E27FC236}">
-                <a16:creationId xmlns:a16="http://schemas.microsoft.com/office/drawing/2014/main" id="{F899972B-0FAC-77AD-C54F-93B0168096B2}"/>
-              </a:ext>
-            </a:extLst>
-          </p:cNvPr>
+          <p:cNvPr id="2" name="Title 1"/>
           <p:cNvSpPr>
             <a:spLocks noGrp="1"/>
           </p:cNvSpPr>
@@ -13136,13 +13007,7 @@
       </p:sp>
       <p:sp>
         <p:nvSpPr>
-          <p:cNvPr id="3" name="Text Placeholder 2">
-            <a:extLst>
-              <a:ext uri="{FF2B5EF4-FFF2-40B4-BE49-F238E27FC236}">
-                <a16:creationId xmlns:a16="http://schemas.microsoft.com/office/drawing/2014/main" id="{F99F6D73-11FA-B8D1-017E-972FA8070E2C}"/>
-              </a:ext>
-            </a:extLst>
-          </p:cNvPr>
+          <p:cNvPr id="3" name="Text Placeholder 2"/>
           <p:cNvSpPr>
             <a:spLocks noGrp="1"/>
           </p:cNvSpPr>
@@ -13152,7 +13017,7 @@
         </p:nvSpPr>
         <p:spPr>
           <a:xfrm>
-            <a:off x="440783" y="1916825"/>
+            <a:off x="440783" y="1154825"/>
             <a:ext cx="7239393" cy="3528300"/>
           </a:xfrm>
         </p:spPr>
@@ -13160,16 +13025,332 @@
           <a:bodyPr/>
           <a:lstStyle/>
           <a:p>
+            <a:pPr>
+              <a:defRPr sz="1500">
+                <a:solidFill>
+                  <a:srgbClr val="4B5563"/>
+                </a:solidFill>
+              </a:defRPr>
+            </a:pPr>
+            <a:r>
+              <a:rPr sz="1800">
+                <a:sym typeface="+mn-ea"/>
+              </a:rPr>
+              <a:t>A good car should be safe, not stuck, and not uncomfortable</a:t>
+            </a:r>
             <a:endParaRPr lang="en-GB" dirty="0"/>
           </a:p>
         </p:txBody>
       </p:sp>
+      <p:sp>
+        <p:nvSpPr>
+          <p:cNvPr id="5" name="Rounded Rectangle 4"/>
+          <p:cNvSpPr/>
+          <p:nvPr/>
+        </p:nvSpPr>
+        <p:spPr>
+          <a:xfrm>
+            <a:off x="1097280" y="1828800"/>
+            <a:ext cx="2560320" cy="1097280"/>
+          </a:xfrm>
+          <a:prstGeom prst="roundRect">
+            <a:avLst/>
+          </a:prstGeom>
+          <a:solidFill>
+            <a:srgbClr val="DCFCE7"/>
+          </a:solidFill>
+          <a:ln>
+            <a:solidFill>
+              <a:srgbClr val="16A34A"/>
+            </a:solidFill>
+          </a:ln>
+        </p:spPr>
+        <p:style>
+          <a:lnRef idx="1">
+            <a:schemeClr val="accent1"/>
+          </a:lnRef>
+          <a:fillRef idx="3">
+            <a:schemeClr val="accent1"/>
+          </a:fillRef>
+          <a:effectRef idx="2">
+            <a:schemeClr val="accent1"/>
+          </a:effectRef>
+          <a:fontRef idx="minor">
+            <a:schemeClr val="lt1"/>
+          </a:fontRef>
+        </p:style>
+        <p:txBody>
+          <a:bodyPr lIns="109728" rIns="109728" rtlCol="0" anchor="ctr"/>
+          <a:lstStyle/>
+          <a:p>
+            <a:pPr algn="ctr">
+              <a:defRPr sz="2800" b="1">
+                <a:solidFill>
+                  <a:srgbClr val="172554"/>
+                </a:solidFill>
+              </a:defRPr>
+            </a:pPr>
+            <a:r>
+              <a:t>Safe</a:t>
+            </a:r>
+          </a:p>
+        </p:txBody>
+      </p:sp>
+      <p:sp>
+        <p:nvSpPr>
+          <p:cNvPr id="6" name="Rounded Rectangle 5"/>
+          <p:cNvSpPr/>
+          <p:nvPr/>
+        </p:nvSpPr>
+        <p:spPr>
+          <a:xfrm>
+            <a:off x="4754880" y="1828800"/>
+            <a:ext cx="2560320" cy="1097280"/>
+          </a:xfrm>
+          <a:prstGeom prst="roundRect">
+            <a:avLst/>
+          </a:prstGeom>
+          <a:solidFill>
+            <a:srgbClr val="DBEAFE"/>
+          </a:solidFill>
+          <a:ln>
+            <a:solidFill>
+              <a:srgbClr val="2563EB"/>
+            </a:solidFill>
+          </a:ln>
+        </p:spPr>
+        <p:style>
+          <a:lnRef idx="1">
+            <a:schemeClr val="accent1"/>
+          </a:lnRef>
+          <a:fillRef idx="3">
+            <a:schemeClr val="accent1"/>
+          </a:fillRef>
+          <a:effectRef idx="2">
+            <a:schemeClr val="accent1"/>
+          </a:effectRef>
+          <a:fontRef idx="minor">
+            <a:schemeClr val="lt1"/>
+          </a:fontRef>
+        </p:style>
+        <p:txBody>
+          <a:bodyPr lIns="109728" rIns="109728" rtlCol="0" anchor="ctr"/>
+          <a:lstStyle/>
+          <a:p>
+            <a:pPr algn="ctr">
+              <a:defRPr sz="2800" b="1">
+                <a:solidFill>
+                  <a:srgbClr val="172554"/>
+                </a:solidFill>
+              </a:defRPr>
+            </a:pPr>
+            <a:r>
+              <a:t>Keep moving</a:t>
+            </a:r>
+          </a:p>
+        </p:txBody>
+      </p:sp>
+      <p:sp>
+        <p:nvSpPr>
+          <p:cNvPr id="7" name="Rounded Rectangle 6"/>
+          <p:cNvSpPr/>
+          <p:nvPr/>
+        </p:nvSpPr>
+        <p:spPr>
+          <a:xfrm>
+            <a:off x="8412480" y="1828800"/>
+            <a:ext cx="2560320" cy="1097280"/>
+          </a:xfrm>
+          <a:prstGeom prst="roundRect">
+            <a:avLst/>
+          </a:prstGeom>
+          <a:solidFill>
+            <a:srgbClr val="FFEDD5"/>
+          </a:solidFill>
+          <a:ln>
+            <a:solidFill>
+              <a:srgbClr val="F97316"/>
+            </a:solidFill>
+          </a:ln>
+        </p:spPr>
+        <p:style>
+          <a:lnRef idx="1">
+            <a:schemeClr val="accent1"/>
+          </a:lnRef>
+          <a:fillRef idx="3">
+            <a:schemeClr val="accent1"/>
+          </a:fillRef>
+          <a:effectRef idx="2">
+            <a:schemeClr val="accent1"/>
+          </a:effectRef>
+          <a:fontRef idx="minor">
+            <a:schemeClr val="lt1"/>
+          </a:fontRef>
+        </p:style>
+        <p:txBody>
+          <a:bodyPr lIns="109728" rIns="109728" rtlCol="0" anchor="ctr"/>
+          <a:lstStyle/>
+          <a:p>
+            <a:pPr algn="ctr">
+              <a:defRPr sz="2800" b="1">
+                <a:solidFill>
+                  <a:srgbClr val="172554"/>
+                </a:solidFill>
+              </a:defRPr>
+            </a:pPr>
+            <a:r>
+              <a:t>Smooth ride</a:t>
+            </a:r>
+          </a:p>
+        </p:txBody>
+      </p:sp>
+      <p:sp>
+        <p:nvSpPr>
+          <p:cNvPr id="8" name="TextBox 7"/>
+          <p:cNvSpPr txBox="1"/>
+          <p:nvPr/>
+        </p:nvSpPr>
+        <p:spPr>
+          <a:xfrm>
+            <a:off x="1280160" y="3174999"/>
+            <a:ext cx="9601200" cy="1153160"/>
+          </a:xfrm>
+          <a:prstGeom prst="rect">
+            <a:avLst/>
+          </a:prstGeom>
+          <a:noFill/>
+        </p:spPr>
+        <p:txBody>
+          <a:bodyPr wrap="square">
+            <a:spAutoFit/>
+          </a:bodyPr>
+          <a:lstStyle/>
+          <a:p>
+            <a:pPr marL="0">
+              <a:spcAft>
+                <a:spcPts val="900"/>
+              </a:spcAft>
+              <a:defRPr sz="2200">
+                <a:solidFill>
+                  <a:srgbClr val="111827"/>
+                </a:solidFill>
+              </a:defRPr>
+            </a:pPr>
+            <a:r>
+              <a:rPr sz="1800">
+                <a:latin typeface="UCL Sans" pitchFamily="2" charset="77"/>
+              </a:rPr>
+              <a:t>Too brave: possible crash.</a:t>
+            </a:r>
+            <a:endParaRPr sz="1800">
+              <a:latin typeface="UCL Sans" pitchFamily="2" charset="77"/>
+            </a:endParaRPr>
+          </a:p>
+          <a:p>
+            <a:pPr marL="0">
+              <a:spcAft>
+                <a:spcPts val="900"/>
+              </a:spcAft>
+              <a:defRPr sz="2200">
+                <a:solidFill>
+                  <a:srgbClr val="111827"/>
+                </a:solidFill>
+              </a:defRPr>
+            </a:pPr>
+            <a:r>
+              <a:rPr sz="1800">
+                <a:latin typeface="UCL Sans" pitchFamily="2" charset="77"/>
+              </a:rPr>
+              <a:t>Too scared: the car may stop and block traffic.</a:t>
+            </a:r>
+            <a:endParaRPr sz="1800">
+              <a:latin typeface="UCL Sans" pitchFamily="2" charset="77"/>
+            </a:endParaRPr>
+          </a:p>
+          <a:p>
+            <a:pPr marL="0">
+              <a:spcAft>
+                <a:spcPts val="900"/>
+              </a:spcAft>
+              <a:defRPr sz="2200">
+                <a:solidFill>
+                  <a:srgbClr val="111827"/>
+                </a:solidFill>
+              </a:defRPr>
+            </a:pPr>
+            <a:r>
+              <a:rPr sz="1800">
+                <a:latin typeface="UCL Sans" pitchFamily="2" charset="77"/>
+              </a:rPr>
+              <a:t>Too rough: passengers feel uncomfortable.</a:t>
+            </a:r>
+            <a:endParaRPr sz="1800">
+              <a:latin typeface="UCL Sans" pitchFamily="2" charset="77"/>
+            </a:endParaRPr>
+          </a:p>
+        </p:txBody>
+      </p:sp>
+      <p:sp>
+        <p:nvSpPr>
+          <p:cNvPr id="9" name="Rounded Rectangle 8"/>
+          <p:cNvSpPr/>
+          <p:nvPr/>
+        </p:nvSpPr>
+        <p:spPr>
+          <a:xfrm>
+            <a:off x="914400" y="4800600"/>
+            <a:ext cx="10058400" cy="868680"/>
+          </a:xfrm>
+          <a:prstGeom prst="roundRect">
+            <a:avLst/>
+          </a:prstGeom>
+          <a:solidFill>
+            <a:srgbClr val="DBEAFE"/>
+          </a:solidFill>
+          <a:ln>
+            <a:solidFill>
+              <a:srgbClr val="2563EB"/>
+            </a:solidFill>
+          </a:ln>
+        </p:spPr>
+        <p:style>
+          <a:lnRef idx="1">
+            <a:schemeClr val="accent1"/>
+          </a:lnRef>
+          <a:fillRef idx="3">
+            <a:schemeClr val="accent1"/>
+          </a:fillRef>
+          <a:effectRef idx="2">
+            <a:schemeClr val="accent1"/>
+          </a:effectRef>
+          <a:fontRef idx="minor">
+            <a:schemeClr val="lt1"/>
+          </a:fontRef>
+        </p:style>
+        <p:txBody>
+          <a:bodyPr wrap="square" lIns="164592" tIns="91440" rIns="164592" bIns="73152" rtlCol="0" anchor="ctr"/>
+          <a:lstStyle/>
+          <a:p>
+            <a:pPr algn="l">
+              <a:defRPr sz="1500">
+                <a:solidFill>
+                  <a:srgbClr val="111827"/>
+                </a:solidFill>
+              </a:defRPr>
+            </a:pPr>
+            <a:r>
+              <a:rPr sz="1800">
+                <a:latin typeface="UCL Sans" pitchFamily="2" charset="77"/>
+              </a:rPr>
+              <a:t>This matters because real junctions are busy and confusing. A good autonomous car must balance three simple goals: avoid danger, keep moving, and make the ride feel smooth for passengers.</a:t>
+            </a:r>
+            <a:endParaRPr sz="1800">
+              <a:latin typeface="UCL Sans" pitchFamily="2" charset="77"/>
+            </a:endParaRPr>
+          </a:p>
+        </p:txBody>
+      </p:sp>
     </p:spTree>
-    <p:extLst>
-      <p:ext uri="{BB962C8B-B14F-4D97-AF65-F5344CB8AC3E}">
-        <p14:creationId xmlns:p14="http://schemas.microsoft.com/office/powerpoint/2010/main" val="2312546360"/>
-      </p:ext>
-    </p:extLst>
   </p:cSld>
   <p:clrMapOvr>
     <a:masterClrMapping/>
@@ -13182,13 +13363,7 @@
   <p:cSld>
     <p:spTree>
       <p:nvGrpSpPr>
-        <p:cNvPr id="1" name="">
-          <a:extLst>
-            <a:ext uri="{FF2B5EF4-FFF2-40B4-BE49-F238E27FC236}">
-              <a16:creationId xmlns:a16="http://schemas.microsoft.com/office/drawing/2014/main" id="{640BC1E7-107D-7435-EBF5-17BA8E58E2D4}"/>
-            </a:ext>
-          </a:extLst>
-        </p:cNvPr>
+        <p:cNvPr id="1" name=""/>
         <p:cNvGrpSpPr/>
         <p:nvPr/>
       </p:nvGrpSpPr>
@@ -13202,13 +13377,7 @@
       </p:grpSpPr>
       <p:sp>
         <p:nvSpPr>
-          <p:cNvPr id="2" name="Title 1">
-            <a:extLst>
-              <a:ext uri="{FF2B5EF4-FFF2-40B4-BE49-F238E27FC236}">
-                <a16:creationId xmlns:a16="http://schemas.microsoft.com/office/drawing/2014/main" id="{08DCEF44-DE09-7BD3-F964-80566AE7F205}"/>
-              </a:ext>
-            </a:extLst>
-          </p:cNvPr>
+          <p:cNvPr id="2" name="Title 1"/>
           <p:cNvSpPr>
             <a:spLocks noGrp="1"/>
           </p:cNvSpPr>
@@ -13233,40 +13402,352 @@
       </p:sp>
       <p:sp>
         <p:nvSpPr>
-          <p:cNvPr id="3" name="Text Placeholder 2">
-            <a:extLst>
-              <a:ext uri="{FF2B5EF4-FFF2-40B4-BE49-F238E27FC236}">
-                <a16:creationId xmlns:a16="http://schemas.microsoft.com/office/drawing/2014/main" id="{107C7622-578F-9B2D-ADC9-9C572E5BBAE4}"/>
-              </a:ext>
-            </a:extLst>
-          </p:cNvPr>
-          <p:cNvSpPr>
-            <a:spLocks noGrp="1"/>
-          </p:cNvSpPr>
-          <p:nvPr>
-            <p:ph type="body" sz="quarter" idx="11"/>
-          </p:nvPr>
-        </p:nvSpPr>
-        <p:spPr>
-          <a:xfrm>
-            <a:off x="440783" y="1916825"/>
-            <a:ext cx="7239393" cy="3528300"/>
-          </a:xfrm>
-        </p:spPr>
-        <p:txBody>
-          <a:bodyPr/>
+          <p:cNvPr id="5" name="TextBox 4"/>
+          <p:cNvSpPr txBox="1"/>
+          <p:nvPr/>
+        </p:nvSpPr>
+        <p:spPr>
+          <a:xfrm>
+            <a:off x="822960" y="1874519"/>
+            <a:ext cx="4297680" cy="1906905"/>
+          </a:xfrm>
+          <a:prstGeom prst="rect">
+            <a:avLst/>
+          </a:prstGeom>
+          <a:noFill/>
+        </p:spPr>
+        <p:txBody>
+          <a:bodyPr wrap="square">
+            <a:spAutoFit/>
+          </a:bodyPr>
           <a:lstStyle/>
           <a:p>
-            <a:endParaRPr lang="en-GB" dirty="0"/>
+            <a:pPr>
+              <a:spcAft>
+                <a:spcPts val="600"/>
+              </a:spcAft>
+              <a:defRPr sz="1700">
+                <a:solidFill>
+                  <a:srgbClr val="111827"/>
+                </a:solidFill>
+              </a:defRPr>
+            </a:pPr>
+            <a:r>
+              <a:rPr sz="1800">
+                <a:latin typeface="UCL Sans" pitchFamily="2" charset="77"/>
+              </a:rPr>
+              <a:t>Some planners follow one predicted path.</a:t>
+            </a:r>
+            <a:endParaRPr sz="1800">
+              <a:latin typeface="UCL Sans" pitchFamily="2" charset="77"/>
+            </a:endParaRPr>
+          </a:p>
+          <a:p>
+            <a:pPr>
+              <a:spcAft>
+                <a:spcPts val="600"/>
+              </a:spcAft>
+              <a:defRPr sz="1700">
+                <a:solidFill>
+                  <a:srgbClr val="111827"/>
+                </a:solidFill>
+              </a:defRPr>
+            </a:pPr>
+            <a:r>
+              <a:rPr sz="1800">
+                <a:latin typeface="UCL Sans" pitchFamily="2" charset="77"/>
+              </a:rPr>
+              <a:t>Learning models can show many possible futures.</a:t>
+            </a:r>
+            <a:endParaRPr sz="1800">
+              <a:latin typeface="UCL Sans" pitchFamily="2" charset="77"/>
+            </a:endParaRPr>
+          </a:p>
+          <a:p>
+            <a:pPr>
+              <a:spcAft>
+                <a:spcPts val="600"/>
+              </a:spcAft>
+              <a:defRPr sz="1700">
+                <a:solidFill>
+                  <a:srgbClr val="111827"/>
+                </a:solidFill>
+              </a:defRPr>
+            </a:pPr>
+            <a:r>
+              <a:rPr sz="1800">
+                <a:latin typeface="UCL Sans" pitchFamily="2" charset="77"/>
+              </a:rPr>
+              <a:t>The hard part is using these futures safely.</a:t>
+            </a:r>
+            <a:endParaRPr sz="1800">
+              <a:latin typeface="UCL Sans" pitchFamily="2" charset="77"/>
+            </a:endParaRPr>
+          </a:p>
+        </p:txBody>
+      </p:sp>
+      <p:sp>
+        <p:nvSpPr>
+          <p:cNvPr id="7" name="TextBox 6"/>
+          <p:cNvSpPr txBox="1"/>
+          <p:nvPr/>
+        </p:nvSpPr>
+        <p:spPr>
+          <a:xfrm>
+            <a:off x="6492240" y="1874519"/>
+            <a:ext cx="4297680" cy="1076325"/>
+          </a:xfrm>
+          <a:prstGeom prst="rect">
+            <a:avLst/>
+          </a:prstGeom>
+          <a:noFill/>
+        </p:spPr>
+        <p:txBody>
+          <a:bodyPr wrap="square">
+            <a:spAutoFit/>
+          </a:bodyPr>
+          <a:lstStyle/>
+          <a:p>
+            <a:pPr>
+              <a:spcAft>
+                <a:spcPts val="600"/>
+              </a:spcAft>
+              <a:defRPr sz="1700">
+                <a:solidFill>
+                  <a:srgbClr val="111827"/>
+                </a:solidFill>
+              </a:defRPr>
+            </a:pPr>
+            <a:r>
+              <a:rPr sz="1800">
+                <a:latin typeface="UCL Sans" pitchFamily="2" charset="77"/>
+              </a:rPr>
+              <a:t>Use several predicted futures.</a:t>
+            </a:r>
+            <a:endParaRPr sz="1800">
+              <a:latin typeface="UCL Sans" pitchFamily="2" charset="77"/>
+            </a:endParaRPr>
+          </a:p>
+          <a:p>
+            <a:pPr>
+              <a:spcAft>
+                <a:spcPts val="600"/>
+              </a:spcAft>
+              <a:defRPr sz="1700">
+                <a:solidFill>
+                  <a:srgbClr val="111827"/>
+                </a:solidFill>
+              </a:defRPr>
+            </a:pPr>
+            <a:r>
+              <a:rPr sz="1800">
+                <a:latin typeface="UCL Sans" pitchFamily="2" charset="77"/>
+              </a:rPr>
+              <a:t>Give each future a safety budget.</a:t>
+            </a:r>
+            <a:endParaRPr sz="1800">
+              <a:latin typeface="UCL Sans" pitchFamily="2" charset="77"/>
+            </a:endParaRPr>
+          </a:p>
+          <a:p>
+            <a:pPr>
+              <a:spcAft>
+                <a:spcPts val="600"/>
+              </a:spcAft>
+              <a:defRPr sz="1700">
+                <a:solidFill>
+                  <a:srgbClr val="111827"/>
+                </a:solidFill>
+              </a:defRPr>
+            </a:pPr>
+            <a:r>
+              <a:rPr sz="1800">
+                <a:latin typeface="UCL Sans" pitchFamily="2" charset="77"/>
+              </a:rPr>
+              <a:t>Re-plan again at every step.</a:t>
+            </a:r>
+            <a:endParaRPr sz="1800">
+              <a:latin typeface="UCL Sans" pitchFamily="2" charset="77"/>
+            </a:endParaRPr>
+          </a:p>
+        </p:txBody>
+      </p:sp>
+      <p:sp>
+        <p:nvSpPr>
+          <p:cNvPr id="8" name="Rounded Rectangle 7"/>
+          <p:cNvSpPr/>
+          <p:nvPr/>
+        </p:nvSpPr>
+        <p:spPr>
+          <a:xfrm>
+            <a:off x="842645" y="4434840"/>
+            <a:ext cx="10058400" cy="1005840"/>
+          </a:xfrm>
+          <a:prstGeom prst="roundRect">
+            <a:avLst/>
+          </a:prstGeom>
+          <a:solidFill>
+            <a:srgbClr val="F3F4F6"/>
+          </a:solidFill>
+          <a:ln>
+            <a:solidFill>
+              <a:srgbClr val="D1D5DB"/>
+            </a:solidFill>
+          </a:ln>
+        </p:spPr>
+        <p:style>
+          <a:lnRef idx="1">
+            <a:schemeClr val="accent1"/>
+          </a:lnRef>
+          <a:fillRef idx="3">
+            <a:schemeClr val="accent1"/>
+          </a:fillRef>
+          <a:effectRef idx="2">
+            <a:schemeClr val="accent1"/>
+          </a:effectRef>
+          <a:fontRef idx="minor">
+            <a:schemeClr val="lt1"/>
+          </a:fontRef>
+        </p:style>
+        <p:txBody>
+          <a:bodyPr wrap="square" lIns="164592" tIns="91440" rIns="164592" bIns="73152" rtlCol="0" anchor="ctr"/>
+          <a:lstStyle/>
+          <a:p>
+            <a:pPr algn="l">
+              <a:defRPr sz="1500">
+                <a:solidFill>
+                  <a:srgbClr val="111827"/>
+                </a:solidFill>
+              </a:defRPr>
+            </a:pPr>
+            <a:r>
+              <a:rPr sz="1800">
+                <a:latin typeface="UCL Sans" pitchFamily="2" charset="77"/>
+              </a:rPr>
+              <a:t>I am trying to connect prediction and control. Instead of treating prediction as one fixed line, it lets the car see multiple possible futures and then uses a careful planner to choose an action that keeps risk low.</a:t>
+            </a:r>
+            <a:endParaRPr sz="1800">
+              <a:latin typeface="UCL Sans" pitchFamily="2" charset="77"/>
+            </a:endParaRPr>
+          </a:p>
+        </p:txBody>
+      </p:sp>
+      <p:sp>
+        <p:nvSpPr>
+          <p:cNvPr id="4" name="Rounded Rectangle 3"/>
+          <p:cNvSpPr/>
+          <p:nvPr/>
+        </p:nvSpPr>
+        <p:spPr>
+          <a:xfrm>
+            <a:off x="731520" y="1234440"/>
+            <a:ext cx="3840480" cy="502920"/>
+          </a:xfrm>
+          <a:prstGeom prst="roundRect">
+            <a:avLst/>
+          </a:prstGeom>
+          <a:solidFill>
+            <a:srgbClr val="FFEDD5"/>
+          </a:solidFill>
+          <a:ln>
+            <a:solidFill>
+              <a:srgbClr val="F97316"/>
+            </a:solidFill>
+          </a:ln>
+        </p:spPr>
+        <p:style>
+          <a:lnRef idx="1">
+            <a:schemeClr val="accent1"/>
+          </a:lnRef>
+          <a:fillRef idx="3">
+            <a:schemeClr val="accent1"/>
+          </a:fillRef>
+          <a:effectRef idx="2">
+            <a:schemeClr val="accent1"/>
+          </a:effectRef>
+          <a:fontRef idx="minor">
+            <a:schemeClr val="lt1"/>
+          </a:fontRef>
+        </p:style>
+        <p:txBody>
+          <a:bodyPr wrap="square" rtlCol="0" anchor="ctr"/>
+          <a:lstStyle/>
+          <a:p>
+            <a:pPr algn="ctr">
+              <a:defRPr sz="1600" b="1">
+                <a:solidFill>
+                  <a:srgbClr val="172554"/>
+                </a:solidFill>
+              </a:defRPr>
+            </a:pPr>
+            <a:r>
+              <a:t>What existing methods often do</a:t>
+            </a:r>
+          </a:p>
+        </p:txBody>
+      </p:sp>
+      <p:sp>
+        <p:nvSpPr>
+          <p:cNvPr id="6" name="Rounded Rectangle 5"/>
+          <p:cNvSpPr/>
+          <p:nvPr/>
+        </p:nvSpPr>
+        <p:spPr>
+          <a:xfrm>
+            <a:off x="6400800" y="1234440"/>
+            <a:ext cx="3840480" cy="502920"/>
+          </a:xfrm>
+          <a:prstGeom prst="roundRect">
+            <a:avLst/>
+          </a:prstGeom>
+          <a:solidFill>
+            <a:srgbClr val="DCFCE7"/>
+          </a:solidFill>
+          <a:ln>
+            <a:solidFill>
+              <a:srgbClr val="16A34A"/>
+            </a:solidFill>
+          </a:ln>
+        </p:spPr>
+        <p:style>
+          <a:lnRef idx="1">
+            <a:schemeClr val="accent1"/>
+          </a:lnRef>
+          <a:fillRef idx="3">
+            <a:schemeClr val="accent1"/>
+          </a:fillRef>
+          <a:effectRef idx="2">
+            <a:schemeClr val="accent1"/>
+          </a:effectRef>
+          <a:fontRef idx="minor">
+            <a:schemeClr val="lt1"/>
+          </a:fontRef>
+        </p:style>
+        <p:txBody>
+          <a:bodyPr wrap="square" rtlCol="0" anchor="ctr"/>
+          <a:lstStyle/>
+          <a:p>
+            <a:pPr algn="ctr">
+              <a:defRPr sz="1600" b="1">
+                <a:solidFill>
+                  <a:srgbClr val="172554"/>
+                </a:solidFill>
+              </a:defRPr>
+            </a:pPr>
+            <a:r>
+              <a:t>P</a:t>
+            </a:r>
+            <a:r>
+              <a:rPr lang="en-US"/>
+              <a:t>roposed </a:t>
+            </a:r>
+            <a:r>
+              <a:t>idea</a:t>
+            </a:r>
           </a:p>
         </p:txBody>
       </p:sp>
     </p:spTree>
-    <p:extLst>
-      <p:ext uri="{BB962C8B-B14F-4D97-AF65-F5344CB8AC3E}">
-        <p14:creationId xmlns:p14="http://schemas.microsoft.com/office/powerpoint/2010/main" val="131584406"/>
-      </p:ext>
-    </p:extLst>
   </p:cSld>
   <p:clrMapOvr>
     <a:masterClrMapping/>
@@ -13279,13 +13760,7 @@
   <p:cSld>
     <p:spTree>
       <p:nvGrpSpPr>
-        <p:cNvPr id="1" name="">
-          <a:extLst>
-            <a:ext uri="{FF2B5EF4-FFF2-40B4-BE49-F238E27FC236}">
-              <a16:creationId xmlns:a16="http://schemas.microsoft.com/office/drawing/2014/main" id="{91D4DF83-BCE7-B3C4-E55E-BEB9488D167F}"/>
-            </a:ext>
-          </a:extLst>
-        </p:cNvPr>
+        <p:cNvPr id="1" name=""/>
         <p:cNvGrpSpPr/>
         <p:nvPr/>
       </p:nvGrpSpPr>
@@ -13299,13 +13774,7 @@
       </p:grpSpPr>
       <p:sp>
         <p:nvSpPr>
-          <p:cNvPr id="2" name="Title 1">
-            <a:extLst>
-              <a:ext uri="{FF2B5EF4-FFF2-40B4-BE49-F238E27FC236}">
-                <a16:creationId xmlns:a16="http://schemas.microsoft.com/office/drawing/2014/main" id="{F274CAD9-A479-69C1-246D-A4CDF2E5CEFA}"/>
-              </a:ext>
-            </a:extLst>
-          </p:cNvPr>
+          <p:cNvPr id="2" name="Title 1"/>
           <p:cNvSpPr>
             <a:spLocks noGrp="1"/>
           </p:cNvSpPr>
@@ -13330,40 +13799,732 @@
       </p:sp>
       <p:sp>
         <p:nvSpPr>
-          <p:cNvPr id="3" name="Text Placeholder 2">
-            <a:extLst>
-              <a:ext uri="{FF2B5EF4-FFF2-40B4-BE49-F238E27FC236}">
-                <a16:creationId xmlns:a16="http://schemas.microsoft.com/office/drawing/2014/main" id="{192CD004-40D8-84F1-0B2E-2F218CE345D7}"/>
-              </a:ext>
-            </a:extLst>
-          </p:cNvPr>
-          <p:cNvSpPr>
-            <a:spLocks noGrp="1"/>
-          </p:cNvSpPr>
-          <p:nvPr>
-            <p:ph type="body" sz="quarter" idx="11"/>
-          </p:nvPr>
-        </p:nvSpPr>
-        <p:spPr>
-          <a:xfrm>
-            <a:off x="440783" y="1916825"/>
-            <a:ext cx="7239393" cy="3528300"/>
-          </a:xfrm>
-        </p:spPr>
-        <p:txBody>
-          <a:bodyPr/>
+          <p:cNvPr id="4" name="Rounded Rectangle 3"/>
+          <p:cNvSpPr/>
+          <p:nvPr/>
+        </p:nvSpPr>
+        <p:spPr>
+          <a:xfrm>
+            <a:off x="822960" y="1143000"/>
+            <a:ext cx="2926080" cy="548640"/>
+          </a:xfrm>
+          <a:prstGeom prst="roundRect">
+            <a:avLst/>
+          </a:prstGeom>
+          <a:solidFill>
+            <a:srgbClr val="DBEAFE"/>
+          </a:solidFill>
+          <a:ln>
+            <a:solidFill>
+              <a:srgbClr val="2563EB"/>
+            </a:solidFill>
+          </a:ln>
+        </p:spPr>
+        <p:style>
+          <a:lnRef idx="1">
+            <a:schemeClr val="accent1"/>
+          </a:lnRef>
+          <a:fillRef idx="3">
+            <a:schemeClr val="accent1"/>
+          </a:fillRef>
+          <a:effectRef idx="2">
+            <a:schemeClr val="accent1"/>
+          </a:effectRef>
+          <a:fontRef idx="minor">
+            <a:schemeClr val="lt1"/>
+          </a:fontRef>
+        </p:style>
+        <p:txBody>
+          <a:bodyPr wrap="square" rtlCol="0" anchor="ctr"/>
           <a:lstStyle/>
           <a:p>
-            <a:endParaRPr lang="en-GB" dirty="0"/>
+            <a:pPr algn="ctr">
+              <a:defRPr sz="1800" b="1">
+                <a:solidFill>
+                  <a:srgbClr val="172554"/>
+                </a:solidFill>
+              </a:defRPr>
+            </a:pPr>
+            <a:r>
+              <a:t>My test idea</a:t>
+            </a:r>
+          </a:p>
+        </p:txBody>
+      </p:sp>
+      <p:sp>
+        <p:nvSpPr>
+          <p:cNvPr id="5" name="TextBox 4"/>
+          <p:cNvSpPr txBox="1"/>
+          <p:nvPr/>
+        </p:nvSpPr>
+        <p:spPr>
+          <a:xfrm>
+            <a:off x="960120" y="1874519"/>
+            <a:ext cx="9784080" cy="645160"/>
+          </a:xfrm>
+          <a:prstGeom prst="rect">
+            <a:avLst/>
+          </a:prstGeom>
+          <a:noFill/>
+        </p:spPr>
+        <p:txBody>
+          <a:bodyPr wrap="square" lIns="73152" rIns="73152">
+            <a:spAutoFit/>
+          </a:bodyPr>
+          <a:lstStyle/>
+          <a:p>
+            <a:pPr algn="l">
+              <a:defRPr sz="2300" b="1">
+                <a:solidFill>
+                  <a:srgbClr val="172554"/>
+                </a:solidFill>
+              </a:defRPr>
+            </a:pPr>
+            <a:r>
+              <a:rPr sz="1800" b="0">
+                <a:solidFill>
+                  <a:srgbClr val="111827"/>
+                </a:solidFill>
+                <a:latin typeface="UCL Sans" pitchFamily="2" charset="77"/>
+              </a:rPr>
+              <a:t>If the car plans with several possible futures, it should cross the junction more safely than a weaker planner.</a:t>
+            </a:r>
+            <a:endParaRPr sz="1800" b="0">
+              <a:solidFill>
+                <a:srgbClr val="111827"/>
+              </a:solidFill>
+              <a:latin typeface="UCL Sans" pitchFamily="2" charset="77"/>
+            </a:endParaRPr>
+          </a:p>
+        </p:txBody>
+      </p:sp>
+      <p:sp>
+        <p:nvSpPr>
+          <p:cNvPr id="6" name="Rounded Rectangle 5"/>
+          <p:cNvSpPr/>
+          <p:nvPr/>
+        </p:nvSpPr>
+        <p:spPr>
+          <a:xfrm>
+            <a:off x="822960" y="2682240"/>
+            <a:ext cx="2926080" cy="502920"/>
+          </a:xfrm>
+          <a:prstGeom prst="roundRect">
+            <a:avLst/>
+          </a:prstGeom>
+          <a:solidFill>
+            <a:srgbClr val="DCFCE7"/>
+          </a:solidFill>
+          <a:ln>
+            <a:solidFill>
+              <a:srgbClr val="16A34A"/>
+            </a:solidFill>
+          </a:ln>
+        </p:spPr>
+        <p:style>
+          <a:lnRef idx="1">
+            <a:schemeClr val="accent1"/>
+          </a:lnRef>
+          <a:fillRef idx="3">
+            <a:schemeClr val="accent1"/>
+          </a:fillRef>
+          <a:effectRef idx="2">
+            <a:schemeClr val="accent1"/>
+          </a:effectRef>
+          <a:fontRef idx="minor">
+            <a:schemeClr val="lt1"/>
+          </a:fontRef>
+        </p:style>
+        <p:txBody>
+          <a:bodyPr wrap="square" rtlCol="0" anchor="ctr"/>
+          <a:lstStyle/>
+          <a:p>
+            <a:pPr algn="ctr">
+              <a:defRPr sz="1700" b="1">
+                <a:solidFill>
+                  <a:srgbClr val="172554"/>
+                </a:solidFill>
+              </a:defRPr>
+            </a:pPr>
+            <a:r>
+              <a:t>How I test it</a:t>
+            </a:r>
+          </a:p>
+        </p:txBody>
+      </p:sp>
+      <p:sp>
+        <p:nvSpPr>
+          <p:cNvPr id="7" name="TextBox 6"/>
+          <p:cNvSpPr txBox="1"/>
+          <p:nvPr/>
+        </p:nvSpPr>
+        <p:spPr>
+          <a:xfrm>
+            <a:off x="914400" y="3368039"/>
+            <a:ext cx="9875520" cy="721995"/>
+          </a:xfrm>
+          <a:prstGeom prst="rect">
+            <a:avLst/>
+          </a:prstGeom>
+          <a:noFill/>
+        </p:spPr>
+        <p:txBody>
+          <a:bodyPr wrap="square">
+            <a:spAutoFit/>
+          </a:bodyPr>
+          <a:lstStyle/>
+          <a:p>
+            <a:pPr>
+              <a:spcAft>
+                <a:spcPts val="600"/>
+              </a:spcAft>
+              <a:defRPr sz="1800">
+                <a:solidFill>
+                  <a:srgbClr val="111827"/>
+                </a:solidFill>
+              </a:defRPr>
+            </a:pPr>
+            <a:r>
+              <a:rPr>
+                <a:latin typeface="UCL Sans" pitchFamily="2" charset="77"/>
+              </a:rPr>
+              <a:t>Compare the main careful planner with simpler baselines.</a:t>
+            </a:r>
+            <a:endParaRPr>
+              <a:latin typeface="UCL Sans" pitchFamily="2" charset="77"/>
+            </a:endParaRPr>
+          </a:p>
+          <a:p>
+            <a:pPr>
+              <a:spcAft>
+                <a:spcPts val="600"/>
+              </a:spcAft>
+              <a:defRPr sz="1800">
+                <a:solidFill>
+                  <a:srgbClr val="111827"/>
+                </a:solidFill>
+              </a:defRPr>
+            </a:pPr>
+            <a:r>
+              <a:rPr>
+                <a:latin typeface="UCL Sans" pitchFamily="2" charset="77"/>
+              </a:rPr>
+              <a:t>Measure whether the car finishes, keeps distance, and moves smoothly.</a:t>
+            </a:r>
+            <a:endParaRPr>
+              <a:latin typeface="UCL Sans" pitchFamily="2" charset="77"/>
+            </a:endParaRPr>
+          </a:p>
+        </p:txBody>
+      </p:sp>
+      <p:sp>
+        <p:nvSpPr>
+          <p:cNvPr id="9" name="Rounded Rectangle 8"/>
+          <p:cNvSpPr/>
+          <p:nvPr/>
+        </p:nvSpPr>
+        <p:spPr>
+          <a:xfrm>
+            <a:off x="685800" y="4592320"/>
+            <a:ext cx="1417320" cy="685800"/>
+          </a:xfrm>
+          <a:prstGeom prst="roundRect">
+            <a:avLst/>
+          </a:prstGeom>
+          <a:solidFill>
+            <a:srgbClr val="F3F4F6"/>
+          </a:solidFill>
+          <a:ln>
+            <a:solidFill>
+              <a:srgbClr val="4B5563"/>
+            </a:solidFill>
+          </a:ln>
+        </p:spPr>
+        <p:style>
+          <a:lnRef idx="1">
+            <a:schemeClr val="accent1"/>
+          </a:lnRef>
+          <a:fillRef idx="3">
+            <a:schemeClr val="accent1"/>
+          </a:fillRef>
+          <a:effectRef idx="2">
+            <a:schemeClr val="accent1"/>
+          </a:effectRef>
+          <a:fontRef idx="minor">
+            <a:schemeClr val="lt1"/>
+          </a:fontRef>
+        </p:style>
+        <p:txBody>
+          <a:bodyPr wrap="square" rtlCol="0" anchor="ctr"/>
+          <a:lstStyle/>
+          <a:p>
+            <a:pPr algn="ctr">
+              <a:defRPr sz="1300" b="1">
+                <a:solidFill>
+                  <a:srgbClr val="172554"/>
+                </a:solidFill>
+              </a:defRPr>
+            </a:pPr>
+            <a:r>
+              <a:t>Scenario</a:t>
+            </a:r>
+          </a:p>
+        </p:txBody>
+      </p:sp>
+      <p:cxnSp>
+        <p:nvCxnSpPr>
+          <p:cNvPr id="10" name="Connector 4"/>
+          <p:cNvCxnSpPr/>
+          <p:nvPr/>
+        </p:nvCxnSpPr>
+        <p:spPr>
+          <a:xfrm>
+            <a:off x="2103120" y="4939792"/>
+            <a:ext cx="365760" cy="0"/>
+          </a:xfrm>
+          <a:prstGeom prst="line">
+            <a:avLst/>
+          </a:prstGeom>
+          <a:ln w="25400">
+            <a:solidFill>
+              <a:srgbClr val="4B5563"/>
+            </a:solidFill>
+          </a:ln>
+        </p:spPr>
+        <p:style>
+          <a:lnRef idx="2">
+            <a:schemeClr val="accent1"/>
+          </a:lnRef>
+          <a:fillRef idx="0">
+            <a:schemeClr val="accent1"/>
+          </a:fillRef>
+          <a:effectRef idx="1">
+            <a:schemeClr val="accent1"/>
+          </a:effectRef>
+          <a:fontRef idx="minor">
+            <a:schemeClr val="tx1"/>
+          </a:fontRef>
+        </p:style>
+      </p:cxnSp>
+      <p:sp>
+        <p:nvSpPr>
+          <p:cNvPr id="11" name="Rounded Rectangle 10"/>
+          <p:cNvSpPr/>
+          <p:nvPr/>
+        </p:nvSpPr>
+        <p:spPr>
+          <a:xfrm>
+            <a:off x="2514600" y="4592320"/>
+            <a:ext cx="1417320" cy="685800"/>
+          </a:xfrm>
+          <a:prstGeom prst="roundRect">
+            <a:avLst/>
+          </a:prstGeom>
+          <a:solidFill>
+            <a:srgbClr val="DBEAFE"/>
+          </a:solidFill>
+          <a:ln>
+            <a:solidFill>
+              <a:srgbClr val="2563EB"/>
+            </a:solidFill>
+          </a:ln>
+        </p:spPr>
+        <p:style>
+          <a:lnRef idx="1">
+            <a:schemeClr val="accent1"/>
+          </a:lnRef>
+          <a:fillRef idx="3">
+            <a:schemeClr val="accent1"/>
+          </a:fillRef>
+          <a:effectRef idx="2">
+            <a:schemeClr val="accent1"/>
+          </a:effectRef>
+          <a:fontRef idx="minor">
+            <a:schemeClr val="lt1"/>
+          </a:fontRef>
+        </p:style>
+        <p:txBody>
+          <a:bodyPr wrap="square" rtlCol="0" anchor="ctr"/>
+          <a:lstStyle/>
+          <a:p>
+            <a:pPr algn="ctr">
+              <a:defRPr sz="1300" b="1">
+                <a:solidFill>
+                  <a:srgbClr val="172554"/>
+                </a:solidFill>
+              </a:defRPr>
+            </a:pPr>
+            <a:r>
+              <a:t>Simulator</a:t>
+            </a:r>
+          </a:p>
+        </p:txBody>
+      </p:sp>
+      <p:cxnSp>
+        <p:nvCxnSpPr>
+          <p:cNvPr id="12" name="Connector 6"/>
+          <p:cNvCxnSpPr/>
+          <p:nvPr/>
+        </p:nvCxnSpPr>
+        <p:spPr>
+          <a:xfrm>
+            <a:off x="3931920" y="4939792"/>
+            <a:ext cx="365760" cy="0"/>
+          </a:xfrm>
+          <a:prstGeom prst="line">
+            <a:avLst/>
+          </a:prstGeom>
+          <a:ln w="25400">
+            <a:solidFill>
+              <a:srgbClr val="4B5563"/>
+            </a:solidFill>
+          </a:ln>
+        </p:spPr>
+        <p:style>
+          <a:lnRef idx="2">
+            <a:schemeClr val="accent1"/>
+          </a:lnRef>
+          <a:fillRef idx="0">
+            <a:schemeClr val="accent1"/>
+          </a:fillRef>
+          <a:effectRef idx="1">
+            <a:schemeClr val="accent1"/>
+          </a:effectRef>
+          <a:fontRef idx="minor">
+            <a:schemeClr val="tx1"/>
+          </a:fontRef>
+        </p:style>
+      </p:cxnSp>
+      <p:sp>
+        <p:nvSpPr>
+          <p:cNvPr id="13" name="Rounded Rectangle 12"/>
+          <p:cNvSpPr/>
+          <p:nvPr/>
+        </p:nvSpPr>
+        <p:spPr>
+          <a:xfrm>
+            <a:off x="4480560" y="4592320"/>
+            <a:ext cx="1417320" cy="685800"/>
+          </a:xfrm>
+          <a:prstGeom prst="roundRect">
+            <a:avLst/>
+          </a:prstGeom>
+          <a:solidFill>
+            <a:srgbClr val="FFEDD5"/>
+          </a:solidFill>
+          <a:ln>
+            <a:solidFill>
+              <a:srgbClr val="F97316"/>
+            </a:solidFill>
+          </a:ln>
+        </p:spPr>
+        <p:style>
+          <a:lnRef idx="1">
+            <a:schemeClr val="accent1"/>
+          </a:lnRef>
+          <a:fillRef idx="3">
+            <a:schemeClr val="accent1"/>
+          </a:fillRef>
+          <a:effectRef idx="2">
+            <a:schemeClr val="accent1"/>
+          </a:effectRef>
+          <a:fontRef idx="minor">
+            <a:schemeClr val="lt1"/>
+          </a:fontRef>
+        </p:style>
+        <p:txBody>
+          <a:bodyPr wrap="square" rtlCol="0" anchor="ctr"/>
+          <a:lstStyle/>
+          <a:p>
+            <a:pPr algn="ctr">
+              <a:defRPr sz="1300" b="1">
+                <a:solidFill>
+                  <a:srgbClr val="172554"/>
+                </a:solidFill>
+              </a:defRPr>
+            </a:pPr>
+            <a:r>
+              <a:t>Possible</a:t>
+            </a:r>
+            <a:br/>
+            <a:r>
+              <a:t>futures</a:t>
+            </a:r>
+          </a:p>
+        </p:txBody>
+      </p:sp>
+      <p:cxnSp>
+        <p:nvCxnSpPr>
+          <p:cNvPr id="14" name="Connector 8"/>
+          <p:cNvCxnSpPr/>
+          <p:nvPr/>
+        </p:nvCxnSpPr>
+        <p:spPr>
+          <a:xfrm>
+            <a:off x="5897880" y="4939792"/>
+            <a:ext cx="365760" cy="0"/>
+          </a:xfrm>
+          <a:prstGeom prst="line">
+            <a:avLst/>
+          </a:prstGeom>
+          <a:ln w="25400">
+            <a:solidFill>
+              <a:srgbClr val="4B5563"/>
+            </a:solidFill>
+          </a:ln>
+        </p:spPr>
+        <p:style>
+          <a:lnRef idx="2">
+            <a:schemeClr val="accent1"/>
+          </a:lnRef>
+          <a:fillRef idx="0">
+            <a:schemeClr val="accent1"/>
+          </a:fillRef>
+          <a:effectRef idx="1">
+            <a:schemeClr val="accent1"/>
+          </a:effectRef>
+          <a:fontRef idx="minor">
+            <a:schemeClr val="tx1"/>
+          </a:fontRef>
+        </p:style>
+      </p:cxnSp>
+      <p:sp>
+        <p:nvSpPr>
+          <p:cNvPr id="17" name="Rounded Rectangle 16"/>
+          <p:cNvSpPr/>
+          <p:nvPr/>
+        </p:nvSpPr>
+        <p:spPr>
+          <a:xfrm>
+            <a:off x="6446520" y="4592320"/>
+            <a:ext cx="1417320" cy="685800"/>
+          </a:xfrm>
+          <a:prstGeom prst="roundRect">
+            <a:avLst/>
+          </a:prstGeom>
+          <a:solidFill>
+            <a:srgbClr val="DCFCE7"/>
+          </a:solidFill>
+          <a:ln>
+            <a:solidFill>
+              <a:srgbClr val="16A34A"/>
+            </a:solidFill>
+          </a:ln>
+        </p:spPr>
+        <p:style>
+          <a:lnRef idx="1">
+            <a:schemeClr val="accent1"/>
+          </a:lnRef>
+          <a:fillRef idx="3">
+            <a:schemeClr val="accent1"/>
+          </a:fillRef>
+          <a:effectRef idx="2">
+            <a:schemeClr val="accent1"/>
+          </a:effectRef>
+          <a:fontRef idx="minor">
+            <a:schemeClr val="lt1"/>
+          </a:fontRef>
+        </p:style>
+        <p:txBody>
+          <a:bodyPr wrap="square" rtlCol="0" anchor="ctr"/>
+          <a:lstStyle/>
+          <a:p>
+            <a:pPr algn="ctr">
+              <a:defRPr sz="1300" b="1">
+                <a:solidFill>
+                  <a:srgbClr val="172554"/>
+                </a:solidFill>
+              </a:defRPr>
+            </a:pPr>
+            <a:r>
+              <a:t>Safe</a:t>
+            </a:r>
+            <a:br/>
+            <a:r>
+              <a:t>planner</a:t>
+            </a:r>
+          </a:p>
+        </p:txBody>
+      </p:sp>
+      <p:cxnSp>
+        <p:nvCxnSpPr>
+          <p:cNvPr id="18" name="Connector 10"/>
+          <p:cNvCxnSpPr/>
+          <p:nvPr/>
+        </p:nvCxnSpPr>
+        <p:spPr>
+          <a:xfrm>
+            <a:off x="7863840" y="4939792"/>
+            <a:ext cx="365760" cy="0"/>
+          </a:xfrm>
+          <a:prstGeom prst="line">
+            <a:avLst/>
+          </a:prstGeom>
+          <a:ln w="25400">
+            <a:solidFill>
+              <a:srgbClr val="4B5563"/>
+            </a:solidFill>
+          </a:ln>
+        </p:spPr>
+        <p:style>
+          <a:lnRef idx="2">
+            <a:schemeClr val="accent1"/>
+          </a:lnRef>
+          <a:fillRef idx="0">
+            <a:schemeClr val="accent1"/>
+          </a:fillRef>
+          <a:effectRef idx="1">
+            <a:schemeClr val="accent1"/>
+          </a:effectRef>
+          <a:fontRef idx="minor">
+            <a:schemeClr val="tx1"/>
+          </a:fontRef>
+        </p:style>
+      </p:cxnSp>
+      <p:sp>
+        <p:nvSpPr>
+          <p:cNvPr id="19" name="Rounded Rectangle 18"/>
+          <p:cNvSpPr/>
+          <p:nvPr/>
+        </p:nvSpPr>
+        <p:spPr>
+          <a:xfrm>
+            <a:off x="8412480" y="4592320"/>
+            <a:ext cx="1417320" cy="685800"/>
+          </a:xfrm>
+          <a:prstGeom prst="roundRect">
+            <a:avLst/>
+          </a:prstGeom>
+          <a:solidFill>
+            <a:srgbClr val="DBEAFE"/>
+          </a:solidFill>
+          <a:ln>
+            <a:solidFill>
+              <a:srgbClr val="2563EB"/>
+            </a:solidFill>
+          </a:ln>
+        </p:spPr>
+        <p:style>
+          <a:lnRef idx="1">
+            <a:schemeClr val="accent1"/>
+          </a:lnRef>
+          <a:fillRef idx="3">
+            <a:schemeClr val="accent1"/>
+          </a:fillRef>
+          <a:effectRef idx="2">
+            <a:schemeClr val="accent1"/>
+          </a:effectRef>
+          <a:fontRef idx="minor">
+            <a:schemeClr val="lt1"/>
+          </a:fontRef>
+        </p:style>
+        <p:txBody>
+          <a:bodyPr wrap="square" rtlCol="0" anchor="ctr"/>
+          <a:lstStyle/>
+          <a:p>
+            <a:pPr algn="ctr">
+              <a:defRPr sz="1300" b="1">
+                <a:solidFill>
+                  <a:srgbClr val="172554"/>
+                </a:solidFill>
+              </a:defRPr>
+            </a:pPr>
+            <a:r>
+              <a:t>Action</a:t>
+            </a:r>
+          </a:p>
+        </p:txBody>
+      </p:sp>
+      <p:cxnSp>
+        <p:nvCxnSpPr>
+          <p:cNvPr id="20" name="Connector 12"/>
+          <p:cNvCxnSpPr/>
+          <p:nvPr/>
+        </p:nvCxnSpPr>
+        <p:spPr>
+          <a:xfrm>
+            <a:off x="9829800" y="4939792"/>
+            <a:ext cx="365759" cy="0"/>
+          </a:xfrm>
+          <a:prstGeom prst="line">
+            <a:avLst/>
+          </a:prstGeom>
+          <a:ln w="25400">
+            <a:solidFill>
+              <a:srgbClr val="4B5563"/>
+            </a:solidFill>
+          </a:ln>
+        </p:spPr>
+        <p:style>
+          <a:lnRef idx="2">
+            <a:schemeClr val="accent1"/>
+          </a:lnRef>
+          <a:fillRef idx="0">
+            <a:schemeClr val="accent1"/>
+          </a:fillRef>
+          <a:effectRef idx="1">
+            <a:schemeClr val="accent1"/>
+          </a:effectRef>
+          <a:fontRef idx="minor">
+            <a:schemeClr val="tx1"/>
+          </a:fontRef>
+        </p:style>
+      </p:cxnSp>
+      <p:sp>
+        <p:nvSpPr>
+          <p:cNvPr id="21" name="Rounded Rectangle 20"/>
+          <p:cNvSpPr/>
+          <p:nvPr/>
+        </p:nvSpPr>
+        <p:spPr>
+          <a:xfrm>
+            <a:off x="10058400" y="4592320"/>
+            <a:ext cx="1417320" cy="685800"/>
+          </a:xfrm>
+          <a:prstGeom prst="roundRect">
+            <a:avLst/>
+          </a:prstGeom>
+          <a:solidFill>
+            <a:srgbClr val="F3F4F6"/>
+          </a:solidFill>
+          <a:ln>
+            <a:solidFill>
+              <a:srgbClr val="4B5563"/>
+            </a:solidFill>
+          </a:ln>
+        </p:spPr>
+        <p:style>
+          <a:lnRef idx="1">
+            <a:schemeClr val="accent1"/>
+          </a:lnRef>
+          <a:fillRef idx="3">
+            <a:schemeClr val="accent1"/>
+          </a:fillRef>
+          <a:effectRef idx="2">
+            <a:schemeClr val="accent1"/>
+          </a:effectRef>
+          <a:fontRef idx="minor">
+            <a:schemeClr val="lt1"/>
+          </a:fontRef>
+        </p:style>
+        <p:txBody>
+          <a:bodyPr wrap="square" rtlCol="0" anchor="ctr"/>
+          <a:lstStyle/>
+          <a:p>
+            <a:pPr algn="ctr">
+              <a:defRPr sz="1300" b="1">
+                <a:solidFill>
+                  <a:srgbClr val="172554"/>
+                </a:solidFill>
+              </a:defRPr>
+            </a:pPr>
+            <a:r>
+              <a:t>Results</a:t>
+            </a:r>
           </a:p>
         </p:txBody>
       </p:sp>
     </p:spTree>
-    <p:extLst>
-      <p:ext uri="{BB962C8B-B14F-4D97-AF65-F5344CB8AC3E}">
-        <p14:creationId xmlns:p14="http://schemas.microsoft.com/office/powerpoint/2010/main" val="230838462"/>
-      </p:ext>
-    </p:extLst>
   </p:cSld>
   <p:clrMapOvr>
     <a:masterClrMapping/>
@@ -13376,13 +14537,7 @@
   <p:cSld>
     <p:spTree>
       <p:nvGrpSpPr>
-        <p:cNvPr id="1" name="">
-          <a:extLst>
-            <a:ext uri="{FF2B5EF4-FFF2-40B4-BE49-F238E27FC236}">
-              <a16:creationId xmlns:a16="http://schemas.microsoft.com/office/drawing/2014/main" id="{7A217517-F8C9-A237-F361-5C272DAE8B60}"/>
-            </a:ext>
-          </a:extLst>
-        </p:cNvPr>
+        <p:cNvPr id="1" name=""/>
         <p:cNvGrpSpPr/>
         <p:nvPr/>
       </p:nvGrpSpPr>
@@ -13396,13 +14551,7 @@
       </p:grpSpPr>
       <p:sp>
         <p:nvSpPr>
-          <p:cNvPr id="2" name="Title 1">
-            <a:extLst>
-              <a:ext uri="{FF2B5EF4-FFF2-40B4-BE49-F238E27FC236}">
-                <a16:creationId xmlns:a16="http://schemas.microsoft.com/office/drawing/2014/main" id="{D5C4C7C5-D759-3397-7332-F63D0D3921DC}"/>
-              </a:ext>
-            </a:extLst>
-          </p:cNvPr>
+          <p:cNvPr id="2" name="Title 1"/>
           <p:cNvSpPr>
             <a:spLocks noGrp="1"/>
           </p:cNvSpPr>
@@ -13425,42 +14574,31 @@
           </a:p>
         </p:txBody>
       </p:sp>
-      <p:sp>
-        <p:nvSpPr>
-          <p:cNvPr id="3" name="Text Placeholder 2">
-            <a:extLst>
-              <a:ext uri="{FF2B5EF4-FFF2-40B4-BE49-F238E27FC236}">
-                <a16:creationId xmlns:a16="http://schemas.microsoft.com/office/drawing/2014/main" id="{85A0CA3A-6C08-C7A9-067D-EEBE75958EFA}"/>
-              </a:ext>
-            </a:extLst>
-          </p:cNvPr>
-          <p:cNvSpPr>
-            <a:spLocks noGrp="1"/>
-          </p:cNvSpPr>
-          <p:nvPr>
-            <p:ph type="body" sz="quarter" idx="11"/>
-          </p:nvPr>
-        </p:nvSpPr>
-        <p:spPr>
-          <a:xfrm>
-            <a:off x="440783" y="1916825"/>
-            <a:ext cx="7239393" cy="3528300"/>
-          </a:xfrm>
-        </p:spPr>
-        <p:txBody>
-          <a:bodyPr/>
-          <a:lstStyle/>
-          <a:p>
-            <a:endParaRPr lang="en-GB" dirty="0"/>
-          </a:p>
-        </p:txBody>
-      </p:sp>
+      <p:pic>
+        <p:nvPicPr>
+          <p:cNvPr id="22" name="Picture 21"/>
+          <p:cNvPicPr>
+            <a:picLocks noChangeAspect="1"/>
+          </p:cNvPicPr>
+          <p:nvPr/>
+        </p:nvPicPr>
+        <p:blipFill>
+          <a:blip r:embed="rId1"/>
+          <a:stretch>
+            <a:fillRect/>
+          </a:stretch>
+        </p:blipFill>
+        <p:spPr>
+          <a:xfrm>
+            <a:off x="198120" y="1305560"/>
+            <a:ext cx="11729085" cy="4269105"/>
+          </a:xfrm>
+          <a:prstGeom prst="rect">
+            <a:avLst/>
+          </a:prstGeom>
+        </p:spPr>
+      </p:pic>
     </p:spTree>
-    <p:extLst>
-      <p:ext uri="{BB962C8B-B14F-4D97-AF65-F5344CB8AC3E}">
-        <p14:creationId xmlns:p14="http://schemas.microsoft.com/office/powerpoint/2010/main" val="1778600548"/>
-      </p:ext>
-    </p:extLst>
   </p:cSld>
   <p:clrMapOvr>
     <a:masterClrMapping/>
@@ -13473,13 +14611,7 @@
   <p:cSld>
     <p:spTree>
       <p:nvGrpSpPr>
-        <p:cNvPr id="1" name="">
-          <a:extLst>
-            <a:ext uri="{FF2B5EF4-FFF2-40B4-BE49-F238E27FC236}">
-              <a16:creationId xmlns:a16="http://schemas.microsoft.com/office/drawing/2014/main" id="{5CC894A1-6315-DD9E-2010-9BD9914020D1}"/>
-            </a:ext>
-          </a:extLst>
-        </p:cNvPr>
+        <p:cNvPr id="1" name=""/>
         <p:cNvGrpSpPr/>
         <p:nvPr/>
       </p:nvGrpSpPr>
@@ -13493,13 +14625,7 @@
       </p:grpSpPr>
       <p:sp>
         <p:nvSpPr>
-          <p:cNvPr id="2" name="Title 1">
-            <a:extLst>
-              <a:ext uri="{FF2B5EF4-FFF2-40B4-BE49-F238E27FC236}">
-                <a16:creationId xmlns:a16="http://schemas.microsoft.com/office/drawing/2014/main" id="{FF43FB9B-110B-A009-47CA-68FECD41BF72}"/>
-              </a:ext>
-            </a:extLst>
-          </p:cNvPr>
+          <p:cNvPr id="2" name="Title 1"/>
           <p:cNvSpPr>
             <a:spLocks noGrp="1"/>
           </p:cNvSpPr>
@@ -13522,42 +14648,449 @@
           </a:p>
         </p:txBody>
       </p:sp>
-      <p:sp>
-        <p:nvSpPr>
-          <p:cNvPr id="3" name="Text Placeholder 2">
-            <a:extLst>
-              <a:ext uri="{FF2B5EF4-FFF2-40B4-BE49-F238E27FC236}">
-                <a16:creationId xmlns:a16="http://schemas.microsoft.com/office/drawing/2014/main" id="{126BB6CD-7AC6-580A-DDCB-679840753D15}"/>
-              </a:ext>
-            </a:extLst>
-          </p:cNvPr>
-          <p:cNvSpPr>
-            <a:spLocks noGrp="1"/>
-          </p:cNvSpPr>
-          <p:nvPr>
-            <p:ph type="body" sz="quarter" idx="11"/>
-          </p:nvPr>
-        </p:nvSpPr>
-        <p:spPr>
-          <a:xfrm>
-            <a:off x="440783" y="1916825"/>
-            <a:ext cx="7239393" cy="3528300"/>
-          </a:xfrm>
-        </p:spPr>
-        <p:txBody>
-          <a:bodyPr/>
+      <p:graphicFrame>
+        <p:nvGraphicFramePr>
+          <p:cNvPr id="4" name="Table 3"/>
+          <p:cNvGraphicFramePr>
+            <a:graphicFrameLocks noGrp="1"/>
+          </p:cNvGraphicFramePr>
+          <p:nvPr/>
+        </p:nvGraphicFramePr>
+        <p:xfrm>
+          <a:off x="904240" y="1579880"/>
+          <a:ext cx="8954135" cy="2632075"/>
+        </p:xfrm>
+        <a:graphic>
+          <a:graphicData uri="http://schemas.openxmlformats.org/drawingml/2006/table">
+            <a:tbl>
+              <a:tblPr firstRow="1" bandRow="1">
+                <a:tableStyleId>{5C22544A-7EE6-4342-B048-85BDC9FD1C3A}</a:tableStyleId>
+              </a:tblPr>
+              <a:tblGrid>
+                <a:gridCol w="2313940"/>
+                <a:gridCol w="3219450"/>
+                <a:gridCol w="3420745"/>
+              </a:tblGrid>
+              <a:tr h="526415">
+                <a:tc>
+                  <a:txBody>
+                    <a:bodyPr/>
+                    <a:lstStyle/>
+                    <a:p>
+                      <a:pPr algn="ctr">
+                        <a:defRPr sz="1200" b="1">
+                          <a:solidFill>
+                            <a:srgbClr val="FFFFFF"/>
+                          </a:solidFill>
+                        </a:defRPr>
+                      </a:pPr>
+                      <a:r>
+                        <a:t>Risk</a:t>
+                      </a:r>
+                    </a:p>
+                  </a:txBody>
+                  <a:tcPr marL="36576" marR="36576" anchor="ctr">
+                    <a:solidFill>
+                      <a:srgbClr val="172554"/>
+                    </a:solidFill>
+                  </a:tcPr>
+                </a:tc>
+                <a:tc>
+                  <a:txBody>
+                    <a:bodyPr/>
+                    <a:lstStyle/>
+                    <a:p>
+                      <a:pPr algn="ctr">
+                        <a:defRPr sz="1200" b="1">
+                          <a:solidFill>
+                            <a:srgbClr val="FFFFFF"/>
+                          </a:solidFill>
+                        </a:defRPr>
+                      </a:pPr>
+                      <a:r>
+                        <a:t>Why it matters</a:t>
+                      </a:r>
+                    </a:p>
+                  </a:txBody>
+                  <a:tcPr marL="36576" marR="36576" anchor="ctr">
+                    <a:solidFill>
+                      <a:srgbClr val="172554"/>
+                    </a:solidFill>
+                  </a:tcPr>
+                </a:tc>
+                <a:tc>
+                  <a:txBody>
+                    <a:bodyPr/>
+                    <a:lstStyle/>
+                    <a:p>
+                      <a:pPr algn="ctr">
+                        <a:defRPr sz="1200" b="1">
+                          <a:solidFill>
+                            <a:srgbClr val="FFFFFF"/>
+                          </a:solidFill>
+                        </a:defRPr>
+                      </a:pPr>
+                      <a:r>
+                        <a:t>My response</a:t>
+                      </a:r>
+                    </a:p>
+                  </a:txBody>
+                  <a:tcPr marL="36576" marR="36576" anchor="ctr">
+                    <a:solidFill>
+                      <a:srgbClr val="172554"/>
+                    </a:solidFill>
+                  </a:tcPr>
+                </a:tc>
+              </a:tr>
+              <a:tr h="526415">
+                <a:tc>
+                  <a:txBody>
+                    <a:bodyPr/>
+                    <a:lstStyle/>
+                    <a:p>
+                      <a:pPr algn="ctr">
+                        <a:defRPr sz="1200">
+                          <a:solidFill>
+                            <a:srgbClr val="111827"/>
+                          </a:solidFill>
+                        </a:defRPr>
+                      </a:pPr>
+                      <a:r>
+                        <a:t>Simulator is slow</a:t>
+                      </a:r>
+                    </a:p>
+                  </a:txBody>
+                  <a:tcPr marL="36576" marR="36576" anchor="ctr">
+                    <a:solidFill>
+                      <a:srgbClr val="FFFFFF"/>
+                    </a:solidFill>
+                  </a:tcPr>
+                </a:tc>
+                <a:tc>
+                  <a:txBody>
+                    <a:bodyPr/>
+                    <a:lstStyle/>
+                    <a:p>
+                      <a:pPr algn="ctr">
+                        <a:defRPr sz="1200">
+                          <a:solidFill>
+                            <a:srgbClr val="111827"/>
+                          </a:solidFill>
+                        </a:defRPr>
+                      </a:pPr>
+                      <a:r>
+                        <a:t>Experiments take time</a:t>
+                      </a:r>
+                    </a:p>
+                  </a:txBody>
+                  <a:tcPr marL="36576" marR="36576" anchor="ctr">
+                    <a:solidFill>
+                      <a:srgbClr val="FFFFFF"/>
+                    </a:solidFill>
+                  </a:tcPr>
+                </a:tc>
+                <a:tc>
+                  <a:txBody>
+                    <a:bodyPr/>
+                    <a:lstStyle/>
+                    <a:p>
+                      <a:pPr algn="ctr">
+                        <a:defRPr sz="1200">
+                          <a:solidFill>
+                            <a:srgbClr val="111827"/>
+                          </a:solidFill>
+                        </a:defRPr>
+                      </a:pPr>
+                      <a:r>
+                        <a:t>Run small pilots first</a:t>
+                      </a:r>
+                    </a:p>
+                  </a:txBody>
+                  <a:tcPr marL="36576" marR="36576" anchor="ctr">
+                    <a:solidFill>
+                      <a:srgbClr val="FFFFFF"/>
+                    </a:solidFill>
+                  </a:tcPr>
+                </a:tc>
+              </a:tr>
+              <a:tr h="526415">
+                <a:tc>
+                  <a:txBody>
+                    <a:bodyPr/>
+                    <a:lstStyle/>
+                    <a:p>
+                      <a:pPr algn="ctr">
+                        <a:defRPr sz="1200">
+                          <a:solidFill>
+                            <a:srgbClr val="111827"/>
+                          </a:solidFill>
+                        </a:defRPr>
+                      </a:pPr>
+                      <a:r>
+                        <a:t>Planner fails</a:t>
+                      </a:r>
+                    </a:p>
+                  </a:txBody>
+                  <a:tcPr marL="36576" marR="36576" anchor="ctr">
+                    <a:solidFill>
+                      <a:srgbClr val="F3F4F6"/>
+                    </a:solidFill>
+                  </a:tcPr>
+                </a:tc>
+                <a:tc>
+                  <a:txBody>
+                    <a:bodyPr/>
+                    <a:lstStyle/>
+                    <a:p>
+                      <a:pPr algn="ctr">
+                        <a:defRPr sz="1200">
+                          <a:solidFill>
+                            <a:srgbClr val="111827"/>
+                          </a:solidFill>
+                        </a:defRPr>
+                      </a:pPr>
+                      <a:r>
+                        <a:t>Car may not move safely</a:t>
+                      </a:r>
+                    </a:p>
+                  </a:txBody>
+                  <a:tcPr marL="36576" marR="36576" anchor="ctr">
+                    <a:solidFill>
+                      <a:srgbClr val="F3F4F6"/>
+                    </a:solidFill>
+                  </a:tcPr>
+                </a:tc>
+                <a:tc>
+                  <a:txBody>
+                    <a:bodyPr/>
+                    <a:lstStyle/>
+                    <a:p>
+                      <a:pPr algn="ctr">
+                        <a:defRPr sz="1200">
+                          <a:solidFill>
+                            <a:srgbClr val="111827"/>
+                          </a:solidFill>
+                        </a:defRPr>
+                      </a:pPr>
+                      <a:r>
+                        <a:t>Save debug files</a:t>
+                      </a:r>
+                    </a:p>
+                  </a:txBody>
+                  <a:tcPr marL="36576" marR="36576" anchor="ctr">
+                    <a:solidFill>
+                      <a:srgbClr val="F3F4F6"/>
+                    </a:solidFill>
+                  </a:tcPr>
+                </a:tc>
+              </a:tr>
+              <a:tr h="526415">
+                <a:tc>
+                  <a:txBody>
+                    <a:bodyPr/>
+                    <a:lstStyle/>
+                    <a:p>
+                      <a:pPr algn="ctr">
+                        <a:defRPr sz="1200">
+                          <a:solidFill>
+                            <a:srgbClr val="111827"/>
+                          </a:solidFill>
+                        </a:defRPr>
+                      </a:pPr>
+                      <a:r>
+                        <a:t>Path is not neat</a:t>
+                      </a:r>
+                    </a:p>
+                  </a:txBody>
+                  <a:tcPr marL="36576" marR="36576" anchor="ctr">
+                    <a:solidFill>
+                      <a:srgbClr val="FFFFFF"/>
+                    </a:solidFill>
+                  </a:tcPr>
+                </a:tc>
+                <a:tc>
+                  <a:txBody>
+                    <a:bodyPr/>
+                    <a:lstStyle/>
+                    <a:p>
+                      <a:pPr algn="ctr">
+                        <a:defRPr sz="1200">
+                          <a:solidFill>
+                            <a:srgbClr val="111827"/>
+                          </a:solidFill>
+                        </a:defRPr>
+                      </a:pPr>
+                      <a:r>
+                        <a:t>Results look weak</a:t>
+                      </a:r>
+                    </a:p>
+                  </a:txBody>
+                  <a:tcPr marL="36576" marR="36576" anchor="ctr">
+                    <a:solidFill>
+                      <a:srgbClr val="FFFFFF"/>
+                    </a:solidFill>
+                  </a:tcPr>
+                </a:tc>
+                <a:tc>
+                  <a:txBody>
+                    <a:bodyPr/>
+                    <a:lstStyle/>
+                    <a:p>
+                      <a:pPr algn="ctr">
+                        <a:defRPr sz="1200">
+                          <a:solidFill>
+                            <a:srgbClr val="111827"/>
+                          </a:solidFill>
+                        </a:defRPr>
+                      </a:pPr>
+                      <a:r>
+                        <a:t>Tune tracking</a:t>
+                      </a:r>
+                    </a:p>
+                  </a:txBody>
+                  <a:tcPr marL="36576" marR="36576" anchor="ctr">
+                    <a:solidFill>
+                      <a:srgbClr val="FFFFFF"/>
+                    </a:solidFill>
+                  </a:tcPr>
+                </a:tc>
+              </a:tr>
+              <a:tr h="526415">
+                <a:tc>
+                  <a:txBody>
+                    <a:bodyPr/>
+                    <a:lstStyle/>
+                    <a:p>
+                      <a:pPr algn="ctr">
+                        <a:defRPr sz="1200">
+                          <a:solidFill>
+                            <a:srgbClr val="111827"/>
+                          </a:solidFill>
+                        </a:defRPr>
+                      </a:pPr>
+                      <a:r>
+                        <a:t>Too few tests</a:t>
+                      </a:r>
+                    </a:p>
+                  </a:txBody>
+                  <a:tcPr marL="36576" marR="36576" anchor="ctr">
+                    <a:solidFill>
+                      <a:srgbClr val="F3F4F6"/>
+                    </a:solidFill>
+                  </a:tcPr>
+                </a:tc>
+                <a:tc>
+                  <a:txBody>
+                    <a:bodyPr/>
+                    <a:lstStyle/>
+                    <a:p>
+                      <a:pPr algn="ctr">
+                        <a:defRPr sz="1200">
+                          <a:solidFill>
+                            <a:srgbClr val="111827"/>
+                          </a:solidFill>
+                        </a:defRPr>
+                      </a:pPr>
+                      <a:r>
+                        <a:t>Claims are not strong</a:t>
+                      </a:r>
+                    </a:p>
+                  </a:txBody>
+                  <a:tcPr marL="36576" marR="36576" anchor="ctr">
+                    <a:solidFill>
+                      <a:srgbClr val="F3F4F6"/>
+                    </a:solidFill>
+                  </a:tcPr>
+                </a:tc>
+                <a:tc>
+                  <a:txBody>
+                    <a:bodyPr/>
+                    <a:lstStyle/>
+                    <a:p>
+                      <a:pPr algn="ctr">
+                        <a:defRPr sz="1200">
+                          <a:solidFill>
+                            <a:srgbClr val="111827"/>
+                          </a:solidFill>
+                        </a:defRPr>
+                      </a:pPr>
+                      <a:r>
+                        <a:t>Scale gradually</a:t>
+                      </a:r>
+                    </a:p>
+                  </a:txBody>
+                  <a:tcPr marL="36576" marR="36576" anchor="ctr">
+                    <a:solidFill>
+                      <a:srgbClr val="F3F4F6"/>
+                    </a:solidFill>
+                  </a:tcPr>
+                </a:tc>
+              </a:tr>
+            </a:tbl>
+          </a:graphicData>
+        </a:graphic>
+      </p:graphicFrame>
+      <p:sp>
+        <p:nvSpPr>
+          <p:cNvPr id="5" name="Rounded Rectangle 4"/>
+          <p:cNvSpPr/>
+          <p:nvPr/>
+        </p:nvSpPr>
+        <p:spPr>
+          <a:xfrm>
+            <a:off x="868680" y="4663440"/>
+            <a:ext cx="10241280" cy="960120"/>
+          </a:xfrm>
+          <a:prstGeom prst="roundRect">
+            <a:avLst/>
+          </a:prstGeom>
+          <a:solidFill>
+            <a:srgbClr val="FFEDD5"/>
+          </a:solidFill>
+          <a:ln>
+            <a:solidFill>
+              <a:srgbClr val="F97316"/>
+            </a:solidFill>
+          </a:ln>
+        </p:spPr>
+        <p:style>
+          <a:lnRef idx="1">
+            <a:schemeClr val="accent1"/>
+          </a:lnRef>
+          <a:fillRef idx="3">
+            <a:schemeClr val="accent1"/>
+          </a:fillRef>
+          <a:effectRef idx="2">
+            <a:schemeClr val="accent1"/>
+          </a:effectRef>
+          <a:fontRef idx="minor">
+            <a:schemeClr val="lt1"/>
+          </a:fontRef>
+        </p:style>
+        <p:txBody>
+          <a:bodyPr wrap="square" lIns="164592" tIns="91440" rIns="164592" bIns="73152" rtlCol="0" anchor="ctr"/>
           <a:lstStyle/>
           <a:p>
-            <a:endParaRPr lang="en-GB" dirty="0"/>
+            <a:pPr algn="l">
+              <a:defRPr sz="1500">
+                <a:solidFill>
+                  <a:srgbClr val="111827"/>
+                </a:solidFill>
+              </a:defRPr>
+            </a:pPr>
+            <a:r>
+              <a:rPr sz="1800">
+                <a:latin typeface="UCL Sans" pitchFamily="2" charset="77"/>
+              </a:rPr>
+              <a:t>The biggest risk is not only whether the car can finish once. I also need to show that it can finish reliably, with a reasonable path, across more starting conditions. This is why I am using small pilots before full experiments.</a:t>
+            </a:r>
+            <a:endParaRPr sz="1800">
+              <a:latin typeface="UCL Sans" pitchFamily="2" charset="77"/>
+            </a:endParaRPr>
           </a:p>
         </p:txBody>
       </p:sp>
     </p:spTree>
-    <p:extLst>
-      <p:ext uri="{BB962C8B-B14F-4D97-AF65-F5344CB8AC3E}">
-        <p14:creationId xmlns:p14="http://schemas.microsoft.com/office/powerpoint/2010/main" val="314130605"/>
-      </p:ext>
-    </p:extLst>
   </p:cSld>
   <p:clrMapOvr>
     <a:masterClrMapping/>
@@ -13584,13 +15117,7 @@
       </p:grpSpPr>
       <p:pic>
         <p:nvPicPr>
-          <p:cNvPr id="6" name="Picture Placeholder 5" descr="A group of people on a staircase&#10;&#10;AI-generated content may be incorrect.">
-            <a:extLst>
-              <a:ext uri="{FF2B5EF4-FFF2-40B4-BE49-F238E27FC236}">
-                <a16:creationId xmlns:a16="http://schemas.microsoft.com/office/drawing/2014/main" id="{8831338A-EBAC-48CD-14D3-9C36262C5ED5}"/>
-              </a:ext>
-            </a:extLst>
-          </p:cNvPr>
+          <p:cNvPr id="6" name="Picture Placeholder 5" descr="A group of people on a staircase&#10;&#10;AI-generated content may be incorrect."/>
           <p:cNvPicPr>
             <a:picLocks noGrp="1" noRot="1" noChangeAspect="1" noMove="1" noResize="1" noEditPoints="1" noAdjustHandles="1" noChangeArrowheads="1" noChangeShapeType="1" noCrop="1"/>
           </p:cNvPicPr>
@@ -13599,7 +15126,7 @@
           </p:nvPr>
         </p:nvPicPr>
         <p:blipFill>
-          <a:blip r:embed="rId3"/>
+          <a:blip r:embed="rId1"/>
           <a:srcRect t="7707" b="7707"/>
           <a:stretch>
             <a:fillRect/>
@@ -13609,23 +15136,14 @@
       </p:pic>
       <p:pic>
         <p:nvPicPr>
-          <p:cNvPr id="7" name="Picture 6">
-            <a:extLst>
-              <a:ext uri="{FF2B5EF4-FFF2-40B4-BE49-F238E27FC236}">
-                <a16:creationId xmlns:a16="http://schemas.microsoft.com/office/drawing/2014/main" id="{D21A176D-FBC6-F479-E844-E2161678C125}"/>
-              </a:ext>
-              <a:ext uri="{C183D7F6-B498-43B3-948B-1728B52AA6E4}">
-                <adec:decorative xmlns:adec="http://schemas.microsoft.com/office/drawing/2017/decorative" val="1"/>
-              </a:ext>
-            </a:extLst>
-          </p:cNvPr>
+          <p:cNvPr id="7" name="Picture 6"/>
           <p:cNvPicPr>
             <a:picLocks noGrp="1" noRot="1" noMove="1" noResize="1" noEditPoints="1" noAdjustHandles="1" noChangeArrowheads="1" noChangeShapeType="1" noCrop="1"/>
           </p:cNvPicPr>
           <p:nvPr/>
         </p:nvPicPr>
         <p:blipFill>
-          <a:blip r:embed="rId4"/>
+          <a:blip r:embed="rId2"/>
           <a:stretch>
             <a:fillRect/>
           </a:stretch>
@@ -13641,11 +15159,6 @@
         </p:spPr>
       </p:pic>
     </p:spTree>
-    <p:extLst>
-      <p:ext uri="{BB962C8B-B14F-4D97-AF65-F5344CB8AC3E}">
-        <p14:creationId xmlns:p14="http://schemas.microsoft.com/office/powerpoint/2010/main" val="2092127916"/>
-      </p:ext>
-    </p:extLst>
   </p:cSld>
   <p:clrMapOvr>
     <a:masterClrMapping/>
@@ -13696,7 +15209,7 @@
     </a:clrScheme>
     <a:fontScheme name="Office">
       <a:majorFont>
-        <a:latin typeface="Aptos Display" panose="02110004020202020204"/>
+        <a:latin typeface="Aptos Display"/>
         <a:ea typeface=""/>
         <a:cs typeface=""/>
         <a:font script="Jpan" typeface="游ゴシック Light"/>
@@ -13729,26 +15242,9 @@
         <a:font script="Viet" typeface="Times New Roman"/>
         <a:font script="Uigh" typeface="Microsoft Uighur"/>
         <a:font script="Geor" typeface="Sylfaen"/>
-        <a:font script="Armn" typeface="Arial"/>
-        <a:font script="Bugi" typeface="Leelawadee UI"/>
-        <a:font script="Bopo" typeface="Microsoft JhengHei"/>
-        <a:font script="Java" typeface="Javanese Text"/>
-        <a:font script="Lisu" typeface="Segoe UI"/>
-        <a:font script="Mymr" typeface="Myanmar Text"/>
-        <a:font script="Nkoo" typeface="Ebrima"/>
-        <a:font script="Olck" typeface="Nirmala UI"/>
-        <a:font script="Osma" typeface="Ebrima"/>
-        <a:font script="Phag" typeface="Phagspa"/>
-        <a:font script="Syrn" typeface="Estrangelo Edessa"/>
-        <a:font script="Syrj" typeface="Estrangelo Edessa"/>
-        <a:font script="Syre" typeface="Estrangelo Edessa"/>
-        <a:font script="Sora" typeface="Nirmala UI"/>
-        <a:font script="Tale" typeface="Microsoft Tai Le"/>
-        <a:font script="Talu" typeface="Microsoft New Tai Lue"/>
-        <a:font script="Tfng" typeface="Ebrima"/>
       </a:majorFont>
       <a:minorFont>
-        <a:latin typeface="Aptos" panose="02110004020202020204"/>
+        <a:latin typeface="Aptos"/>
         <a:ea typeface=""/>
         <a:cs typeface=""/>
         <a:font script="Jpan" typeface="游ゴシック"/>
@@ -13781,23 +15277,6 @@
         <a:font script="Viet" typeface="Arial"/>
         <a:font script="Uigh" typeface="Microsoft Uighur"/>
         <a:font script="Geor" typeface="Sylfaen"/>
-        <a:font script="Armn" typeface="Arial"/>
-        <a:font script="Bugi" typeface="Leelawadee UI"/>
-        <a:font script="Bopo" typeface="Microsoft JhengHei"/>
-        <a:font script="Java" typeface="Javanese Text"/>
-        <a:font script="Lisu" typeface="Segoe UI"/>
-        <a:font script="Mymr" typeface="Myanmar Text"/>
-        <a:font script="Nkoo" typeface="Ebrima"/>
-        <a:font script="Olck" typeface="Nirmala UI"/>
-        <a:font script="Osma" typeface="Ebrima"/>
-        <a:font script="Phag" typeface="Phagspa"/>
-        <a:font script="Syrn" typeface="Estrangelo Edessa"/>
-        <a:font script="Syrj" typeface="Estrangelo Edessa"/>
-        <a:font script="Syre" typeface="Estrangelo Edessa"/>
-        <a:font script="Sora" typeface="Nirmala UI"/>
-        <a:font script="Tale" typeface="Microsoft Tai Le"/>
-        <a:font script="Talu" typeface="Microsoft New Tai Lue"/>
-        <a:font script="Tfng" typeface="Ebrima"/>
       </a:minorFont>
     </a:fontScheme>
     <a:fmtScheme name="Office">
@@ -13959,10 +15438,9 @@
       </a:style>
     </a:lnDef>
   </a:objectDefaults>
-  <a:extraClrSchemeLst/>
   <a:extLst>
     <a:ext uri="{05A4C25C-085E-4340-85A3-A5531E510DB2}">
-      <thm15:themeFamily xmlns:thm15="http://schemas.microsoft.com/office/thememl/2012/main" name="UCL-Powerpoint-Template-UCLSans-UserTest" id="{C27536D9-30EE-8F40-884F-9B8503BB78CC}" vid="{2812A23A-B212-8C47-86B3-DEF37C047B0D}"/>
+      <thm15:themeFamily xmlns:thm15="http://schemas.microsoft.com/office/thememl/2012/main" name="Office Theme" id="{62F939B6-93AF-4DB8-9C6B-D6C7DFDC589F}" vid="{4A3C46E8-61CC-4603-A589-7422A47A8E4A}"/>
     </a:ext>
   </a:extLst>
 </a:theme>
@@ -14011,7 +15489,7 @@
     </a:clrScheme>
     <a:fontScheme name="Office">
       <a:majorFont>
-        <a:latin typeface="Aptos Display" panose="02110004020202020204"/>
+        <a:latin typeface="Aptos Display"/>
         <a:ea typeface=""/>
         <a:cs typeface=""/>
         <a:font script="Jpan" typeface="游ゴシック Light"/>
@@ -14044,26 +15522,9 @@
         <a:font script="Viet" typeface="Times New Roman"/>
         <a:font script="Uigh" typeface="Microsoft Uighur"/>
         <a:font script="Geor" typeface="Sylfaen"/>
-        <a:font script="Armn" typeface="Arial"/>
-        <a:font script="Bugi" typeface="Leelawadee UI"/>
-        <a:font script="Bopo" typeface="Microsoft JhengHei"/>
-        <a:font script="Java" typeface="Javanese Text"/>
-        <a:font script="Lisu" typeface="Segoe UI"/>
-        <a:font script="Mymr" typeface="Myanmar Text"/>
-        <a:font script="Nkoo" typeface="Ebrima"/>
-        <a:font script="Olck" typeface="Nirmala UI"/>
-        <a:font script="Osma" typeface="Ebrima"/>
-        <a:font script="Phag" typeface="Phagspa"/>
-        <a:font script="Syrn" typeface="Estrangelo Edessa"/>
-        <a:font script="Syrj" typeface="Estrangelo Edessa"/>
-        <a:font script="Syre" typeface="Estrangelo Edessa"/>
-        <a:font script="Sora" typeface="Nirmala UI"/>
-        <a:font script="Tale" typeface="Microsoft Tai Le"/>
-        <a:font script="Talu" typeface="Microsoft New Tai Lue"/>
-        <a:font script="Tfng" typeface="Ebrima"/>
       </a:majorFont>
       <a:minorFont>
-        <a:latin typeface="Aptos" panose="02110004020202020204"/>
+        <a:latin typeface="Aptos"/>
         <a:ea typeface=""/>
         <a:cs typeface=""/>
         <a:font script="Jpan" typeface="游ゴシック"/>
@@ -14096,23 +15557,6 @@
         <a:font script="Viet" typeface="Arial"/>
         <a:font script="Uigh" typeface="Microsoft Uighur"/>
         <a:font script="Geor" typeface="Sylfaen"/>
-        <a:font script="Armn" typeface="Arial"/>
-        <a:font script="Bugi" typeface="Leelawadee UI"/>
-        <a:font script="Bopo" typeface="Microsoft JhengHei"/>
-        <a:font script="Java" typeface="Javanese Text"/>
-        <a:font script="Lisu" typeface="Segoe UI"/>
-        <a:font script="Mymr" typeface="Myanmar Text"/>
-        <a:font script="Nkoo" typeface="Ebrima"/>
-        <a:font script="Olck" typeface="Nirmala UI"/>
-        <a:font script="Osma" typeface="Ebrima"/>
-        <a:font script="Phag" typeface="Phagspa"/>
-        <a:font script="Syrn" typeface="Estrangelo Edessa"/>
-        <a:font script="Syrj" typeface="Estrangelo Edessa"/>
-        <a:font script="Syre" typeface="Estrangelo Edessa"/>
-        <a:font script="Sora" typeface="Nirmala UI"/>
-        <a:font script="Tale" typeface="Microsoft Tai Le"/>
-        <a:font script="Talu" typeface="Microsoft New Tai Lue"/>
-        <a:font script="Tfng" typeface="Ebrima"/>
       </a:minorFont>
     </a:fontScheme>
     <a:fmtScheme name="Office">
@@ -14274,10 +15718,9 @@
       </a:style>
     </a:lnDef>
   </a:objectDefaults>
-  <a:extraClrSchemeLst/>
   <a:extLst>
     <a:ext uri="{05A4C25C-085E-4340-85A3-A5531E510DB2}">
-      <thm15:themeFamily xmlns:thm15="http://schemas.microsoft.com/office/thememl/2012/main" name="UCL-Powerpoint-Template-UCLSans-UserTest" id="{C27536D9-30EE-8F40-884F-9B8503BB78CC}" vid="{48DDD679-D01D-0E41-9682-843B2A2815EA}"/>
+      <thm15:themeFamily xmlns:thm15="http://schemas.microsoft.com/office/thememl/2012/main" name="Office Theme" id="{62F939B6-93AF-4DB8-9C6B-D6C7DFDC589F}" vid="{4A3C46E8-61CC-4603-A589-7422A47A8E4A}"/>
     </a:ext>
   </a:extLst>
 </a:theme>
@@ -14326,7 +15769,7 @@
     </a:clrScheme>
     <a:fontScheme name="Office">
       <a:majorFont>
-        <a:latin typeface="Aptos Display" panose="02110004020202020204"/>
+        <a:latin typeface="Aptos Display"/>
         <a:ea typeface=""/>
         <a:cs typeface=""/>
         <a:font script="Jpan" typeface="游ゴシック Light"/>
@@ -14359,26 +15802,9 @@
         <a:font script="Viet" typeface="Times New Roman"/>
         <a:font script="Uigh" typeface="Microsoft Uighur"/>
         <a:font script="Geor" typeface="Sylfaen"/>
-        <a:font script="Armn" typeface="Arial"/>
-        <a:font script="Bugi" typeface="Leelawadee UI"/>
-        <a:font script="Bopo" typeface="Microsoft JhengHei"/>
-        <a:font script="Java" typeface="Javanese Text"/>
-        <a:font script="Lisu" typeface="Segoe UI"/>
-        <a:font script="Mymr" typeface="Myanmar Text"/>
-        <a:font script="Nkoo" typeface="Ebrima"/>
-        <a:font script="Olck" typeface="Nirmala UI"/>
-        <a:font script="Osma" typeface="Ebrima"/>
-        <a:font script="Phag" typeface="Phagspa"/>
-        <a:font script="Syrn" typeface="Estrangelo Edessa"/>
-        <a:font script="Syrj" typeface="Estrangelo Edessa"/>
-        <a:font script="Syre" typeface="Estrangelo Edessa"/>
-        <a:font script="Sora" typeface="Nirmala UI"/>
-        <a:font script="Tale" typeface="Microsoft Tai Le"/>
-        <a:font script="Talu" typeface="Microsoft New Tai Lue"/>
-        <a:font script="Tfng" typeface="Ebrima"/>
       </a:majorFont>
       <a:minorFont>
-        <a:latin typeface="Aptos" panose="02110004020202020204"/>
+        <a:latin typeface="Aptos"/>
         <a:ea typeface=""/>
         <a:cs typeface=""/>
         <a:font script="Jpan" typeface="游ゴシック"/>
@@ -14411,23 +15837,6 @@
         <a:font script="Viet" typeface="Arial"/>
         <a:font script="Uigh" typeface="Microsoft Uighur"/>
         <a:font script="Geor" typeface="Sylfaen"/>
-        <a:font script="Armn" typeface="Arial"/>
-        <a:font script="Bugi" typeface="Leelawadee UI"/>
-        <a:font script="Bopo" typeface="Microsoft JhengHei"/>
-        <a:font script="Java" typeface="Javanese Text"/>
-        <a:font script="Lisu" typeface="Segoe UI"/>
-        <a:font script="Mymr" typeface="Myanmar Text"/>
-        <a:font script="Nkoo" typeface="Ebrima"/>
-        <a:font script="Olck" typeface="Nirmala UI"/>
-        <a:font script="Osma" typeface="Ebrima"/>
-        <a:font script="Phag" typeface="Phagspa"/>
-        <a:font script="Syrn" typeface="Estrangelo Edessa"/>
-        <a:font script="Syrj" typeface="Estrangelo Edessa"/>
-        <a:font script="Syre" typeface="Estrangelo Edessa"/>
-        <a:font script="Sora" typeface="Nirmala UI"/>
-        <a:font script="Tale" typeface="Microsoft Tai Le"/>
-        <a:font script="Talu" typeface="Microsoft New Tai Lue"/>
-        <a:font script="Tfng" typeface="Ebrima"/>
       </a:minorFont>
     </a:fontScheme>
     <a:fmtScheme name="Office">
@@ -14589,10 +15998,9 @@
       </a:style>
     </a:lnDef>
   </a:objectDefaults>
-  <a:extraClrSchemeLst/>
   <a:extLst>
     <a:ext uri="{05A4C25C-085E-4340-85A3-A5531E510DB2}">
-      <thm15:themeFamily xmlns:thm15="http://schemas.microsoft.com/office/thememl/2012/main" name="Office Theme" id="{2E142A2C-CD16-42D6-873A-C26D2A0506FA}" vid="{1BDDFF52-6CD6-40A5-AB3C-68EB2F1E4D0A}"/>
+      <thm15:themeFamily xmlns:thm15="http://schemas.microsoft.com/office/thememl/2012/main" name="Office Theme" id="{62F939B6-93AF-4DB8-9C6B-D6C7DFDC589F}" vid="{4A3C46E8-61CC-4603-A589-7422A47A8E4A}"/>
     </a:ext>
   </a:extLst>
 </a:theme>
@@ -14641,7 +16049,7 @@
     </a:clrScheme>
     <a:fontScheme name="Office">
       <a:majorFont>
-        <a:latin typeface="Aptos Display" panose="02110004020202020204"/>
+        <a:latin typeface="Aptos Display"/>
         <a:ea typeface=""/>
         <a:cs typeface=""/>
         <a:font script="Jpan" typeface="游ゴシック Light"/>
@@ -14674,26 +16082,9 @@
         <a:font script="Viet" typeface="Times New Roman"/>
         <a:font script="Uigh" typeface="Microsoft Uighur"/>
         <a:font script="Geor" typeface="Sylfaen"/>
-        <a:font script="Armn" typeface="Arial"/>
-        <a:font script="Bugi" typeface="Leelawadee UI"/>
-        <a:font script="Bopo" typeface="Microsoft JhengHei"/>
-        <a:font script="Java" typeface="Javanese Text"/>
-        <a:font script="Lisu" typeface="Segoe UI"/>
-        <a:font script="Mymr" typeface="Myanmar Text"/>
-        <a:font script="Nkoo" typeface="Ebrima"/>
-        <a:font script="Olck" typeface="Nirmala UI"/>
-        <a:font script="Osma" typeface="Ebrima"/>
-        <a:font script="Phag" typeface="Phagspa"/>
-        <a:font script="Syrn" typeface="Estrangelo Edessa"/>
-        <a:font script="Syrj" typeface="Estrangelo Edessa"/>
-        <a:font script="Syre" typeface="Estrangelo Edessa"/>
-        <a:font script="Sora" typeface="Nirmala UI"/>
-        <a:font script="Tale" typeface="Microsoft Tai Le"/>
-        <a:font script="Talu" typeface="Microsoft New Tai Lue"/>
-        <a:font script="Tfng" typeface="Ebrima"/>
       </a:majorFont>
       <a:minorFont>
-        <a:latin typeface="Aptos" panose="02110004020202020204"/>
+        <a:latin typeface="Aptos"/>
         <a:ea typeface=""/>
         <a:cs typeface=""/>
         <a:font script="Jpan" typeface="游ゴシック"/>
@@ -14726,23 +16117,6 @@
         <a:font script="Viet" typeface="Arial"/>
         <a:font script="Uigh" typeface="Microsoft Uighur"/>
         <a:font script="Geor" typeface="Sylfaen"/>
-        <a:font script="Armn" typeface="Arial"/>
-        <a:font script="Bugi" typeface="Leelawadee UI"/>
-        <a:font script="Bopo" typeface="Microsoft JhengHei"/>
-        <a:font script="Java" typeface="Javanese Text"/>
-        <a:font script="Lisu" typeface="Segoe UI"/>
-        <a:font script="Mymr" typeface="Myanmar Text"/>
-        <a:font script="Nkoo" typeface="Ebrima"/>
-        <a:font script="Olck" typeface="Nirmala UI"/>
-        <a:font script="Osma" typeface="Ebrima"/>
-        <a:font script="Phag" typeface="Phagspa"/>
-        <a:font script="Syrn" typeface="Estrangelo Edessa"/>
-        <a:font script="Syrj" typeface="Estrangelo Edessa"/>
-        <a:font script="Syre" typeface="Estrangelo Edessa"/>
-        <a:font script="Sora" typeface="Nirmala UI"/>
-        <a:font script="Tale" typeface="Microsoft Tai Le"/>
-        <a:font script="Talu" typeface="Microsoft New Tai Lue"/>
-        <a:font script="Tfng" typeface="Ebrima"/>
       </a:minorFont>
     </a:fontScheme>
     <a:fmtScheme name="Office">
@@ -14904,18 +16278,17 @@
       </a:style>
     </a:lnDef>
   </a:objectDefaults>
-  <a:extraClrSchemeLst/>
   <a:extLst>
     <a:ext uri="{05A4C25C-085E-4340-85A3-A5531E510DB2}">
-      <thm15:themeFamily xmlns:thm15="http://schemas.microsoft.com/office/thememl/2012/main" name="Office Theme" id="{2E142A2C-CD16-42D6-873A-C26D2A0506FA}" vid="{1BDDFF52-6CD6-40A5-AB3C-68EB2F1E4D0A}"/>
+      <thm15:themeFamily xmlns:thm15="http://schemas.microsoft.com/office/thememl/2012/main" name="Office Theme" id="{62F939B6-93AF-4DB8-9C6B-D6C7DFDC589F}" vid="{4A3C46E8-61CC-4603-A589-7422A47A8E4A}"/>
     </a:ext>
   </a:extLst>
 </a:theme>
 </file>
 
 <file path=customXml/item1.xml><?xml version="1.0" encoding="utf-8"?>
-<ct:contentTypeSchema xmlns:ct="http://schemas.microsoft.com/office/2006/metadata/contentType" xmlns:ma="http://schemas.microsoft.com/office/2006/metadata/properties/metaAttributes" ct:_="" ma:_="" ma:contentTypeName="Document" ma:contentTypeID="0x010100A12A0662030DBC4F99C1FA9D93D14A4C" ma:contentTypeVersion="" ma:contentTypeDescription="Create a new document." ma:contentTypeScope="" ma:versionID="601ee87aba0edee35dd0bd1031319f69">
-  <xsd:schema xmlns:xsd="http://www.w3.org/2001/XMLSchema" xmlns:xs="http://www.w3.org/2001/XMLSchema" xmlns:p="http://schemas.microsoft.com/office/2006/metadata/properties" xmlns:ns2="1d368349-1023-48e7-96c9-f9d028f6f0fb" xmlns:ns3="1aa119c2-5735-4356-91ec-0ca074bf9097" xmlns:ns4="32f397aa-99c0-43f4-9b94-7b5d785faf95" targetNamespace="http://schemas.microsoft.com/office/2006/metadata/properties" ma:root="true" ma:fieldsID="ceaa2ff74debb88eeec5ab219e85c5f9" ns2:_="" ns3:_="" ns4:_="">
+<ct:contentTypeSchema xmlns:ct="http://schemas.microsoft.com/office/2006/metadata/contentType" xmlns:ma="http://schemas.microsoft.com/office/2006/metadata/properties/metaAttributes" ct:_="" ma:contentTypeID="0x010100A12A0662030DBC4F99C1FA9D93D14A4C" ma:_="" ma:contentTypeName="Document" ma:contentTypeVersion="" ma:contentTypeScope="" ma:versionID="601ee87aba0edee35dd0bd1031319f69" ma:contentTypeDescription="Create a new document.">
+  <xsd:schema xmlns:xsd="http://www.w3.org/2001/XMLSchema" xmlns:xs="http://www.w3.org/2001/XMLSchema" xmlns:p="http://schemas.microsoft.com/office/2006/metadata/properties" xmlns:ns2="1d368349-1023-48e7-96c9-f9d028f6f0fb" xmlns:ns3="1aa119c2-5735-4356-91ec-0ca074bf9097" xmlns:ns4="32f397aa-99c0-43f4-9b94-7b5d785faf95" ns2:_="" ns4:_="" targetNamespace="http://schemas.microsoft.com/office/2006/metadata/properties" ma:fieldsID="ceaa2ff74debb88eeec5ab219e85c5f9" ns3:_="" ma:root="true">
     <xsd:import namespace="1d368349-1023-48e7-96c9-f9d028f6f0fb"/>
     <xsd:import namespace="1aa119c2-5735-4356-91ec-0ca074bf9097"/>
     <xsd:import namespace="32f397aa-99c0-43f4-9b94-7b5d785faf95"/>
@@ -14949,100 +16322,100 @@
       </xsd:complexType>
     </xsd:element>
   </xsd:schema>
-  <xsd:schema xmlns:xsd="http://www.w3.org/2001/XMLSchema" xmlns:xs="http://www.w3.org/2001/XMLSchema" xmlns:dms="http://schemas.microsoft.com/office/2006/documentManagement/types" xmlns:pc="http://schemas.microsoft.com/office/infopath/2007/PartnerControls" targetNamespace="1d368349-1023-48e7-96c9-f9d028f6f0fb" elementFormDefault="qualified">
+  <xsd:schema xmlns:xsd="http://www.w3.org/2001/XMLSchema" xmlns:dms="http://schemas.microsoft.com/office/2006/documentManagement/types" xmlns:xs="http://www.w3.org/2001/XMLSchema" xmlns:pc="http://schemas.microsoft.com/office/infopath/2007/PartnerControls" elementFormDefault="qualified" targetNamespace="1d368349-1023-48e7-96c9-f9d028f6f0fb">
     <xsd:import namespace="http://schemas.microsoft.com/office/2006/documentManagement/types"/>
     <xsd:import namespace="http://schemas.microsoft.com/office/infopath/2007/PartnerControls"/>
-    <xsd:element name="MediaServiceMetadata" ma:index="8" nillable="true" ma:displayName="MediaServiceMetadata" ma:hidden="true" ma:internalName="MediaServiceMetadata" ma:readOnly="true">
+    <xsd:element ma:internalName="MediaServiceMetadata" nillable="true" ma:hidden="true" ma:readOnly="true" name="MediaServiceMetadata" ma:displayName="MediaServiceMetadata" ma:index="8">
       <xsd:simpleType>
         <xsd:restriction base="dms:Note"/>
       </xsd:simpleType>
     </xsd:element>
-    <xsd:element name="MediaServiceFastMetadata" ma:index="9" nillable="true" ma:displayName="MediaServiceFastMetadata" ma:hidden="true" ma:internalName="MediaServiceFastMetadata" ma:readOnly="true">
+    <xsd:element ma:internalName="MediaServiceFastMetadata" nillable="true" ma:hidden="true" ma:readOnly="true" name="MediaServiceFastMetadata" ma:displayName="MediaServiceFastMetadata" ma:index="9">
       <xsd:simpleType>
         <xsd:restriction base="dms:Note"/>
       </xsd:simpleType>
     </xsd:element>
-    <xsd:element name="MediaServiceAutoKeyPoints" ma:index="10" nillable="true" ma:displayName="MediaServiceAutoKeyPoints" ma:hidden="true" ma:internalName="MediaServiceAutoKeyPoints" ma:readOnly="true">
+    <xsd:element ma:internalName="MediaServiceAutoKeyPoints" nillable="true" ma:hidden="true" ma:readOnly="true" name="MediaServiceAutoKeyPoints" ma:displayName="MediaServiceAutoKeyPoints" ma:index="10">
       <xsd:simpleType>
         <xsd:restriction base="dms:Note"/>
       </xsd:simpleType>
     </xsd:element>
-    <xsd:element name="MediaServiceKeyPoints" ma:index="11" nillable="true" ma:displayName="KeyPoints" ma:internalName="MediaServiceKeyPoints" ma:readOnly="true">
+    <xsd:element ma:internalName="MediaServiceKeyPoints" nillable="true" ma:readOnly="true" name="MediaServiceKeyPoints" ma:displayName="KeyPoints" ma:index="11">
       <xsd:simpleType>
         <xsd:restriction base="dms:Note">
           <xsd:maxLength value="255"/>
         </xsd:restriction>
       </xsd:simpleType>
     </xsd:element>
-    <xsd:element name="MediaServiceAutoTags" ma:index="12" nillable="true" ma:displayName="Tags" ma:internalName="MediaServiceAutoTags" ma:readOnly="true">
+    <xsd:element ma:internalName="MediaServiceAutoTags" nillable="true" ma:readOnly="true" name="MediaServiceAutoTags" ma:displayName="Tags" ma:index="12">
       <xsd:simpleType>
         <xsd:restriction base="dms:Text"/>
       </xsd:simpleType>
     </xsd:element>
-    <xsd:element name="MediaServiceOCR" ma:index="13" nillable="true" ma:displayName="Extracted Text" ma:internalName="MediaServiceOCR" ma:readOnly="true">
+    <xsd:element ma:internalName="MediaServiceOCR" nillable="true" ma:readOnly="true" name="MediaServiceOCR" ma:displayName="Extracted Text" ma:index="13">
       <xsd:simpleType>
         <xsd:restriction base="dms:Note">
           <xsd:maxLength value="255"/>
         </xsd:restriction>
       </xsd:simpleType>
     </xsd:element>
-    <xsd:element name="MediaServiceGenerationTime" ma:index="14" nillable="true" ma:displayName="MediaServiceGenerationTime" ma:hidden="true" ma:internalName="MediaServiceGenerationTime" ma:readOnly="true">
+    <xsd:element ma:internalName="MediaServiceGenerationTime" nillable="true" ma:hidden="true" ma:readOnly="true" name="MediaServiceGenerationTime" ma:displayName="MediaServiceGenerationTime" ma:index="14">
       <xsd:simpleType>
         <xsd:restriction base="dms:Text"/>
       </xsd:simpleType>
     </xsd:element>
-    <xsd:element name="MediaServiceEventHashCode" ma:index="15" nillable="true" ma:displayName="MediaServiceEventHashCode" ma:hidden="true" ma:internalName="MediaServiceEventHashCode" ma:readOnly="true">
+    <xsd:element ma:internalName="MediaServiceEventHashCode" nillable="true" ma:hidden="true" ma:readOnly="true" name="MediaServiceEventHashCode" ma:displayName="MediaServiceEventHashCode" ma:index="15">
       <xsd:simpleType>
         <xsd:restriction base="dms:Text"/>
       </xsd:simpleType>
     </xsd:element>
-    <xsd:element name="MediaServiceDateTaken" ma:index="16" nillable="true" ma:displayName="MediaServiceDateTaken" ma:hidden="true" ma:internalName="MediaServiceDateTaken" ma:readOnly="true">
+    <xsd:element ma:internalName="MediaServiceDateTaken" nillable="true" ma:hidden="true" ma:readOnly="true" name="MediaServiceDateTaken" ma:displayName="MediaServiceDateTaken" ma:index="16">
       <xsd:simpleType>
         <xsd:restriction base="dms:Text"/>
       </xsd:simpleType>
     </xsd:element>
-    <xsd:element name="MediaServiceLocation" ma:index="19" nillable="true" ma:displayName="Location" ma:internalName="MediaServiceLocation" ma:readOnly="true">
+    <xsd:element ma:internalName="MediaServiceLocation" nillable="true" ma:readOnly="true" name="MediaServiceLocation" ma:displayName="Location" ma:index="19">
       <xsd:simpleType>
         <xsd:restriction base="dms:Text"/>
       </xsd:simpleType>
     </xsd:element>
-    <xsd:element name="MediaLengthInSeconds" ma:index="20" nillable="true" ma:displayName="MediaLengthInSeconds" ma:hidden="true" ma:internalName="MediaLengthInSeconds" ma:readOnly="true">
+    <xsd:element ma:internalName="MediaLengthInSeconds" nillable="true" ma:hidden="true" ma:readOnly="true" name="MediaLengthInSeconds" ma:displayName="MediaLengthInSeconds" ma:index="20">
       <xsd:simpleType>
         <xsd:restriction base="dms:Unknown"/>
       </xsd:simpleType>
     </xsd:element>
-    <xsd:element name="lcf76f155ced4ddcb4097134ff3c332f" ma:index="22" nillable="true" ma:taxonomy="true" ma:internalName="lcf76f155ced4ddcb4097134ff3c332f" ma:taxonomyFieldName="MediaServiceImageTags" ma:displayName="Image Tags" ma:readOnly="false" ma:fieldId="{5cf76f15-5ced-4ddc-b409-7134ff3c332f}" ma:taxonomyMulti="true" ma:sspId="579a89b1-2c2c-4f7f-9bd7-7914fb13a02b" ma:termSetId="09814cd3-568e-fe90-9814-8d621ff8fb84" ma:anchorId="fba54fb3-c3e1-fe81-a776-ca4b69148c4d" ma:open="true" ma:isKeyword="false">
+    <xsd:element ma:taxonomy="true" ma:isKeyword="false" ma:internalName="lcf76f155ced4ddcb4097134ff3c332f" ma:termSetId="09814cd3-568e-fe90-9814-8d621ff8fb84" ma:taxonomyMulti="true" ma:fieldId="{5cf76f15-5ced-4ddc-b409-7134ff3c332f}" ma:taxonomyFieldName="MediaServiceImageTags" ma:open="true" nillable="true" ma:anchorId="fba54fb3-c3e1-fe81-a776-ca4b69148c4d" ma:readOnly="false" ma:sspId="579a89b1-2c2c-4f7f-9bd7-7914fb13a02b" name="lcf76f155ced4ddcb4097134ff3c332f" ma:displayName="Image Tags" ma:index="22">
       <xsd:complexType>
         <xsd:sequence>
-          <xsd:element ref="pc:Terms" minOccurs="0" maxOccurs="1"/>
+          <xsd:element maxOccurs="1" ref="pc:Terms" minOccurs="0"/>
         </xsd:sequence>
       </xsd:complexType>
     </xsd:element>
-    <xsd:element name="MediaServiceObjectDetectorVersions" ma:index="24" nillable="true" ma:displayName="MediaServiceObjectDetectorVersions" ma:hidden="true" ma:indexed="true" ma:internalName="MediaServiceObjectDetectorVersions" ma:readOnly="true">
+    <xsd:element ma:internalName="MediaServiceObjectDetectorVersions" ma:indexed="true" nillable="true" ma:hidden="true" ma:readOnly="true" name="MediaServiceObjectDetectorVersions" ma:displayName="MediaServiceObjectDetectorVersions" ma:index="24">
       <xsd:simpleType>
         <xsd:restriction base="dms:Text"/>
       </xsd:simpleType>
     </xsd:element>
-    <xsd:element name="MediaServiceSearchProperties" ma:index="25" nillable="true" ma:displayName="MediaServiceSearchProperties" ma:hidden="true" ma:internalName="MediaServiceSearchProperties" ma:readOnly="true">
+    <xsd:element ma:internalName="MediaServiceSearchProperties" nillable="true" ma:hidden="true" ma:readOnly="true" name="MediaServiceSearchProperties" ma:displayName="MediaServiceSearchProperties" ma:index="25">
       <xsd:simpleType>
         <xsd:restriction base="dms:Note"/>
       </xsd:simpleType>
     </xsd:element>
   </xsd:schema>
-  <xsd:schema xmlns:xsd="http://www.w3.org/2001/XMLSchema" xmlns:xs="http://www.w3.org/2001/XMLSchema" xmlns:dms="http://schemas.microsoft.com/office/2006/documentManagement/types" xmlns:pc="http://schemas.microsoft.com/office/infopath/2007/PartnerControls" targetNamespace="1aa119c2-5735-4356-91ec-0ca074bf9097" elementFormDefault="qualified">
+  <xsd:schema xmlns:xsd="http://www.w3.org/2001/XMLSchema" xmlns:dms="http://schemas.microsoft.com/office/2006/documentManagement/types" xmlns:xs="http://www.w3.org/2001/XMLSchema" xmlns:pc="http://schemas.microsoft.com/office/infopath/2007/PartnerControls" elementFormDefault="qualified" targetNamespace="1aa119c2-5735-4356-91ec-0ca074bf9097">
     <xsd:import namespace="http://schemas.microsoft.com/office/2006/documentManagement/types"/>
     <xsd:import namespace="http://schemas.microsoft.com/office/infopath/2007/PartnerControls"/>
-    <xsd:element name="SharedWithUsers" ma:index="17" nillable="true" ma:displayName="Shared With" ma:internalName="SharedWithUsers" ma:readOnly="true">
+    <xsd:element ma:internalName="SharedWithUsers" nillable="true" ma:readOnly="true" name="SharedWithUsers" ma:displayName="Shared With" ma:index="17">
       <xsd:complexType>
         <xsd:complexContent>
           <xsd:extension base="dms:UserMulti">
             <xsd:sequence>
-              <xsd:element name="UserInfo" minOccurs="0" maxOccurs="unbounded">
+              <xsd:element maxOccurs="unbounded" minOccurs="0" name="UserInfo">
                 <xsd:complexType>
                   <xsd:sequence>
-                    <xsd:element name="DisplayName" type="xsd:string" minOccurs="0"/>
-                    <xsd:element name="AccountId" type="dms:UserId" minOccurs="0" nillable="true"/>
-                    <xsd:element name="AccountType" type="xsd:string" minOccurs="0"/>
+                    <xsd:element minOccurs="0" type="xsd:string" name="DisplayName"/>
+                    <xsd:element minOccurs="0" type="dms:UserId" nillable="true" name="AccountId"/>
+                    <xsd:element minOccurs="0" type="xsd:string" name="AccountType"/>
                   </xsd:sequence>
                 </xsd:complexType>
               </xsd:element>
@@ -15051,7 +16424,7 @@
         </xsd:complexContent>
       </xsd:complexType>
     </xsd:element>
-    <xsd:element name="SharedWithDetails" ma:index="18" nillable="true" ma:displayName="Shared With Details" ma:internalName="SharedWithDetails" ma:readOnly="true">
+    <xsd:element ma:internalName="SharedWithDetails" nillable="true" ma:readOnly="true" name="SharedWithDetails" ma:displayName="Shared With Details" ma:index="18">
       <xsd:simpleType>
         <xsd:restriction base="dms:Note">
           <xsd:maxLength value="255"/>
@@ -15059,52 +16432,52 @@
       </xsd:simpleType>
     </xsd:element>
   </xsd:schema>
-  <xsd:schema xmlns:xsd="http://www.w3.org/2001/XMLSchema" xmlns:xs="http://www.w3.org/2001/XMLSchema" xmlns:dms="http://schemas.microsoft.com/office/2006/documentManagement/types" xmlns:pc="http://schemas.microsoft.com/office/infopath/2007/PartnerControls" targetNamespace="32f397aa-99c0-43f4-9b94-7b5d785faf95" elementFormDefault="qualified">
+  <xsd:schema xmlns:xsd="http://www.w3.org/2001/XMLSchema" xmlns:dms="http://schemas.microsoft.com/office/2006/documentManagement/types" xmlns:xs="http://www.w3.org/2001/XMLSchema" xmlns:pc="http://schemas.microsoft.com/office/infopath/2007/PartnerControls" elementFormDefault="qualified" targetNamespace="32f397aa-99c0-43f4-9b94-7b5d785faf95">
     <xsd:import namespace="http://schemas.microsoft.com/office/2006/documentManagement/types"/>
     <xsd:import namespace="http://schemas.microsoft.com/office/infopath/2007/PartnerControls"/>
-    <xsd:element name="TaxCatchAll" ma:index="23" nillable="true" ma:displayName="Taxonomy Catch All Column" ma:hidden="true" ma:list="{d117ceb8-fbd8-4cd5-a93e-9fc1393353fc}" ma:internalName="TaxCatchAll" ma:showField="CatchAllData" ma:web="32f397aa-99c0-43f4-9b94-7b5d785faf95">
+    <xsd:element ma:internalName="TaxCatchAll" ma:list="{d117ceb8-fbd8-4cd5-a93e-9fc1393353fc}" nillable="true" ma:hidden="true" name="TaxCatchAll" ma:displayName="Taxonomy Catch All Column" ma:showField="CatchAllData" ma:web="32f397aa-99c0-43f4-9b94-7b5d785faf95" ma:index="23">
       <xsd:complexType>
         <xsd:complexContent>
           <xsd:extension base="dms:MultiChoiceLookup">
             <xsd:sequence>
-              <xsd:element name="Value" type="dms:Lookup" maxOccurs="unbounded" minOccurs="0" nillable="true"/>
+              <xsd:element maxOccurs="unbounded" minOccurs="0" type="dms:Lookup" nillable="true" name="Value"/>
             </xsd:sequence>
           </xsd:extension>
         </xsd:complexContent>
       </xsd:complexType>
     </xsd:element>
   </xsd:schema>
-  <xsd:schema xmlns="http://schemas.openxmlformats.org/package/2006/metadata/core-properties" xmlns:xsd="http://www.w3.org/2001/XMLSchema" xmlns:xsi="http://www.w3.org/2001/XMLSchema-instance" xmlns:dc="http://purl.org/dc/elements/1.1/" xmlns:dcterms="http://purl.org/dc/terms/" xmlns:odoc="http://schemas.microsoft.com/internal/obd" targetNamespace="http://schemas.openxmlformats.org/package/2006/metadata/core-properties" elementFormDefault="qualified" attributeFormDefault="unqualified" blockDefault="#all">
+  <xsd:schema xmlns:xsd="http://www.w3.org/2001/XMLSchema" xmlns:dc="http://purl.org/dc/elements/1.1/" xmlns="http://schemas.openxmlformats.org/package/2006/metadata/core-properties" xmlns:dcterms="http://purl.org/dc/terms/" xmlns:xsi="http://www.w3.org/2001/XMLSchema-instance" xmlns:odoc="http://schemas.microsoft.com/internal/obd" blockDefault="#all" elementFormDefault="qualified" attributeFormDefault="unqualified" targetNamespace="http://schemas.openxmlformats.org/package/2006/metadata/core-properties">
     <xsd:import namespace="http://purl.org/dc/elements/1.1/" schemaLocation="http://dublincore.org/schemas/xmls/qdc/2003/04/02/dc.xsd"/>
     <xsd:import namespace="http://purl.org/dc/terms/" schemaLocation="http://dublincore.org/schemas/xmls/qdc/2003/04/02/dcterms.xsd"/>
-    <xsd:element name="coreProperties" type="CT_coreProperties"/>
+    <xsd:element type="CT_coreProperties" name="coreProperties"/>
     <xsd:complexType name="CT_coreProperties">
       <xsd:all>
-        <xsd:element ref="dc:creator" minOccurs="0" maxOccurs="1"/>
-        <xsd:element ref="dcterms:created" minOccurs="0" maxOccurs="1"/>
-        <xsd:element ref="dc:identifier" minOccurs="0" maxOccurs="1"/>
-        <xsd:element name="contentType" minOccurs="0" maxOccurs="1" type="xsd:string" ma:index="0" ma:displayName="Content Type"/>
-        <xsd:element ref="dc:title" minOccurs="0" maxOccurs="1" ma:index="4" ma:displayName="Title"/>
-        <xsd:element ref="dc:subject" minOccurs="0" maxOccurs="1"/>
-        <xsd:element ref="dc:description" minOccurs="0" maxOccurs="1"/>
-        <xsd:element name="keywords" minOccurs="0" maxOccurs="1" type="xsd:string"/>
-        <xsd:element ref="dc:language" minOccurs="0" maxOccurs="1"/>
-        <xsd:element name="category" minOccurs="0" maxOccurs="1" type="xsd:string"/>
-        <xsd:element name="version" minOccurs="0" maxOccurs="1" type="xsd:string"/>
-        <xsd:element name="revision" minOccurs="0" maxOccurs="1" type="xsd:string">
+        <xsd:element maxOccurs="1" ref="dc:creator" minOccurs="0"/>
+        <xsd:element maxOccurs="1" ref="dcterms:created" minOccurs="0"/>
+        <xsd:element maxOccurs="1" ref="dc:identifier" minOccurs="0"/>
+        <xsd:element maxOccurs="1" minOccurs="0" type="xsd:string" name="contentType" ma:displayName="Content Type" ma:index="0"/>
+        <xsd:element maxOccurs="1" ref="dc:title" minOccurs="0" ma:displayName="Title" ma:index="4"/>
+        <xsd:element maxOccurs="1" ref="dc:subject" minOccurs="0"/>
+        <xsd:element maxOccurs="1" ref="dc:description" minOccurs="0"/>
+        <xsd:element maxOccurs="1" minOccurs="0" type="xsd:string" name="keywords"/>
+        <xsd:element maxOccurs="1" ref="dc:language" minOccurs="0"/>
+        <xsd:element maxOccurs="1" minOccurs="0" type="xsd:string" name="category"/>
+        <xsd:element maxOccurs="1" minOccurs="0" type="xsd:string" name="version"/>
+        <xsd:element maxOccurs="1" minOccurs="0" type="xsd:string" name="revision">
           <xsd:annotation>
-            <xsd:documentation>
-                        This value indicates the number of saves or revisions. The application is responsible for updating this value after each revision.
+            <xsd:documentation>
+                        This value indicates the number of saves or revisions. The application is responsible for updating this value after each revision.
                     </xsd:documentation>
           </xsd:annotation>
         </xsd:element>
-        <xsd:element name="lastModifiedBy" minOccurs="0" maxOccurs="1" type="xsd:string"/>
-        <xsd:element ref="dcterms:modified" minOccurs="0" maxOccurs="1"/>
-        <xsd:element name="contentStatus" minOccurs="0" maxOccurs="1" type="xsd:string"/>
+        <xsd:element maxOccurs="1" minOccurs="0" type="xsd:string" name="lastModifiedBy"/>
+        <xsd:element maxOccurs="1" ref="dcterms:modified" minOccurs="0"/>
+        <xsd:element maxOccurs="1" minOccurs="0" type="xsd:string" name="contentStatus"/>
       </xsd:all>
     </xsd:complexType>
   </xsd:schema>
-  <xs:schema xmlns:pc="http://schemas.microsoft.com/office/infopath/2007/PartnerControls" xmlns:xs="http://www.w3.org/2001/XMLSchema" targetNamespace="http://schemas.microsoft.com/office/infopath/2007/PartnerControls" elementFormDefault="qualified" attributeFormDefault="unqualified">
+  <xs:schema xmlns:xs="http://www.w3.org/2001/XMLSchema" xmlns:pc="http://schemas.microsoft.com/office/infopath/2007/PartnerControls" elementFormDefault="qualified" attributeFormDefault="unqualified" targetNamespace="http://schemas.microsoft.com/office/infopath/2007/PartnerControls">
     <xs:element name="Person">
       <xs:complexType>
         <xs:sequence>
@@ -15114,13 +16487,13 @@
         </xs:sequence>
       </xs:complexType>
     </xs:element>
-    <xs:element name="DisplayName" type="xs:string"/>
-    <xs:element name="AccountId" type="xs:string"/>
-    <xs:element name="AccountType" type="xs:string"/>
+    <xs:element type="xs:string" name="DisplayName"/>
+    <xs:element type="xs:string" name="AccountId"/>
+    <xs:element type="xs:string" name="AccountType"/>
     <xs:element name="BDCAssociatedEntity">
       <xs:complexType>
         <xs:sequence>
-          <xs:element ref="pc:BDCEntity" minOccurs="0" maxOccurs="unbounded"/>
+          <xs:element maxOccurs="unbounded" ref="pc:BDCEntity" minOccurs="0"/>
         </xs:sequence>
         <xs:attribute ref="pc:EntityNamespace"/>
         <xs:attribute ref="pc:EntityName"/>
@@ -15128,10 +16501,10 @@
         <xs:attribute ref="pc:AssociationName"/>
       </xs:complexType>
     </xs:element>
-    <xs:attribute name="EntityNamespace" type="xs:string"/>
-    <xs:attribute name="EntityName" type="xs:string"/>
-    <xs:attribute name="SystemInstanceName" type="xs:string"/>
-    <xs:attribute name="AssociationName" type="xs:string"/>
+    <xs:attribute type="xs:string" name="EntityNamespace"/>
+    <xs:attribute type="xs:string" name="EntityName"/>
+    <xs:attribute type="xs:string" name="SystemInstanceName"/>
+    <xs:attribute type="xs:string" name="AssociationName"/>
     <xs:element name="BDCEntity">
       <xs:complexType>
         <xs:sequence>
@@ -15145,17 +16518,17 @@
         </xs:sequence>
       </xs:complexType>
     </xs:element>
-    <xs:element name="EntityDisplayName" type="xs:string"/>
-    <xs:element name="EntityInstanceReference" type="xs:string"/>
-    <xs:element name="EntityId1" type="xs:string"/>
-    <xs:element name="EntityId2" type="xs:string"/>
-    <xs:element name="EntityId3" type="xs:string"/>
-    <xs:element name="EntityId4" type="xs:string"/>
-    <xs:element name="EntityId5" type="xs:string"/>
+    <xs:element type="xs:string" name="EntityDisplayName"/>
+    <xs:element type="xs:string" name="EntityInstanceReference"/>
+    <xs:element type="xs:string" name="EntityId1"/>
+    <xs:element type="xs:string" name="EntityId2"/>
+    <xs:element type="xs:string" name="EntityId3"/>
+    <xs:element type="xs:string" name="EntityId4"/>
+    <xs:element type="xs:string" name="EntityId5"/>
     <xs:element name="Terms">
       <xs:complexType>
         <xs:sequence>
-          <xs:element ref="pc:TermInfo" minOccurs="0" maxOccurs="unbounded"/>
+          <xs:element maxOccurs="unbounded" ref="pc:TermInfo" minOccurs="0"/>
         </xs:sequence>
       </xs:complexType>
     </xs:element>
@@ -15167,14 +16540,14 @@
         </xs:sequence>
       </xs:complexType>
     </xs:element>
-    <xs:element name="TermName" type="xs:string"/>
-    <xs:element name="TermId" type="xs:string"/>
+    <xs:element type="xs:string" name="TermName"/>
+    <xs:element type="xs:string" name="TermId"/>
   </xs:schema>
 </ct:contentTypeSchema>
 </file>
 
 <file path=customXml/item2.xml><?xml version="1.0" encoding="utf-8"?>
-<p:properties xmlns:p="http://schemas.microsoft.com/office/2006/metadata/properties" xmlns:xsi="http://www.w3.org/2001/XMLSchema-instance" xmlns:pc="http://schemas.microsoft.com/office/infopath/2007/PartnerControls">
+<p:properties xmlns:xsi="http://www.w3.org/2001/XMLSchema-instance" xmlns:p="http://schemas.microsoft.com/office/2006/metadata/properties" xmlns:pc="http://schemas.microsoft.com/office/infopath/2007/PartnerControls">
   <documentManagement>
     <lcf76f155ced4ddcb4097134ff3c332f xmlns="1d368349-1023-48e7-96c9-f9d028f6f0fb">
       <Terms xmlns="http://schemas.microsoft.com/office/infopath/2007/PartnerControls"/>
@@ -15195,39 +16568,18 @@
 
 <file path=customXml/itemProps1.xml><?xml version="1.0" encoding="utf-8"?>
 <ds:datastoreItem xmlns:ds="http://schemas.openxmlformats.org/officeDocument/2006/customXml" ds:itemID="{0A618EBA-795F-4487-B29C-4E0D2C8D67FE}">
-  <ds:schemaRefs>
-    <ds:schemaRef ds:uri="http://schemas.microsoft.com/office/2006/metadata/contentType"/>
-    <ds:schemaRef ds:uri="http://schemas.microsoft.com/office/2006/metadata/properties/metaAttributes"/>
-    <ds:schemaRef ds:uri="http://www.w3.org/2001/XMLSchema"/>
-    <ds:schemaRef ds:uri="http://schemas.microsoft.com/office/2006/metadata/properties"/>
-    <ds:schemaRef ds:uri="1d368349-1023-48e7-96c9-f9d028f6f0fb"/>
-    <ds:schemaRef ds:uri="1aa119c2-5735-4356-91ec-0ca074bf9097"/>
-    <ds:schemaRef ds:uri="32f397aa-99c0-43f4-9b94-7b5d785faf95"/>
-    <ds:schemaRef ds:uri="http://schemas.microsoft.com/office/2006/documentManagement/types"/>
-    <ds:schemaRef ds:uri="http://schemas.microsoft.com/office/infopath/2007/PartnerControls"/>
-    <ds:schemaRef ds:uri="http://schemas.openxmlformats.org/package/2006/metadata/core-properties"/>
-    <ds:schemaRef ds:uri="http://purl.org/dc/elements/1.1/"/>
-    <ds:schemaRef ds:uri="http://purl.org/dc/terms/"/>
-    <ds:schemaRef ds:uri="http://schemas.microsoft.com/internal/obd"/>
-  </ds:schemaRefs>
+  <ds:schemaRefs/>
 </ds:datastoreItem>
 </file>
 
 <file path=customXml/itemProps2.xml><?xml version="1.0" encoding="utf-8"?>
 <ds:datastoreItem xmlns:ds="http://schemas.openxmlformats.org/officeDocument/2006/customXml" ds:itemID="{6ECBB2BC-B86C-4646-888A-87EB55C19509}">
-  <ds:schemaRefs>
-    <ds:schemaRef ds:uri="http://schemas.microsoft.com/office/2006/metadata/properties"/>
-    <ds:schemaRef ds:uri="http://schemas.microsoft.com/office/infopath/2007/PartnerControls"/>
-    <ds:schemaRef ds:uri="1d368349-1023-48e7-96c9-f9d028f6f0fb"/>
-    <ds:schemaRef ds:uri="32f397aa-99c0-43f4-9b94-7b5d785faf95"/>
-  </ds:schemaRefs>
+  <ds:schemaRefs/>
 </ds:datastoreItem>
 </file>
 
 <file path=customXml/itemProps3.xml><?xml version="1.0" encoding="utf-8"?>
 <ds:datastoreItem xmlns:ds="http://schemas.openxmlformats.org/officeDocument/2006/customXml" ds:itemID="{55700595-49AE-497B-9134-6C4B03871A7F}">
-  <ds:schemaRefs>
-    <ds:schemaRef ds:uri="http://schemas.microsoft.com/sharepoint/v3/contenttype/forms"/>
-  </ds:schemaRefs>
+  <ds:schemaRefs/>
 </ds:datastoreItem>
 </file>